--- a/result.pptx
+++ b/result.pptx
@@ -7,6 +7,11 @@
   <p:sldIdLst>
     <p:sldId id="256" r:id="rId2"/>
     <p:sldId id="257" r:id="rId3"/>
+    <p:sldId id="258" r:id="rId4"/>
+    <p:sldId id="263" r:id="rId5"/>
+    <p:sldId id="260" r:id="rId6"/>
+    <p:sldId id="261" r:id="rId7"/>
+    <p:sldId id="262" r:id="rId8"/>
   </p:sldIdLst>
   <p:sldSz cx="12192000" cy="6858000"/>
   <p:notesSz cx="6858000" cy="9144000"/>
@@ -105,6 +110,11 @@
       </a:defRPr>
     </a:lvl9pPr>
   </p:defaultTextStyle>
+  <p:extLst>
+    <p:ext uri="{EFAFB233-063F-42B5-8137-9DF3F51BA10A}">
+      <p15:sldGuideLst xmlns:p15="http://schemas.microsoft.com/office/powerpoint/2012/main"/>
+    </p:ext>
+  </p:extLst>
 </p:presentation>
 </file>
 
@@ -130,7 +140,7 @@
           <p:cNvPr id="2" name="標題 1">
             <a:extLst>
               <a:ext uri="{FF2B5EF4-FFF2-40B4-BE49-F238E27FC236}">
-                <a16:creationId xmlns:a16="http://schemas.microsoft.com/office/drawing/2014/main" id="{949CD83E-108A-83AC-6EC5-372D297C414A}"/>
+                <a16:creationId xmlns:a16="http://schemas.microsoft.com/office/drawing/2014/main" id="{2DF976F8-70DF-49BB-4372-B1384DEBDC7B}"/>
               </a:ext>
             </a:extLst>
           </p:cNvPr>
@@ -167,7 +177,7 @@
           <p:cNvPr id="3" name="副標題 2">
             <a:extLst>
               <a:ext uri="{FF2B5EF4-FFF2-40B4-BE49-F238E27FC236}">
-                <a16:creationId xmlns:a16="http://schemas.microsoft.com/office/drawing/2014/main" id="{AFC9CA43-F757-3DF5-1023-19CA53493A4F}"/>
+                <a16:creationId xmlns:a16="http://schemas.microsoft.com/office/drawing/2014/main" id="{AB798804-80CE-99EA-39EC-1F4186F45207}"/>
               </a:ext>
             </a:extLst>
           </p:cNvPr>
@@ -237,7 +247,7 @@
           <p:cNvPr id="4" name="日期版面配置區 3">
             <a:extLst>
               <a:ext uri="{FF2B5EF4-FFF2-40B4-BE49-F238E27FC236}">
-                <a16:creationId xmlns:a16="http://schemas.microsoft.com/office/drawing/2014/main" id="{C3A94417-E8FC-A018-E072-9D0BEB312642}"/>
+                <a16:creationId xmlns:a16="http://schemas.microsoft.com/office/drawing/2014/main" id="{538CC5AD-6A1C-91E7-E924-A8AD8637CA5D}"/>
               </a:ext>
             </a:extLst>
           </p:cNvPr>
@@ -253,9 +263,9 @@
           <a:bodyPr/>
           <a:lstStyle/>
           <a:p>
-            <a:fld id="{4A3BFA84-52F0-4236-88CA-D056824456CF}" type="datetimeFigureOut">
+            <a:fld id="{90AD2469-20E7-4B6C-96EF-9D1BC1F7B575}" type="datetimeFigureOut">
               <a:rPr lang="zh-TW" altLang="en-US" smtClean="0"/>
-              <a:t>2024/1/11</a:t>
+              <a:t>2024/5/9</a:t>
             </a:fld>
             <a:endParaRPr lang="zh-TW" altLang="en-US"/>
           </a:p>
@@ -266,7 +276,7 @@
           <p:cNvPr id="5" name="頁尾版面配置區 4">
             <a:extLst>
               <a:ext uri="{FF2B5EF4-FFF2-40B4-BE49-F238E27FC236}">
-                <a16:creationId xmlns:a16="http://schemas.microsoft.com/office/drawing/2014/main" id="{87A23D18-C29D-9780-5F44-45E4F30C4652}"/>
+                <a16:creationId xmlns:a16="http://schemas.microsoft.com/office/drawing/2014/main" id="{9D165590-CD41-6FCA-9612-7F9942925127}"/>
               </a:ext>
             </a:extLst>
           </p:cNvPr>
@@ -291,7 +301,7 @@
           <p:cNvPr id="6" name="投影片編號版面配置區 5">
             <a:extLst>
               <a:ext uri="{FF2B5EF4-FFF2-40B4-BE49-F238E27FC236}">
-                <a16:creationId xmlns:a16="http://schemas.microsoft.com/office/drawing/2014/main" id="{93626A9E-4236-CA63-3B2A-3AD83D81D915}"/>
+                <a16:creationId xmlns:a16="http://schemas.microsoft.com/office/drawing/2014/main" id="{A056E81D-6E3C-11D2-B5F9-58960D62F082}"/>
               </a:ext>
             </a:extLst>
           </p:cNvPr>
@@ -307,7 +317,7 @@
           <a:bodyPr/>
           <a:lstStyle/>
           <a:p>
-            <a:fld id="{5851F284-F31E-4EE4-B872-B0582415DB92}" type="slidenum">
+            <a:fld id="{DDCC0B03-BC31-482B-9057-F16658E92C45}" type="slidenum">
               <a:rPr lang="zh-TW" altLang="en-US" smtClean="0"/>
               <a:t>‹#›</a:t>
             </a:fld>
@@ -318,7 +328,7 @@
     </p:spTree>
     <p:extLst>
       <p:ext uri="{BB962C8B-B14F-4D97-AF65-F5344CB8AC3E}">
-        <p14:creationId xmlns:p14="http://schemas.microsoft.com/office/powerpoint/2010/main" val="2740868651"/>
+        <p14:creationId xmlns:p14="http://schemas.microsoft.com/office/powerpoint/2010/main" val="1988027509"/>
       </p:ext>
     </p:extLst>
   </p:cSld>
@@ -350,7 +360,7 @@
           <p:cNvPr id="2" name="標題 1">
             <a:extLst>
               <a:ext uri="{FF2B5EF4-FFF2-40B4-BE49-F238E27FC236}">
-                <a16:creationId xmlns:a16="http://schemas.microsoft.com/office/drawing/2014/main" id="{10E146CA-0574-D2AC-E0E8-2005F353F519}"/>
+                <a16:creationId xmlns:a16="http://schemas.microsoft.com/office/drawing/2014/main" id="{56B0F39E-18A0-53AB-6B11-74B9A59F91A3}"/>
               </a:ext>
             </a:extLst>
           </p:cNvPr>
@@ -378,7 +388,7 @@
           <p:cNvPr id="3" name="直排文字版面配置區 2">
             <a:extLst>
               <a:ext uri="{FF2B5EF4-FFF2-40B4-BE49-F238E27FC236}">
-                <a16:creationId xmlns:a16="http://schemas.microsoft.com/office/drawing/2014/main" id="{CDE0A30A-0C49-BF90-FCC9-D9820A503CEB}"/>
+                <a16:creationId xmlns:a16="http://schemas.microsoft.com/office/drawing/2014/main" id="{BAE03D99-A04C-9D85-0010-F55264E22EE7}"/>
               </a:ext>
             </a:extLst>
           </p:cNvPr>
@@ -435,7 +445,7 @@
           <p:cNvPr id="4" name="日期版面配置區 3">
             <a:extLst>
               <a:ext uri="{FF2B5EF4-FFF2-40B4-BE49-F238E27FC236}">
-                <a16:creationId xmlns:a16="http://schemas.microsoft.com/office/drawing/2014/main" id="{D068527E-BF93-5EE0-1219-1317FC34A45B}"/>
+                <a16:creationId xmlns:a16="http://schemas.microsoft.com/office/drawing/2014/main" id="{708122BF-7402-3FAF-C15E-C7C30F4A12E9}"/>
               </a:ext>
             </a:extLst>
           </p:cNvPr>
@@ -451,9 +461,9 @@
           <a:bodyPr/>
           <a:lstStyle/>
           <a:p>
-            <a:fld id="{4A3BFA84-52F0-4236-88CA-D056824456CF}" type="datetimeFigureOut">
+            <a:fld id="{90AD2469-20E7-4B6C-96EF-9D1BC1F7B575}" type="datetimeFigureOut">
               <a:rPr lang="zh-TW" altLang="en-US" smtClean="0"/>
-              <a:t>2024/1/11</a:t>
+              <a:t>2024/5/9</a:t>
             </a:fld>
             <a:endParaRPr lang="zh-TW" altLang="en-US"/>
           </a:p>
@@ -464,7 +474,7 @@
           <p:cNvPr id="5" name="頁尾版面配置區 4">
             <a:extLst>
               <a:ext uri="{FF2B5EF4-FFF2-40B4-BE49-F238E27FC236}">
-                <a16:creationId xmlns:a16="http://schemas.microsoft.com/office/drawing/2014/main" id="{BEB0D696-98AF-9993-480B-2F1CFAA3DD73}"/>
+                <a16:creationId xmlns:a16="http://schemas.microsoft.com/office/drawing/2014/main" id="{42C5837F-5712-A5AB-2A1F-3DA0AA777786}"/>
               </a:ext>
             </a:extLst>
           </p:cNvPr>
@@ -489,7 +499,7 @@
           <p:cNvPr id="6" name="投影片編號版面配置區 5">
             <a:extLst>
               <a:ext uri="{FF2B5EF4-FFF2-40B4-BE49-F238E27FC236}">
-                <a16:creationId xmlns:a16="http://schemas.microsoft.com/office/drawing/2014/main" id="{1210754F-70ED-5253-7A6B-E82FEE6F63C9}"/>
+                <a16:creationId xmlns:a16="http://schemas.microsoft.com/office/drawing/2014/main" id="{84B5CDE6-8765-3BF6-4663-50EC7AA4D9BE}"/>
               </a:ext>
             </a:extLst>
           </p:cNvPr>
@@ -505,7 +515,7 @@
           <a:bodyPr/>
           <a:lstStyle/>
           <a:p>
-            <a:fld id="{5851F284-F31E-4EE4-B872-B0582415DB92}" type="slidenum">
+            <a:fld id="{DDCC0B03-BC31-482B-9057-F16658E92C45}" type="slidenum">
               <a:rPr lang="zh-TW" altLang="en-US" smtClean="0"/>
               <a:t>‹#›</a:t>
             </a:fld>
@@ -516,7 +526,7 @@
     </p:spTree>
     <p:extLst>
       <p:ext uri="{BB962C8B-B14F-4D97-AF65-F5344CB8AC3E}">
-        <p14:creationId xmlns:p14="http://schemas.microsoft.com/office/powerpoint/2010/main" val="3923592917"/>
+        <p14:creationId xmlns:p14="http://schemas.microsoft.com/office/powerpoint/2010/main" val="1509404804"/>
       </p:ext>
     </p:extLst>
   </p:cSld>
@@ -548,7 +558,7 @@
           <p:cNvPr id="2" name="直排標題 1">
             <a:extLst>
               <a:ext uri="{FF2B5EF4-FFF2-40B4-BE49-F238E27FC236}">
-                <a16:creationId xmlns:a16="http://schemas.microsoft.com/office/drawing/2014/main" id="{F5DB0A05-D8B7-CB71-C6C2-200EC7FA3D19}"/>
+                <a16:creationId xmlns:a16="http://schemas.microsoft.com/office/drawing/2014/main" id="{0CBA4413-B2C0-2FE3-4F44-E00FA13146D5}"/>
               </a:ext>
             </a:extLst>
           </p:cNvPr>
@@ -581,7 +591,7 @@
           <p:cNvPr id="3" name="直排文字版面配置區 2">
             <a:extLst>
               <a:ext uri="{FF2B5EF4-FFF2-40B4-BE49-F238E27FC236}">
-                <a16:creationId xmlns:a16="http://schemas.microsoft.com/office/drawing/2014/main" id="{8B377A0D-731E-5173-01F0-444784772702}"/>
+                <a16:creationId xmlns:a16="http://schemas.microsoft.com/office/drawing/2014/main" id="{635F91C2-02BE-654B-5DD3-89E03DB47687}"/>
               </a:ext>
             </a:extLst>
           </p:cNvPr>
@@ -643,7 +653,7 @@
           <p:cNvPr id="4" name="日期版面配置區 3">
             <a:extLst>
               <a:ext uri="{FF2B5EF4-FFF2-40B4-BE49-F238E27FC236}">
-                <a16:creationId xmlns:a16="http://schemas.microsoft.com/office/drawing/2014/main" id="{286BB6D0-D923-3457-9F16-896515B6F347}"/>
+                <a16:creationId xmlns:a16="http://schemas.microsoft.com/office/drawing/2014/main" id="{AA3A00ED-3989-6D86-43A8-286A8039E79E}"/>
               </a:ext>
             </a:extLst>
           </p:cNvPr>
@@ -659,9 +669,9 @@
           <a:bodyPr/>
           <a:lstStyle/>
           <a:p>
-            <a:fld id="{4A3BFA84-52F0-4236-88CA-D056824456CF}" type="datetimeFigureOut">
+            <a:fld id="{90AD2469-20E7-4B6C-96EF-9D1BC1F7B575}" type="datetimeFigureOut">
               <a:rPr lang="zh-TW" altLang="en-US" smtClean="0"/>
-              <a:t>2024/1/11</a:t>
+              <a:t>2024/5/9</a:t>
             </a:fld>
             <a:endParaRPr lang="zh-TW" altLang="en-US"/>
           </a:p>
@@ -672,7 +682,7 @@
           <p:cNvPr id="5" name="頁尾版面配置區 4">
             <a:extLst>
               <a:ext uri="{FF2B5EF4-FFF2-40B4-BE49-F238E27FC236}">
-                <a16:creationId xmlns:a16="http://schemas.microsoft.com/office/drawing/2014/main" id="{5D6D4365-AC19-96E5-D19C-78FA6F270A52}"/>
+                <a16:creationId xmlns:a16="http://schemas.microsoft.com/office/drawing/2014/main" id="{87557407-1CF4-A4CB-FC0E-9CF59B552AA1}"/>
               </a:ext>
             </a:extLst>
           </p:cNvPr>
@@ -697,7 +707,7 @@
           <p:cNvPr id="6" name="投影片編號版面配置區 5">
             <a:extLst>
               <a:ext uri="{FF2B5EF4-FFF2-40B4-BE49-F238E27FC236}">
-                <a16:creationId xmlns:a16="http://schemas.microsoft.com/office/drawing/2014/main" id="{C2B61301-8D32-CF4C-BAD4-99948B06AE3D}"/>
+                <a16:creationId xmlns:a16="http://schemas.microsoft.com/office/drawing/2014/main" id="{E79C069A-451F-8A39-0058-2318C12A4A6A}"/>
               </a:ext>
             </a:extLst>
           </p:cNvPr>
@@ -713,7 +723,7 @@
           <a:bodyPr/>
           <a:lstStyle/>
           <a:p>
-            <a:fld id="{5851F284-F31E-4EE4-B872-B0582415DB92}" type="slidenum">
+            <a:fld id="{DDCC0B03-BC31-482B-9057-F16658E92C45}" type="slidenum">
               <a:rPr lang="zh-TW" altLang="en-US" smtClean="0"/>
               <a:t>‹#›</a:t>
             </a:fld>
@@ -724,7 +734,7 @@
     </p:spTree>
     <p:extLst>
       <p:ext uri="{BB962C8B-B14F-4D97-AF65-F5344CB8AC3E}">
-        <p14:creationId xmlns:p14="http://schemas.microsoft.com/office/powerpoint/2010/main" val="4162785279"/>
+        <p14:creationId xmlns:p14="http://schemas.microsoft.com/office/powerpoint/2010/main" val="1754828000"/>
       </p:ext>
     </p:extLst>
   </p:cSld>
@@ -756,7 +766,7 @@
           <p:cNvPr id="2" name="標題 1">
             <a:extLst>
               <a:ext uri="{FF2B5EF4-FFF2-40B4-BE49-F238E27FC236}">
-                <a16:creationId xmlns:a16="http://schemas.microsoft.com/office/drawing/2014/main" id="{AF3BA001-7755-81B4-2C7E-A13A19DEA0A2}"/>
+                <a16:creationId xmlns:a16="http://schemas.microsoft.com/office/drawing/2014/main" id="{6EE42ADB-79BB-F15F-FF7E-CB7E445FBCE1}"/>
               </a:ext>
             </a:extLst>
           </p:cNvPr>
@@ -784,7 +794,7 @@
           <p:cNvPr id="3" name="內容版面配置區 2">
             <a:extLst>
               <a:ext uri="{FF2B5EF4-FFF2-40B4-BE49-F238E27FC236}">
-                <a16:creationId xmlns:a16="http://schemas.microsoft.com/office/drawing/2014/main" id="{B897DBCB-2394-0AD6-8AD9-B032CED19FD5}"/>
+                <a16:creationId xmlns:a16="http://schemas.microsoft.com/office/drawing/2014/main" id="{D26D3E14-8B0F-5D81-76F7-812513BBFE79}"/>
               </a:ext>
             </a:extLst>
           </p:cNvPr>
@@ -841,7 +851,7 @@
           <p:cNvPr id="4" name="日期版面配置區 3">
             <a:extLst>
               <a:ext uri="{FF2B5EF4-FFF2-40B4-BE49-F238E27FC236}">
-                <a16:creationId xmlns:a16="http://schemas.microsoft.com/office/drawing/2014/main" id="{519A4BAD-0BBD-3818-7922-F92562DA96C1}"/>
+                <a16:creationId xmlns:a16="http://schemas.microsoft.com/office/drawing/2014/main" id="{46515142-FE3B-20C8-2B41-B3DD2F0BDC46}"/>
               </a:ext>
             </a:extLst>
           </p:cNvPr>
@@ -857,9 +867,9 @@
           <a:bodyPr/>
           <a:lstStyle/>
           <a:p>
-            <a:fld id="{4A3BFA84-52F0-4236-88CA-D056824456CF}" type="datetimeFigureOut">
+            <a:fld id="{90AD2469-20E7-4B6C-96EF-9D1BC1F7B575}" type="datetimeFigureOut">
               <a:rPr lang="zh-TW" altLang="en-US" smtClean="0"/>
-              <a:t>2024/1/11</a:t>
+              <a:t>2024/5/9</a:t>
             </a:fld>
             <a:endParaRPr lang="zh-TW" altLang="en-US"/>
           </a:p>
@@ -870,7 +880,7 @@
           <p:cNvPr id="5" name="頁尾版面配置區 4">
             <a:extLst>
               <a:ext uri="{FF2B5EF4-FFF2-40B4-BE49-F238E27FC236}">
-                <a16:creationId xmlns:a16="http://schemas.microsoft.com/office/drawing/2014/main" id="{95C2E414-1D11-8BFA-46F1-E523772D1CA5}"/>
+                <a16:creationId xmlns:a16="http://schemas.microsoft.com/office/drawing/2014/main" id="{5B6261CF-0F6C-0BC2-0802-A96C1C5A30D8}"/>
               </a:ext>
             </a:extLst>
           </p:cNvPr>
@@ -895,7 +905,7 @@
           <p:cNvPr id="6" name="投影片編號版面配置區 5">
             <a:extLst>
               <a:ext uri="{FF2B5EF4-FFF2-40B4-BE49-F238E27FC236}">
-                <a16:creationId xmlns:a16="http://schemas.microsoft.com/office/drawing/2014/main" id="{348CE96A-C38B-2EE4-24A9-BADF2DD5C291}"/>
+                <a16:creationId xmlns:a16="http://schemas.microsoft.com/office/drawing/2014/main" id="{AB614989-00EA-8D78-C66C-FD605F4C4D56}"/>
               </a:ext>
             </a:extLst>
           </p:cNvPr>
@@ -911,7 +921,7 @@
           <a:bodyPr/>
           <a:lstStyle/>
           <a:p>
-            <a:fld id="{5851F284-F31E-4EE4-B872-B0582415DB92}" type="slidenum">
+            <a:fld id="{DDCC0B03-BC31-482B-9057-F16658E92C45}" type="slidenum">
               <a:rPr lang="zh-TW" altLang="en-US" smtClean="0"/>
               <a:t>‹#›</a:t>
             </a:fld>
@@ -922,7 +932,7 @@
     </p:spTree>
     <p:extLst>
       <p:ext uri="{BB962C8B-B14F-4D97-AF65-F5344CB8AC3E}">
-        <p14:creationId xmlns:p14="http://schemas.microsoft.com/office/powerpoint/2010/main" val="2675179111"/>
+        <p14:creationId xmlns:p14="http://schemas.microsoft.com/office/powerpoint/2010/main" val="3057551915"/>
       </p:ext>
     </p:extLst>
   </p:cSld>
@@ -954,7 +964,7 @@
           <p:cNvPr id="2" name="標題 1">
             <a:extLst>
               <a:ext uri="{FF2B5EF4-FFF2-40B4-BE49-F238E27FC236}">
-                <a16:creationId xmlns:a16="http://schemas.microsoft.com/office/drawing/2014/main" id="{54DC2648-2621-2729-DF8C-8AD22ACE725F}"/>
+                <a16:creationId xmlns:a16="http://schemas.microsoft.com/office/drawing/2014/main" id="{E3D7EBA2-8271-3847-1355-F0F69AADFAD3}"/>
               </a:ext>
             </a:extLst>
           </p:cNvPr>
@@ -991,7 +1001,7 @@
           <p:cNvPr id="3" name="文字版面配置區 2">
             <a:extLst>
               <a:ext uri="{FF2B5EF4-FFF2-40B4-BE49-F238E27FC236}">
-                <a16:creationId xmlns:a16="http://schemas.microsoft.com/office/drawing/2014/main" id="{B79B406F-249A-E3ED-50D4-B510DB82ED71}"/>
+                <a16:creationId xmlns:a16="http://schemas.microsoft.com/office/drawing/2014/main" id="{5C139B9E-FDB2-9929-8B7C-BD5B70A9C97C}"/>
               </a:ext>
             </a:extLst>
           </p:cNvPr>
@@ -1116,7 +1126,7 @@
           <p:cNvPr id="4" name="日期版面配置區 3">
             <a:extLst>
               <a:ext uri="{FF2B5EF4-FFF2-40B4-BE49-F238E27FC236}">
-                <a16:creationId xmlns:a16="http://schemas.microsoft.com/office/drawing/2014/main" id="{F59A0A2A-3793-7FE3-50AF-904857A46B77}"/>
+                <a16:creationId xmlns:a16="http://schemas.microsoft.com/office/drawing/2014/main" id="{744730A5-2DAF-0E85-762D-B82CBCA07B50}"/>
               </a:ext>
             </a:extLst>
           </p:cNvPr>
@@ -1132,9 +1142,9 @@
           <a:bodyPr/>
           <a:lstStyle/>
           <a:p>
-            <a:fld id="{4A3BFA84-52F0-4236-88CA-D056824456CF}" type="datetimeFigureOut">
+            <a:fld id="{90AD2469-20E7-4B6C-96EF-9D1BC1F7B575}" type="datetimeFigureOut">
               <a:rPr lang="zh-TW" altLang="en-US" smtClean="0"/>
-              <a:t>2024/1/11</a:t>
+              <a:t>2024/5/9</a:t>
             </a:fld>
             <a:endParaRPr lang="zh-TW" altLang="en-US"/>
           </a:p>
@@ -1145,7 +1155,7 @@
           <p:cNvPr id="5" name="頁尾版面配置區 4">
             <a:extLst>
               <a:ext uri="{FF2B5EF4-FFF2-40B4-BE49-F238E27FC236}">
-                <a16:creationId xmlns:a16="http://schemas.microsoft.com/office/drawing/2014/main" id="{1C26580D-80E9-C2BE-2D1A-8BB75CDDCC04}"/>
+                <a16:creationId xmlns:a16="http://schemas.microsoft.com/office/drawing/2014/main" id="{B75A0751-FB4E-837B-438E-946FFB8ED95F}"/>
               </a:ext>
             </a:extLst>
           </p:cNvPr>
@@ -1170,7 +1180,7 @@
           <p:cNvPr id="6" name="投影片編號版面配置區 5">
             <a:extLst>
               <a:ext uri="{FF2B5EF4-FFF2-40B4-BE49-F238E27FC236}">
-                <a16:creationId xmlns:a16="http://schemas.microsoft.com/office/drawing/2014/main" id="{E90A5565-90B1-BA25-BA97-2C510A73DCD2}"/>
+                <a16:creationId xmlns:a16="http://schemas.microsoft.com/office/drawing/2014/main" id="{96A37F2E-9B66-E7F7-3CA2-264833033C06}"/>
               </a:ext>
             </a:extLst>
           </p:cNvPr>
@@ -1186,7 +1196,7 @@
           <a:bodyPr/>
           <a:lstStyle/>
           <a:p>
-            <a:fld id="{5851F284-F31E-4EE4-B872-B0582415DB92}" type="slidenum">
+            <a:fld id="{DDCC0B03-BC31-482B-9057-F16658E92C45}" type="slidenum">
               <a:rPr lang="zh-TW" altLang="en-US" smtClean="0"/>
               <a:t>‹#›</a:t>
             </a:fld>
@@ -1197,7 +1207,7 @@
     </p:spTree>
     <p:extLst>
       <p:ext uri="{BB962C8B-B14F-4D97-AF65-F5344CB8AC3E}">
-        <p14:creationId xmlns:p14="http://schemas.microsoft.com/office/powerpoint/2010/main" val="779921456"/>
+        <p14:creationId xmlns:p14="http://schemas.microsoft.com/office/powerpoint/2010/main" val="2045337535"/>
       </p:ext>
     </p:extLst>
   </p:cSld>
@@ -1229,7 +1239,7 @@
           <p:cNvPr id="2" name="標題 1">
             <a:extLst>
               <a:ext uri="{FF2B5EF4-FFF2-40B4-BE49-F238E27FC236}">
-                <a16:creationId xmlns:a16="http://schemas.microsoft.com/office/drawing/2014/main" id="{FF607098-39AE-30B7-9E8A-9851920ED4D1}"/>
+                <a16:creationId xmlns:a16="http://schemas.microsoft.com/office/drawing/2014/main" id="{C85E1E93-F0AF-5C8C-78E2-52B768A491DD}"/>
               </a:ext>
             </a:extLst>
           </p:cNvPr>
@@ -1257,7 +1267,7 @@
           <p:cNvPr id="3" name="內容版面配置區 2">
             <a:extLst>
               <a:ext uri="{FF2B5EF4-FFF2-40B4-BE49-F238E27FC236}">
-                <a16:creationId xmlns:a16="http://schemas.microsoft.com/office/drawing/2014/main" id="{7D4DD806-7736-D6B3-EB4E-1B4BFB7465D3}"/>
+                <a16:creationId xmlns:a16="http://schemas.microsoft.com/office/drawing/2014/main" id="{D643FCA1-2ACF-5D33-B5BA-5E9FE081CABD}"/>
               </a:ext>
             </a:extLst>
           </p:cNvPr>
@@ -1319,7 +1329,7 @@
           <p:cNvPr id="4" name="內容版面配置區 3">
             <a:extLst>
               <a:ext uri="{FF2B5EF4-FFF2-40B4-BE49-F238E27FC236}">
-                <a16:creationId xmlns:a16="http://schemas.microsoft.com/office/drawing/2014/main" id="{0237F7C9-E187-AF5A-8BF1-3D9D56A32DA6}"/>
+                <a16:creationId xmlns:a16="http://schemas.microsoft.com/office/drawing/2014/main" id="{0907626D-F128-F444-F050-7DF33CFE8074}"/>
               </a:ext>
             </a:extLst>
           </p:cNvPr>
@@ -1381,7 +1391,7 @@
           <p:cNvPr id="5" name="日期版面配置區 4">
             <a:extLst>
               <a:ext uri="{FF2B5EF4-FFF2-40B4-BE49-F238E27FC236}">
-                <a16:creationId xmlns:a16="http://schemas.microsoft.com/office/drawing/2014/main" id="{20C41612-EC06-5083-19ED-55772E2BD030}"/>
+                <a16:creationId xmlns:a16="http://schemas.microsoft.com/office/drawing/2014/main" id="{3A66C156-44E5-9820-7165-0A5F6F428A8A}"/>
               </a:ext>
             </a:extLst>
           </p:cNvPr>
@@ -1397,9 +1407,9 @@
           <a:bodyPr/>
           <a:lstStyle/>
           <a:p>
-            <a:fld id="{4A3BFA84-52F0-4236-88CA-D056824456CF}" type="datetimeFigureOut">
+            <a:fld id="{90AD2469-20E7-4B6C-96EF-9D1BC1F7B575}" type="datetimeFigureOut">
               <a:rPr lang="zh-TW" altLang="en-US" smtClean="0"/>
-              <a:t>2024/1/11</a:t>
+              <a:t>2024/5/9</a:t>
             </a:fld>
             <a:endParaRPr lang="zh-TW" altLang="en-US"/>
           </a:p>
@@ -1410,7 +1420,7 @@
           <p:cNvPr id="6" name="頁尾版面配置區 5">
             <a:extLst>
               <a:ext uri="{FF2B5EF4-FFF2-40B4-BE49-F238E27FC236}">
-                <a16:creationId xmlns:a16="http://schemas.microsoft.com/office/drawing/2014/main" id="{3FB14815-C054-D2A3-DD20-26330E26258F}"/>
+                <a16:creationId xmlns:a16="http://schemas.microsoft.com/office/drawing/2014/main" id="{CA5A6441-554E-B8A1-F78F-FC660E6FAAF1}"/>
               </a:ext>
             </a:extLst>
           </p:cNvPr>
@@ -1435,7 +1445,7 @@
           <p:cNvPr id="7" name="投影片編號版面配置區 6">
             <a:extLst>
               <a:ext uri="{FF2B5EF4-FFF2-40B4-BE49-F238E27FC236}">
-                <a16:creationId xmlns:a16="http://schemas.microsoft.com/office/drawing/2014/main" id="{7F375D00-E97B-E923-F1F2-D80BCA4285D7}"/>
+                <a16:creationId xmlns:a16="http://schemas.microsoft.com/office/drawing/2014/main" id="{1E3CA7C4-2A47-C3ED-F1B1-6874AB04D42F}"/>
               </a:ext>
             </a:extLst>
           </p:cNvPr>
@@ -1451,7 +1461,7 @@
           <a:bodyPr/>
           <a:lstStyle/>
           <a:p>
-            <a:fld id="{5851F284-F31E-4EE4-B872-B0582415DB92}" type="slidenum">
+            <a:fld id="{DDCC0B03-BC31-482B-9057-F16658E92C45}" type="slidenum">
               <a:rPr lang="zh-TW" altLang="en-US" smtClean="0"/>
               <a:t>‹#›</a:t>
             </a:fld>
@@ -1462,7 +1472,7 @@
     </p:spTree>
     <p:extLst>
       <p:ext uri="{BB962C8B-B14F-4D97-AF65-F5344CB8AC3E}">
-        <p14:creationId xmlns:p14="http://schemas.microsoft.com/office/powerpoint/2010/main" val="3891827015"/>
+        <p14:creationId xmlns:p14="http://schemas.microsoft.com/office/powerpoint/2010/main" val="519195326"/>
       </p:ext>
     </p:extLst>
   </p:cSld>
@@ -1494,7 +1504,7 @@
           <p:cNvPr id="2" name="標題 1">
             <a:extLst>
               <a:ext uri="{FF2B5EF4-FFF2-40B4-BE49-F238E27FC236}">
-                <a16:creationId xmlns:a16="http://schemas.microsoft.com/office/drawing/2014/main" id="{DB6A0281-70C1-D861-5984-06972526C9FF}"/>
+                <a16:creationId xmlns:a16="http://schemas.microsoft.com/office/drawing/2014/main" id="{8B1A64AB-6246-C310-65BF-4D02B67B27CE}"/>
               </a:ext>
             </a:extLst>
           </p:cNvPr>
@@ -1527,7 +1537,7 @@
           <p:cNvPr id="3" name="文字版面配置區 2">
             <a:extLst>
               <a:ext uri="{FF2B5EF4-FFF2-40B4-BE49-F238E27FC236}">
-                <a16:creationId xmlns:a16="http://schemas.microsoft.com/office/drawing/2014/main" id="{3DE39D53-C3D1-BA92-75F5-D8AEC7D7056C}"/>
+                <a16:creationId xmlns:a16="http://schemas.microsoft.com/office/drawing/2014/main" id="{FFCBE8AA-ACBD-FA80-6B24-8EB18D91DAC3}"/>
               </a:ext>
             </a:extLst>
           </p:cNvPr>
@@ -1598,7 +1608,7 @@
           <p:cNvPr id="4" name="內容版面配置區 3">
             <a:extLst>
               <a:ext uri="{FF2B5EF4-FFF2-40B4-BE49-F238E27FC236}">
-                <a16:creationId xmlns:a16="http://schemas.microsoft.com/office/drawing/2014/main" id="{B1B3CCD3-B051-3AA4-AB54-95813BEC6CD8}"/>
+                <a16:creationId xmlns:a16="http://schemas.microsoft.com/office/drawing/2014/main" id="{37B02A5D-24DA-2D3A-60A7-54094F5D557C}"/>
               </a:ext>
             </a:extLst>
           </p:cNvPr>
@@ -1660,7 +1670,7 @@
           <p:cNvPr id="5" name="文字版面配置區 4">
             <a:extLst>
               <a:ext uri="{FF2B5EF4-FFF2-40B4-BE49-F238E27FC236}">
-                <a16:creationId xmlns:a16="http://schemas.microsoft.com/office/drawing/2014/main" id="{E4D01494-9863-4A73-C645-AEF954F30868}"/>
+                <a16:creationId xmlns:a16="http://schemas.microsoft.com/office/drawing/2014/main" id="{E34C1862-ACB8-F64C-99B3-D4A23806F0D0}"/>
               </a:ext>
             </a:extLst>
           </p:cNvPr>
@@ -1731,7 +1741,7 @@
           <p:cNvPr id="6" name="內容版面配置區 5">
             <a:extLst>
               <a:ext uri="{FF2B5EF4-FFF2-40B4-BE49-F238E27FC236}">
-                <a16:creationId xmlns:a16="http://schemas.microsoft.com/office/drawing/2014/main" id="{BEDF8CB0-E7B2-0785-D646-9697677E29C9}"/>
+                <a16:creationId xmlns:a16="http://schemas.microsoft.com/office/drawing/2014/main" id="{AA00A9E4-8DE1-86C8-A83B-11C0E45E121A}"/>
               </a:ext>
             </a:extLst>
           </p:cNvPr>
@@ -1793,7 +1803,7 @@
           <p:cNvPr id="7" name="日期版面配置區 6">
             <a:extLst>
               <a:ext uri="{FF2B5EF4-FFF2-40B4-BE49-F238E27FC236}">
-                <a16:creationId xmlns:a16="http://schemas.microsoft.com/office/drawing/2014/main" id="{32D24FA6-AB7A-3358-24A0-531236099F00}"/>
+                <a16:creationId xmlns:a16="http://schemas.microsoft.com/office/drawing/2014/main" id="{CD2FC313-7456-1375-E806-E584DA570B29}"/>
               </a:ext>
             </a:extLst>
           </p:cNvPr>
@@ -1809,9 +1819,9 @@
           <a:bodyPr/>
           <a:lstStyle/>
           <a:p>
-            <a:fld id="{4A3BFA84-52F0-4236-88CA-D056824456CF}" type="datetimeFigureOut">
+            <a:fld id="{90AD2469-20E7-4B6C-96EF-9D1BC1F7B575}" type="datetimeFigureOut">
               <a:rPr lang="zh-TW" altLang="en-US" smtClean="0"/>
-              <a:t>2024/1/11</a:t>
+              <a:t>2024/5/9</a:t>
             </a:fld>
             <a:endParaRPr lang="zh-TW" altLang="en-US"/>
           </a:p>
@@ -1822,7 +1832,7 @@
           <p:cNvPr id="8" name="頁尾版面配置區 7">
             <a:extLst>
               <a:ext uri="{FF2B5EF4-FFF2-40B4-BE49-F238E27FC236}">
-                <a16:creationId xmlns:a16="http://schemas.microsoft.com/office/drawing/2014/main" id="{FC324AC4-694F-3A89-20AF-0D77BAC82EF8}"/>
+                <a16:creationId xmlns:a16="http://schemas.microsoft.com/office/drawing/2014/main" id="{E1EB539F-7345-5DA8-103D-67485DA82DAC}"/>
               </a:ext>
             </a:extLst>
           </p:cNvPr>
@@ -1847,7 +1857,7 @@
           <p:cNvPr id="9" name="投影片編號版面配置區 8">
             <a:extLst>
               <a:ext uri="{FF2B5EF4-FFF2-40B4-BE49-F238E27FC236}">
-                <a16:creationId xmlns:a16="http://schemas.microsoft.com/office/drawing/2014/main" id="{532B12B4-79D8-0171-AC2C-6C1846317861}"/>
+                <a16:creationId xmlns:a16="http://schemas.microsoft.com/office/drawing/2014/main" id="{7A40DEA1-FF66-2F3C-E34A-C636EA3D7985}"/>
               </a:ext>
             </a:extLst>
           </p:cNvPr>
@@ -1863,7 +1873,7 @@
           <a:bodyPr/>
           <a:lstStyle/>
           <a:p>
-            <a:fld id="{5851F284-F31E-4EE4-B872-B0582415DB92}" type="slidenum">
+            <a:fld id="{DDCC0B03-BC31-482B-9057-F16658E92C45}" type="slidenum">
               <a:rPr lang="zh-TW" altLang="en-US" smtClean="0"/>
               <a:t>‹#›</a:t>
             </a:fld>
@@ -1874,7 +1884,7 @@
     </p:spTree>
     <p:extLst>
       <p:ext uri="{BB962C8B-B14F-4D97-AF65-F5344CB8AC3E}">
-        <p14:creationId xmlns:p14="http://schemas.microsoft.com/office/powerpoint/2010/main" val="2293757942"/>
+        <p14:creationId xmlns:p14="http://schemas.microsoft.com/office/powerpoint/2010/main" val="1271392405"/>
       </p:ext>
     </p:extLst>
   </p:cSld>
@@ -1906,7 +1916,7 @@
           <p:cNvPr id="2" name="標題 1">
             <a:extLst>
               <a:ext uri="{FF2B5EF4-FFF2-40B4-BE49-F238E27FC236}">
-                <a16:creationId xmlns:a16="http://schemas.microsoft.com/office/drawing/2014/main" id="{C356031C-8A5B-C90B-859C-42DC71684070}"/>
+                <a16:creationId xmlns:a16="http://schemas.microsoft.com/office/drawing/2014/main" id="{D1883E87-18E4-B615-EF0C-AB1442F00181}"/>
               </a:ext>
             </a:extLst>
           </p:cNvPr>
@@ -1934,7 +1944,7 @@
           <p:cNvPr id="3" name="日期版面配置區 2">
             <a:extLst>
               <a:ext uri="{FF2B5EF4-FFF2-40B4-BE49-F238E27FC236}">
-                <a16:creationId xmlns:a16="http://schemas.microsoft.com/office/drawing/2014/main" id="{9813C59F-41FC-1F50-EF91-54A3C64327EB}"/>
+                <a16:creationId xmlns:a16="http://schemas.microsoft.com/office/drawing/2014/main" id="{11B35461-F6F9-008A-6454-993AD9DD7E2A}"/>
               </a:ext>
             </a:extLst>
           </p:cNvPr>
@@ -1950,9 +1960,9 @@
           <a:bodyPr/>
           <a:lstStyle/>
           <a:p>
-            <a:fld id="{4A3BFA84-52F0-4236-88CA-D056824456CF}" type="datetimeFigureOut">
+            <a:fld id="{90AD2469-20E7-4B6C-96EF-9D1BC1F7B575}" type="datetimeFigureOut">
               <a:rPr lang="zh-TW" altLang="en-US" smtClean="0"/>
-              <a:t>2024/1/11</a:t>
+              <a:t>2024/5/9</a:t>
             </a:fld>
             <a:endParaRPr lang="zh-TW" altLang="en-US"/>
           </a:p>
@@ -1963,7 +1973,7 @@
           <p:cNvPr id="4" name="頁尾版面配置區 3">
             <a:extLst>
               <a:ext uri="{FF2B5EF4-FFF2-40B4-BE49-F238E27FC236}">
-                <a16:creationId xmlns:a16="http://schemas.microsoft.com/office/drawing/2014/main" id="{99FE7E2B-90A2-D833-F909-B3EC9A02B08F}"/>
+                <a16:creationId xmlns:a16="http://schemas.microsoft.com/office/drawing/2014/main" id="{5E536B17-808A-47C9-99DF-EDF3D512F84D}"/>
               </a:ext>
             </a:extLst>
           </p:cNvPr>
@@ -1988,7 +1998,7 @@
           <p:cNvPr id="5" name="投影片編號版面配置區 4">
             <a:extLst>
               <a:ext uri="{FF2B5EF4-FFF2-40B4-BE49-F238E27FC236}">
-                <a16:creationId xmlns:a16="http://schemas.microsoft.com/office/drawing/2014/main" id="{81E8C127-0247-8493-FA0E-4F27BA9C0517}"/>
+                <a16:creationId xmlns:a16="http://schemas.microsoft.com/office/drawing/2014/main" id="{76CCFD81-9700-2969-4EF3-70572DF0A008}"/>
               </a:ext>
             </a:extLst>
           </p:cNvPr>
@@ -2004,7 +2014,7 @@
           <a:bodyPr/>
           <a:lstStyle/>
           <a:p>
-            <a:fld id="{5851F284-F31E-4EE4-B872-B0582415DB92}" type="slidenum">
+            <a:fld id="{DDCC0B03-BC31-482B-9057-F16658E92C45}" type="slidenum">
               <a:rPr lang="zh-TW" altLang="en-US" smtClean="0"/>
               <a:t>‹#›</a:t>
             </a:fld>
@@ -2015,7 +2025,7 @@
     </p:spTree>
     <p:extLst>
       <p:ext uri="{BB962C8B-B14F-4D97-AF65-F5344CB8AC3E}">
-        <p14:creationId xmlns:p14="http://schemas.microsoft.com/office/powerpoint/2010/main" val="301983121"/>
+        <p14:creationId xmlns:p14="http://schemas.microsoft.com/office/powerpoint/2010/main" val="740564684"/>
       </p:ext>
     </p:extLst>
   </p:cSld>
@@ -2047,7 +2057,7 @@
           <p:cNvPr id="2" name="日期版面配置區 1">
             <a:extLst>
               <a:ext uri="{FF2B5EF4-FFF2-40B4-BE49-F238E27FC236}">
-                <a16:creationId xmlns:a16="http://schemas.microsoft.com/office/drawing/2014/main" id="{86618EAA-9234-C360-0D45-D097DABFC980}"/>
+                <a16:creationId xmlns:a16="http://schemas.microsoft.com/office/drawing/2014/main" id="{4FE0D985-9D20-4DE5-E856-3C1BFDF83C37}"/>
               </a:ext>
             </a:extLst>
           </p:cNvPr>
@@ -2063,9 +2073,9 @@
           <a:bodyPr/>
           <a:lstStyle/>
           <a:p>
-            <a:fld id="{4A3BFA84-52F0-4236-88CA-D056824456CF}" type="datetimeFigureOut">
+            <a:fld id="{90AD2469-20E7-4B6C-96EF-9D1BC1F7B575}" type="datetimeFigureOut">
               <a:rPr lang="zh-TW" altLang="en-US" smtClean="0"/>
-              <a:t>2024/1/11</a:t>
+              <a:t>2024/5/9</a:t>
             </a:fld>
             <a:endParaRPr lang="zh-TW" altLang="en-US"/>
           </a:p>
@@ -2076,7 +2086,7 @@
           <p:cNvPr id="3" name="頁尾版面配置區 2">
             <a:extLst>
               <a:ext uri="{FF2B5EF4-FFF2-40B4-BE49-F238E27FC236}">
-                <a16:creationId xmlns:a16="http://schemas.microsoft.com/office/drawing/2014/main" id="{00E3BF2E-0E21-FD2D-D0CB-DFF0EB3F1811}"/>
+                <a16:creationId xmlns:a16="http://schemas.microsoft.com/office/drawing/2014/main" id="{DF5B9A5C-B69E-4609-B2B4-9C4A30B6C0DD}"/>
               </a:ext>
             </a:extLst>
           </p:cNvPr>
@@ -2101,7 +2111,7 @@
           <p:cNvPr id="4" name="投影片編號版面配置區 3">
             <a:extLst>
               <a:ext uri="{FF2B5EF4-FFF2-40B4-BE49-F238E27FC236}">
-                <a16:creationId xmlns:a16="http://schemas.microsoft.com/office/drawing/2014/main" id="{3D619523-44DA-53E4-6948-634701037B28}"/>
+                <a16:creationId xmlns:a16="http://schemas.microsoft.com/office/drawing/2014/main" id="{56AE503E-3692-2194-0C86-2CB734365542}"/>
               </a:ext>
             </a:extLst>
           </p:cNvPr>
@@ -2117,7 +2127,7 @@
           <a:bodyPr/>
           <a:lstStyle/>
           <a:p>
-            <a:fld id="{5851F284-F31E-4EE4-B872-B0582415DB92}" type="slidenum">
+            <a:fld id="{DDCC0B03-BC31-482B-9057-F16658E92C45}" type="slidenum">
               <a:rPr lang="zh-TW" altLang="en-US" smtClean="0"/>
               <a:t>‹#›</a:t>
             </a:fld>
@@ -2128,7 +2138,7 @@
     </p:spTree>
     <p:extLst>
       <p:ext uri="{BB962C8B-B14F-4D97-AF65-F5344CB8AC3E}">
-        <p14:creationId xmlns:p14="http://schemas.microsoft.com/office/powerpoint/2010/main" val="1544252882"/>
+        <p14:creationId xmlns:p14="http://schemas.microsoft.com/office/powerpoint/2010/main" val="3649913191"/>
       </p:ext>
     </p:extLst>
   </p:cSld>
@@ -2160,7 +2170,7 @@
           <p:cNvPr id="2" name="標題 1">
             <a:extLst>
               <a:ext uri="{FF2B5EF4-FFF2-40B4-BE49-F238E27FC236}">
-                <a16:creationId xmlns:a16="http://schemas.microsoft.com/office/drawing/2014/main" id="{2051EE9F-C839-DD31-6F32-0EA6B9759867}"/>
+                <a16:creationId xmlns:a16="http://schemas.microsoft.com/office/drawing/2014/main" id="{2EBBC0DB-102D-5FA5-83A8-E68A8ABFC940}"/>
               </a:ext>
             </a:extLst>
           </p:cNvPr>
@@ -2197,7 +2207,7 @@
           <p:cNvPr id="3" name="內容版面配置區 2">
             <a:extLst>
               <a:ext uri="{FF2B5EF4-FFF2-40B4-BE49-F238E27FC236}">
-                <a16:creationId xmlns:a16="http://schemas.microsoft.com/office/drawing/2014/main" id="{0398EFEB-556C-DF81-53EB-40FC08C80EE1}"/>
+                <a16:creationId xmlns:a16="http://schemas.microsoft.com/office/drawing/2014/main" id="{E18E2B2B-D950-8CF5-2E82-4DBA851F6BB6}"/>
               </a:ext>
             </a:extLst>
           </p:cNvPr>
@@ -2287,7 +2297,7 @@
           <p:cNvPr id="4" name="文字版面配置區 3">
             <a:extLst>
               <a:ext uri="{FF2B5EF4-FFF2-40B4-BE49-F238E27FC236}">
-                <a16:creationId xmlns:a16="http://schemas.microsoft.com/office/drawing/2014/main" id="{D3CD0713-D613-0C00-F121-25D149F7D5E3}"/>
+                <a16:creationId xmlns:a16="http://schemas.microsoft.com/office/drawing/2014/main" id="{860F6329-B128-AFED-3006-F77C0B620B66}"/>
               </a:ext>
             </a:extLst>
           </p:cNvPr>
@@ -2358,7 +2368,7 @@
           <p:cNvPr id="5" name="日期版面配置區 4">
             <a:extLst>
               <a:ext uri="{FF2B5EF4-FFF2-40B4-BE49-F238E27FC236}">
-                <a16:creationId xmlns:a16="http://schemas.microsoft.com/office/drawing/2014/main" id="{31C98E66-5B76-D521-08CE-942A736B7AD9}"/>
+                <a16:creationId xmlns:a16="http://schemas.microsoft.com/office/drawing/2014/main" id="{982A085A-9AB9-E7A0-85AF-AC8F1F391025}"/>
               </a:ext>
             </a:extLst>
           </p:cNvPr>
@@ -2374,9 +2384,9 @@
           <a:bodyPr/>
           <a:lstStyle/>
           <a:p>
-            <a:fld id="{4A3BFA84-52F0-4236-88CA-D056824456CF}" type="datetimeFigureOut">
+            <a:fld id="{90AD2469-20E7-4B6C-96EF-9D1BC1F7B575}" type="datetimeFigureOut">
               <a:rPr lang="zh-TW" altLang="en-US" smtClean="0"/>
-              <a:t>2024/1/11</a:t>
+              <a:t>2024/5/9</a:t>
             </a:fld>
             <a:endParaRPr lang="zh-TW" altLang="en-US"/>
           </a:p>
@@ -2387,7 +2397,7 @@
           <p:cNvPr id="6" name="頁尾版面配置區 5">
             <a:extLst>
               <a:ext uri="{FF2B5EF4-FFF2-40B4-BE49-F238E27FC236}">
-                <a16:creationId xmlns:a16="http://schemas.microsoft.com/office/drawing/2014/main" id="{E378E968-E2E8-C5D4-3472-57880F340004}"/>
+                <a16:creationId xmlns:a16="http://schemas.microsoft.com/office/drawing/2014/main" id="{64781213-A048-7A23-BE6D-0A10748C19FD}"/>
               </a:ext>
             </a:extLst>
           </p:cNvPr>
@@ -2412,7 +2422,7 @@
           <p:cNvPr id="7" name="投影片編號版面配置區 6">
             <a:extLst>
               <a:ext uri="{FF2B5EF4-FFF2-40B4-BE49-F238E27FC236}">
-                <a16:creationId xmlns:a16="http://schemas.microsoft.com/office/drawing/2014/main" id="{B68916C5-7506-86A7-F662-D323E3F88EB9}"/>
+                <a16:creationId xmlns:a16="http://schemas.microsoft.com/office/drawing/2014/main" id="{F6B7A0A3-CA20-D7B5-18FD-F0203485A33C}"/>
               </a:ext>
             </a:extLst>
           </p:cNvPr>
@@ -2428,7 +2438,7 @@
           <a:bodyPr/>
           <a:lstStyle/>
           <a:p>
-            <a:fld id="{5851F284-F31E-4EE4-B872-B0582415DB92}" type="slidenum">
+            <a:fld id="{DDCC0B03-BC31-482B-9057-F16658E92C45}" type="slidenum">
               <a:rPr lang="zh-TW" altLang="en-US" smtClean="0"/>
               <a:t>‹#›</a:t>
             </a:fld>
@@ -2439,7 +2449,7 @@
     </p:spTree>
     <p:extLst>
       <p:ext uri="{BB962C8B-B14F-4D97-AF65-F5344CB8AC3E}">
-        <p14:creationId xmlns:p14="http://schemas.microsoft.com/office/powerpoint/2010/main" val="3741213059"/>
+        <p14:creationId xmlns:p14="http://schemas.microsoft.com/office/powerpoint/2010/main" val="3659139227"/>
       </p:ext>
     </p:extLst>
   </p:cSld>
@@ -2471,7 +2481,7 @@
           <p:cNvPr id="2" name="標題 1">
             <a:extLst>
               <a:ext uri="{FF2B5EF4-FFF2-40B4-BE49-F238E27FC236}">
-                <a16:creationId xmlns:a16="http://schemas.microsoft.com/office/drawing/2014/main" id="{19515A59-D630-6842-A5B1-BF9D199847F8}"/>
+                <a16:creationId xmlns:a16="http://schemas.microsoft.com/office/drawing/2014/main" id="{FCBB00D5-0DEB-ACD3-7228-C120294CF96B}"/>
               </a:ext>
             </a:extLst>
           </p:cNvPr>
@@ -2508,7 +2518,7 @@
           <p:cNvPr id="3" name="圖片版面配置區 2">
             <a:extLst>
               <a:ext uri="{FF2B5EF4-FFF2-40B4-BE49-F238E27FC236}">
-                <a16:creationId xmlns:a16="http://schemas.microsoft.com/office/drawing/2014/main" id="{CEA9BFF0-E44C-AE6C-1EAA-66735931A013}"/>
+                <a16:creationId xmlns:a16="http://schemas.microsoft.com/office/drawing/2014/main" id="{B61B229B-2693-6B86-4AED-BCDC1B722099}"/>
               </a:ext>
             </a:extLst>
           </p:cNvPr>
@@ -2575,7 +2585,7 @@
           <p:cNvPr id="4" name="文字版面配置區 3">
             <a:extLst>
               <a:ext uri="{FF2B5EF4-FFF2-40B4-BE49-F238E27FC236}">
-                <a16:creationId xmlns:a16="http://schemas.microsoft.com/office/drawing/2014/main" id="{C554BFAF-CD92-D905-9ABC-39C5168929BA}"/>
+                <a16:creationId xmlns:a16="http://schemas.microsoft.com/office/drawing/2014/main" id="{E3E53964-B942-2722-4E49-57EEFFEF4DA2}"/>
               </a:ext>
             </a:extLst>
           </p:cNvPr>
@@ -2646,7 +2656,7 @@
           <p:cNvPr id="5" name="日期版面配置區 4">
             <a:extLst>
               <a:ext uri="{FF2B5EF4-FFF2-40B4-BE49-F238E27FC236}">
-                <a16:creationId xmlns:a16="http://schemas.microsoft.com/office/drawing/2014/main" id="{6414809B-16C8-312D-9001-04F8103E9478}"/>
+                <a16:creationId xmlns:a16="http://schemas.microsoft.com/office/drawing/2014/main" id="{1FFE477E-CD66-9CBB-4B1E-87EF054B9662}"/>
               </a:ext>
             </a:extLst>
           </p:cNvPr>
@@ -2662,9 +2672,9 @@
           <a:bodyPr/>
           <a:lstStyle/>
           <a:p>
-            <a:fld id="{4A3BFA84-52F0-4236-88CA-D056824456CF}" type="datetimeFigureOut">
+            <a:fld id="{90AD2469-20E7-4B6C-96EF-9D1BC1F7B575}" type="datetimeFigureOut">
               <a:rPr lang="zh-TW" altLang="en-US" smtClean="0"/>
-              <a:t>2024/1/11</a:t>
+              <a:t>2024/5/9</a:t>
             </a:fld>
             <a:endParaRPr lang="zh-TW" altLang="en-US"/>
           </a:p>
@@ -2675,7 +2685,7 @@
           <p:cNvPr id="6" name="頁尾版面配置區 5">
             <a:extLst>
               <a:ext uri="{FF2B5EF4-FFF2-40B4-BE49-F238E27FC236}">
-                <a16:creationId xmlns:a16="http://schemas.microsoft.com/office/drawing/2014/main" id="{EB515899-E8C1-DA8D-8AF4-EF671BB105D5}"/>
+                <a16:creationId xmlns:a16="http://schemas.microsoft.com/office/drawing/2014/main" id="{BC31B6EF-030B-4AAC-34D7-EFC53C0AF9B2}"/>
               </a:ext>
             </a:extLst>
           </p:cNvPr>
@@ -2700,7 +2710,7 @@
           <p:cNvPr id="7" name="投影片編號版面配置區 6">
             <a:extLst>
               <a:ext uri="{FF2B5EF4-FFF2-40B4-BE49-F238E27FC236}">
-                <a16:creationId xmlns:a16="http://schemas.microsoft.com/office/drawing/2014/main" id="{CAFCB809-6E53-B088-2A11-071D1D8B1464}"/>
+                <a16:creationId xmlns:a16="http://schemas.microsoft.com/office/drawing/2014/main" id="{61C3AFCF-9DDD-81C4-71D1-DC841E02A41C}"/>
               </a:ext>
             </a:extLst>
           </p:cNvPr>
@@ -2716,7 +2726,7 @@
           <a:bodyPr/>
           <a:lstStyle/>
           <a:p>
-            <a:fld id="{5851F284-F31E-4EE4-B872-B0582415DB92}" type="slidenum">
+            <a:fld id="{DDCC0B03-BC31-482B-9057-F16658E92C45}" type="slidenum">
               <a:rPr lang="zh-TW" altLang="en-US" smtClean="0"/>
               <a:t>‹#›</a:t>
             </a:fld>
@@ -2727,7 +2737,7 @@
     </p:spTree>
     <p:extLst>
       <p:ext uri="{BB962C8B-B14F-4D97-AF65-F5344CB8AC3E}">
-        <p14:creationId xmlns:p14="http://schemas.microsoft.com/office/powerpoint/2010/main" val="3387679058"/>
+        <p14:creationId xmlns:p14="http://schemas.microsoft.com/office/powerpoint/2010/main" val="595370591"/>
       </p:ext>
     </p:extLst>
   </p:cSld>
@@ -2764,7 +2774,7 @@
           <p:cNvPr id="2" name="標題版面配置區 1">
             <a:extLst>
               <a:ext uri="{FF2B5EF4-FFF2-40B4-BE49-F238E27FC236}">
-                <a16:creationId xmlns:a16="http://schemas.microsoft.com/office/drawing/2014/main" id="{8C6BAE25-42DB-EAD1-7FFA-DE3EBED3BCAE}"/>
+                <a16:creationId xmlns:a16="http://schemas.microsoft.com/office/drawing/2014/main" id="{D279D456-6C7B-8954-7B62-2499F8DBA8F5}"/>
               </a:ext>
             </a:extLst>
           </p:cNvPr>
@@ -2802,7 +2812,7 @@
           <p:cNvPr id="3" name="文字版面配置區 2">
             <a:extLst>
               <a:ext uri="{FF2B5EF4-FFF2-40B4-BE49-F238E27FC236}">
-                <a16:creationId xmlns:a16="http://schemas.microsoft.com/office/drawing/2014/main" id="{A5107080-4853-89B9-73C1-C62527D4BA79}"/>
+                <a16:creationId xmlns:a16="http://schemas.microsoft.com/office/drawing/2014/main" id="{A844CBD8-9E33-4D84-A62B-A7C7D0F24718}"/>
               </a:ext>
             </a:extLst>
           </p:cNvPr>
@@ -2869,7 +2879,7 @@
           <p:cNvPr id="4" name="日期版面配置區 3">
             <a:extLst>
               <a:ext uri="{FF2B5EF4-FFF2-40B4-BE49-F238E27FC236}">
-                <a16:creationId xmlns:a16="http://schemas.microsoft.com/office/drawing/2014/main" id="{D8DE6D37-8DE1-3DAD-F412-0AE3852FA144}"/>
+                <a16:creationId xmlns:a16="http://schemas.microsoft.com/office/drawing/2014/main" id="{369AFDBB-DE81-4DBC-EA95-A47066C91895}"/>
               </a:ext>
             </a:extLst>
           </p:cNvPr>
@@ -2903,9 +2913,9 @@
             </a:lvl1pPr>
           </a:lstStyle>
           <a:p>
-            <a:fld id="{4A3BFA84-52F0-4236-88CA-D056824456CF}" type="datetimeFigureOut">
+            <a:fld id="{90AD2469-20E7-4B6C-96EF-9D1BC1F7B575}" type="datetimeFigureOut">
               <a:rPr lang="zh-TW" altLang="en-US" smtClean="0"/>
-              <a:t>2024/1/11</a:t>
+              <a:t>2024/5/9</a:t>
             </a:fld>
             <a:endParaRPr lang="zh-TW" altLang="en-US"/>
           </a:p>
@@ -2916,7 +2926,7 @@
           <p:cNvPr id="5" name="頁尾版面配置區 4">
             <a:extLst>
               <a:ext uri="{FF2B5EF4-FFF2-40B4-BE49-F238E27FC236}">
-                <a16:creationId xmlns:a16="http://schemas.microsoft.com/office/drawing/2014/main" id="{1908BBB2-4547-B979-100B-11A24862366E}"/>
+                <a16:creationId xmlns:a16="http://schemas.microsoft.com/office/drawing/2014/main" id="{79B3CEC8-F325-F852-0EBF-9A5582F934D2}"/>
               </a:ext>
             </a:extLst>
           </p:cNvPr>
@@ -2959,7 +2969,7 @@
           <p:cNvPr id="6" name="投影片編號版面配置區 5">
             <a:extLst>
               <a:ext uri="{FF2B5EF4-FFF2-40B4-BE49-F238E27FC236}">
-                <a16:creationId xmlns:a16="http://schemas.microsoft.com/office/drawing/2014/main" id="{C8718723-EBF4-9D33-3980-B5EF5DB7F958}"/>
+                <a16:creationId xmlns:a16="http://schemas.microsoft.com/office/drawing/2014/main" id="{08177360-A6F6-EBCA-AEC2-FA3B6AB1CE40}"/>
               </a:ext>
             </a:extLst>
           </p:cNvPr>
@@ -2993,7 +3003,7 @@
             </a:lvl1pPr>
           </a:lstStyle>
           <a:p>
-            <a:fld id="{5851F284-F31E-4EE4-B872-B0582415DB92}" type="slidenum">
+            <a:fld id="{DDCC0B03-BC31-482B-9057-F16658E92C45}" type="slidenum">
               <a:rPr lang="zh-TW" altLang="en-US" smtClean="0"/>
               <a:t>‹#›</a:t>
             </a:fld>
@@ -3004,7 +3014,7 @@
     </p:spTree>
     <p:extLst>
       <p:ext uri="{BB962C8B-B14F-4D97-AF65-F5344CB8AC3E}">
-        <p14:creationId xmlns:p14="http://schemas.microsoft.com/office/powerpoint/2010/main" val="1219378668"/>
+        <p14:creationId xmlns:p14="http://schemas.microsoft.com/office/powerpoint/2010/main" val="2691353197"/>
       </p:ext>
     </p:extLst>
   </p:cSld>
@@ -3324,10 +3334,10 @@
       </p:grpSpPr>
       <p:pic>
         <p:nvPicPr>
-          <p:cNvPr id="5" name="圖片 4">
-            <a:extLst>
-              <a:ext uri="{FF2B5EF4-FFF2-40B4-BE49-F238E27FC236}">
-                <a16:creationId xmlns:a16="http://schemas.microsoft.com/office/drawing/2014/main" id="{480BF4E0-9956-84D4-2E70-AF0CB9365DA0}"/>
+          <p:cNvPr id="7" name="圖片 6">
+            <a:extLst>
+              <a:ext uri="{FF2B5EF4-FFF2-40B4-BE49-F238E27FC236}">
+                <a16:creationId xmlns:a16="http://schemas.microsoft.com/office/drawing/2014/main" id="{D3D2679C-5CFB-4182-DBAE-BF36E483F557}"/>
               </a:ext>
             </a:extLst>
           </p:cNvPr>
@@ -3344,8 +3354,8 @@
         </p:blipFill>
         <p:spPr>
           <a:xfrm>
-            <a:off x="4226258" y="122918"/>
-            <a:ext cx="3101127" cy="2865368"/>
+            <a:off x="1161245" y="3863894"/>
+            <a:ext cx="3111139" cy="2221662"/>
           </a:xfrm>
           <a:prstGeom prst="rect">
             <a:avLst/>
@@ -3354,10 +3364,10 @@
       </p:pic>
       <p:pic>
         <p:nvPicPr>
-          <p:cNvPr id="9" name="圖片 8">
-            <a:extLst>
-              <a:ext uri="{FF2B5EF4-FFF2-40B4-BE49-F238E27FC236}">
-                <a16:creationId xmlns:a16="http://schemas.microsoft.com/office/drawing/2014/main" id="{066B7F69-A6D8-DF1F-5512-0E1FB6F82080}"/>
+          <p:cNvPr id="8" name="圖片 7">
+            <a:extLst>
+              <a:ext uri="{FF2B5EF4-FFF2-40B4-BE49-F238E27FC236}">
+                <a16:creationId xmlns:a16="http://schemas.microsoft.com/office/drawing/2014/main" id="{AA309C0A-5155-DC55-3572-D5C510263543}"/>
               </a:ext>
             </a:extLst>
           </p:cNvPr>
@@ -3374,8 +3384,8 @@
         </p:blipFill>
         <p:spPr>
           <a:xfrm>
-            <a:off x="1434861" y="167129"/>
-            <a:ext cx="2988325" cy="2776945"/>
+            <a:off x="7865193" y="3860953"/>
+            <a:ext cx="3165561" cy="2252893"/>
           </a:xfrm>
           <a:prstGeom prst="rect">
             <a:avLst/>
@@ -3384,10 +3394,10 @@
       </p:pic>
       <p:pic>
         <p:nvPicPr>
-          <p:cNvPr id="11" name="圖片 10">
-            <a:extLst>
-              <a:ext uri="{FF2B5EF4-FFF2-40B4-BE49-F238E27FC236}">
-                <a16:creationId xmlns:a16="http://schemas.microsoft.com/office/drawing/2014/main" id="{B29C103A-5695-22C6-78F6-D7A8511D435B}"/>
+          <p:cNvPr id="9" name="圖片 8">
+            <a:extLst>
+              <a:ext uri="{FF2B5EF4-FFF2-40B4-BE49-F238E27FC236}">
+                <a16:creationId xmlns:a16="http://schemas.microsoft.com/office/drawing/2014/main" id="{257038AC-EF84-2BA6-03B4-8106AF591753}"/>
               </a:ext>
             </a:extLst>
           </p:cNvPr>
@@ -3404,8 +3414,8 @@
         </p:blipFill>
         <p:spPr>
           <a:xfrm>
-            <a:off x="7089448" y="270661"/>
-            <a:ext cx="2618966" cy="2717625"/>
+            <a:off x="4486008" y="3860953"/>
+            <a:ext cx="3165561" cy="2221663"/>
           </a:xfrm>
           <a:prstGeom prst="rect">
             <a:avLst/>
@@ -3414,10 +3424,10 @@
       </p:pic>
       <p:pic>
         <p:nvPicPr>
-          <p:cNvPr id="15" name="圖片 14">
-            <a:extLst>
-              <a:ext uri="{FF2B5EF4-FFF2-40B4-BE49-F238E27FC236}">
-                <a16:creationId xmlns:a16="http://schemas.microsoft.com/office/drawing/2014/main" id="{8C432698-8229-F373-81A1-760E0941B68F}"/>
+          <p:cNvPr id="13" name="圖片 12">
+            <a:extLst>
+              <a:ext uri="{FF2B5EF4-FFF2-40B4-BE49-F238E27FC236}">
+                <a16:creationId xmlns:a16="http://schemas.microsoft.com/office/drawing/2014/main" id="{6D2081E6-33EA-D611-E3C2-9BA4362F2E4A}"/>
               </a:ext>
             </a:extLst>
           </p:cNvPr>
@@ -3434,8 +3444,8 @@
         </p:blipFill>
         <p:spPr>
           <a:xfrm>
-            <a:off x="1775280" y="3136029"/>
-            <a:ext cx="7812248" cy="2997352"/>
+            <a:off x="4326808" y="515636"/>
+            <a:ext cx="2680154" cy="2757774"/>
           </a:xfrm>
           <a:prstGeom prst="rect">
             <a:avLst/>
@@ -3444,10 +3454,10 @@
       </p:pic>
       <p:pic>
         <p:nvPicPr>
-          <p:cNvPr id="17" name="圖片 16">
-            <a:extLst>
-              <a:ext uri="{FF2B5EF4-FFF2-40B4-BE49-F238E27FC236}">
-                <a16:creationId xmlns:a16="http://schemas.microsoft.com/office/drawing/2014/main" id="{7DDD4B44-990E-BF13-9809-C2DFAD9C5659}"/>
+          <p:cNvPr id="3" name="圖片 2">
+            <a:extLst>
+              <a:ext uri="{FF2B5EF4-FFF2-40B4-BE49-F238E27FC236}">
+                <a16:creationId xmlns:a16="http://schemas.microsoft.com/office/drawing/2014/main" id="{24161106-5DFB-20F9-0A20-32782FE6B6D7}"/>
               </a:ext>
             </a:extLst>
           </p:cNvPr>
@@ -3464,8 +3474,74 @@
         </p:blipFill>
         <p:spPr>
           <a:xfrm>
-            <a:off x="3254382" y="6308325"/>
-            <a:ext cx="5044877" cy="426757"/>
+            <a:off x="7865193" y="572460"/>
+            <a:ext cx="2680154" cy="2767202"/>
+          </a:xfrm>
+          <a:prstGeom prst="rect">
+            <a:avLst/>
+          </a:prstGeom>
+        </p:spPr>
+      </p:pic>
+      <p:sp>
+        <p:nvSpPr>
+          <p:cNvPr id="4" name="文字方塊 3">
+            <a:extLst>
+              <a:ext uri="{FF2B5EF4-FFF2-40B4-BE49-F238E27FC236}">
+                <a16:creationId xmlns:a16="http://schemas.microsoft.com/office/drawing/2014/main" id="{F93F4922-203B-E5D4-1F9A-EF463BE3630C}"/>
+              </a:ext>
+            </a:extLst>
+          </p:cNvPr>
+          <p:cNvSpPr txBox="1"/>
+          <p:nvPr/>
+        </p:nvSpPr>
+        <p:spPr>
+          <a:xfrm>
+            <a:off x="237744" y="146304"/>
+            <a:ext cx="1043292" cy="369332"/>
+          </a:xfrm>
+          <a:prstGeom prst="rect">
+            <a:avLst/>
+          </a:prstGeom>
+          <a:noFill/>
+        </p:spPr>
+        <p:txBody>
+          <a:bodyPr wrap="square" rtlCol="0">
+            <a:spAutoFit/>
+          </a:bodyPr>
+          <a:lstStyle/>
+          <a:p>
+            <a:r>
+              <a:rPr lang="en-US" altLang="zh-TW" dirty="0"/>
+              <a:t>CNN</a:t>
+            </a:r>
+            <a:endParaRPr lang="zh-TW" altLang="en-US" dirty="0"/>
+          </a:p>
+        </p:txBody>
+      </p:sp>
+      <p:pic>
+        <p:nvPicPr>
+          <p:cNvPr id="10" name="圖片 9">
+            <a:extLst>
+              <a:ext uri="{FF2B5EF4-FFF2-40B4-BE49-F238E27FC236}">
+                <a16:creationId xmlns:a16="http://schemas.microsoft.com/office/drawing/2014/main" id="{C1137F2E-20D9-AD3C-21BF-0E6722CD26A2}"/>
+              </a:ext>
+            </a:extLst>
+          </p:cNvPr>
+          <p:cNvPicPr>
+            <a:picLocks noChangeAspect="1"/>
+          </p:cNvPicPr>
+          <p:nvPr/>
+        </p:nvPicPr>
+        <p:blipFill>
+          <a:blip r:embed="rId7"/>
+          <a:stretch>
+            <a:fillRect/>
+          </a:stretch>
+        </p:blipFill>
+        <p:spPr>
+          <a:xfrm>
+            <a:off x="1347393" y="572460"/>
+            <a:ext cx="2550300" cy="2611021"/>
           </a:xfrm>
           <a:prstGeom prst="rect">
             <a:avLst/>
@@ -3475,7 +3551,7 @@
     </p:spTree>
     <p:extLst>
       <p:ext uri="{BB962C8B-B14F-4D97-AF65-F5344CB8AC3E}">
-        <p14:creationId xmlns:p14="http://schemas.microsoft.com/office/powerpoint/2010/main" val="1526871895"/>
+        <p14:creationId xmlns:p14="http://schemas.microsoft.com/office/powerpoint/2010/main" val="4260660697"/>
       </p:ext>
     </p:extLst>
   </p:cSld>
@@ -3504,10 +3580,10 @@
       </p:grpSpPr>
       <p:pic>
         <p:nvPicPr>
-          <p:cNvPr id="13" name="圖片 12">
-            <a:extLst>
-              <a:ext uri="{FF2B5EF4-FFF2-40B4-BE49-F238E27FC236}">
-                <a16:creationId xmlns:a16="http://schemas.microsoft.com/office/drawing/2014/main" id="{36B8AB97-6008-687E-E2E4-E9B2C083C41B}"/>
+          <p:cNvPr id="4" name="圖片 3">
+            <a:extLst>
+              <a:ext uri="{FF2B5EF4-FFF2-40B4-BE49-F238E27FC236}">
+                <a16:creationId xmlns:a16="http://schemas.microsoft.com/office/drawing/2014/main" id="{E7289008-D103-F0F1-8D0A-09A149348A90}"/>
               </a:ext>
             </a:extLst>
           </p:cNvPr>
@@ -3524,8 +3600,8 @@
         </p:blipFill>
         <p:spPr>
           <a:xfrm>
-            <a:off x="1764045" y="0"/>
-            <a:ext cx="3710219" cy="2343774"/>
+            <a:off x="610282" y="842482"/>
+            <a:ext cx="2518227" cy="2586518"/>
           </a:xfrm>
           <a:prstGeom prst="rect">
             <a:avLst/>
@@ -3537,7 +3613,7 @@
           <p:cNvPr id="5" name="圖片 4">
             <a:extLst>
               <a:ext uri="{FF2B5EF4-FFF2-40B4-BE49-F238E27FC236}">
-                <a16:creationId xmlns:a16="http://schemas.microsoft.com/office/drawing/2014/main" id="{520F6165-1985-F0B0-5BD7-C377DBBED713}"/>
+                <a16:creationId xmlns:a16="http://schemas.microsoft.com/office/drawing/2014/main" id="{F5C26A62-9F09-A6E8-9EE3-CEEF5BC87059}"/>
               </a:ext>
             </a:extLst>
           </p:cNvPr>
@@ -3554,8 +3630,8 @@
         </p:blipFill>
         <p:spPr>
           <a:xfrm>
-            <a:off x="6096000" y="258407"/>
-            <a:ext cx="5212056" cy="6341185"/>
+            <a:off x="8908313" y="842482"/>
+            <a:ext cx="2514302" cy="2612818"/>
           </a:xfrm>
           <a:prstGeom prst="rect">
             <a:avLst/>
@@ -3564,10 +3640,10 @@
       </p:pic>
       <p:pic>
         <p:nvPicPr>
-          <p:cNvPr id="7" name="圖片 6">
-            <a:extLst>
-              <a:ext uri="{FF2B5EF4-FFF2-40B4-BE49-F238E27FC236}">
-                <a16:creationId xmlns:a16="http://schemas.microsoft.com/office/drawing/2014/main" id="{0E2C435D-BE5B-0A42-D290-881B4701BDC0}"/>
+          <p:cNvPr id="6" name="圖片 5">
+            <a:extLst>
+              <a:ext uri="{FF2B5EF4-FFF2-40B4-BE49-F238E27FC236}">
+                <a16:creationId xmlns:a16="http://schemas.microsoft.com/office/drawing/2014/main" id="{F8706E88-F3FD-1B42-C40D-86DC377D14A3}"/>
               </a:ext>
             </a:extLst>
           </p:cNvPr>
@@ -3584,8 +3660,8 @@
         </p:blipFill>
         <p:spPr>
           <a:xfrm>
-            <a:off x="1764045" y="2270454"/>
-            <a:ext cx="3482578" cy="2137726"/>
+            <a:off x="6212397" y="842482"/>
+            <a:ext cx="2514303" cy="2582142"/>
           </a:xfrm>
           <a:prstGeom prst="rect">
             <a:avLst/>
@@ -3594,10 +3670,10 @@
       </p:pic>
       <p:pic>
         <p:nvPicPr>
-          <p:cNvPr id="9" name="圖片 8">
-            <a:extLst>
-              <a:ext uri="{FF2B5EF4-FFF2-40B4-BE49-F238E27FC236}">
-                <a16:creationId xmlns:a16="http://schemas.microsoft.com/office/drawing/2014/main" id="{66C16060-F98D-10F0-371C-105D1A5C4EE1}"/>
+          <p:cNvPr id="7" name="圖片 6">
+            <a:extLst>
+              <a:ext uri="{FF2B5EF4-FFF2-40B4-BE49-F238E27FC236}">
+                <a16:creationId xmlns:a16="http://schemas.microsoft.com/office/drawing/2014/main" id="{4FF670AB-BBCE-4B0A-5062-41A86029369A}"/>
               </a:ext>
             </a:extLst>
           </p:cNvPr>
@@ -3614,8 +3690,350 @@
         </p:blipFill>
         <p:spPr>
           <a:xfrm>
-            <a:off x="1764045" y="4478735"/>
-            <a:ext cx="3425228" cy="2042835"/>
+            <a:off x="6293921" y="3455300"/>
+            <a:ext cx="2614392" cy="2689468"/>
+          </a:xfrm>
+          <a:prstGeom prst="rect">
+            <a:avLst/>
+          </a:prstGeom>
+        </p:spPr>
+      </p:pic>
+      <p:pic>
+        <p:nvPicPr>
+          <p:cNvPr id="8" name="圖片 7">
+            <a:extLst>
+              <a:ext uri="{FF2B5EF4-FFF2-40B4-BE49-F238E27FC236}">
+                <a16:creationId xmlns:a16="http://schemas.microsoft.com/office/drawing/2014/main" id="{BC7DF456-263D-5221-2877-0CB647D1A72D}"/>
+              </a:ext>
+            </a:extLst>
+          </p:cNvPr>
+          <p:cNvPicPr>
+            <a:picLocks noChangeAspect="1"/>
+          </p:cNvPicPr>
+          <p:nvPr/>
+        </p:nvPicPr>
+        <p:blipFill>
+          <a:blip r:embed="rId6"/>
+          <a:stretch>
+            <a:fillRect/>
+          </a:stretch>
+        </p:blipFill>
+        <p:spPr>
+          <a:xfrm>
+            <a:off x="8979759" y="3524573"/>
+            <a:ext cx="2573297" cy="2612818"/>
+          </a:xfrm>
+          <a:prstGeom prst="rect">
+            <a:avLst/>
+          </a:prstGeom>
+        </p:spPr>
+      </p:pic>
+      <p:pic>
+        <p:nvPicPr>
+          <p:cNvPr id="9" name="圖片 8">
+            <a:extLst>
+              <a:ext uri="{FF2B5EF4-FFF2-40B4-BE49-F238E27FC236}">
+                <a16:creationId xmlns:a16="http://schemas.microsoft.com/office/drawing/2014/main" id="{EE24D20A-9C5B-6D8B-13B8-5F1138ABF17D}"/>
+              </a:ext>
+            </a:extLst>
+          </p:cNvPr>
+          <p:cNvPicPr>
+            <a:picLocks noChangeAspect="1"/>
+          </p:cNvPicPr>
+          <p:nvPr/>
+        </p:nvPicPr>
+        <p:blipFill>
+          <a:blip r:embed="rId7"/>
+          <a:stretch>
+            <a:fillRect/>
+          </a:stretch>
+        </p:blipFill>
+        <p:spPr>
+          <a:xfrm>
+            <a:off x="3128509" y="842482"/>
+            <a:ext cx="2518227" cy="2582142"/>
+          </a:xfrm>
+          <a:prstGeom prst="rect">
+            <a:avLst/>
+          </a:prstGeom>
+        </p:spPr>
+      </p:pic>
+      <p:sp>
+        <p:nvSpPr>
+          <p:cNvPr id="10" name="文字方塊 9">
+            <a:extLst>
+              <a:ext uri="{FF2B5EF4-FFF2-40B4-BE49-F238E27FC236}">
+                <a16:creationId xmlns:a16="http://schemas.microsoft.com/office/drawing/2014/main" id="{9B05BFFB-40C6-7585-AA92-01B8BD4CB783}"/>
+              </a:ext>
+            </a:extLst>
+          </p:cNvPr>
+          <p:cNvSpPr txBox="1"/>
+          <p:nvPr/>
+        </p:nvSpPr>
+        <p:spPr>
+          <a:xfrm>
+            <a:off x="237744" y="146304"/>
+            <a:ext cx="1618488" cy="369332"/>
+          </a:xfrm>
+          <a:prstGeom prst="rect">
+            <a:avLst/>
+          </a:prstGeom>
+          <a:noFill/>
+        </p:spPr>
+        <p:txBody>
+          <a:bodyPr wrap="square" rtlCol="0">
+            <a:spAutoFit/>
+          </a:bodyPr>
+          <a:lstStyle/>
+          <a:p>
+            <a:r>
+              <a:rPr lang="en-US" altLang="zh-TW" dirty="0"/>
+              <a:t>Transformer</a:t>
+            </a:r>
+            <a:endParaRPr lang="zh-TW" altLang="en-US" dirty="0"/>
+          </a:p>
+        </p:txBody>
+      </p:sp>
+    </p:spTree>
+    <p:extLst>
+      <p:ext uri="{BB962C8B-B14F-4D97-AF65-F5344CB8AC3E}">
+        <p14:creationId xmlns:p14="http://schemas.microsoft.com/office/powerpoint/2010/main" val="2145782335"/>
+      </p:ext>
+    </p:extLst>
+  </p:cSld>
+  <p:clrMapOvr>
+    <a:masterClrMapping/>
+  </p:clrMapOvr>
+</p:sld>
+</file>
+
+<file path=ppt/slides/slide3.xml><?xml version="1.0" encoding="utf-8"?>
+<p:sld xmlns:a="http://schemas.openxmlformats.org/drawingml/2006/main" xmlns:r="http://schemas.openxmlformats.org/officeDocument/2006/relationships" xmlns:p="http://schemas.openxmlformats.org/presentationml/2006/main">
+  <p:cSld>
+    <p:spTree>
+      <p:nvGrpSpPr>
+        <p:cNvPr id="1" name=""/>
+        <p:cNvGrpSpPr/>
+        <p:nvPr/>
+      </p:nvGrpSpPr>
+      <p:grpSpPr>
+        <a:xfrm>
+          <a:off x="0" y="0"/>
+          <a:ext cx="0" cy="0"/>
+          <a:chOff x="0" y="0"/>
+          <a:chExt cx="0" cy="0"/>
+        </a:xfrm>
+      </p:grpSpPr>
+      <p:sp>
+        <p:nvSpPr>
+          <p:cNvPr id="10" name="文字方塊 9">
+            <a:extLst>
+              <a:ext uri="{FF2B5EF4-FFF2-40B4-BE49-F238E27FC236}">
+                <a16:creationId xmlns:a16="http://schemas.microsoft.com/office/drawing/2014/main" id="{9B05BFFB-40C6-7585-AA92-01B8BD4CB783}"/>
+              </a:ext>
+            </a:extLst>
+          </p:cNvPr>
+          <p:cNvSpPr txBox="1"/>
+          <p:nvPr/>
+        </p:nvSpPr>
+        <p:spPr>
+          <a:xfrm>
+            <a:off x="237744" y="146304"/>
+            <a:ext cx="1618488" cy="369332"/>
+          </a:xfrm>
+          <a:prstGeom prst="rect">
+            <a:avLst/>
+          </a:prstGeom>
+          <a:noFill/>
+        </p:spPr>
+        <p:txBody>
+          <a:bodyPr wrap="square" rtlCol="0">
+            <a:spAutoFit/>
+          </a:bodyPr>
+          <a:lstStyle/>
+          <a:p>
+            <a:r>
+              <a:rPr lang="en-US" altLang="zh-TW" dirty="0"/>
+              <a:t>Transformer</a:t>
+            </a:r>
+            <a:endParaRPr lang="zh-TW" altLang="en-US" dirty="0"/>
+          </a:p>
+        </p:txBody>
+      </p:sp>
+      <p:pic>
+        <p:nvPicPr>
+          <p:cNvPr id="2" name="圖片 1">
+            <a:extLst>
+              <a:ext uri="{FF2B5EF4-FFF2-40B4-BE49-F238E27FC236}">
+                <a16:creationId xmlns:a16="http://schemas.microsoft.com/office/drawing/2014/main" id="{C5C540F1-46BF-8FE5-FF18-9AC42D8571EE}"/>
+              </a:ext>
+            </a:extLst>
+          </p:cNvPr>
+          <p:cNvPicPr>
+            <a:picLocks noChangeAspect="1"/>
+          </p:cNvPicPr>
+          <p:nvPr/>
+        </p:nvPicPr>
+        <p:blipFill>
+          <a:blip r:embed="rId2"/>
+          <a:stretch>
+            <a:fillRect/>
+          </a:stretch>
+        </p:blipFill>
+        <p:spPr>
+          <a:xfrm>
+            <a:off x="3444979" y="1145069"/>
+            <a:ext cx="2802210" cy="1976526"/>
+          </a:xfrm>
+          <a:prstGeom prst="rect">
+            <a:avLst/>
+          </a:prstGeom>
+        </p:spPr>
+      </p:pic>
+      <p:pic>
+        <p:nvPicPr>
+          <p:cNvPr id="3" name="圖片 2">
+            <a:extLst>
+              <a:ext uri="{FF2B5EF4-FFF2-40B4-BE49-F238E27FC236}">
+                <a16:creationId xmlns:a16="http://schemas.microsoft.com/office/drawing/2014/main" id="{5D9A512F-4749-4BBA-56ED-2651434D3C57}"/>
+              </a:ext>
+            </a:extLst>
+          </p:cNvPr>
+          <p:cNvPicPr>
+            <a:picLocks noChangeAspect="1"/>
+          </p:cNvPicPr>
+          <p:nvPr/>
+        </p:nvPicPr>
+        <p:blipFill>
+          <a:blip r:embed="rId3"/>
+          <a:stretch>
+            <a:fillRect/>
+          </a:stretch>
+        </p:blipFill>
+        <p:spPr>
+          <a:xfrm>
+            <a:off x="617341" y="1082045"/>
+            <a:ext cx="2802210" cy="1992196"/>
+          </a:xfrm>
+          <a:prstGeom prst="rect">
+            <a:avLst/>
+          </a:prstGeom>
+        </p:spPr>
+      </p:pic>
+      <p:pic>
+        <p:nvPicPr>
+          <p:cNvPr id="12" name="圖片 11">
+            <a:extLst>
+              <a:ext uri="{FF2B5EF4-FFF2-40B4-BE49-F238E27FC236}">
+                <a16:creationId xmlns:a16="http://schemas.microsoft.com/office/drawing/2014/main" id="{0C81E500-9BE0-B165-1ACE-9A049FF1F117}"/>
+              </a:ext>
+            </a:extLst>
+          </p:cNvPr>
+          <p:cNvPicPr>
+            <a:picLocks noChangeAspect="1"/>
+          </p:cNvPicPr>
+          <p:nvPr/>
+        </p:nvPicPr>
+        <p:blipFill>
+          <a:blip r:embed="rId4"/>
+          <a:stretch>
+            <a:fillRect/>
+          </a:stretch>
+        </p:blipFill>
+        <p:spPr>
+          <a:xfrm>
+            <a:off x="8922789" y="1003180"/>
+            <a:ext cx="3021731" cy="2149926"/>
+          </a:xfrm>
+          <a:prstGeom prst="rect">
+            <a:avLst/>
+          </a:prstGeom>
+        </p:spPr>
+      </p:pic>
+      <p:pic>
+        <p:nvPicPr>
+          <p:cNvPr id="13" name="圖片 12">
+            <a:extLst>
+              <a:ext uri="{FF2B5EF4-FFF2-40B4-BE49-F238E27FC236}">
+                <a16:creationId xmlns:a16="http://schemas.microsoft.com/office/drawing/2014/main" id="{A0043455-B08A-B903-2DFE-E8A5DA23B986}"/>
+              </a:ext>
+            </a:extLst>
+          </p:cNvPr>
+          <p:cNvPicPr>
+            <a:picLocks noChangeAspect="1"/>
+          </p:cNvPicPr>
+          <p:nvPr/>
+        </p:nvPicPr>
+        <p:blipFill>
+          <a:blip r:embed="rId5"/>
+          <a:stretch>
+            <a:fillRect/>
+          </a:stretch>
+        </p:blipFill>
+        <p:spPr>
+          <a:xfrm>
+            <a:off x="6467791" y="1034690"/>
+            <a:ext cx="2931605" cy="2086905"/>
+          </a:xfrm>
+          <a:prstGeom prst="rect">
+            <a:avLst/>
+          </a:prstGeom>
+        </p:spPr>
+      </p:pic>
+      <p:pic>
+        <p:nvPicPr>
+          <p:cNvPr id="14" name="圖片 13">
+            <a:extLst>
+              <a:ext uri="{FF2B5EF4-FFF2-40B4-BE49-F238E27FC236}">
+                <a16:creationId xmlns:a16="http://schemas.microsoft.com/office/drawing/2014/main" id="{8385621C-F29D-0EB8-D66D-E6D7534F1173}"/>
+              </a:ext>
+            </a:extLst>
+          </p:cNvPr>
+          <p:cNvPicPr>
+            <a:picLocks noChangeAspect="1"/>
+          </p:cNvPicPr>
+          <p:nvPr/>
+        </p:nvPicPr>
+        <p:blipFill>
+          <a:blip r:embed="rId6"/>
+          <a:stretch>
+            <a:fillRect/>
+          </a:stretch>
+        </p:blipFill>
+        <p:spPr>
+          <a:xfrm>
+            <a:off x="4129759" y="4357319"/>
+            <a:ext cx="2805424" cy="1982014"/>
+          </a:xfrm>
+          <a:prstGeom prst="rect">
+            <a:avLst/>
+          </a:prstGeom>
+        </p:spPr>
+      </p:pic>
+      <p:pic>
+        <p:nvPicPr>
+          <p:cNvPr id="15" name="圖片 14">
+            <a:extLst>
+              <a:ext uri="{FF2B5EF4-FFF2-40B4-BE49-F238E27FC236}">
+                <a16:creationId xmlns:a16="http://schemas.microsoft.com/office/drawing/2014/main" id="{111266CB-A1E0-44B9-4CF9-18C9496E037D}"/>
+              </a:ext>
+            </a:extLst>
+          </p:cNvPr>
+          <p:cNvPicPr>
+            <a:picLocks noChangeAspect="1"/>
+          </p:cNvPicPr>
+          <p:nvPr/>
+        </p:nvPicPr>
+        <p:blipFill>
+          <a:blip r:embed="rId7"/>
+          <a:stretch>
+            <a:fillRect/>
+          </a:stretch>
+        </p:blipFill>
+        <p:spPr>
+          <a:xfrm>
+            <a:off x="917548" y="4158230"/>
+            <a:ext cx="2980972" cy="2181103"/>
           </a:xfrm>
           <a:prstGeom prst="rect">
             <a:avLst/>
@@ -3625,7 +4043,1560 @@
     </p:spTree>
     <p:extLst>
       <p:ext uri="{BB962C8B-B14F-4D97-AF65-F5344CB8AC3E}">
-        <p14:creationId xmlns:p14="http://schemas.microsoft.com/office/powerpoint/2010/main" val="1266724286"/>
+        <p14:creationId xmlns:p14="http://schemas.microsoft.com/office/powerpoint/2010/main" val="990398428"/>
+      </p:ext>
+    </p:extLst>
+  </p:cSld>
+  <p:clrMapOvr>
+    <a:masterClrMapping/>
+  </p:clrMapOvr>
+</p:sld>
+</file>
+
+<file path=ppt/slides/slide4.xml><?xml version="1.0" encoding="utf-8"?>
+<p:sld xmlns:a="http://schemas.openxmlformats.org/drawingml/2006/main" xmlns:r="http://schemas.openxmlformats.org/officeDocument/2006/relationships" xmlns:p="http://schemas.openxmlformats.org/presentationml/2006/main">
+  <p:cSld>
+    <p:spTree>
+      <p:nvGrpSpPr>
+        <p:cNvPr id="1" name=""/>
+        <p:cNvGrpSpPr/>
+        <p:nvPr/>
+      </p:nvGrpSpPr>
+      <p:grpSpPr>
+        <a:xfrm>
+          <a:off x="0" y="0"/>
+          <a:ext cx="0" cy="0"/>
+          <a:chOff x="0" y="0"/>
+          <a:chExt cx="0" cy="0"/>
+        </a:xfrm>
+      </p:grpSpPr>
+      <p:sp>
+        <p:nvSpPr>
+          <p:cNvPr id="4" name="文字方塊 3">
+            <a:extLst>
+              <a:ext uri="{FF2B5EF4-FFF2-40B4-BE49-F238E27FC236}">
+                <a16:creationId xmlns:a16="http://schemas.microsoft.com/office/drawing/2014/main" id="{978A1ABD-CF4F-6D93-4C5C-18A0804583CD}"/>
+              </a:ext>
+            </a:extLst>
+          </p:cNvPr>
+          <p:cNvSpPr txBox="1"/>
+          <p:nvPr/>
+        </p:nvSpPr>
+        <p:spPr>
+          <a:xfrm>
+            <a:off x="237744" y="146304"/>
+            <a:ext cx="1043292" cy="369332"/>
+          </a:xfrm>
+          <a:prstGeom prst="rect">
+            <a:avLst/>
+          </a:prstGeom>
+          <a:noFill/>
+        </p:spPr>
+        <p:txBody>
+          <a:bodyPr wrap="square" rtlCol="0">
+            <a:spAutoFit/>
+          </a:bodyPr>
+          <a:lstStyle/>
+          <a:p>
+            <a:r>
+              <a:rPr lang="en-US" altLang="zh-TW" dirty="0"/>
+              <a:t>CNN</a:t>
+            </a:r>
+            <a:endParaRPr lang="zh-TW" altLang="en-US" dirty="0"/>
+          </a:p>
+        </p:txBody>
+      </p:sp>
+      <p:pic>
+        <p:nvPicPr>
+          <p:cNvPr id="6" name="圖片 5">
+            <a:extLst>
+              <a:ext uri="{FF2B5EF4-FFF2-40B4-BE49-F238E27FC236}">
+                <a16:creationId xmlns:a16="http://schemas.microsoft.com/office/drawing/2014/main" id="{B222189E-59EF-0A64-B2C0-03A0D4383275}"/>
+              </a:ext>
+            </a:extLst>
+          </p:cNvPr>
+          <p:cNvPicPr>
+            <a:picLocks noChangeAspect="1"/>
+          </p:cNvPicPr>
+          <p:nvPr/>
+        </p:nvPicPr>
+        <p:blipFill>
+          <a:blip r:embed="rId2"/>
+          <a:stretch>
+            <a:fillRect/>
+          </a:stretch>
+        </p:blipFill>
+        <p:spPr>
+          <a:xfrm>
+            <a:off x="976379" y="3504844"/>
+            <a:ext cx="2772661" cy="1977345"/>
+          </a:xfrm>
+          <a:prstGeom prst="rect">
+            <a:avLst/>
+          </a:prstGeom>
+        </p:spPr>
+      </p:pic>
+      <p:sp>
+        <p:nvSpPr>
+          <p:cNvPr id="7" name="文字方塊 6">
+            <a:extLst>
+              <a:ext uri="{FF2B5EF4-FFF2-40B4-BE49-F238E27FC236}">
+                <a16:creationId xmlns:a16="http://schemas.microsoft.com/office/drawing/2014/main" id="{14ECA838-DEDA-2F4E-4BBA-131419417739}"/>
+              </a:ext>
+            </a:extLst>
+          </p:cNvPr>
+          <p:cNvSpPr txBox="1"/>
+          <p:nvPr/>
+        </p:nvSpPr>
+        <p:spPr>
+          <a:xfrm>
+            <a:off x="1183387" y="5815798"/>
+            <a:ext cx="2772660" cy="369332"/>
+          </a:xfrm>
+          <a:prstGeom prst="rect">
+            <a:avLst/>
+          </a:prstGeom>
+          <a:noFill/>
+        </p:spPr>
+        <p:txBody>
+          <a:bodyPr wrap="square" rtlCol="0">
+            <a:spAutoFit/>
+          </a:bodyPr>
+          <a:lstStyle/>
+          <a:p>
+            <a:r>
+              <a:rPr lang="en-US" altLang="zh-TW" dirty="0"/>
+              <a:t>12.24</a:t>
+            </a:r>
+            <a:r>
+              <a:rPr lang="zh-TW" altLang="en-US" dirty="0"/>
+              <a:t>   </a:t>
+            </a:r>
+            <a:r>
+              <a:rPr lang="en-US" altLang="zh-TW" dirty="0"/>
+              <a:t>11.33</a:t>
+            </a:r>
+            <a:r>
+              <a:rPr lang="zh-TW" altLang="en-US" dirty="0"/>
+              <a:t>  </a:t>
+            </a:r>
+            <a:r>
+              <a:rPr lang="en-US" altLang="zh-TW" dirty="0"/>
+              <a:t>9.69</a:t>
+            </a:r>
+            <a:r>
+              <a:rPr lang="zh-TW" altLang="en-US" dirty="0"/>
+              <a:t>  </a:t>
+            </a:r>
+            <a:r>
+              <a:rPr lang="en-US" altLang="zh-TW" dirty="0"/>
+              <a:t>8.43</a:t>
+            </a:r>
+            <a:endParaRPr lang="zh-TW" altLang="en-US" dirty="0"/>
+          </a:p>
+        </p:txBody>
+      </p:sp>
+      <p:pic>
+        <p:nvPicPr>
+          <p:cNvPr id="9" name="圖片 8">
+            <a:extLst>
+              <a:ext uri="{FF2B5EF4-FFF2-40B4-BE49-F238E27FC236}">
+                <a16:creationId xmlns:a16="http://schemas.microsoft.com/office/drawing/2014/main" id="{9F83D770-F530-AE7E-1CEF-F1CBA035116F}"/>
+              </a:ext>
+            </a:extLst>
+          </p:cNvPr>
+          <p:cNvPicPr>
+            <a:picLocks noChangeAspect="1"/>
+          </p:cNvPicPr>
+          <p:nvPr/>
+        </p:nvPicPr>
+        <p:blipFill>
+          <a:blip r:embed="rId3"/>
+          <a:stretch>
+            <a:fillRect/>
+          </a:stretch>
+        </p:blipFill>
+        <p:spPr>
+          <a:xfrm>
+            <a:off x="4412993" y="3504844"/>
+            <a:ext cx="3066799" cy="2168323"/>
+          </a:xfrm>
+          <a:prstGeom prst="rect">
+            <a:avLst/>
+          </a:prstGeom>
+        </p:spPr>
+      </p:pic>
+      <p:sp>
+        <p:nvSpPr>
+          <p:cNvPr id="10" name="文字方塊 9">
+            <a:extLst>
+              <a:ext uri="{FF2B5EF4-FFF2-40B4-BE49-F238E27FC236}">
+                <a16:creationId xmlns:a16="http://schemas.microsoft.com/office/drawing/2014/main" id="{239D2A07-18EB-AAE8-7E76-5D5E0497A9C4}"/>
+              </a:ext>
+            </a:extLst>
+          </p:cNvPr>
+          <p:cNvSpPr txBox="1"/>
+          <p:nvPr/>
+        </p:nvSpPr>
+        <p:spPr>
+          <a:xfrm>
+            <a:off x="4707132" y="5828728"/>
+            <a:ext cx="2772660" cy="369332"/>
+          </a:xfrm>
+          <a:prstGeom prst="rect">
+            <a:avLst/>
+          </a:prstGeom>
+          <a:noFill/>
+        </p:spPr>
+        <p:txBody>
+          <a:bodyPr wrap="square" rtlCol="0">
+            <a:spAutoFit/>
+          </a:bodyPr>
+          <a:lstStyle/>
+          <a:p>
+            <a:r>
+              <a:rPr lang="en-US" altLang="zh-TW" dirty="0"/>
+              <a:t>12.36</a:t>
+            </a:r>
+            <a:r>
+              <a:rPr lang="zh-TW" altLang="en-US" dirty="0"/>
+              <a:t>  </a:t>
+            </a:r>
+            <a:r>
+              <a:rPr lang="en-US" altLang="zh-TW" dirty="0"/>
+              <a:t>11.6</a:t>
+            </a:r>
+            <a:r>
+              <a:rPr lang="zh-TW" altLang="en-US" dirty="0"/>
+              <a:t>  </a:t>
+            </a:r>
+            <a:r>
+              <a:rPr lang="en-US" altLang="zh-TW" dirty="0"/>
+              <a:t>9.86</a:t>
+            </a:r>
+            <a:r>
+              <a:rPr lang="zh-TW" altLang="en-US" dirty="0"/>
+              <a:t>  </a:t>
+            </a:r>
+            <a:r>
+              <a:rPr lang="en-US" altLang="zh-TW" dirty="0"/>
+              <a:t>9.08</a:t>
+            </a:r>
+            <a:endParaRPr lang="zh-TW" altLang="en-US" dirty="0"/>
+          </a:p>
+        </p:txBody>
+      </p:sp>
+      <p:pic>
+        <p:nvPicPr>
+          <p:cNvPr id="12" name="圖片 11">
+            <a:extLst>
+              <a:ext uri="{FF2B5EF4-FFF2-40B4-BE49-F238E27FC236}">
+                <a16:creationId xmlns:a16="http://schemas.microsoft.com/office/drawing/2014/main" id="{65340AFE-1401-EB4D-AC8E-D9E431336668}"/>
+              </a:ext>
+            </a:extLst>
+          </p:cNvPr>
+          <p:cNvPicPr>
+            <a:picLocks noChangeAspect="1"/>
+          </p:cNvPicPr>
+          <p:nvPr/>
+        </p:nvPicPr>
+        <p:blipFill>
+          <a:blip r:embed="rId4"/>
+          <a:stretch>
+            <a:fillRect/>
+          </a:stretch>
+        </p:blipFill>
+        <p:spPr>
+          <a:xfrm>
+            <a:off x="8052305" y="3358357"/>
+            <a:ext cx="3267967" cy="2314810"/>
+          </a:xfrm>
+          <a:prstGeom prst="rect">
+            <a:avLst/>
+          </a:prstGeom>
+        </p:spPr>
+      </p:pic>
+      <p:sp>
+        <p:nvSpPr>
+          <p:cNvPr id="13" name="文字方塊 12">
+            <a:extLst>
+              <a:ext uri="{FF2B5EF4-FFF2-40B4-BE49-F238E27FC236}">
+                <a16:creationId xmlns:a16="http://schemas.microsoft.com/office/drawing/2014/main" id="{9EDF48DF-3FBF-07D3-54F1-A6A6C8434850}"/>
+              </a:ext>
+            </a:extLst>
+          </p:cNvPr>
+          <p:cNvSpPr txBox="1"/>
+          <p:nvPr/>
+        </p:nvSpPr>
+        <p:spPr>
+          <a:xfrm>
+            <a:off x="8425692" y="5815798"/>
+            <a:ext cx="2772660" cy="369332"/>
+          </a:xfrm>
+          <a:prstGeom prst="rect">
+            <a:avLst/>
+          </a:prstGeom>
+          <a:noFill/>
+        </p:spPr>
+        <p:txBody>
+          <a:bodyPr wrap="square" rtlCol="0">
+            <a:spAutoFit/>
+          </a:bodyPr>
+          <a:lstStyle/>
+          <a:p>
+            <a:r>
+              <a:rPr lang="en-US" altLang="zh-TW" dirty="0"/>
+              <a:t>11.86</a:t>
+            </a:r>
+            <a:r>
+              <a:rPr lang="zh-TW" altLang="en-US" dirty="0"/>
+              <a:t>  </a:t>
+            </a:r>
+            <a:r>
+              <a:rPr lang="en-US" altLang="zh-TW" dirty="0"/>
+              <a:t>11.39</a:t>
+            </a:r>
+            <a:r>
+              <a:rPr lang="zh-TW" altLang="en-US" dirty="0"/>
+              <a:t>  </a:t>
+            </a:r>
+            <a:r>
+              <a:rPr lang="en-US" altLang="zh-TW" dirty="0"/>
+              <a:t>9.91</a:t>
+            </a:r>
+            <a:r>
+              <a:rPr lang="zh-TW" altLang="en-US" dirty="0"/>
+              <a:t>  </a:t>
+            </a:r>
+            <a:r>
+              <a:rPr lang="en-US" altLang="zh-TW" dirty="0"/>
+              <a:t>9.21</a:t>
+            </a:r>
+            <a:endParaRPr lang="zh-TW" altLang="en-US" dirty="0"/>
+          </a:p>
+        </p:txBody>
+      </p:sp>
+      <p:pic>
+        <p:nvPicPr>
+          <p:cNvPr id="17" name="圖片 16">
+            <a:extLst>
+              <a:ext uri="{FF2B5EF4-FFF2-40B4-BE49-F238E27FC236}">
+                <a16:creationId xmlns:a16="http://schemas.microsoft.com/office/drawing/2014/main" id="{AEFB0F08-9B0E-3FC8-CD41-A02D18CA6744}"/>
+              </a:ext>
+            </a:extLst>
+          </p:cNvPr>
+          <p:cNvPicPr>
+            <a:picLocks noChangeAspect="1"/>
+          </p:cNvPicPr>
+          <p:nvPr/>
+        </p:nvPicPr>
+        <p:blipFill>
+          <a:blip r:embed="rId5"/>
+          <a:stretch>
+            <a:fillRect/>
+          </a:stretch>
+        </p:blipFill>
+        <p:spPr>
+          <a:xfrm>
+            <a:off x="4503414" y="665710"/>
+            <a:ext cx="2473458" cy="2537207"/>
+          </a:xfrm>
+          <a:prstGeom prst="rect">
+            <a:avLst/>
+          </a:prstGeom>
+        </p:spPr>
+      </p:pic>
+      <p:pic>
+        <p:nvPicPr>
+          <p:cNvPr id="19" name="圖片 18">
+            <a:extLst>
+              <a:ext uri="{FF2B5EF4-FFF2-40B4-BE49-F238E27FC236}">
+                <a16:creationId xmlns:a16="http://schemas.microsoft.com/office/drawing/2014/main" id="{719053AE-46DD-7FA0-3FD0-FE7A98F9F162}"/>
+              </a:ext>
+            </a:extLst>
+          </p:cNvPr>
+          <p:cNvPicPr>
+            <a:picLocks noChangeAspect="1"/>
+          </p:cNvPicPr>
+          <p:nvPr/>
+        </p:nvPicPr>
+        <p:blipFill>
+          <a:blip r:embed="rId6"/>
+          <a:stretch>
+            <a:fillRect/>
+          </a:stretch>
+        </p:blipFill>
+        <p:spPr>
+          <a:xfrm>
+            <a:off x="8052305" y="515636"/>
+            <a:ext cx="2551373" cy="2599512"/>
+          </a:xfrm>
+          <a:prstGeom prst="rect">
+            <a:avLst/>
+          </a:prstGeom>
+        </p:spPr>
+      </p:pic>
+      <p:pic>
+        <p:nvPicPr>
+          <p:cNvPr id="21" name="圖片 20">
+            <a:extLst>
+              <a:ext uri="{FF2B5EF4-FFF2-40B4-BE49-F238E27FC236}">
+                <a16:creationId xmlns:a16="http://schemas.microsoft.com/office/drawing/2014/main" id="{0D4F7A51-CF66-7329-048A-15570F8D19F2}"/>
+              </a:ext>
+            </a:extLst>
+          </p:cNvPr>
+          <p:cNvPicPr>
+            <a:picLocks noChangeAspect="1"/>
+          </p:cNvPicPr>
+          <p:nvPr/>
+        </p:nvPicPr>
+        <p:blipFill>
+          <a:blip r:embed="rId7"/>
+          <a:stretch>
+            <a:fillRect/>
+          </a:stretch>
+        </p:blipFill>
+        <p:spPr>
+          <a:xfrm>
+            <a:off x="1221583" y="672870"/>
+            <a:ext cx="2227387" cy="2314810"/>
+          </a:xfrm>
+          <a:prstGeom prst="rect">
+            <a:avLst/>
+          </a:prstGeom>
+        </p:spPr>
+      </p:pic>
+    </p:spTree>
+    <p:extLst>
+      <p:ext uri="{BB962C8B-B14F-4D97-AF65-F5344CB8AC3E}">
+        <p14:creationId xmlns:p14="http://schemas.microsoft.com/office/powerpoint/2010/main" val="2665983862"/>
+      </p:ext>
+    </p:extLst>
+  </p:cSld>
+  <p:clrMapOvr>
+    <a:masterClrMapping/>
+  </p:clrMapOvr>
+</p:sld>
+</file>
+
+<file path=ppt/slides/slide5.xml><?xml version="1.0" encoding="utf-8"?>
+<p:sld xmlns:a="http://schemas.openxmlformats.org/drawingml/2006/main" xmlns:r="http://schemas.openxmlformats.org/officeDocument/2006/relationships" xmlns:p="http://schemas.openxmlformats.org/presentationml/2006/main">
+  <p:cSld>
+    <p:spTree>
+      <p:nvGrpSpPr>
+        <p:cNvPr id="1" name=""/>
+        <p:cNvGrpSpPr/>
+        <p:nvPr/>
+      </p:nvGrpSpPr>
+      <p:grpSpPr>
+        <a:xfrm>
+          <a:off x="0" y="0"/>
+          <a:ext cx="0" cy="0"/>
+          <a:chOff x="0" y="0"/>
+          <a:chExt cx="0" cy="0"/>
+        </a:xfrm>
+      </p:grpSpPr>
+      <p:pic>
+        <p:nvPicPr>
+          <p:cNvPr id="4" name="圖片 3">
+            <a:extLst>
+              <a:ext uri="{FF2B5EF4-FFF2-40B4-BE49-F238E27FC236}">
+                <a16:creationId xmlns:a16="http://schemas.microsoft.com/office/drawing/2014/main" id="{F3859E67-5918-29CA-735E-23552C9D3269}"/>
+              </a:ext>
+            </a:extLst>
+          </p:cNvPr>
+          <p:cNvPicPr>
+            <a:picLocks noChangeAspect="1"/>
+          </p:cNvPicPr>
+          <p:nvPr/>
+        </p:nvPicPr>
+        <p:blipFill>
+          <a:blip r:embed="rId2"/>
+          <a:stretch>
+            <a:fillRect/>
+          </a:stretch>
+        </p:blipFill>
+        <p:spPr>
+          <a:xfrm>
+            <a:off x="524001" y="857423"/>
+            <a:ext cx="2145565" cy="2200674"/>
+          </a:xfrm>
+          <a:prstGeom prst="rect">
+            <a:avLst/>
+          </a:prstGeom>
+        </p:spPr>
+      </p:pic>
+      <p:pic>
+        <p:nvPicPr>
+          <p:cNvPr id="5" name="圖片 4">
+            <a:extLst>
+              <a:ext uri="{FF2B5EF4-FFF2-40B4-BE49-F238E27FC236}">
+                <a16:creationId xmlns:a16="http://schemas.microsoft.com/office/drawing/2014/main" id="{D0386D2C-6DDB-B0A3-464B-F8F32BD3C16B}"/>
+              </a:ext>
+            </a:extLst>
+          </p:cNvPr>
+          <p:cNvPicPr>
+            <a:picLocks noChangeAspect="1"/>
+          </p:cNvPicPr>
+          <p:nvPr/>
+        </p:nvPicPr>
+        <p:blipFill>
+          <a:blip r:embed="rId3"/>
+          <a:stretch>
+            <a:fillRect/>
+          </a:stretch>
+        </p:blipFill>
+        <p:spPr>
+          <a:xfrm>
+            <a:off x="2879496" y="891997"/>
+            <a:ext cx="2101439" cy="2166099"/>
+          </a:xfrm>
+          <a:prstGeom prst="rect">
+            <a:avLst/>
+          </a:prstGeom>
+        </p:spPr>
+      </p:pic>
+      <p:pic>
+        <p:nvPicPr>
+          <p:cNvPr id="6" name="圖片 5">
+            <a:extLst>
+              <a:ext uri="{FF2B5EF4-FFF2-40B4-BE49-F238E27FC236}">
+                <a16:creationId xmlns:a16="http://schemas.microsoft.com/office/drawing/2014/main" id="{745EF8A7-A971-800B-A8BE-F4C1CEEE9DBA}"/>
+              </a:ext>
+            </a:extLst>
+          </p:cNvPr>
+          <p:cNvPicPr>
+            <a:picLocks noChangeAspect="1"/>
+          </p:cNvPicPr>
+          <p:nvPr/>
+        </p:nvPicPr>
+        <p:blipFill>
+          <a:blip r:embed="rId4"/>
+          <a:stretch>
+            <a:fillRect/>
+          </a:stretch>
+        </p:blipFill>
+        <p:spPr>
+          <a:xfrm>
+            <a:off x="5848926" y="680199"/>
+            <a:ext cx="2354077" cy="2406300"/>
+          </a:xfrm>
+          <a:prstGeom prst="rect">
+            <a:avLst/>
+          </a:prstGeom>
+        </p:spPr>
+      </p:pic>
+      <p:pic>
+        <p:nvPicPr>
+          <p:cNvPr id="7" name="圖片 6">
+            <a:extLst>
+              <a:ext uri="{FF2B5EF4-FFF2-40B4-BE49-F238E27FC236}">
+                <a16:creationId xmlns:a16="http://schemas.microsoft.com/office/drawing/2014/main" id="{D7AFA616-9203-34F5-932C-7AEF83E04A8D}"/>
+              </a:ext>
+            </a:extLst>
+          </p:cNvPr>
+          <p:cNvPicPr>
+            <a:picLocks noChangeAspect="1"/>
+          </p:cNvPicPr>
+          <p:nvPr/>
+        </p:nvPicPr>
+        <p:blipFill>
+          <a:blip r:embed="rId5"/>
+          <a:stretch>
+            <a:fillRect/>
+          </a:stretch>
+        </p:blipFill>
+        <p:spPr>
+          <a:xfrm>
+            <a:off x="886875" y="3813919"/>
+            <a:ext cx="2432117" cy="2485980"/>
+          </a:xfrm>
+          <a:prstGeom prst="rect">
+            <a:avLst/>
+          </a:prstGeom>
+        </p:spPr>
+      </p:pic>
+      <p:pic>
+        <p:nvPicPr>
+          <p:cNvPr id="8" name="圖片 7">
+            <a:extLst>
+              <a:ext uri="{FF2B5EF4-FFF2-40B4-BE49-F238E27FC236}">
+                <a16:creationId xmlns:a16="http://schemas.microsoft.com/office/drawing/2014/main" id="{4F0A1261-0D5B-46CE-59B8-9745921F27A7}"/>
+              </a:ext>
+            </a:extLst>
+          </p:cNvPr>
+          <p:cNvPicPr>
+            <a:picLocks noChangeAspect="1"/>
+          </p:cNvPicPr>
+          <p:nvPr/>
+        </p:nvPicPr>
+        <p:blipFill>
+          <a:blip r:embed="rId6"/>
+          <a:stretch>
+            <a:fillRect/>
+          </a:stretch>
+        </p:blipFill>
+        <p:spPr>
+          <a:xfrm>
+            <a:off x="3416808" y="3771501"/>
+            <a:ext cx="2432118" cy="2528398"/>
+          </a:xfrm>
+          <a:prstGeom prst="rect">
+            <a:avLst/>
+          </a:prstGeom>
+        </p:spPr>
+      </p:pic>
+      <p:sp>
+        <p:nvSpPr>
+          <p:cNvPr id="9" name="文字方塊 8">
+            <a:extLst>
+              <a:ext uri="{FF2B5EF4-FFF2-40B4-BE49-F238E27FC236}">
+                <a16:creationId xmlns:a16="http://schemas.microsoft.com/office/drawing/2014/main" id="{70E6C5C8-1A44-C3A1-92DB-5784092F2BD0}"/>
+              </a:ext>
+            </a:extLst>
+          </p:cNvPr>
+          <p:cNvSpPr txBox="1"/>
+          <p:nvPr/>
+        </p:nvSpPr>
+        <p:spPr>
+          <a:xfrm>
+            <a:off x="237744" y="146304"/>
+            <a:ext cx="1618488" cy="369332"/>
+          </a:xfrm>
+          <a:prstGeom prst="rect">
+            <a:avLst/>
+          </a:prstGeom>
+          <a:noFill/>
+        </p:spPr>
+        <p:txBody>
+          <a:bodyPr wrap="square" rtlCol="0">
+            <a:spAutoFit/>
+          </a:bodyPr>
+          <a:lstStyle/>
+          <a:p>
+            <a:r>
+              <a:rPr lang="en-US" altLang="zh-TW" dirty="0"/>
+              <a:t>Transformer</a:t>
+            </a:r>
+            <a:endParaRPr lang="zh-TW" altLang="en-US" dirty="0"/>
+          </a:p>
+        </p:txBody>
+      </p:sp>
+      <p:pic>
+        <p:nvPicPr>
+          <p:cNvPr id="11" name="圖片 10">
+            <a:extLst>
+              <a:ext uri="{FF2B5EF4-FFF2-40B4-BE49-F238E27FC236}">
+                <a16:creationId xmlns:a16="http://schemas.microsoft.com/office/drawing/2014/main" id="{EB975DB2-BEDC-132A-3F7E-912A16453CBE}"/>
+              </a:ext>
+            </a:extLst>
+          </p:cNvPr>
+          <p:cNvPicPr>
+            <a:picLocks noChangeAspect="1"/>
+          </p:cNvPicPr>
+          <p:nvPr/>
+        </p:nvPicPr>
+        <p:blipFill>
+          <a:blip r:embed="rId7"/>
+          <a:stretch>
+            <a:fillRect/>
+          </a:stretch>
+        </p:blipFill>
+        <p:spPr>
+          <a:xfrm>
+            <a:off x="8640501" y="680199"/>
+            <a:ext cx="2456364" cy="2548740"/>
+          </a:xfrm>
+          <a:prstGeom prst="rect">
+            <a:avLst/>
+          </a:prstGeom>
+        </p:spPr>
+      </p:pic>
+    </p:spTree>
+    <p:extLst>
+      <p:ext uri="{BB962C8B-B14F-4D97-AF65-F5344CB8AC3E}">
+        <p14:creationId xmlns:p14="http://schemas.microsoft.com/office/powerpoint/2010/main" val="177387997"/>
+      </p:ext>
+    </p:extLst>
+  </p:cSld>
+  <p:clrMapOvr>
+    <a:masterClrMapping/>
+  </p:clrMapOvr>
+</p:sld>
+</file>
+
+<file path=ppt/slides/slide6.xml><?xml version="1.0" encoding="utf-8"?>
+<p:sld xmlns:a="http://schemas.openxmlformats.org/drawingml/2006/main" xmlns:r="http://schemas.openxmlformats.org/officeDocument/2006/relationships" xmlns:p="http://schemas.openxmlformats.org/presentationml/2006/main">
+  <p:cSld>
+    <p:spTree>
+      <p:nvGrpSpPr>
+        <p:cNvPr id="1" name=""/>
+        <p:cNvGrpSpPr/>
+        <p:nvPr/>
+      </p:nvGrpSpPr>
+      <p:grpSpPr>
+        <a:xfrm>
+          <a:off x="0" y="0"/>
+          <a:ext cx="0" cy="0"/>
+          <a:chOff x="0" y="0"/>
+          <a:chExt cx="0" cy="0"/>
+        </a:xfrm>
+      </p:grpSpPr>
+      <p:pic>
+        <p:nvPicPr>
+          <p:cNvPr id="4" name="圖片 3">
+            <a:extLst>
+              <a:ext uri="{FF2B5EF4-FFF2-40B4-BE49-F238E27FC236}">
+                <a16:creationId xmlns:a16="http://schemas.microsoft.com/office/drawing/2014/main" id="{DA9BA5DE-6C2C-B4F1-C4AD-30100B0D4DE9}"/>
+              </a:ext>
+            </a:extLst>
+          </p:cNvPr>
+          <p:cNvPicPr>
+            <a:picLocks noChangeAspect="1"/>
+          </p:cNvPicPr>
+          <p:nvPr/>
+        </p:nvPicPr>
+        <p:blipFill>
+          <a:blip r:embed="rId2"/>
+          <a:stretch>
+            <a:fillRect/>
+          </a:stretch>
+        </p:blipFill>
+        <p:spPr>
+          <a:xfrm>
+            <a:off x="408177" y="789330"/>
+            <a:ext cx="2896109" cy="2068109"/>
+          </a:xfrm>
+          <a:prstGeom prst="rect">
+            <a:avLst/>
+          </a:prstGeom>
+        </p:spPr>
+      </p:pic>
+      <p:sp>
+        <p:nvSpPr>
+          <p:cNvPr id="5" name="文字方塊 4">
+            <a:extLst>
+              <a:ext uri="{FF2B5EF4-FFF2-40B4-BE49-F238E27FC236}">
+                <a16:creationId xmlns:a16="http://schemas.microsoft.com/office/drawing/2014/main" id="{FA287F4C-CF4A-35D0-48DC-E2B4313792DE}"/>
+              </a:ext>
+            </a:extLst>
+          </p:cNvPr>
+          <p:cNvSpPr txBox="1"/>
+          <p:nvPr/>
+        </p:nvSpPr>
+        <p:spPr>
+          <a:xfrm>
+            <a:off x="1404235" y="2992723"/>
+            <a:ext cx="1139190" cy="369332"/>
+          </a:xfrm>
+          <a:prstGeom prst="rect">
+            <a:avLst/>
+          </a:prstGeom>
+          <a:noFill/>
+        </p:spPr>
+        <p:txBody>
+          <a:bodyPr wrap="square" rtlCol="0">
+            <a:spAutoFit/>
+          </a:bodyPr>
+          <a:lstStyle/>
+          <a:p>
+            <a:r>
+              <a:rPr lang="en-US" altLang="zh-TW" dirty="0"/>
+              <a:t>8.49</a:t>
+            </a:r>
+            <a:r>
+              <a:rPr lang="zh-TW" altLang="en-US" dirty="0"/>
+              <a:t>  </a:t>
+            </a:r>
+            <a:r>
+              <a:rPr lang="en-US" altLang="zh-TW" dirty="0"/>
+              <a:t>7.76</a:t>
+            </a:r>
+            <a:endParaRPr lang="zh-TW" altLang="en-US" dirty="0"/>
+          </a:p>
+        </p:txBody>
+      </p:sp>
+      <p:sp>
+        <p:nvSpPr>
+          <p:cNvPr id="7" name="文字方塊 6">
+            <a:extLst>
+              <a:ext uri="{FF2B5EF4-FFF2-40B4-BE49-F238E27FC236}">
+                <a16:creationId xmlns:a16="http://schemas.microsoft.com/office/drawing/2014/main" id="{EEB028AF-9E29-30CF-3558-0B96AB459249}"/>
+              </a:ext>
+            </a:extLst>
+          </p:cNvPr>
+          <p:cNvSpPr txBox="1"/>
+          <p:nvPr/>
+        </p:nvSpPr>
+        <p:spPr>
+          <a:xfrm>
+            <a:off x="237744" y="146304"/>
+            <a:ext cx="1618488" cy="369332"/>
+          </a:xfrm>
+          <a:prstGeom prst="rect">
+            <a:avLst/>
+          </a:prstGeom>
+          <a:noFill/>
+        </p:spPr>
+        <p:txBody>
+          <a:bodyPr wrap="square" rtlCol="0">
+            <a:spAutoFit/>
+          </a:bodyPr>
+          <a:lstStyle/>
+          <a:p>
+            <a:r>
+              <a:rPr lang="en-US" altLang="zh-TW" dirty="0"/>
+              <a:t>Transformer</a:t>
+            </a:r>
+            <a:endParaRPr lang="zh-TW" altLang="en-US" dirty="0"/>
+          </a:p>
+        </p:txBody>
+      </p:sp>
+      <p:pic>
+        <p:nvPicPr>
+          <p:cNvPr id="9" name="圖片 8">
+            <a:extLst>
+              <a:ext uri="{FF2B5EF4-FFF2-40B4-BE49-F238E27FC236}">
+                <a16:creationId xmlns:a16="http://schemas.microsoft.com/office/drawing/2014/main" id="{69FDA96F-A6F9-FC3F-DCCC-790F6878354D}"/>
+              </a:ext>
+            </a:extLst>
+          </p:cNvPr>
+          <p:cNvPicPr>
+            <a:picLocks noChangeAspect="1"/>
+          </p:cNvPicPr>
+          <p:nvPr/>
+        </p:nvPicPr>
+        <p:blipFill>
+          <a:blip r:embed="rId3"/>
+          <a:stretch>
+            <a:fillRect/>
+          </a:stretch>
+        </p:blipFill>
+        <p:spPr>
+          <a:xfrm>
+            <a:off x="8983730" y="715733"/>
+            <a:ext cx="2800093" cy="1989540"/>
+          </a:xfrm>
+          <a:prstGeom prst="rect">
+            <a:avLst/>
+          </a:prstGeom>
+        </p:spPr>
+      </p:pic>
+      <p:sp>
+        <p:nvSpPr>
+          <p:cNvPr id="10" name="文字方塊 9">
+            <a:extLst>
+              <a:ext uri="{FF2B5EF4-FFF2-40B4-BE49-F238E27FC236}">
+                <a16:creationId xmlns:a16="http://schemas.microsoft.com/office/drawing/2014/main" id="{4B2AFC12-62CC-81A6-DB16-ACD498518B8C}"/>
+              </a:ext>
+            </a:extLst>
+          </p:cNvPr>
+          <p:cNvSpPr txBox="1"/>
+          <p:nvPr/>
+        </p:nvSpPr>
+        <p:spPr>
+          <a:xfrm>
+            <a:off x="9885426" y="3143750"/>
+            <a:ext cx="1599437" cy="369332"/>
+          </a:xfrm>
+          <a:prstGeom prst="rect">
+            <a:avLst/>
+          </a:prstGeom>
+          <a:noFill/>
+        </p:spPr>
+        <p:txBody>
+          <a:bodyPr wrap="square" rtlCol="0">
+            <a:spAutoFit/>
+          </a:bodyPr>
+          <a:lstStyle/>
+          <a:p>
+            <a:r>
+              <a:rPr lang="en-US" altLang="zh-TW" dirty="0"/>
+              <a:t>12.52</a:t>
+            </a:r>
+            <a:r>
+              <a:rPr lang="zh-TW" altLang="en-US" dirty="0"/>
+              <a:t>  </a:t>
+            </a:r>
+            <a:r>
+              <a:rPr lang="en-US" altLang="zh-TW" dirty="0"/>
+              <a:t>11.89</a:t>
+            </a:r>
+            <a:endParaRPr lang="zh-TW" altLang="en-US" dirty="0"/>
+          </a:p>
+        </p:txBody>
+      </p:sp>
+      <p:pic>
+        <p:nvPicPr>
+          <p:cNvPr id="3" name="圖片 2">
+            <a:extLst>
+              <a:ext uri="{FF2B5EF4-FFF2-40B4-BE49-F238E27FC236}">
+                <a16:creationId xmlns:a16="http://schemas.microsoft.com/office/drawing/2014/main" id="{2280E01E-88D4-6C89-DFAD-667BD062C04A}"/>
+              </a:ext>
+            </a:extLst>
+          </p:cNvPr>
+          <p:cNvPicPr>
+            <a:picLocks noChangeAspect="1"/>
+          </p:cNvPicPr>
+          <p:nvPr/>
+        </p:nvPicPr>
+        <p:blipFill>
+          <a:blip r:embed="rId4"/>
+          <a:stretch>
+            <a:fillRect/>
+          </a:stretch>
+        </p:blipFill>
+        <p:spPr>
+          <a:xfrm>
+            <a:off x="3304286" y="715733"/>
+            <a:ext cx="3007172" cy="2117174"/>
+          </a:xfrm>
+          <a:prstGeom prst="rect">
+            <a:avLst/>
+          </a:prstGeom>
+        </p:spPr>
+      </p:pic>
+      <p:sp>
+        <p:nvSpPr>
+          <p:cNvPr id="6" name="文字方塊 5">
+            <a:extLst>
+              <a:ext uri="{FF2B5EF4-FFF2-40B4-BE49-F238E27FC236}">
+                <a16:creationId xmlns:a16="http://schemas.microsoft.com/office/drawing/2014/main" id="{E9BF136E-75F4-8CB2-EE1E-B007C582FD63}"/>
+              </a:ext>
+            </a:extLst>
+          </p:cNvPr>
+          <p:cNvSpPr txBox="1"/>
+          <p:nvPr/>
+        </p:nvSpPr>
+        <p:spPr>
+          <a:xfrm>
+            <a:off x="6998147" y="3143750"/>
+            <a:ext cx="1985583" cy="369332"/>
+          </a:xfrm>
+          <a:prstGeom prst="rect">
+            <a:avLst/>
+          </a:prstGeom>
+          <a:noFill/>
+        </p:spPr>
+        <p:txBody>
+          <a:bodyPr wrap="square" rtlCol="0">
+            <a:spAutoFit/>
+          </a:bodyPr>
+          <a:lstStyle/>
+          <a:p>
+            <a:r>
+              <a:rPr lang="en-US" altLang="zh-TW" dirty="0"/>
+              <a:t>9.44</a:t>
+            </a:r>
+            <a:r>
+              <a:rPr lang="zh-TW" altLang="en-US" dirty="0"/>
+              <a:t>  </a:t>
+            </a:r>
+            <a:r>
+              <a:rPr lang="en-US" altLang="zh-TW" dirty="0"/>
+              <a:t>8.80</a:t>
+            </a:r>
+            <a:endParaRPr lang="zh-TW" altLang="en-US" dirty="0"/>
+          </a:p>
+        </p:txBody>
+      </p:sp>
+      <p:pic>
+        <p:nvPicPr>
+          <p:cNvPr id="11" name="圖片 10">
+            <a:extLst>
+              <a:ext uri="{FF2B5EF4-FFF2-40B4-BE49-F238E27FC236}">
+                <a16:creationId xmlns:a16="http://schemas.microsoft.com/office/drawing/2014/main" id="{7D264457-D9FB-F872-ECC2-C8E0FA7C4D90}"/>
+              </a:ext>
+            </a:extLst>
+          </p:cNvPr>
+          <p:cNvPicPr>
+            <a:picLocks noChangeAspect="1"/>
+          </p:cNvPicPr>
+          <p:nvPr/>
+        </p:nvPicPr>
+        <p:blipFill>
+          <a:blip r:embed="rId5"/>
+          <a:stretch>
+            <a:fillRect/>
+          </a:stretch>
+        </p:blipFill>
+        <p:spPr>
+          <a:xfrm>
+            <a:off x="6096000" y="697265"/>
+            <a:ext cx="3007172" cy="2135642"/>
+          </a:xfrm>
+          <a:prstGeom prst="rect">
+            <a:avLst/>
+          </a:prstGeom>
+        </p:spPr>
+      </p:pic>
+      <p:sp>
+        <p:nvSpPr>
+          <p:cNvPr id="12" name="文字方塊 11">
+            <a:extLst>
+              <a:ext uri="{FF2B5EF4-FFF2-40B4-BE49-F238E27FC236}">
+                <a16:creationId xmlns:a16="http://schemas.microsoft.com/office/drawing/2014/main" id="{0E05947E-7969-2480-D9CD-C1B88D076A4D}"/>
+              </a:ext>
+            </a:extLst>
+          </p:cNvPr>
+          <p:cNvSpPr txBox="1"/>
+          <p:nvPr/>
+        </p:nvSpPr>
+        <p:spPr>
+          <a:xfrm>
+            <a:off x="4201062" y="3096244"/>
+            <a:ext cx="1985583" cy="369332"/>
+          </a:xfrm>
+          <a:prstGeom prst="rect">
+            <a:avLst/>
+          </a:prstGeom>
+          <a:noFill/>
+        </p:spPr>
+        <p:txBody>
+          <a:bodyPr wrap="square" rtlCol="0">
+            <a:spAutoFit/>
+          </a:bodyPr>
+          <a:lstStyle/>
+          <a:p>
+            <a:r>
+              <a:rPr lang="en-US" altLang="zh-TW" dirty="0"/>
+              <a:t>12.14</a:t>
+            </a:r>
+            <a:r>
+              <a:rPr lang="zh-TW" altLang="en-US" dirty="0"/>
+              <a:t>  </a:t>
+            </a:r>
+            <a:r>
+              <a:rPr lang="en-US" altLang="zh-TW" dirty="0"/>
+              <a:t>11.66</a:t>
+            </a:r>
+            <a:endParaRPr lang="zh-TW" altLang="en-US" dirty="0"/>
+          </a:p>
+        </p:txBody>
+      </p:sp>
+      <p:sp>
+        <p:nvSpPr>
+          <p:cNvPr id="13" name="文字方塊 12">
+            <a:extLst>
+              <a:ext uri="{FF2B5EF4-FFF2-40B4-BE49-F238E27FC236}">
+                <a16:creationId xmlns:a16="http://schemas.microsoft.com/office/drawing/2014/main" id="{CB3337C5-15AF-2794-E9DB-FC8E3E8E828F}"/>
+              </a:ext>
+            </a:extLst>
+          </p:cNvPr>
+          <p:cNvSpPr txBox="1"/>
+          <p:nvPr/>
+        </p:nvSpPr>
+        <p:spPr>
+          <a:xfrm>
+            <a:off x="1856231" y="5884004"/>
+            <a:ext cx="3217925" cy="369332"/>
+          </a:xfrm>
+          <a:prstGeom prst="rect">
+            <a:avLst/>
+          </a:prstGeom>
+          <a:noFill/>
+        </p:spPr>
+        <p:txBody>
+          <a:bodyPr wrap="square" rtlCol="0">
+            <a:spAutoFit/>
+          </a:bodyPr>
+          <a:lstStyle/>
+          <a:p>
+            <a:r>
+              <a:rPr lang="en-US" altLang="zh-TW" dirty="0"/>
+              <a:t>12.35</a:t>
+            </a:r>
+            <a:r>
+              <a:rPr lang="zh-TW" altLang="en-US" dirty="0"/>
+              <a:t>  </a:t>
+            </a:r>
+            <a:r>
+              <a:rPr lang="en-US" altLang="zh-TW" dirty="0"/>
+              <a:t>11.92</a:t>
+            </a:r>
+            <a:r>
+              <a:rPr lang="zh-TW" altLang="en-US" dirty="0"/>
+              <a:t>  </a:t>
+            </a:r>
+            <a:r>
+              <a:rPr lang="en-US" altLang="zh-TW" dirty="0"/>
+              <a:t>9.96</a:t>
+            </a:r>
+            <a:r>
+              <a:rPr lang="zh-TW" altLang="en-US" dirty="0"/>
+              <a:t>  </a:t>
+            </a:r>
+            <a:r>
+              <a:rPr lang="en-US" altLang="zh-TW" dirty="0"/>
+              <a:t>9.69</a:t>
+            </a:r>
+            <a:r>
+              <a:rPr lang="zh-TW" altLang="en-US" dirty="0"/>
+              <a:t>  </a:t>
+            </a:r>
+          </a:p>
+        </p:txBody>
+      </p:sp>
+      <p:pic>
+        <p:nvPicPr>
+          <p:cNvPr id="15" name="圖片 14">
+            <a:extLst>
+              <a:ext uri="{FF2B5EF4-FFF2-40B4-BE49-F238E27FC236}">
+                <a16:creationId xmlns:a16="http://schemas.microsoft.com/office/drawing/2014/main" id="{6E7C98D8-1368-5342-0E4F-01D561D3C196}"/>
+              </a:ext>
+            </a:extLst>
+          </p:cNvPr>
+          <p:cNvPicPr>
+            <a:picLocks noChangeAspect="1"/>
+          </p:cNvPicPr>
+          <p:nvPr/>
+        </p:nvPicPr>
+        <p:blipFill>
+          <a:blip r:embed="rId6"/>
+          <a:stretch>
+            <a:fillRect/>
+          </a:stretch>
+        </p:blipFill>
+        <p:spPr>
+          <a:xfrm>
+            <a:off x="1404235" y="3521870"/>
+            <a:ext cx="3217925" cy="2269264"/>
+          </a:xfrm>
+          <a:prstGeom prst="rect">
+            <a:avLst/>
+          </a:prstGeom>
+        </p:spPr>
+      </p:pic>
+    </p:spTree>
+    <p:extLst>
+      <p:ext uri="{BB962C8B-B14F-4D97-AF65-F5344CB8AC3E}">
+        <p14:creationId xmlns:p14="http://schemas.microsoft.com/office/powerpoint/2010/main" val="2818117033"/>
+      </p:ext>
+    </p:extLst>
+  </p:cSld>
+  <p:clrMapOvr>
+    <a:masterClrMapping/>
+  </p:clrMapOvr>
+</p:sld>
+</file>
+
+<file path=ppt/slides/slide7.xml><?xml version="1.0" encoding="utf-8"?>
+<p:sld xmlns:a="http://schemas.openxmlformats.org/drawingml/2006/main" xmlns:r="http://schemas.openxmlformats.org/officeDocument/2006/relationships" xmlns:p="http://schemas.openxmlformats.org/presentationml/2006/main">
+  <p:cSld>
+    <p:spTree>
+      <p:nvGrpSpPr>
+        <p:cNvPr id="1" name=""/>
+        <p:cNvGrpSpPr/>
+        <p:nvPr/>
+      </p:nvGrpSpPr>
+      <p:grpSpPr>
+        <a:xfrm>
+          <a:off x="0" y="0"/>
+          <a:ext cx="0" cy="0"/>
+          <a:chOff x="0" y="0"/>
+          <a:chExt cx="0" cy="0"/>
+        </a:xfrm>
+      </p:grpSpPr>
+      <p:sp>
+        <p:nvSpPr>
+          <p:cNvPr id="4" name="文字方塊 3">
+            <a:extLst>
+              <a:ext uri="{FF2B5EF4-FFF2-40B4-BE49-F238E27FC236}">
+                <a16:creationId xmlns:a16="http://schemas.microsoft.com/office/drawing/2014/main" id="{D11B7F17-2F0E-7153-53F0-BD7C4EE72D77}"/>
+              </a:ext>
+            </a:extLst>
+          </p:cNvPr>
+          <p:cNvSpPr txBox="1"/>
+          <p:nvPr/>
+        </p:nvSpPr>
+        <p:spPr>
+          <a:xfrm>
+            <a:off x="237744" y="146304"/>
+            <a:ext cx="2505456" cy="369332"/>
+          </a:xfrm>
+          <a:prstGeom prst="rect">
+            <a:avLst/>
+          </a:prstGeom>
+          <a:noFill/>
+        </p:spPr>
+        <p:txBody>
+          <a:bodyPr wrap="square" rtlCol="0">
+            <a:spAutoFit/>
+          </a:bodyPr>
+          <a:lstStyle/>
+          <a:p>
+            <a:r>
+              <a:rPr lang="en-US" altLang="zh-TW" dirty="0"/>
+              <a:t>CNN</a:t>
+            </a:r>
+            <a:r>
+              <a:rPr lang="zh-TW" altLang="en-US" dirty="0"/>
+              <a:t> </a:t>
+            </a:r>
+            <a:r>
+              <a:rPr lang="en-US" altLang="zh-TW" dirty="0"/>
+              <a:t>+</a:t>
+            </a:r>
+            <a:r>
+              <a:rPr lang="zh-TW" altLang="en-US" dirty="0"/>
+              <a:t> </a:t>
+            </a:r>
+            <a:r>
+              <a:rPr lang="en-US" altLang="zh-TW" dirty="0"/>
+              <a:t>Transformer</a:t>
+            </a:r>
+            <a:endParaRPr lang="zh-TW" altLang="en-US" dirty="0"/>
+          </a:p>
+        </p:txBody>
+      </p:sp>
+      <p:pic>
+        <p:nvPicPr>
+          <p:cNvPr id="6" name="圖片 5">
+            <a:extLst>
+              <a:ext uri="{FF2B5EF4-FFF2-40B4-BE49-F238E27FC236}">
+                <a16:creationId xmlns:a16="http://schemas.microsoft.com/office/drawing/2014/main" id="{5372F764-111B-4099-35BD-F2ED34114D2C}"/>
+              </a:ext>
+            </a:extLst>
+          </p:cNvPr>
+          <p:cNvPicPr>
+            <a:picLocks noChangeAspect="1"/>
+          </p:cNvPicPr>
+          <p:nvPr/>
+        </p:nvPicPr>
+        <p:blipFill>
+          <a:blip r:embed="rId2"/>
+          <a:stretch>
+            <a:fillRect/>
+          </a:stretch>
+        </p:blipFill>
+        <p:spPr>
+          <a:xfrm>
+            <a:off x="4437877" y="850020"/>
+            <a:ext cx="2383547" cy="2436066"/>
+          </a:xfrm>
+          <a:prstGeom prst="rect">
+            <a:avLst/>
+          </a:prstGeom>
+        </p:spPr>
+      </p:pic>
+      <p:pic>
+        <p:nvPicPr>
+          <p:cNvPr id="8" name="圖片 7">
+            <a:extLst>
+              <a:ext uri="{FF2B5EF4-FFF2-40B4-BE49-F238E27FC236}">
+                <a16:creationId xmlns:a16="http://schemas.microsoft.com/office/drawing/2014/main" id="{47ADE4AA-8E64-3323-FBAB-564D83CB78FB}"/>
+              </a:ext>
+            </a:extLst>
+          </p:cNvPr>
+          <p:cNvPicPr>
+            <a:picLocks noChangeAspect="1"/>
+          </p:cNvPicPr>
+          <p:nvPr/>
+        </p:nvPicPr>
+        <p:blipFill>
+          <a:blip r:embed="rId3"/>
+          <a:stretch>
+            <a:fillRect/>
+          </a:stretch>
+        </p:blipFill>
+        <p:spPr>
+          <a:xfrm>
+            <a:off x="7649333" y="850020"/>
+            <a:ext cx="2410826" cy="2506428"/>
+          </a:xfrm>
+          <a:prstGeom prst="rect">
+            <a:avLst/>
+          </a:prstGeom>
+        </p:spPr>
+      </p:pic>
+      <p:pic>
+        <p:nvPicPr>
+          <p:cNvPr id="10" name="圖片 9">
+            <a:extLst>
+              <a:ext uri="{FF2B5EF4-FFF2-40B4-BE49-F238E27FC236}">
+                <a16:creationId xmlns:a16="http://schemas.microsoft.com/office/drawing/2014/main" id="{36B1B63A-D2D2-D0C8-1C58-3F7B10FA42A5}"/>
+              </a:ext>
+            </a:extLst>
+          </p:cNvPr>
+          <p:cNvPicPr>
+            <a:picLocks noChangeAspect="1"/>
+          </p:cNvPicPr>
+          <p:nvPr/>
+        </p:nvPicPr>
+        <p:blipFill>
+          <a:blip r:embed="rId4"/>
+          <a:stretch>
+            <a:fillRect/>
+          </a:stretch>
+        </p:blipFill>
+        <p:spPr>
+          <a:xfrm>
+            <a:off x="1197285" y="730685"/>
+            <a:ext cx="2505456" cy="2569699"/>
+          </a:xfrm>
+          <a:prstGeom prst="rect">
+            <a:avLst/>
+          </a:prstGeom>
+        </p:spPr>
+      </p:pic>
+      <p:pic>
+        <p:nvPicPr>
+          <p:cNvPr id="2" name="圖片 1">
+            <a:extLst>
+              <a:ext uri="{FF2B5EF4-FFF2-40B4-BE49-F238E27FC236}">
+                <a16:creationId xmlns:a16="http://schemas.microsoft.com/office/drawing/2014/main" id="{7ABDDF9F-D9DF-A6AA-32BD-8DA88162D5E5}"/>
+              </a:ext>
+            </a:extLst>
+          </p:cNvPr>
+          <p:cNvPicPr>
+            <a:picLocks noChangeAspect="1"/>
+          </p:cNvPicPr>
+          <p:nvPr/>
+        </p:nvPicPr>
+        <p:blipFill>
+          <a:blip r:embed="rId5"/>
+          <a:stretch>
+            <a:fillRect/>
+          </a:stretch>
+        </p:blipFill>
+        <p:spPr>
+          <a:xfrm>
+            <a:off x="1282446" y="3733421"/>
+            <a:ext cx="2695575" cy="1906883"/>
+          </a:xfrm>
+          <a:prstGeom prst="rect">
+            <a:avLst/>
+          </a:prstGeom>
+        </p:spPr>
+      </p:pic>
+      <p:sp>
+        <p:nvSpPr>
+          <p:cNvPr id="3" name="文字方塊 2">
+            <a:extLst>
+              <a:ext uri="{FF2B5EF4-FFF2-40B4-BE49-F238E27FC236}">
+                <a16:creationId xmlns:a16="http://schemas.microsoft.com/office/drawing/2014/main" id="{58463796-95CC-482E-59AF-9FA8EA25E68D}"/>
+              </a:ext>
+            </a:extLst>
+          </p:cNvPr>
+          <p:cNvSpPr txBox="1"/>
+          <p:nvPr/>
+        </p:nvSpPr>
+        <p:spPr>
+          <a:xfrm>
+            <a:off x="1490472" y="5704009"/>
+            <a:ext cx="2510789" cy="369332"/>
+          </a:xfrm>
+          <a:prstGeom prst="rect">
+            <a:avLst/>
+          </a:prstGeom>
+          <a:noFill/>
+        </p:spPr>
+        <p:txBody>
+          <a:bodyPr wrap="square" rtlCol="0">
+            <a:spAutoFit/>
+          </a:bodyPr>
+          <a:lstStyle/>
+          <a:p>
+            <a:r>
+              <a:rPr lang="en-US" altLang="zh-TW" dirty="0"/>
+              <a:t>12.94  10.90  8.85  8.13</a:t>
+            </a:r>
+          </a:p>
+        </p:txBody>
+      </p:sp>
+      <p:pic>
+        <p:nvPicPr>
+          <p:cNvPr id="7" name="圖片 6">
+            <a:extLst>
+              <a:ext uri="{FF2B5EF4-FFF2-40B4-BE49-F238E27FC236}">
+                <a16:creationId xmlns:a16="http://schemas.microsoft.com/office/drawing/2014/main" id="{AA0FC182-5C0D-ED44-D033-3EEA9B62BDE5}"/>
+              </a:ext>
+            </a:extLst>
+          </p:cNvPr>
+          <p:cNvPicPr>
+            <a:picLocks noChangeAspect="1"/>
+          </p:cNvPicPr>
+          <p:nvPr/>
+        </p:nvPicPr>
+        <p:blipFill>
+          <a:blip r:embed="rId6"/>
+          <a:stretch>
+            <a:fillRect/>
+          </a:stretch>
+        </p:blipFill>
+        <p:spPr>
+          <a:xfrm>
+            <a:off x="7649333" y="3707462"/>
+            <a:ext cx="2829055" cy="1996547"/>
+          </a:xfrm>
+          <a:prstGeom prst="rect">
+            <a:avLst/>
+          </a:prstGeom>
+        </p:spPr>
+      </p:pic>
+      <p:sp>
+        <p:nvSpPr>
+          <p:cNvPr id="9" name="文字方塊 8">
+            <a:extLst>
+              <a:ext uri="{FF2B5EF4-FFF2-40B4-BE49-F238E27FC236}">
+                <a16:creationId xmlns:a16="http://schemas.microsoft.com/office/drawing/2014/main" id="{81F1C299-0D6B-84FC-0328-5DB7CF65ED08}"/>
+              </a:ext>
+            </a:extLst>
+          </p:cNvPr>
+          <p:cNvSpPr txBox="1"/>
+          <p:nvPr/>
+        </p:nvSpPr>
+        <p:spPr>
+          <a:xfrm>
+            <a:off x="7967599" y="5823314"/>
+            <a:ext cx="2510789" cy="369332"/>
+          </a:xfrm>
+          <a:prstGeom prst="rect">
+            <a:avLst/>
+          </a:prstGeom>
+          <a:noFill/>
+        </p:spPr>
+        <p:txBody>
+          <a:bodyPr wrap="square" rtlCol="0">
+            <a:spAutoFit/>
+          </a:bodyPr>
+          <a:lstStyle/>
+          <a:p>
+            <a:r>
+              <a:rPr lang="en-US" altLang="zh-TW" dirty="0"/>
+              <a:t>15.10</a:t>
+            </a:r>
+            <a:r>
+              <a:rPr lang="zh-TW" altLang="en-US" dirty="0"/>
+              <a:t>  </a:t>
+            </a:r>
+            <a:r>
+              <a:rPr lang="en-US" altLang="zh-TW" dirty="0"/>
+              <a:t>12.23</a:t>
+            </a:r>
+            <a:r>
+              <a:rPr lang="zh-TW" altLang="en-US" dirty="0"/>
+              <a:t>  </a:t>
+            </a:r>
+            <a:r>
+              <a:rPr lang="en-US" altLang="zh-TW" dirty="0"/>
+              <a:t>9.25</a:t>
+            </a:r>
+            <a:r>
+              <a:rPr lang="zh-TW" altLang="en-US" dirty="0"/>
+              <a:t>  </a:t>
+            </a:r>
+            <a:r>
+              <a:rPr lang="en-US" altLang="zh-TW" dirty="0"/>
+              <a:t>9.13</a:t>
+            </a:r>
+          </a:p>
+        </p:txBody>
+      </p:sp>
+      <p:sp>
+        <p:nvSpPr>
+          <p:cNvPr id="15" name="文字方塊 14">
+            <a:extLst>
+              <a:ext uri="{FF2B5EF4-FFF2-40B4-BE49-F238E27FC236}">
+                <a16:creationId xmlns:a16="http://schemas.microsoft.com/office/drawing/2014/main" id="{35C1FFA7-605B-3F88-1C6C-BA29964BFD0C}"/>
+              </a:ext>
+            </a:extLst>
+          </p:cNvPr>
+          <p:cNvSpPr txBox="1"/>
+          <p:nvPr/>
+        </p:nvSpPr>
+        <p:spPr>
+          <a:xfrm>
+            <a:off x="4729035" y="5823314"/>
+            <a:ext cx="2510789" cy="369332"/>
+          </a:xfrm>
+          <a:prstGeom prst="rect">
+            <a:avLst/>
+          </a:prstGeom>
+          <a:noFill/>
+        </p:spPr>
+        <p:txBody>
+          <a:bodyPr wrap="square" rtlCol="0">
+            <a:spAutoFit/>
+          </a:bodyPr>
+          <a:lstStyle/>
+          <a:p>
+            <a:r>
+              <a:rPr lang="en-US" altLang="zh-TW" dirty="0"/>
+              <a:t>13.51  11.17  9.26  9.57</a:t>
+            </a:r>
+          </a:p>
+        </p:txBody>
+      </p:sp>
+      <p:sp>
+        <p:nvSpPr>
+          <p:cNvPr id="18" name="文字方塊 17">
+            <a:extLst>
+              <a:ext uri="{FF2B5EF4-FFF2-40B4-BE49-F238E27FC236}">
+                <a16:creationId xmlns:a16="http://schemas.microsoft.com/office/drawing/2014/main" id="{04B60CC9-0599-31F9-E98D-9792A0FEE747}"/>
+              </a:ext>
+            </a:extLst>
+          </p:cNvPr>
+          <p:cNvSpPr txBox="1"/>
+          <p:nvPr/>
+        </p:nvSpPr>
+        <p:spPr>
+          <a:xfrm>
+            <a:off x="10567417" y="4553327"/>
+            <a:ext cx="1392936" cy="646331"/>
+          </a:xfrm>
+          <a:prstGeom prst="rect">
+            <a:avLst/>
+          </a:prstGeom>
+          <a:noFill/>
+        </p:spPr>
+        <p:txBody>
+          <a:bodyPr wrap="square" rtlCol="0">
+            <a:spAutoFit/>
+          </a:bodyPr>
+          <a:lstStyle/>
+          <a:p>
+            <a:r>
+              <a:rPr lang="en-US" altLang="zh-TW" dirty="0"/>
+              <a:t>Layer = 1, head = 8</a:t>
+            </a:r>
+          </a:p>
+        </p:txBody>
+      </p:sp>
+      <p:pic>
+        <p:nvPicPr>
+          <p:cNvPr id="19" name="圖片 18">
+            <a:extLst>
+              <a:ext uri="{FF2B5EF4-FFF2-40B4-BE49-F238E27FC236}">
+                <a16:creationId xmlns:a16="http://schemas.microsoft.com/office/drawing/2014/main" id="{FF7BD173-4553-7217-2E31-CD85D830A58B}"/>
+              </a:ext>
+            </a:extLst>
+          </p:cNvPr>
+          <p:cNvPicPr>
+            <a:picLocks noChangeAspect="1"/>
+          </p:cNvPicPr>
+          <p:nvPr/>
+        </p:nvPicPr>
+        <p:blipFill>
+          <a:blip r:embed="rId7"/>
+          <a:stretch>
+            <a:fillRect/>
+          </a:stretch>
+        </p:blipFill>
+        <p:spPr>
+          <a:xfrm>
+            <a:off x="4437877" y="3707462"/>
+            <a:ext cx="2691130" cy="1919720"/>
+          </a:xfrm>
+          <a:prstGeom prst="rect">
+            <a:avLst/>
+          </a:prstGeom>
+        </p:spPr>
+      </p:pic>
+    </p:spTree>
+    <p:extLst>
+      <p:ext uri="{BB962C8B-B14F-4D97-AF65-F5344CB8AC3E}">
+        <p14:creationId xmlns:p14="http://schemas.microsoft.com/office/powerpoint/2010/main" val="936600707"/>
       </p:ext>
     </p:extLst>
   </p:cSld>

--- a/result.pptx
+++ b/result.pptx
@@ -12,6 +12,17 @@
     <p:sldId id="260" r:id="rId6"/>
     <p:sldId id="261" r:id="rId7"/>
     <p:sldId id="262" r:id="rId8"/>
+    <p:sldId id="267" r:id="rId9"/>
+    <p:sldId id="264" r:id="rId10"/>
+    <p:sldId id="266" r:id="rId11"/>
+    <p:sldId id="265" r:id="rId12"/>
+    <p:sldId id="269" r:id="rId13"/>
+    <p:sldId id="273" r:id="rId14"/>
+    <p:sldId id="274" r:id="rId15"/>
+    <p:sldId id="268" r:id="rId16"/>
+    <p:sldId id="271" r:id="rId17"/>
+    <p:sldId id="270" r:id="rId18"/>
+    <p:sldId id="272" r:id="rId19"/>
   </p:sldIdLst>
   <p:sldSz cx="12192000" cy="6858000"/>
   <p:notesSz cx="6858000" cy="9144000"/>
@@ -265,7 +276,7 @@
           <a:p>
             <a:fld id="{90AD2469-20E7-4B6C-96EF-9D1BC1F7B575}" type="datetimeFigureOut">
               <a:rPr lang="zh-TW" altLang="en-US" smtClean="0"/>
-              <a:t>2024/5/9</a:t>
+              <a:t>2024/5/23</a:t>
             </a:fld>
             <a:endParaRPr lang="zh-TW" altLang="en-US"/>
           </a:p>
@@ -463,7 +474,7 @@
           <a:p>
             <a:fld id="{90AD2469-20E7-4B6C-96EF-9D1BC1F7B575}" type="datetimeFigureOut">
               <a:rPr lang="zh-TW" altLang="en-US" smtClean="0"/>
-              <a:t>2024/5/9</a:t>
+              <a:t>2024/5/23</a:t>
             </a:fld>
             <a:endParaRPr lang="zh-TW" altLang="en-US"/>
           </a:p>
@@ -671,7 +682,7 @@
           <a:p>
             <a:fld id="{90AD2469-20E7-4B6C-96EF-9D1BC1F7B575}" type="datetimeFigureOut">
               <a:rPr lang="zh-TW" altLang="en-US" smtClean="0"/>
-              <a:t>2024/5/9</a:t>
+              <a:t>2024/5/23</a:t>
             </a:fld>
             <a:endParaRPr lang="zh-TW" altLang="en-US"/>
           </a:p>
@@ -869,7 +880,7 @@
           <a:p>
             <a:fld id="{90AD2469-20E7-4B6C-96EF-9D1BC1F7B575}" type="datetimeFigureOut">
               <a:rPr lang="zh-TW" altLang="en-US" smtClean="0"/>
-              <a:t>2024/5/9</a:t>
+              <a:t>2024/5/23</a:t>
             </a:fld>
             <a:endParaRPr lang="zh-TW" altLang="en-US"/>
           </a:p>
@@ -1144,7 +1155,7 @@
           <a:p>
             <a:fld id="{90AD2469-20E7-4B6C-96EF-9D1BC1F7B575}" type="datetimeFigureOut">
               <a:rPr lang="zh-TW" altLang="en-US" smtClean="0"/>
-              <a:t>2024/5/9</a:t>
+              <a:t>2024/5/23</a:t>
             </a:fld>
             <a:endParaRPr lang="zh-TW" altLang="en-US"/>
           </a:p>
@@ -1409,7 +1420,7 @@
           <a:p>
             <a:fld id="{90AD2469-20E7-4B6C-96EF-9D1BC1F7B575}" type="datetimeFigureOut">
               <a:rPr lang="zh-TW" altLang="en-US" smtClean="0"/>
-              <a:t>2024/5/9</a:t>
+              <a:t>2024/5/23</a:t>
             </a:fld>
             <a:endParaRPr lang="zh-TW" altLang="en-US"/>
           </a:p>
@@ -1821,7 +1832,7 @@
           <a:p>
             <a:fld id="{90AD2469-20E7-4B6C-96EF-9D1BC1F7B575}" type="datetimeFigureOut">
               <a:rPr lang="zh-TW" altLang="en-US" smtClean="0"/>
-              <a:t>2024/5/9</a:t>
+              <a:t>2024/5/23</a:t>
             </a:fld>
             <a:endParaRPr lang="zh-TW" altLang="en-US"/>
           </a:p>
@@ -1962,7 +1973,7 @@
           <a:p>
             <a:fld id="{90AD2469-20E7-4B6C-96EF-9D1BC1F7B575}" type="datetimeFigureOut">
               <a:rPr lang="zh-TW" altLang="en-US" smtClean="0"/>
-              <a:t>2024/5/9</a:t>
+              <a:t>2024/5/23</a:t>
             </a:fld>
             <a:endParaRPr lang="zh-TW" altLang="en-US"/>
           </a:p>
@@ -2075,7 +2086,7 @@
           <a:p>
             <a:fld id="{90AD2469-20E7-4B6C-96EF-9D1BC1F7B575}" type="datetimeFigureOut">
               <a:rPr lang="zh-TW" altLang="en-US" smtClean="0"/>
-              <a:t>2024/5/9</a:t>
+              <a:t>2024/5/23</a:t>
             </a:fld>
             <a:endParaRPr lang="zh-TW" altLang="en-US"/>
           </a:p>
@@ -2386,7 +2397,7 @@
           <a:p>
             <a:fld id="{90AD2469-20E7-4B6C-96EF-9D1BC1F7B575}" type="datetimeFigureOut">
               <a:rPr lang="zh-TW" altLang="en-US" smtClean="0"/>
-              <a:t>2024/5/9</a:t>
+              <a:t>2024/5/23</a:t>
             </a:fld>
             <a:endParaRPr lang="zh-TW" altLang="en-US"/>
           </a:p>
@@ -2674,7 +2685,7 @@
           <a:p>
             <a:fld id="{90AD2469-20E7-4B6C-96EF-9D1BC1F7B575}" type="datetimeFigureOut">
               <a:rPr lang="zh-TW" altLang="en-US" smtClean="0"/>
-              <a:t>2024/5/9</a:t>
+              <a:t>2024/5/23</a:t>
             </a:fld>
             <a:endParaRPr lang="zh-TW" altLang="en-US"/>
           </a:p>
@@ -2915,7 +2926,7 @@
           <a:p>
             <a:fld id="{90AD2469-20E7-4B6C-96EF-9D1BC1F7B575}" type="datetimeFigureOut">
               <a:rPr lang="zh-TW" altLang="en-US" smtClean="0"/>
-              <a:t>2024/5/9</a:t>
+              <a:t>2024/5/23</a:t>
             </a:fld>
             <a:endParaRPr lang="zh-TW" altLang="en-US"/>
           </a:p>
@@ -3561,6 +3572,5077 @@
 </p:sld>
 </file>
 
+<file path=ppt/slides/slide10.xml><?xml version="1.0" encoding="utf-8"?>
+<p:sld xmlns:a="http://schemas.openxmlformats.org/drawingml/2006/main" xmlns:r="http://schemas.openxmlformats.org/officeDocument/2006/relationships" xmlns:p="http://schemas.openxmlformats.org/presentationml/2006/main">
+  <p:cSld>
+    <p:spTree>
+      <p:nvGrpSpPr>
+        <p:cNvPr id="1" name=""/>
+        <p:cNvGrpSpPr/>
+        <p:nvPr/>
+      </p:nvGrpSpPr>
+      <p:grpSpPr>
+        <a:xfrm>
+          <a:off x="0" y="0"/>
+          <a:ext cx="0" cy="0"/>
+          <a:chOff x="0" y="0"/>
+          <a:chExt cx="0" cy="0"/>
+        </a:xfrm>
+      </p:grpSpPr>
+      <p:pic>
+        <p:nvPicPr>
+          <p:cNvPr id="5" name="圖片 4">
+            <a:extLst>
+              <a:ext uri="{FF2B5EF4-FFF2-40B4-BE49-F238E27FC236}">
+                <a16:creationId xmlns:a16="http://schemas.microsoft.com/office/drawing/2014/main" id="{FCEDDEEC-B8E9-5BB6-73F1-9070F6B60B04}"/>
+              </a:ext>
+            </a:extLst>
+          </p:cNvPr>
+          <p:cNvPicPr>
+            <a:picLocks noChangeAspect="1"/>
+          </p:cNvPicPr>
+          <p:nvPr/>
+        </p:nvPicPr>
+        <p:blipFill>
+          <a:blip r:embed="rId2"/>
+          <a:stretch>
+            <a:fillRect/>
+          </a:stretch>
+        </p:blipFill>
+        <p:spPr>
+          <a:xfrm>
+            <a:off x="582422" y="2084832"/>
+            <a:ext cx="2468359" cy="1773729"/>
+          </a:xfrm>
+          <a:prstGeom prst="rect">
+            <a:avLst/>
+          </a:prstGeom>
+        </p:spPr>
+      </p:pic>
+      <p:sp>
+        <p:nvSpPr>
+          <p:cNvPr id="7" name="文字方塊 6">
+            <a:extLst>
+              <a:ext uri="{FF2B5EF4-FFF2-40B4-BE49-F238E27FC236}">
+                <a16:creationId xmlns:a16="http://schemas.microsoft.com/office/drawing/2014/main" id="{B09ED4A4-5B43-6EE5-D628-DA3409DA1D19}"/>
+              </a:ext>
+            </a:extLst>
+          </p:cNvPr>
+          <p:cNvSpPr txBox="1"/>
+          <p:nvPr/>
+        </p:nvSpPr>
+        <p:spPr>
+          <a:xfrm>
+            <a:off x="3266694" y="2063309"/>
+            <a:ext cx="6094476" cy="461665"/>
+          </a:xfrm>
+          <a:prstGeom prst="rect">
+            <a:avLst/>
+          </a:prstGeom>
+          <a:noFill/>
+        </p:spPr>
+        <p:txBody>
+          <a:bodyPr wrap="square">
+            <a:spAutoFit/>
+          </a:bodyPr>
+          <a:lstStyle/>
+          <a:p>
+            <a:r>
+              <a:rPr lang="en-US" altLang="zh-TW" sz="1200" b="0" i="0" dirty="0">
+                <a:solidFill>
+                  <a:srgbClr val="D5D5D5"/>
+                </a:solidFill>
+                <a:effectLst/>
+                <a:highlight>
+                  <a:srgbClr val="383838"/>
+                </a:highlight>
+                <a:latin typeface="Courier New" panose="02070309020205020404" pitchFamily="49" charset="0"/>
+              </a:rPr>
+              <a:t>Mean Absolute Error (MAE): 12.434478101504721 Interquartile Mean (IQM): 11.050743277616741</a:t>
+            </a:r>
+            <a:endParaRPr lang="zh-TW" altLang="en-US" sz="1200" dirty="0"/>
+          </a:p>
+        </p:txBody>
+      </p:sp>
+      <p:sp>
+        <p:nvSpPr>
+          <p:cNvPr id="9" name="文字方塊 8">
+            <a:extLst>
+              <a:ext uri="{FF2B5EF4-FFF2-40B4-BE49-F238E27FC236}">
+                <a16:creationId xmlns:a16="http://schemas.microsoft.com/office/drawing/2014/main" id="{3D55829C-1B5F-12B0-2995-C1CEFD29AB54}"/>
+              </a:ext>
+            </a:extLst>
+          </p:cNvPr>
+          <p:cNvSpPr txBox="1"/>
+          <p:nvPr/>
+        </p:nvSpPr>
+        <p:spPr>
+          <a:xfrm>
+            <a:off x="3266694" y="2524974"/>
+            <a:ext cx="6094476" cy="461665"/>
+          </a:xfrm>
+          <a:prstGeom prst="rect">
+            <a:avLst/>
+          </a:prstGeom>
+          <a:noFill/>
+        </p:spPr>
+        <p:txBody>
+          <a:bodyPr wrap="square">
+            <a:spAutoFit/>
+          </a:bodyPr>
+          <a:lstStyle/>
+          <a:p>
+            <a:r>
+              <a:rPr lang="en-US" altLang="zh-TW" sz="1200" b="0" i="0" dirty="0">
+                <a:solidFill>
+                  <a:srgbClr val="D5D5D5"/>
+                </a:solidFill>
+                <a:effectLst/>
+                <a:highlight>
+                  <a:srgbClr val="383838"/>
+                </a:highlight>
+                <a:latin typeface="Courier New" panose="02070309020205020404" pitchFamily="49" charset="0"/>
+              </a:rPr>
+              <a:t>Mean Absolute Error (MAE): 12.00844086799553 Interquartile Mean (IQM): 10.979008814487978</a:t>
+            </a:r>
+            <a:endParaRPr lang="zh-TW" altLang="en-US" sz="1200" dirty="0"/>
+          </a:p>
+        </p:txBody>
+      </p:sp>
+      <p:sp>
+        <p:nvSpPr>
+          <p:cNvPr id="11" name="文字方塊 10">
+            <a:extLst>
+              <a:ext uri="{FF2B5EF4-FFF2-40B4-BE49-F238E27FC236}">
+                <a16:creationId xmlns:a16="http://schemas.microsoft.com/office/drawing/2014/main" id="{DC56BBFE-7120-6D70-BEE4-657B9EF1034D}"/>
+              </a:ext>
+            </a:extLst>
+          </p:cNvPr>
+          <p:cNvSpPr txBox="1"/>
+          <p:nvPr/>
+        </p:nvSpPr>
+        <p:spPr>
+          <a:xfrm>
+            <a:off x="3266694" y="2995576"/>
+            <a:ext cx="6094476" cy="461665"/>
+          </a:xfrm>
+          <a:prstGeom prst="rect">
+            <a:avLst/>
+          </a:prstGeom>
+          <a:noFill/>
+        </p:spPr>
+        <p:txBody>
+          <a:bodyPr wrap="square">
+            <a:spAutoFit/>
+          </a:bodyPr>
+          <a:lstStyle/>
+          <a:p>
+            <a:r>
+              <a:rPr lang="en-US" altLang="zh-TW" sz="1200" b="0" i="0" dirty="0">
+                <a:solidFill>
+                  <a:srgbClr val="D5D5D5"/>
+                </a:solidFill>
+                <a:effectLst/>
+                <a:highlight>
+                  <a:srgbClr val="383838"/>
+                </a:highlight>
+                <a:latin typeface="Courier New" panose="02070309020205020404" pitchFamily="49" charset="0"/>
+              </a:rPr>
+              <a:t>Mean Absolute Error (MAE): 10.253295828394437 Interquartile Mean (IQM): 8.543804847971497</a:t>
+            </a:r>
+            <a:endParaRPr lang="zh-TW" altLang="en-US" sz="1200" dirty="0"/>
+          </a:p>
+        </p:txBody>
+      </p:sp>
+      <p:sp>
+        <p:nvSpPr>
+          <p:cNvPr id="13" name="文字方塊 12">
+            <a:extLst>
+              <a:ext uri="{FF2B5EF4-FFF2-40B4-BE49-F238E27FC236}">
+                <a16:creationId xmlns:a16="http://schemas.microsoft.com/office/drawing/2014/main" id="{E699FF18-B21C-7D49-81A0-562F046F0C12}"/>
+              </a:ext>
+            </a:extLst>
+          </p:cNvPr>
+          <p:cNvSpPr txBox="1"/>
+          <p:nvPr/>
+        </p:nvSpPr>
+        <p:spPr>
+          <a:xfrm>
+            <a:off x="3266694" y="3466178"/>
+            <a:ext cx="6094476" cy="461665"/>
+          </a:xfrm>
+          <a:prstGeom prst="rect">
+            <a:avLst/>
+          </a:prstGeom>
+          <a:noFill/>
+        </p:spPr>
+        <p:txBody>
+          <a:bodyPr wrap="square">
+            <a:spAutoFit/>
+          </a:bodyPr>
+          <a:lstStyle/>
+          <a:p>
+            <a:r>
+              <a:rPr lang="en-US" altLang="zh-TW" sz="1200" b="0" i="0" dirty="0">
+                <a:solidFill>
+                  <a:srgbClr val="D5D5D5"/>
+                </a:solidFill>
+                <a:effectLst/>
+                <a:highlight>
+                  <a:srgbClr val="383838"/>
+                </a:highlight>
+                <a:latin typeface="Courier New" panose="02070309020205020404" pitchFamily="49" charset="0"/>
+              </a:rPr>
+              <a:t>Mean Absolute Error (MAE): 9.205590861753123 Interquartile Mean (IQM): 7.438824524120649</a:t>
+            </a:r>
+            <a:endParaRPr lang="zh-TW" altLang="en-US" sz="1200" dirty="0"/>
+          </a:p>
+        </p:txBody>
+      </p:sp>
+      <p:pic>
+        <p:nvPicPr>
+          <p:cNvPr id="15" name="圖片 14">
+            <a:extLst>
+              <a:ext uri="{FF2B5EF4-FFF2-40B4-BE49-F238E27FC236}">
+                <a16:creationId xmlns:a16="http://schemas.microsoft.com/office/drawing/2014/main" id="{C2B3A961-7D4F-37C2-F01C-9B60E7E4D3B6}"/>
+              </a:ext>
+            </a:extLst>
+          </p:cNvPr>
+          <p:cNvPicPr>
+            <a:picLocks noChangeAspect="1"/>
+          </p:cNvPicPr>
+          <p:nvPr/>
+        </p:nvPicPr>
+        <p:blipFill>
+          <a:blip r:embed="rId3"/>
+          <a:stretch>
+            <a:fillRect/>
+          </a:stretch>
+        </p:blipFill>
+        <p:spPr>
+          <a:xfrm>
+            <a:off x="510857" y="4389211"/>
+            <a:ext cx="2755837" cy="1929086"/>
+          </a:xfrm>
+          <a:prstGeom prst="rect">
+            <a:avLst/>
+          </a:prstGeom>
+        </p:spPr>
+      </p:pic>
+      <p:sp>
+        <p:nvSpPr>
+          <p:cNvPr id="17" name="文字方塊 16">
+            <a:extLst>
+              <a:ext uri="{FF2B5EF4-FFF2-40B4-BE49-F238E27FC236}">
+                <a16:creationId xmlns:a16="http://schemas.microsoft.com/office/drawing/2014/main" id="{13AF46E3-9F9C-C79D-43DE-831FE017AFC2}"/>
+              </a:ext>
+            </a:extLst>
+          </p:cNvPr>
+          <p:cNvSpPr txBox="1"/>
+          <p:nvPr/>
+        </p:nvSpPr>
+        <p:spPr>
+          <a:xfrm>
+            <a:off x="3266694" y="4302359"/>
+            <a:ext cx="6094476" cy="461665"/>
+          </a:xfrm>
+          <a:prstGeom prst="rect">
+            <a:avLst/>
+          </a:prstGeom>
+          <a:noFill/>
+        </p:spPr>
+        <p:txBody>
+          <a:bodyPr wrap="square">
+            <a:spAutoFit/>
+          </a:bodyPr>
+          <a:lstStyle/>
+          <a:p>
+            <a:r>
+              <a:rPr lang="en-US" altLang="zh-TW" sz="1200" b="0" i="0" dirty="0">
+                <a:solidFill>
+                  <a:srgbClr val="D5D5D5"/>
+                </a:solidFill>
+                <a:effectLst/>
+                <a:highlight>
+                  <a:srgbClr val="383838"/>
+                </a:highlight>
+                <a:latin typeface="Courier New" panose="02070309020205020404" pitchFamily="49" charset="0"/>
+              </a:rPr>
+              <a:t>Mean Absolute Error (MAE): 12.650989945699278 Interquartile Mean (IQM): 11.346588404737759</a:t>
+            </a:r>
+            <a:endParaRPr lang="zh-TW" altLang="en-US" sz="1200" dirty="0"/>
+          </a:p>
+        </p:txBody>
+      </p:sp>
+      <p:sp>
+        <p:nvSpPr>
+          <p:cNvPr id="19" name="文字方塊 18">
+            <a:extLst>
+              <a:ext uri="{FF2B5EF4-FFF2-40B4-BE49-F238E27FC236}">
+                <a16:creationId xmlns:a16="http://schemas.microsoft.com/office/drawing/2014/main" id="{15E3E79E-8EF0-2C62-1F73-EF9822252972}"/>
+              </a:ext>
+            </a:extLst>
+          </p:cNvPr>
+          <p:cNvSpPr txBox="1"/>
+          <p:nvPr/>
+        </p:nvSpPr>
+        <p:spPr>
+          <a:xfrm>
+            <a:off x="3266694" y="4833009"/>
+            <a:ext cx="6094476" cy="461665"/>
+          </a:xfrm>
+          <a:prstGeom prst="rect">
+            <a:avLst/>
+          </a:prstGeom>
+          <a:noFill/>
+        </p:spPr>
+        <p:txBody>
+          <a:bodyPr wrap="square">
+            <a:spAutoFit/>
+          </a:bodyPr>
+          <a:lstStyle/>
+          <a:p>
+            <a:r>
+              <a:rPr lang="en-US" altLang="zh-TW" sz="1200" b="0" i="0" dirty="0">
+                <a:solidFill>
+                  <a:srgbClr val="D5D5D5"/>
+                </a:solidFill>
+                <a:effectLst/>
+                <a:highlight>
+                  <a:srgbClr val="383838"/>
+                </a:highlight>
+                <a:latin typeface="Courier New" panose="02070309020205020404" pitchFamily="49" charset="0"/>
+              </a:rPr>
+              <a:t>Mean Absolute Error (MAE): 11.851089891021221 Interquartile Mean (IQM): 10.357386021865388</a:t>
+            </a:r>
+            <a:endParaRPr lang="zh-TW" altLang="en-US" sz="1200" dirty="0"/>
+          </a:p>
+        </p:txBody>
+      </p:sp>
+      <p:sp>
+        <p:nvSpPr>
+          <p:cNvPr id="21" name="文字方塊 20">
+            <a:extLst>
+              <a:ext uri="{FF2B5EF4-FFF2-40B4-BE49-F238E27FC236}">
+                <a16:creationId xmlns:a16="http://schemas.microsoft.com/office/drawing/2014/main" id="{18F20ECA-B163-70E2-1FA4-BA21E3F46716}"/>
+              </a:ext>
+            </a:extLst>
+          </p:cNvPr>
+          <p:cNvSpPr txBox="1"/>
+          <p:nvPr/>
+        </p:nvSpPr>
+        <p:spPr>
+          <a:xfrm>
+            <a:off x="3266694" y="5294674"/>
+            <a:ext cx="6094476" cy="738664"/>
+          </a:xfrm>
+          <a:prstGeom prst="rect">
+            <a:avLst/>
+          </a:prstGeom>
+          <a:noFill/>
+        </p:spPr>
+        <p:txBody>
+          <a:bodyPr wrap="square">
+            <a:spAutoFit/>
+          </a:bodyPr>
+          <a:lstStyle/>
+          <a:p>
+            <a:r>
+              <a:rPr lang="en-US" altLang="zh-TW" sz="1200" b="0" i="0" dirty="0">
+                <a:solidFill>
+                  <a:srgbClr val="D5D5D5"/>
+                </a:solidFill>
+                <a:effectLst/>
+                <a:highlight>
+                  <a:srgbClr val="383838"/>
+                </a:highlight>
+                <a:latin typeface="Courier New" panose="02070309020205020404" pitchFamily="49" charset="0"/>
+              </a:rPr>
+              <a:t>Mean Absolute Error (MAE): 10.56867110947823 Interquartile Mean (IQM): 8.9051708722671 </a:t>
+            </a:r>
+            <a:br>
+              <a:rPr lang="en-US" altLang="zh-TW" dirty="0"/>
+            </a:br>
+            <a:endParaRPr lang="zh-TW" altLang="en-US" dirty="0"/>
+          </a:p>
+        </p:txBody>
+      </p:sp>
+      <p:sp>
+        <p:nvSpPr>
+          <p:cNvPr id="23" name="文字方塊 22">
+            <a:extLst>
+              <a:ext uri="{FF2B5EF4-FFF2-40B4-BE49-F238E27FC236}">
+                <a16:creationId xmlns:a16="http://schemas.microsoft.com/office/drawing/2014/main" id="{08B7286D-FF94-78EA-9DBA-D9B20BFFBA28}"/>
+              </a:ext>
+            </a:extLst>
+          </p:cNvPr>
+          <p:cNvSpPr txBox="1"/>
+          <p:nvPr/>
+        </p:nvSpPr>
+        <p:spPr>
+          <a:xfrm>
+            <a:off x="3266694" y="5790511"/>
+            <a:ext cx="6094476" cy="461665"/>
+          </a:xfrm>
+          <a:prstGeom prst="rect">
+            <a:avLst/>
+          </a:prstGeom>
+          <a:noFill/>
+        </p:spPr>
+        <p:txBody>
+          <a:bodyPr wrap="square">
+            <a:spAutoFit/>
+          </a:bodyPr>
+          <a:lstStyle/>
+          <a:p>
+            <a:r>
+              <a:rPr lang="en-US" altLang="zh-TW" sz="1200" b="0" i="0" dirty="0">
+                <a:solidFill>
+                  <a:srgbClr val="D5D5D5"/>
+                </a:solidFill>
+                <a:effectLst/>
+                <a:highlight>
+                  <a:srgbClr val="383838"/>
+                </a:highlight>
+                <a:latin typeface="Courier New" panose="02070309020205020404" pitchFamily="49" charset="0"/>
+              </a:rPr>
+              <a:t>Mean Absolute Error (MAE): 9.340098062312887 Interquartile Mean (IQM): 7.541398447939025</a:t>
+            </a:r>
+            <a:endParaRPr lang="zh-TW" altLang="en-US" sz="1200" dirty="0"/>
+          </a:p>
+        </p:txBody>
+      </p:sp>
+      <p:pic>
+        <p:nvPicPr>
+          <p:cNvPr id="25" name="圖片 24">
+            <a:extLst>
+              <a:ext uri="{FF2B5EF4-FFF2-40B4-BE49-F238E27FC236}">
+                <a16:creationId xmlns:a16="http://schemas.microsoft.com/office/drawing/2014/main" id="{9B9BD346-065C-212A-7766-92A1257E6F7B}"/>
+              </a:ext>
+            </a:extLst>
+          </p:cNvPr>
+          <p:cNvPicPr>
+            <a:picLocks noChangeAspect="1"/>
+          </p:cNvPicPr>
+          <p:nvPr/>
+        </p:nvPicPr>
+        <p:blipFill>
+          <a:blip r:embed="rId4"/>
+          <a:stretch>
+            <a:fillRect/>
+          </a:stretch>
+        </p:blipFill>
+        <p:spPr>
+          <a:xfrm>
+            <a:off x="656614" y="333010"/>
+            <a:ext cx="2319973" cy="1639407"/>
+          </a:xfrm>
+          <a:prstGeom prst="rect">
+            <a:avLst/>
+          </a:prstGeom>
+        </p:spPr>
+      </p:pic>
+      <p:sp>
+        <p:nvSpPr>
+          <p:cNvPr id="26" name="文字方塊 25">
+            <a:extLst>
+              <a:ext uri="{FF2B5EF4-FFF2-40B4-BE49-F238E27FC236}">
+                <a16:creationId xmlns:a16="http://schemas.microsoft.com/office/drawing/2014/main" id="{93F7FA55-4324-03A7-05AD-CCE2A1393F17}"/>
+              </a:ext>
+            </a:extLst>
+          </p:cNvPr>
+          <p:cNvSpPr txBox="1"/>
+          <p:nvPr/>
+        </p:nvSpPr>
+        <p:spPr>
+          <a:xfrm>
+            <a:off x="219456" y="35929"/>
+            <a:ext cx="1335024" cy="369332"/>
+          </a:xfrm>
+          <a:prstGeom prst="rect">
+            <a:avLst/>
+          </a:prstGeom>
+          <a:noFill/>
+        </p:spPr>
+        <p:txBody>
+          <a:bodyPr wrap="square" rtlCol="0">
+            <a:spAutoFit/>
+          </a:bodyPr>
+          <a:lstStyle/>
+          <a:p>
+            <a:r>
+              <a:rPr lang="en-US" altLang="zh-TW" dirty="0"/>
+              <a:t>CNN</a:t>
+            </a:r>
+            <a:r>
+              <a:rPr lang="zh-TW" altLang="en-US" dirty="0"/>
+              <a:t> </a:t>
+            </a:r>
+            <a:r>
+              <a:rPr lang="en-US" altLang="zh-TW" dirty="0"/>
+              <a:t>42</a:t>
+            </a:r>
+            <a:endParaRPr lang="zh-TW" altLang="en-US" dirty="0"/>
+          </a:p>
+        </p:txBody>
+      </p:sp>
+      <p:sp>
+        <p:nvSpPr>
+          <p:cNvPr id="28" name="文字方塊 27">
+            <a:extLst>
+              <a:ext uri="{FF2B5EF4-FFF2-40B4-BE49-F238E27FC236}">
+                <a16:creationId xmlns:a16="http://schemas.microsoft.com/office/drawing/2014/main" id="{3A10CF30-EFBE-F9A8-00CA-782CEE466569}"/>
+              </a:ext>
+            </a:extLst>
+          </p:cNvPr>
+          <p:cNvSpPr txBox="1"/>
+          <p:nvPr/>
+        </p:nvSpPr>
+        <p:spPr>
+          <a:xfrm>
+            <a:off x="3202686" y="144159"/>
+            <a:ext cx="6094476" cy="461665"/>
+          </a:xfrm>
+          <a:prstGeom prst="rect">
+            <a:avLst/>
+          </a:prstGeom>
+          <a:noFill/>
+        </p:spPr>
+        <p:txBody>
+          <a:bodyPr wrap="square">
+            <a:spAutoFit/>
+          </a:bodyPr>
+          <a:lstStyle/>
+          <a:p>
+            <a:r>
+              <a:rPr lang="en-US" altLang="zh-TW" sz="1200" b="0" i="0" dirty="0">
+                <a:solidFill>
+                  <a:srgbClr val="D5D5D5"/>
+                </a:solidFill>
+                <a:effectLst/>
+                <a:highlight>
+                  <a:srgbClr val="383838"/>
+                </a:highlight>
+                <a:latin typeface="Courier New" panose="02070309020205020404" pitchFamily="49" charset="0"/>
+              </a:rPr>
+              <a:t>Mean Absolute Error (MAE): 11.82104219607481 Interquartile Mean (IQM): 10.426471756432878</a:t>
+            </a:r>
+            <a:endParaRPr lang="zh-TW" altLang="en-US" sz="1200" dirty="0"/>
+          </a:p>
+        </p:txBody>
+      </p:sp>
+      <p:sp>
+        <p:nvSpPr>
+          <p:cNvPr id="30" name="文字方塊 29">
+            <a:extLst>
+              <a:ext uri="{FF2B5EF4-FFF2-40B4-BE49-F238E27FC236}">
+                <a16:creationId xmlns:a16="http://schemas.microsoft.com/office/drawing/2014/main" id="{C9A7CA13-60E6-0139-876F-D63C796675C3}"/>
+              </a:ext>
+            </a:extLst>
+          </p:cNvPr>
+          <p:cNvSpPr txBox="1"/>
+          <p:nvPr/>
+        </p:nvSpPr>
+        <p:spPr>
+          <a:xfrm>
+            <a:off x="3202686" y="605824"/>
+            <a:ext cx="6094476" cy="461665"/>
+          </a:xfrm>
+          <a:prstGeom prst="rect">
+            <a:avLst/>
+          </a:prstGeom>
+          <a:noFill/>
+        </p:spPr>
+        <p:txBody>
+          <a:bodyPr wrap="square">
+            <a:spAutoFit/>
+          </a:bodyPr>
+          <a:lstStyle/>
+          <a:p>
+            <a:r>
+              <a:rPr lang="en-US" altLang="zh-TW" sz="1200" b="0" i="0" dirty="0">
+                <a:solidFill>
+                  <a:srgbClr val="D5D5D5"/>
+                </a:solidFill>
+                <a:effectLst/>
+                <a:highlight>
+                  <a:srgbClr val="383838"/>
+                </a:highlight>
+                <a:latin typeface="Courier New" panose="02070309020205020404" pitchFamily="49" charset="0"/>
+              </a:rPr>
+              <a:t>Mean Absolute Error (MAE): 11.462547212273655 Interquartile Mean (IQM): 9.980230512126079</a:t>
+            </a:r>
+            <a:endParaRPr lang="zh-TW" altLang="en-US" sz="1200" dirty="0"/>
+          </a:p>
+        </p:txBody>
+      </p:sp>
+      <p:sp>
+        <p:nvSpPr>
+          <p:cNvPr id="32" name="文字方塊 31">
+            <a:extLst>
+              <a:ext uri="{FF2B5EF4-FFF2-40B4-BE49-F238E27FC236}">
+                <a16:creationId xmlns:a16="http://schemas.microsoft.com/office/drawing/2014/main" id="{61265F9F-C5CC-6834-2B59-D8C677F5A74B}"/>
+              </a:ext>
+            </a:extLst>
+          </p:cNvPr>
+          <p:cNvSpPr txBox="1"/>
+          <p:nvPr/>
+        </p:nvSpPr>
+        <p:spPr>
+          <a:xfrm>
+            <a:off x="3202686" y="1056662"/>
+            <a:ext cx="6094476" cy="461665"/>
+          </a:xfrm>
+          <a:prstGeom prst="rect">
+            <a:avLst/>
+          </a:prstGeom>
+          <a:noFill/>
+        </p:spPr>
+        <p:txBody>
+          <a:bodyPr wrap="square">
+            <a:spAutoFit/>
+          </a:bodyPr>
+          <a:lstStyle/>
+          <a:p>
+            <a:r>
+              <a:rPr lang="en-US" altLang="zh-TW" sz="1200" b="0" i="0" dirty="0">
+                <a:solidFill>
+                  <a:srgbClr val="D5D5D5"/>
+                </a:solidFill>
+                <a:effectLst/>
+                <a:highlight>
+                  <a:srgbClr val="383838"/>
+                </a:highlight>
+                <a:latin typeface="Courier New" panose="02070309020205020404" pitchFamily="49" charset="0"/>
+              </a:rPr>
+              <a:t>Mean Absolute Error (MAE): 9.864264450569591 Interquartile Mean (IQM): 8.297753604485889</a:t>
+            </a:r>
+            <a:endParaRPr lang="zh-TW" altLang="en-US" sz="1200" dirty="0"/>
+          </a:p>
+        </p:txBody>
+      </p:sp>
+      <p:sp>
+        <p:nvSpPr>
+          <p:cNvPr id="34" name="文字方塊 33">
+            <a:extLst>
+              <a:ext uri="{FF2B5EF4-FFF2-40B4-BE49-F238E27FC236}">
+                <a16:creationId xmlns:a16="http://schemas.microsoft.com/office/drawing/2014/main" id="{2450A6F8-71D0-30C0-6AA2-A687E3DCA1DA}"/>
+              </a:ext>
+            </a:extLst>
+          </p:cNvPr>
+          <p:cNvSpPr txBox="1"/>
+          <p:nvPr/>
+        </p:nvSpPr>
+        <p:spPr>
+          <a:xfrm>
+            <a:off x="3192500" y="1431178"/>
+            <a:ext cx="6094476" cy="461665"/>
+          </a:xfrm>
+          <a:prstGeom prst="rect">
+            <a:avLst/>
+          </a:prstGeom>
+          <a:noFill/>
+        </p:spPr>
+        <p:txBody>
+          <a:bodyPr wrap="square">
+            <a:spAutoFit/>
+          </a:bodyPr>
+          <a:lstStyle/>
+          <a:p>
+            <a:r>
+              <a:rPr lang="en-US" altLang="zh-TW" sz="1200" b="0" i="0" dirty="0">
+                <a:solidFill>
+                  <a:srgbClr val="D5D5D5"/>
+                </a:solidFill>
+                <a:effectLst/>
+                <a:highlight>
+                  <a:srgbClr val="383838"/>
+                </a:highlight>
+                <a:latin typeface="Courier New" panose="02070309020205020404" pitchFamily="49" charset="0"/>
+              </a:rPr>
+              <a:t>Mean Absolute Error (MAE): 8.574938017462342 Interquartile Mean (IQM): 6.977809947903761</a:t>
+            </a:r>
+            <a:endParaRPr lang="zh-TW" altLang="en-US" sz="1200" dirty="0"/>
+          </a:p>
+        </p:txBody>
+      </p:sp>
+    </p:spTree>
+    <p:extLst>
+      <p:ext uri="{BB962C8B-B14F-4D97-AF65-F5344CB8AC3E}">
+        <p14:creationId xmlns:p14="http://schemas.microsoft.com/office/powerpoint/2010/main" val="1090727986"/>
+      </p:ext>
+    </p:extLst>
+  </p:cSld>
+  <p:clrMapOvr>
+    <a:masterClrMapping/>
+  </p:clrMapOvr>
+</p:sld>
+</file>
+
+<file path=ppt/slides/slide11.xml><?xml version="1.0" encoding="utf-8"?>
+<p:sld xmlns:a="http://schemas.openxmlformats.org/drawingml/2006/main" xmlns:r="http://schemas.openxmlformats.org/officeDocument/2006/relationships" xmlns:p="http://schemas.openxmlformats.org/presentationml/2006/main">
+  <p:cSld>
+    <p:spTree>
+      <p:nvGrpSpPr>
+        <p:cNvPr id="1" name=""/>
+        <p:cNvGrpSpPr/>
+        <p:nvPr/>
+      </p:nvGrpSpPr>
+      <p:grpSpPr>
+        <a:xfrm>
+          <a:off x="0" y="0"/>
+          <a:ext cx="0" cy="0"/>
+          <a:chOff x="0" y="0"/>
+          <a:chExt cx="0" cy="0"/>
+        </a:xfrm>
+      </p:grpSpPr>
+      <p:pic>
+        <p:nvPicPr>
+          <p:cNvPr id="5" name="圖片 4">
+            <a:extLst>
+              <a:ext uri="{FF2B5EF4-FFF2-40B4-BE49-F238E27FC236}">
+                <a16:creationId xmlns:a16="http://schemas.microsoft.com/office/drawing/2014/main" id="{1C072330-75B5-AF1B-6D6C-F87E458720C7}"/>
+              </a:ext>
+            </a:extLst>
+          </p:cNvPr>
+          <p:cNvPicPr>
+            <a:picLocks noChangeAspect="1"/>
+          </p:cNvPicPr>
+          <p:nvPr/>
+        </p:nvPicPr>
+        <p:blipFill>
+          <a:blip r:embed="rId2"/>
+          <a:stretch>
+            <a:fillRect/>
+          </a:stretch>
+        </p:blipFill>
+        <p:spPr>
+          <a:xfrm>
+            <a:off x="347151" y="356824"/>
+            <a:ext cx="2685351" cy="1910126"/>
+          </a:xfrm>
+          <a:prstGeom prst="rect">
+            <a:avLst/>
+          </a:prstGeom>
+        </p:spPr>
+      </p:pic>
+      <p:sp>
+        <p:nvSpPr>
+          <p:cNvPr id="7" name="文字方塊 6">
+            <a:extLst>
+              <a:ext uri="{FF2B5EF4-FFF2-40B4-BE49-F238E27FC236}">
+                <a16:creationId xmlns:a16="http://schemas.microsoft.com/office/drawing/2014/main" id="{3BE08589-F9E6-9BD7-204F-BD9ED140090B}"/>
+              </a:ext>
+            </a:extLst>
+          </p:cNvPr>
+          <p:cNvSpPr txBox="1"/>
+          <p:nvPr/>
+        </p:nvSpPr>
+        <p:spPr>
+          <a:xfrm>
+            <a:off x="3449574" y="380669"/>
+            <a:ext cx="6094476" cy="461665"/>
+          </a:xfrm>
+          <a:prstGeom prst="rect">
+            <a:avLst/>
+          </a:prstGeom>
+          <a:noFill/>
+        </p:spPr>
+        <p:txBody>
+          <a:bodyPr wrap="square">
+            <a:spAutoFit/>
+          </a:bodyPr>
+          <a:lstStyle/>
+          <a:p>
+            <a:r>
+              <a:rPr lang="en-US" altLang="zh-TW" sz="1200" b="0" i="0" dirty="0">
+                <a:solidFill>
+                  <a:srgbClr val="D5D5D5"/>
+                </a:solidFill>
+                <a:effectLst/>
+                <a:highlight>
+                  <a:srgbClr val="383838"/>
+                </a:highlight>
+                <a:latin typeface="Courier New" panose="02070309020205020404" pitchFamily="49" charset="0"/>
+              </a:rPr>
+              <a:t>Mean Absolute Error (MAE): 13.064388716887677 Interquartile Mean (IQM): 12.02501636658101</a:t>
+            </a:r>
+            <a:endParaRPr lang="zh-TW" altLang="en-US" sz="1200" dirty="0"/>
+          </a:p>
+        </p:txBody>
+      </p:sp>
+      <p:sp>
+        <p:nvSpPr>
+          <p:cNvPr id="9" name="文字方塊 8">
+            <a:extLst>
+              <a:ext uri="{FF2B5EF4-FFF2-40B4-BE49-F238E27FC236}">
+                <a16:creationId xmlns:a16="http://schemas.microsoft.com/office/drawing/2014/main" id="{3F5409F7-0509-3FF5-CD5B-E2575D4F6181}"/>
+              </a:ext>
+            </a:extLst>
+          </p:cNvPr>
+          <p:cNvSpPr txBox="1"/>
+          <p:nvPr/>
+        </p:nvSpPr>
+        <p:spPr>
+          <a:xfrm>
+            <a:off x="3449574" y="965638"/>
+            <a:ext cx="6094476" cy="461665"/>
+          </a:xfrm>
+          <a:prstGeom prst="rect">
+            <a:avLst/>
+          </a:prstGeom>
+          <a:noFill/>
+        </p:spPr>
+        <p:txBody>
+          <a:bodyPr wrap="square">
+            <a:spAutoFit/>
+          </a:bodyPr>
+          <a:lstStyle/>
+          <a:p>
+            <a:r>
+              <a:rPr lang="en-US" altLang="zh-TW" sz="1200" b="0" i="0" dirty="0">
+                <a:solidFill>
+                  <a:srgbClr val="D5D5D5"/>
+                </a:solidFill>
+                <a:effectLst/>
+                <a:highlight>
+                  <a:srgbClr val="383838"/>
+                </a:highlight>
+                <a:latin typeface="Courier New" panose="02070309020205020404" pitchFamily="49" charset="0"/>
+              </a:rPr>
+              <a:t>Mean Absolute Error (MAE): 11.89536152298604 Interquartile Mean (IQM): 10.769458661605482</a:t>
+            </a:r>
+            <a:endParaRPr lang="zh-TW" altLang="en-US" sz="1200" dirty="0"/>
+          </a:p>
+        </p:txBody>
+      </p:sp>
+      <p:sp>
+        <p:nvSpPr>
+          <p:cNvPr id="11" name="文字方塊 10">
+            <a:extLst>
+              <a:ext uri="{FF2B5EF4-FFF2-40B4-BE49-F238E27FC236}">
+                <a16:creationId xmlns:a16="http://schemas.microsoft.com/office/drawing/2014/main" id="{7B2BCEE5-D10C-B46F-87B4-FA15B2A34B98}"/>
+              </a:ext>
+            </a:extLst>
+          </p:cNvPr>
+          <p:cNvSpPr txBox="1"/>
+          <p:nvPr/>
+        </p:nvSpPr>
+        <p:spPr>
+          <a:xfrm>
+            <a:off x="3449574" y="1568895"/>
+            <a:ext cx="6094476" cy="461665"/>
+          </a:xfrm>
+          <a:prstGeom prst="rect">
+            <a:avLst/>
+          </a:prstGeom>
+          <a:noFill/>
+        </p:spPr>
+        <p:txBody>
+          <a:bodyPr wrap="square">
+            <a:spAutoFit/>
+          </a:bodyPr>
+          <a:lstStyle/>
+          <a:p>
+            <a:r>
+              <a:rPr lang="en-US" altLang="zh-TW" sz="1200" b="0" i="0" dirty="0">
+                <a:solidFill>
+                  <a:srgbClr val="D5D5D5"/>
+                </a:solidFill>
+                <a:effectLst/>
+                <a:highlight>
+                  <a:srgbClr val="383838"/>
+                </a:highlight>
+                <a:latin typeface="Courier New" panose="02070309020205020404" pitchFamily="49" charset="0"/>
+              </a:rPr>
+              <a:t>Mean Absolute Error (MAE): 8.043185654813389 Interquartile Mean (IQM): 6.025015740023358</a:t>
+            </a:r>
+            <a:endParaRPr lang="zh-TW" altLang="en-US" sz="1200" dirty="0"/>
+          </a:p>
+        </p:txBody>
+      </p:sp>
+      <p:sp>
+        <p:nvSpPr>
+          <p:cNvPr id="13" name="文字方塊 12">
+            <a:extLst>
+              <a:ext uri="{FF2B5EF4-FFF2-40B4-BE49-F238E27FC236}">
+                <a16:creationId xmlns:a16="http://schemas.microsoft.com/office/drawing/2014/main" id="{D7513748-4709-2B71-A8A4-6062AD7F3AE7}"/>
+              </a:ext>
+            </a:extLst>
+          </p:cNvPr>
+          <p:cNvSpPr txBox="1"/>
+          <p:nvPr/>
+        </p:nvSpPr>
+        <p:spPr>
+          <a:xfrm>
+            <a:off x="3449574" y="2036117"/>
+            <a:ext cx="6094476" cy="461665"/>
+          </a:xfrm>
+          <a:prstGeom prst="rect">
+            <a:avLst/>
+          </a:prstGeom>
+          <a:noFill/>
+        </p:spPr>
+        <p:txBody>
+          <a:bodyPr wrap="square">
+            <a:spAutoFit/>
+          </a:bodyPr>
+          <a:lstStyle/>
+          <a:p>
+            <a:r>
+              <a:rPr lang="en-US" altLang="zh-TW" sz="1200" b="0" i="0" dirty="0">
+                <a:solidFill>
+                  <a:srgbClr val="D5D5D5"/>
+                </a:solidFill>
+                <a:effectLst/>
+                <a:highlight>
+                  <a:srgbClr val="383838"/>
+                </a:highlight>
+                <a:latin typeface="Courier New" panose="02070309020205020404" pitchFamily="49" charset="0"/>
+              </a:rPr>
+              <a:t>Mean Absolute Error (MAE): 8.189792320901693 Interquartile Mean (IQM): 6.451766620738615</a:t>
+            </a:r>
+            <a:endParaRPr lang="zh-TW" altLang="en-US" sz="1200" dirty="0"/>
+          </a:p>
+        </p:txBody>
+      </p:sp>
+      <p:pic>
+        <p:nvPicPr>
+          <p:cNvPr id="15" name="圖片 14">
+            <a:extLst>
+              <a:ext uri="{FF2B5EF4-FFF2-40B4-BE49-F238E27FC236}">
+                <a16:creationId xmlns:a16="http://schemas.microsoft.com/office/drawing/2014/main" id="{29CAC1F2-C29D-6E4E-12EC-2A996BDC692A}"/>
+              </a:ext>
+            </a:extLst>
+          </p:cNvPr>
+          <p:cNvPicPr>
+            <a:picLocks noChangeAspect="1"/>
+          </p:cNvPicPr>
+          <p:nvPr/>
+        </p:nvPicPr>
+        <p:blipFill>
+          <a:blip r:embed="rId3"/>
+          <a:stretch>
+            <a:fillRect/>
+          </a:stretch>
+        </p:blipFill>
+        <p:spPr>
+          <a:xfrm>
+            <a:off x="454789" y="2556519"/>
+            <a:ext cx="2685352" cy="1913578"/>
+          </a:xfrm>
+          <a:prstGeom prst="rect">
+            <a:avLst/>
+          </a:prstGeom>
+        </p:spPr>
+      </p:pic>
+      <p:sp>
+        <p:nvSpPr>
+          <p:cNvPr id="17" name="文字方塊 16">
+            <a:extLst>
+              <a:ext uri="{FF2B5EF4-FFF2-40B4-BE49-F238E27FC236}">
+                <a16:creationId xmlns:a16="http://schemas.microsoft.com/office/drawing/2014/main" id="{81F676B8-DAA5-CCEC-7C5E-8DABC0ED20FF}"/>
+              </a:ext>
+            </a:extLst>
+          </p:cNvPr>
+          <p:cNvSpPr txBox="1"/>
+          <p:nvPr/>
+        </p:nvSpPr>
+        <p:spPr>
+          <a:xfrm>
+            <a:off x="3449574" y="2656439"/>
+            <a:ext cx="6094476" cy="461665"/>
+          </a:xfrm>
+          <a:prstGeom prst="rect">
+            <a:avLst/>
+          </a:prstGeom>
+          <a:noFill/>
+        </p:spPr>
+        <p:txBody>
+          <a:bodyPr wrap="square">
+            <a:spAutoFit/>
+          </a:bodyPr>
+          <a:lstStyle/>
+          <a:p>
+            <a:r>
+              <a:rPr lang="en-US" altLang="zh-TW" sz="1200" b="0" i="0" dirty="0">
+                <a:solidFill>
+                  <a:srgbClr val="D5D5D5"/>
+                </a:solidFill>
+                <a:effectLst/>
+                <a:highlight>
+                  <a:srgbClr val="383838"/>
+                </a:highlight>
+                <a:latin typeface="Courier New" panose="02070309020205020404" pitchFamily="49" charset="0"/>
+              </a:rPr>
+              <a:t>Mean Absolute Error (MAE): 12.784349974811882 Interquartile Mean (IQM): 11.991940215530917</a:t>
+            </a:r>
+            <a:endParaRPr lang="zh-TW" altLang="en-US" sz="1200" dirty="0"/>
+          </a:p>
+        </p:txBody>
+      </p:sp>
+      <p:sp>
+        <p:nvSpPr>
+          <p:cNvPr id="19" name="文字方塊 18">
+            <a:extLst>
+              <a:ext uri="{FF2B5EF4-FFF2-40B4-BE49-F238E27FC236}">
+                <a16:creationId xmlns:a16="http://schemas.microsoft.com/office/drawing/2014/main" id="{F68E61A3-3655-3787-96F2-577F7CAEEAC5}"/>
+              </a:ext>
+            </a:extLst>
+          </p:cNvPr>
+          <p:cNvSpPr txBox="1"/>
+          <p:nvPr/>
+        </p:nvSpPr>
+        <p:spPr>
+          <a:xfrm>
+            <a:off x="3449574" y="3118104"/>
+            <a:ext cx="6094476" cy="461665"/>
+          </a:xfrm>
+          <a:prstGeom prst="rect">
+            <a:avLst/>
+          </a:prstGeom>
+          <a:noFill/>
+        </p:spPr>
+        <p:txBody>
+          <a:bodyPr wrap="square">
+            <a:spAutoFit/>
+          </a:bodyPr>
+          <a:lstStyle/>
+          <a:p>
+            <a:r>
+              <a:rPr lang="en-US" altLang="zh-TW" sz="1200" b="0" i="0" dirty="0">
+                <a:solidFill>
+                  <a:srgbClr val="D5D5D5"/>
+                </a:solidFill>
+                <a:effectLst/>
+                <a:highlight>
+                  <a:srgbClr val="383838"/>
+                </a:highlight>
+                <a:latin typeface="Courier New" panose="02070309020205020404" pitchFamily="49" charset="0"/>
+              </a:rPr>
+              <a:t>Mean Absolute Error (MAE): 11.87812718102396 Interquartile Mean (IQM): 10.646958182009781</a:t>
+            </a:r>
+            <a:endParaRPr lang="zh-TW" altLang="en-US" sz="1200" dirty="0"/>
+          </a:p>
+        </p:txBody>
+      </p:sp>
+      <p:sp>
+        <p:nvSpPr>
+          <p:cNvPr id="21" name="文字方塊 20">
+            <a:extLst>
+              <a:ext uri="{FF2B5EF4-FFF2-40B4-BE49-F238E27FC236}">
+                <a16:creationId xmlns:a16="http://schemas.microsoft.com/office/drawing/2014/main" id="{2EE1B679-87EB-7A4C-1DFC-AEC577A69C83}"/>
+              </a:ext>
+            </a:extLst>
+          </p:cNvPr>
+          <p:cNvSpPr txBox="1"/>
+          <p:nvPr/>
+        </p:nvSpPr>
+        <p:spPr>
+          <a:xfrm>
+            <a:off x="3449574" y="3567416"/>
+            <a:ext cx="6094476" cy="461665"/>
+          </a:xfrm>
+          <a:prstGeom prst="rect">
+            <a:avLst/>
+          </a:prstGeom>
+          <a:noFill/>
+        </p:spPr>
+        <p:txBody>
+          <a:bodyPr wrap="square">
+            <a:spAutoFit/>
+          </a:bodyPr>
+          <a:lstStyle/>
+          <a:p>
+            <a:r>
+              <a:rPr lang="en-US" altLang="zh-TW" sz="1200" b="0" i="0" dirty="0">
+                <a:solidFill>
+                  <a:srgbClr val="D5D5D5"/>
+                </a:solidFill>
+                <a:effectLst/>
+                <a:highlight>
+                  <a:srgbClr val="383838"/>
+                </a:highlight>
+                <a:latin typeface="Courier New" panose="02070309020205020404" pitchFamily="49" charset="0"/>
+              </a:rPr>
+              <a:t>Mean Absolute Error (MAE): 9.425530941768086 Interquartile Mean (IQM): 7.8392750758818135</a:t>
+            </a:r>
+            <a:endParaRPr lang="zh-TW" altLang="en-US" sz="1200" dirty="0"/>
+          </a:p>
+        </p:txBody>
+      </p:sp>
+      <p:sp>
+        <p:nvSpPr>
+          <p:cNvPr id="23" name="文字方塊 22">
+            <a:extLst>
+              <a:ext uri="{FF2B5EF4-FFF2-40B4-BE49-F238E27FC236}">
+                <a16:creationId xmlns:a16="http://schemas.microsoft.com/office/drawing/2014/main" id="{08CA0885-B957-64ED-D458-35D6BD9D072D}"/>
+              </a:ext>
+            </a:extLst>
+          </p:cNvPr>
+          <p:cNvSpPr txBox="1"/>
+          <p:nvPr/>
+        </p:nvSpPr>
+        <p:spPr>
+          <a:xfrm>
+            <a:off x="3449574" y="4041434"/>
+            <a:ext cx="6094476" cy="461665"/>
+          </a:xfrm>
+          <a:prstGeom prst="rect">
+            <a:avLst/>
+          </a:prstGeom>
+          <a:noFill/>
+        </p:spPr>
+        <p:txBody>
+          <a:bodyPr wrap="square">
+            <a:spAutoFit/>
+          </a:bodyPr>
+          <a:lstStyle/>
+          <a:p>
+            <a:r>
+              <a:rPr lang="en-US" altLang="zh-TW" sz="1200" b="0" i="0" dirty="0">
+                <a:solidFill>
+                  <a:srgbClr val="D5D5D5"/>
+                </a:solidFill>
+                <a:effectLst/>
+                <a:highlight>
+                  <a:srgbClr val="383838"/>
+                </a:highlight>
+                <a:latin typeface="Courier New" panose="02070309020205020404" pitchFamily="49" charset="0"/>
+              </a:rPr>
+              <a:t>Mean Absolute Error (MAE): 9.510756861283177 Interquartile Mean (IQM): 8.01569762405144</a:t>
+            </a:r>
+            <a:endParaRPr lang="zh-TW" altLang="en-US" sz="1200" dirty="0"/>
+          </a:p>
+        </p:txBody>
+      </p:sp>
+      <p:pic>
+        <p:nvPicPr>
+          <p:cNvPr id="25" name="圖片 24">
+            <a:extLst>
+              <a:ext uri="{FF2B5EF4-FFF2-40B4-BE49-F238E27FC236}">
+                <a16:creationId xmlns:a16="http://schemas.microsoft.com/office/drawing/2014/main" id="{81D41637-CEDA-1A30-9AFA-6599D9855AC4}"/>
+              </a:ext>
+            </a:extLst>
+          </p:cNvPr>
+          <p:cNvPicPr>
+            <a:picLocks noChangeAspect="1"/>
+          </p:cNvPicPr>
+          <p:nvPr/>
+        </p:nvPicPr>
+        <p:blipFill>
+          <a:blip r:embed="rId4"/>
+          <a:stretch>
+            <a:fillRect/>
+          </a:stretch>
+        </p:blipFill>
+        <p:spPr>
+          <a:xfrm>
+            <a:off x="454789" y="4759666"/>
+            <a:ext cx="2685352" cy="1905053"/>
+          </a:xfrm>
+          <a:prstGeom prst="rect">
+            <a:avLst/>
+          </a:prstGeom>
+        </p:spPr>
+      </p:pic>
+      <p:sp>
+        <p:nvSpPr>
+          <p:cNvPr id="27" name="文字方塊 26">
+            <a:extLst>
+              <a:ext uri="{FF2B5EF4-FFF2-40B4-BE49-F238E27FC236}">
+                <a16:creationId xmlns:a16="http://schemas.microsoft.com/office/drawing/2014/main" id="{E5F99CF9-0C78-1727-239B-F01C3D9C8FBC}"/>
+              </a:ext>
+            </a:extLst>
+          </p:cNvPr>
+          <p:cNvSpPr txBox="1"/>
+          <p:nvPr/>
+        </p:nvSpPr>
+        <p:spPr>
+          <a:xfrm>
+            <a:off x="3449574" y="4664482"/>
+            <a:ext cx="6094476" cy="461665"/>
+          </a:xfrm>
+          <a:prstGeom prst="rect">
+            <a:avLst/>
+          </a:prstGeom>
+          <a:noFill/>
+        </p:spPr>
+        <p:txBody>
+          <a:bodyPr wrap="square">
+            <a:spAutoFit/>
+          </a:bodyPr>
+          <a:lstStyle/>
+          <a:p>
+            <a:r>
+              <a:rPr lang="en-US" altLang="zh-TW" sz="1200" b="0" i="0" dirty="0">
+                <a:solidFill>
+                  <a:srgbClr val="D5D5D5"/>
+                </a:solidFill>
+                <a:effectLst/>
+                <a:highlight>
+                  <a:srgbClr val="383838"/>
+                </a:highlight>
+                <a:latin typeface="Courier New" panose="02070309020205020404" pitchFamily="49" charset="0"/>
+              </a:rPr>
+              <a:t>Mean Absolute Error (MAE): 12.507338984437649 Interquartile Mean (IQM): 11.83669060822649</a:t>
+            </a:r>
+            <a:endParaRPr lang="zh-TW" altLang="en-US" sz="1200" dirty="0"/>
+          </a:p>
+        </p:txBody>
+      </p:sp>
+      <p:sp>
+        <p:nvSpPr>
+          <p:cNvPr id="29" name="文字方塊 28">
+            <a:extLst>
+              <a:ext uri="{FF2B5EF4-FFF2-40B4-BE49-F238E27FC236}">
+                <a16:creationId xmlns:a16="http://schemas.microsoft.com/office/drawing/2014/main" id="{844D774F-13CA-8C6B-5CE3-B7E009956082}"/>
+              </a:ext>
+            </a:extLst>
+          </p:cNvPr>
+          <p:cNvSpPr txBox="1"/>
+          <p:nvPr/>
+        </p:nvSpPr>
+        <p:spPr>
+          <a:xfrm>
+            <a:off x="3449574" y="5126147"/>
+            <a:ext cx="6094476" cy="461665"/>
+          </a:xfrm>
+          <a:prstGeom prst="rect">
+            <a:avLst/>
+          </a:prstGeom>
+          <a:noFill/>
+        </p:spPr>
+        <p:txBody>
+          <a:bodyPr wrap="square">
+            <a:spAutoFit/>
+          </a:bodyPr>
+          <a:lstStyle/>
+          <a:p>
+            <a:r>
+              <a:rPr lang="en-US" altLang="zh-TW" sz="1200" b="0" i="0" dirty="0">
+                <a:solidFill>
+                  <a:srgbClr val="D5D5D5"/>
+                </a:solidFill>
+                <a:effectLst/>
+                <a:highlight>
+                  <a:srgbClr val="383838"/>
+                </a:highlight>
+                <a:latin typeface="Courier New" panose="02070309020205020404" pitchFamily="49" charset="0"/>
+              </a:rPr>
+              <a:t>Mean Absolute Error (MAE): 11.546071020990436 Interquartile Mean (IQM): 10.574989177716361</a:t>
+            </a:r>
+            <a:endParaRPr lang="zh-TW" altLang="en-US" sz="1200" dirty="0"/>
+          </a:p>
+        </p:txBody>
+      </p:sp>
+      <p:sp>
+        <p:nvSpPr>
+          <p:cNvPr id="31" name="文字方塊 30">
+            <a:extLst>
+              <a:ext uri="{FF2B5EF4-FFF2-40B4-BE49-F238E27FC236}">
+                <a16:creationId xmlns:a16="http://schemas.microsoft.com/office/drawing/2014/main" id="{DE2D2BB4-55DC-52F0-73BB-EA08ACF91867}"/>
+              </a:ext>
+            </a:extLst>
+          </p:cNvPr>
+          <p:cNvSpPr txBox="1"/>
+          <p:nvPr/>
+        </p:nvSpPr>
+        <p:spPr>
+          <a:xfrm>
+            <a:off x="3449574" y="5587812"/>
+            <a:ext cx="6094476" cy="461665"/>
+          </a:xfrm>
+          <a:prstGeom prst="rect">
+            <a:avLst/>
+          </a:prstGeom>
+          <a:noFill/>
+        </p:spPr>
+        <p:txBody>
+          <a:bodyPr wrap="square">
+            <a:spAutoFit/>
+          </a:bodyPr>
+          <a:lstStyle/>
+          <a:p>
+            <a:r>
+              <a:rPr lang="en-US" altLang="zh-TW" sz="1200" b="0" i="0" dirty="0">
+                <a:solidFill>
+                  <a:srgbClr val="D5D5D5"/>
+                </a:solidFill>
+                <a:effectLst/>
+                <a:highlight>
+                  <a:srgbClr val="383838"/>
+                </a:highlight>
+                <a:latin typeface="Courier New" panose="02070309020205020404" pitchFamily="49" charset="0"/>
+              </a:rPr>
+              <a:t>Mean Absolute Error (MAE): 9.762010363111697 Interquartile Mean (IQM): 8.172899551612028</a:t>
+            </a:r>
+            <a:endParaRPr lang="zh-TW" altLang="en-US" sz="1200" dirty="0"/>
+          </a:p>
+        </p:txBody>
+      </p:sp>
+      <p:sp>
+        <p:nvSpPr>
+          <p:cNvPr id="33" name="文字方塊 32">
+            <a:extLst>
+              <a:ext uri="{FF2B5EF4-FFF2-40B4-BE49-F238E27FC236}">
+                <a16:creationId xmlns:a16="http://schemas.microsoft.com/office/drawing/2014/main" id="{9A9A6AE9-AD08-93E1-2659-A8BEA6EFAF95}"/>
+              </a:ext>
+            </a:extLst>
+          </p:cNvPr>
+          <p:cNvSpPr txBox="1"/>
+          <p:nvPr/>
+        </p:nvSpPr>
+        <p:spPr>
+          <a:xfrm>
+            <a:off x="3442716" y="6190073"/>
+            <a:ext cx="6094476" cy="461665"/>
+          </a:xfrm>
+          <a:prstGeom prst="rect">
+            <a:avLst/>
+          </a:prstGeom>
+          <a:noFill/>
+        </p:spPr>
+        <p:txBody>
+          <a:bodyPr wrap="square">
+            <a:spAutoFit/>
+          </a:bodyPr>
+          <a:lstStyle/>
+          <a:p>
+            <a:r>
+              <a:rPr lang="en-US" altLang="zh-TW" sz="1200" b="0" i="0" dirty="0">
+                <a:solidFill>
+                  <a:srgbClr val="D5D5D5"/>
+                </a:solidFill>
+                <a:effectLst/>
+                <a:highlight>
+                  <a:srgbClr val="383838"/>
+                </a:highlight>
+                <a:latin typeface="Courier New" panose="02070309020205020404" pitchFamily="49" charset="0"/>
+              </a:rPr>
+              <a:t>Mean Absolute Error (MAE): 9.797736884926382 Interquartile Mean (IQM): 8.50484260164805</a:t>
+            </a:r>
+            <a:endParaRPr lang="zh-TW" altLang="en-US" sz="1200" dirty="0"/>
+          </a:p>
+        </p:txBody>
+      </p:sp>
+      <p:sp>
+        <p:nvSpPr>
+          <p:cNvPr id="34" name="文字方塊 33">
+            <a:extLst>
+              <a:ext uri="{FF2B5EF4-FFF2-40B4-BE49-F238E27FC236}">
+                <a16:creationId xmlns:a16="http://schemas.microsoft.com/office/drawing/2014/main" id="{6EEB8950-731A-837D-B67E-9FF9519316D1}"/>
+              </a:ext>
+            </a:extLst>
+          </p:cNvPr>
+          <p:cNvSpPr txBox="1"/>
+          <p:nvPr/>
+        </p:nvSpPr>
+        <p:spPr>
+          <a:xfrm>
+            <a:off x="173735" y="34469"/>
+            <a:ext cx="3557017" cy="369332"/>
+          </a:xfrm>
+          <a:prstGeom prst="rect">
+            <a:avLst/>
+          </a:prstGeom>
+          <a:noFill/>
+        </p:spPr>
+        <p:txBody>
+          <a:bodyPr wrap="square" rtlCol="0">
+            <a:spAutoFit/>
+          </a:bodyPr>
+          <a:lstStyle/>
+          <a:p>
+            <a:r>
+              <a:rPr lang="en-US" altLang="zh-TW" dirty="0"/>
+              <a:t>Transformer(layer=1, head=8)</a:t>
+            </a:r>
+            <a:r>
+              <a:rPr lang="zh-TW" altLang="en-US" dirty="0"/>
+              <a:t> </a:t>
+            </a:r>
+            <a:r>
+              <a:rPr lang="en-US" altLang="zh-TW" dirty="0"/>
+              <a:t>42</a:t>
+            </a:r>
+            <a:endParaRPr lang="zh-TW" altLang="en-US" dirty="0"/>
+          </a:p>
+        </p:txBody>
+      </p:sp>
+    </p:spTree>
+    <p:extLst>
+      <p:ext uri="{BB962C8B-B14F-4D97-AF65-F5344CB8AC3E}">
+        <p14:creationId xmlns:p14="http://schemas.microsoft.com/office/powerpoint/2010/main" val="980834639"/>
+      </p:ext>
+    </p:extLst>
+  </p:cSld>
+  <p:clrMapOvr>
+    <a:masterClrMapping/>
+  </p:clrMapOvr>
+</p:sld>
+</file>
+
+<file path=ppt/slides/slide12.xml><?xml version="1.0" encoding="utf-8"?>
+<p:sld xmlns:a="http://schemas.openxmlformats.org/drawingml/2006/main" xmlns:r="http://schemas.openxmlformats.org/officeDocument/2006/relationships" xmlns:p="http://schemas.openxmlformats.org/presentationml/2006/main">
+  <p:cSld>
+    <p:spTree>
+      <p:nvGrpSpPr>
+        <p:cNvPr id="1" name=""/>
+        <p:cNvGrpSpPr/>
+        <p:nvPr/>
+      </p:nvGrpSpPr>
+      <p:grpSpPr>
+        <a:xfrm>
+          <a:off x="0" y="0"/>
+          <a:ext cx="0" cy="0"/>
+          <a:chOff x="0" y="0"/>
+          <a:chExt cx="0" cy="0"/>
+        </a:xfrm>
+      </p:grpSpPr>
+      <p:pic>
+        <p:nvPicPr>
+          <p:cNvPr id="5" name="圖片 4">
+            <a:extLst>
+              <a:ext uri="{FF2B5EF4-FFF2-40B4-BE49-F238E27FC236}">
+                <a16:creationId xmlns:a16="http://schemas.microsoft.com/office/drawing/2014/main" id="{308676C6-9653-60FF-C304-40F13E5DD1C5}"/>
+              </a:ext>
+            </a:extLst>
+          </p:cNvPr>
+          <p:cNvPicPr>
+            <a:picLocks noChangeAspect="1"/>
+          </p:cNvPicPr>
+          <p:nvPr/>
+        </p:nvPicPr>
+        <p:blipFill>
+          <a:blip r:embed="rId2"/>
+          <a:stretch>
+            <a:fillRect/>
+          </a:stretch>
+        </p:blipFill>
+        <p:spPr>
+          <a:xfrm>
+            <a:off x="716540" y="579481"/>
+            <a:ext cx="1811770" cy="1880256"/>
+          </a:xfrm>
+          <a:prstGeom prst="rect">
+            <a:avLst/>
+          </a:prstGeom>
+        </p:spPr>
+      </p:pic>
+      <p:sp>
+        <p:nvSpPr>
+          <p:cNvPr id="6" name="文字方塊 5">
+            <a:extLst>
+              <a:ext uri="{FF2B5EF4-FFF2-40B4-BE49-F238E27FC236}">
+                <a16:creationId xmlns:a16="http://schemas.microsoft.com/office/drawing/2014/main" id="{8A90D420-0882-FA22-DCE2-A632ABC7C834}"/>
+              </a:ext>
+            </a:extLst>
+          </p:cNvPr>
+          <p:cNvSpPr txBox="1"/>
+          <p:nvPr/>
+        </p:nvSpPr>
+        <p:spPr>
+          <a:xfrm>
+            <a:off x="219456" y="35929"/>
+            <a:ext cx="2157984" cy="369332"/>
+          </a:xfrm>
+          <a:prstGeom prst="rect">
+            <a:avLst/>
+          </a:prstGeom>
+          <a:noFill/>
+        </p:spPr>
+        <p:txBody>
+          <a:bodyPr wrap="square" rtlCol="0">
+            <a:spAutoFit/>
+          </a:bodyPr>
+          <a:lstStyle/>
+          <a:p>
+            <a:r>
+              <a:rPr lang="en-US" altLang="zh-TW" dirty="0"/>
+              <a:t>CNN</a:t>
+            </a:r>
+            <a:r>
+              <a:rPr lang="zh-TW" altLang="en-US" dirty="0"/>
+              <a:t> </a:t>
+            </a:r>
+            <a:r>
+              <a:rPr lang="en-US" altLang="zh-TW" dirty="0"/>
+              <a:t>42</a:t>
+            </a:r>
+            <a:r>
+              <a:rPr lang="zh-TW" altLang="en-US" dirty="0"/>
+              <a:t> </a:t>
+            </a:r>
+            <a:r>
+              <a:rPr lang="en-US" altLang="zh-TW" dirty="0"/>
+              <a:t>(30epoch)</a:t>
+            </a:r>
+            <a:endParaRPr lang="zh-TW" altLang="en-US" dirty="0"/>
+          </a:p>
+        </p:txBody>
+      </p:sp>
+      <p:pic>
+        <p:nvPicPr>
+          <p:cNvPr id="8" name="圖片 7">
+            <a:extLst>
+              <a:ext uri="{FF2B5EF4-FFF2-40B4-BE49-F238E27FC236}">
+                <a16:creationId xmlns:a16="http://schemas.microsoft.com/office/drawing/2014/main" id="{2C19BE59-2A91-1CAB-800B-050C2A6565F1}"/>
+              </a:ext>
+            </a:extLst>
+          </p:cNvPr>
+          <p:cNvPicPr>
+            <a:picLocks noChangeAspect="1"/>
+          </p:cNvPicPr>
+          <p:nvPr/>
+        </p:nvPicPr>
+        <p:blipFill>
+          <a:blip r:embed="rId3"/>
+          <a:stretch>
+            <a:fillRect/>
+          </a:stretch>
+        </p:blipFill>
+        <p:spPr>
+          <a:xfrm>
+            <a:off x="3016596" y="693738"/>
+            <a:ext cx="3178108" cy="738696"/>
+          </a:xfrm>
+          <a:prstGeom prst="rect">
+            <a:avLst/>
+          </a:prstGeom>
+        </p:spPr>
+      </p:pic>
+      <p:pic>
+        <p:nvPicPr>
+          <p:cNvPr id="10" name="圖片 9">
+            <a:extLst>
+              <a:ext uri="{FF2B5EF4-FFF2-40B4-BE49-F238E27FC236}">
+                <a16:creationId xmlns:a16="http://schemas.microsoft.com/office/drawing/2014/main" id="{F2822FB1-AC7A-B299-9897-3AA830A5EF9F}"/>
+              </a:ext>
+            </a:extLst>
+          </p:cNvPr>
+          <p:cNvPicPr>
+            <a:picLocks noChangeAspect="1"/>
+          </p:cNvPicPr>
+          <p:nvPr/>
+        </p:nvPicPr>
+        <p:blipFill>
+          <a:blip r:embed="rId4"/>
+          <a:stretch>
+            <a:fillRect/>
+          </a:stretch>
+        </p:blipFill>
+        <p:spPr>
+          <a:xfrm>
+            <a:off x="2992300" y="1456397"/>
+            <a:ext cx="3291429" cy="825871"/>
+          </a:xfrm>
+          <a:prstGeom prst="rect">
+            <a:avLst/>
+          </a:prstGeom>
+        </p:spPr>
+      </p:pic>
+      <p:pic>
+        <p:nvPicPr>
+          <p:cNvPr id="12" name="圖片 11">
+            <a:extLst>
+              <a:ext uri="{FF2B5EF4-FFF2-40B4-BE49-F238E27FC236}">
+                <a16:creationId xmlns:a16="http://schemas.microsoft.com/office/drawing/2014/main" id="{C58072D2-0180-4C09-6E2A-D141E27762F0}"/>
+              </a:ext>
+            </a:extLst>
+          </p:cNvPr>
+          <p:cNvPicPr>
+            <a:picLocks noChangeAspect="1"/>
+          </p:cNvPicPr>
+          <p:nvPr/>
+        </p:nvPicPr>
+        <p:blipFill>
+          <a:blip r:embed="rId5"/>
+          <a:stretch>
+            <a:fillRect/>
+          </a:stretch>
+        </p:blipFill>
+        <p:spPr>
+          <a:xfrm>
+            <a:off x="6772015" y="693738"/>
+            <a:ext cx="3333625" cy="825871"/>
+          </a:xfrm>
+          <a:prstGeom prst="rect">
+            <a:avLst/>
+          </a:prstGeom>
+        </p:spPr>
+      </p:pic>
+      <p:pic>
+        <p:nvPicPr>
+          <p:cNvPr id="14" name="圖片 13">
+            <a:extLst>
+              <a:ext uri="{FF2B5EF4-FFF2-40B4-BE49-F238E27FC236}">
+                <a16:creationId xmlns:a16="http://schemas.microsoft.com/office/drawing/2014/main" id="{8C893E51-F04B-0DDB-2CBF-082CE14D1740}"/>
+              </a:ext>
+            </a:extLst>
+          </p:cNvPr>
+          <p:cNvPicPr>
+            <a:picLocks noChangeAspect="1"/>
+          </p:cNvPicPr>
+          <p:nvPr/>
+        </p:nvPicPr>
+        <p:blipFill>
+          <a:blip r:embed="rId6"/>
+          <a:stretch>
+            <a:fillRect/>
+          </a:stretch>
+        </p:blipFill>
+        <p:spPr>
+          <a:xfrm>
+            <a:off x="6747719" y="1558876"/>
+            <a:ext cx="3393909" cy="723392"/>
+          </a:xfrm>
+          <a:prstGeom prst="rect">
+            <a:avLst/>
+          </a:prstGeom>
+        </p:spPr>
+      </p:pic>
+      <p:pic>
+        <p:nvPicPr>
+          <p:cNvPr id="18" name="圖片 17">
+            <a:extLst>
+              <a:ext uri="{FF2B5EF4-FFF2-40B4-BE49-F238E27FC236}">
+                <a16:creationId xmlns:a16="http://schemas.microsoft.com/office/drawing/2014/main" id="{120B48D4-7366-D193-BBB1-31DA1EB8A9B5}"/>
+              </a:ext>
+            </a:extLst>
+          </p:cNvPr>
+          <p:cNvPicPr>
+            <a:picLocks noChangeAspect="1"/>
+          </p:cNvPicPr>
+          <p:nvPr/>
+        </p:nvPicPr>
+        <p:blipFill>
+          <a:blip r:embed="rId7"/>
+          <a:stretch>
+            <a:fillRect/>
+          </a:stretch>
+        </p:blipFill>
+        <p:spPr>
+          <a:xfrm>
+            <a:off x="607342" y="2633957"/>
+            <a:ext cx="2030165" cy="2106775"/>
+          </a:xfrm>
+          <a:prstGeom prst="rect">
+            <a:avLst/>
+          </a:prstGeom>
+        </p:spPr>
+      </p:pic>
+      <p:pic>
+        <p:nvPicPr>
+          <p:cNvPr id="20" name="圖片 19">
+            <a:extLst>
+              <a:ext uri="{FF2B5EF4-FFF2-40B4-BE49-F238E27FC236}">
+                <a16:creationId xmlns:a16="http://schemas.microsoft.com/office/drawing/2014/main" id="{F49AA887-75EB-7440-484C-ED6DAF5E839C}"/>
+              </a:ext>
+            </a:extLst>
+          </p:cNvPr>
+          <p:cNvPicPr>
+            <a:picLocks noChangeAspect="1"/>
+          </p:cNvPicPr>
+          <p:nvPr/>
+        </p:nvPicPr>
+        <p:blipFill>
+          <a:blip r:embed="rId8"/>
+          <a:stretch>
+            <a:fillRect/>
+          </a:stretch>
+        </p:blipFill>
+        <p:spPr>
+          <a:xfrm>
+            <a:off x="2992300" y="2866217"/>
+            <a:ext cx="3516432" cy="821127"/>
+          </a:xfrm>
+          <a:prstGeom prst="rect">
+            <a:avLst/>
+          </a:prstGeom>
+        </p:spPr>
+      </p:pic>
+      <p:pic>
+        <p:nvPicPr>
+          <p:cNvPr id="22" name="圖片 21">
+            <a:extLst>
+              <a:ext uri="{FF2B5EF4-FFF2-40B4-BE49-F238E27FC236}">
+                <a16:creationId xmlns:a16="http://schemas.microsoft.com/office/drawing/2014/main" id="{1C550CA4-CF98-3642-4CF9-A14D1CFC2632}"/>
+              </a:ext>
+            </a:extLst>
+          </p:cNvPr>
+          <p:cNvPicPr>
+            <a:picLocks noChangeAspect="1"/>
+          </p:cNvPicPr>
+          <p:nvPr/>
+        </p:nvPicPr>
+        <p:blipFill>
+          <a:blip r:embed="rId9"/>
+          <a:stretch>
+            <a:fillRect/>
+          </a:stretch>
+        </p:blipFill>
+        <p:spPr>
+          <a:xfrm>
+            <a:off x="3016597" y="3717088"/>
+            <a:ext cx="3382824" cy="1023644"/>
+          </a:xfrm>
+          <a:prstGeom prst="rect">
+            <a:avLst/>
+          </a:prstGeom>
+        </p:spPr>
+      </p:pic>
+      <p:pic>
+        <p:nvPicPr>
+          <p:cNvPr id="24" name="圖片 23">
+            <a:extLst>
+              <a:ext uri="{FF2B5EF4-FFF2-40B4-BE49-F238E27FC236}">
+                <a16:creationId xmlns:a16="http://schemas.microsoft.com/office/drawing/2014/main" id="{9E20B7B5-8625-8911-4353-4AC091C4DABF}"/>
+              </a:ext>
+            </a:extLst>
+          </p:cNvPr>
+          <p:cNvPicPr>
+            <a:picLocks noChangeAspect="1"/>
+          </p:cNvPicPr>
+          <p:nvPr/>
+        </p:nvPicPr>
+        <p:blipFill>
+          <a:blip r:embed="rId10"/>
+          <a:stretch>
+            <a:fillRect/>
+          </a:stretch>
+        </p:blipFill>
+        <p:spPr>
+          <a:xfrm>
+            <a:off x="6863525" y="2790248"/>
+            <a:ext cx="2876638" cy="926840"/>
+          </a:xfrm>
+          <a:prstGeom prst="rect">
+            <a:avLst/>
+          </a:prstGeom>
+        </p:spPr>
+      </p:pic>
+      <p:pic>
+        <p:nvPicPr>
+          <p:cNvPr id="26" name="圖片 25">
+            <a:extLst>
+              <a:ext uri="{FF2B5EF4-FFF2-40B4-BE49-F238E27FC236}">
+                <a16:creationId xmlns:a16="http://schemas.microsoft.com/office/drawing/2014/main" id="{B37045AC-C1B6-553D-7ACE-6717B86E1651}"/>
+              </a:ext>
+            </a:extLst>
+          </p:cNvPr>
+          <p:cNvPicPr>
+            <a:picLocks noChangeAspect="1"/>
+          </p:cNvPicPr>
+          <p:nvPr/>
+        </p:nvPicPr>
+        <p:blipFill>
+          <a:blip r:embed="rId11"/>
+          <a:stretch>
+            <a:fillRect/>
+          </a:stretch>
+        </p:blipFill>
+        <p:spPr>
+          <a:xfrm>
+            <a:off x="6803145" y="3757214"/>
+            <a:ext cx="3302495" cy="935707"/>
+          </a:xfrm>
+          <a:prstGeom prst="rect">
+            <a:avLst/>
+          </a:prstGeom>
+        </p:spPr>
+      </p:pic>
+      <p:pic>
+        <p:nvPicPr>
+          <p:cNvPr id="3" name="圖片 2">
+            <a:extLst>
+              <a:ext uri="{FF2B5EF4-FFF2-40B4-BE49-F238E27FC236}">
+                <a16:creationId xmlns:a16="http://schemas.microsoft.com/office/drawing/2014/main" id="{09D59482-12BB-A1B4-9FF5-B3E4D078C5FA}"/>
+              </a:ext>
+            </a:extLst>
+          </p:cNvPr>
+          <p:cNvPicPr>
+            <a:picLocks noChangeAspect="1"/>
+          </p:cNvPicPr>
+          <p:nvPr/>
+        </p:nvPicPr>
+        <p:blipFill>
+          <a:blip r:embed="rId12"/>
+          <a:stretch>
+            <a:fillRect/>
+          </a:stretch>
+        </p:blipFill>
+        <p:spPr>
+          <a:xfrm>
+            <a:off x="712838" y="4914952"/>
+            <a:ext cx="1815472" cy="1880754"/>
+          </a:xfrm>
+          <a:prstGeom prst="rect">
+            <a:avLst/>
+          </a:prstGeom>
+        </p:spPr>
+      </p:pic>
+      <p:pic>
+        <p:nvPicPr>
+          <p:cNvPr id="7" name="圖片 6">
+            <a:extLst>
+              <a:ext uri="{FF2B5EF4-FFF2-40B4-BE49-F238E27FC236}">
+                <a16:creationId xmlns:a16="http://schemas.microsoft.com/office/drawing/2014/main" id="{96FD2FF7-2105-EEFF-6DB8-5F26313E1360}"/>
+              </a:ext>
+            </a:extLst>
+          </p:cNvPr>
+          <p:cNvPicPr>
+            <a:picLocks noChangeAspect="1"/>
+          </p:cNvPicPr>
+          <p:nvPr/>
+        </p:nvPicPr>
+        <p:blipFill>
+          <a:blip r:embed="rId13"/>
+          <a:stretch>
+            <a:fillRect/>
+          </a:stretch>
+        </p:blipFill>
+        <p:spPr>
+          <a:xfrm>
+            <a:off x="3040980" y="4914952"/>
+            <a:ext cx="2649217" cy="817581"/>
+          </a:xfrm>
+          <a:prstGeom prst="rect">
+            <a:avLst/>
+          </a:prstGeom>
+        </p:spPr>
+      </p:pic>
+      <p:pic>
+        <p:nvPicPr>
+          <p:cNvPr id="11" name="圖片 10">
+            <a:extLst>
+              <a:ext uri="{FF2B5EF4-FFF2-40B4-BE49-F238E27FC236}">
+                <a16:creationId xmlns:a16="http://schemas.microsoft.com/office/drawing/2014/main" id="{521FB564-26BC-2BEB-FD32-A23E37A35FA3}"/>
+              </a:ext>
+            </a:extLst>
+          </p:cNvPr>
+          <p:cNvPicPr>
+            <a:picLocks noChangeAspect="1"/>
+          </p:cNvPicPr>
+          <p:nvPr/>
+        </p:nvPicPr>
+        <p:blipFill>
+          <a:blip r:embed="rId14"/>
+          <a:stretch>
+            <a:fillRect/>
+          </a:stretch>
+        </p:blipFill>
+        <p:spPr>
+          <a:xfrm>
+            <a:off x="2992300" y="5887011"/>
+            <a:ext cx="2831275" cy="843359"/>
+          </a:xfrm>
+          <a:prstGeom prst="rect">
+            <a:avLst/>
+          </a:prstGeom>
+        </p:spPr>
+      </p:pic>
+      <p:pic>
+        <p:nvPicPr>
+          <p:cNvPr id="15" name="圖片 14">
+            <a:extLst>
+              <a:ext uri="{FF2B5EF4-FFF2-40B4-BE49-F238E27FC236}">
+                <a16:creationId xmlns:a16="http://schemas.microsoft.com/office/drawing/2014/main" id="{ED2F50FB-DD3E-1EAE-44A0-03F1E0E1508F}"/>
+              </a:ext>
+            </a:extLst>
+          </p:cNvPr>
+          <p:cNvPicPr>
+            <a:picLocks noChangeAspect="1"/>
+          </p:cNvPicPr>
+          <p:nvPr/>
+        </p:nvPicPr>
+        <p:blipFill>
+          <a:blip r:embed="rId15"/>
+          <a:stretch>
+            <a:fillRect/>
+          </a:stretch>
+        </p:blipFill>
+        <p:spPr>
+          <a:xfrm>
+            <a:off x="6747719" y="4919700"/>
+            <a:ext cx="2548254" cy="766258"/>
+          </a:xfrm>
+          <a:prstGeom prst="rect">
+            <a:avLst/>
+          </a:prstGeom>
+        </p:spPr>
+      </p:pic>
+      <p:pic>
+        <p:nvPicPr>
+          <p:cNvPr id="17" name="圖片 16">
+            <a:extLst>
+              <a:ext uri="{FF2B5EF4-FFF2-40B4-BE49-F238E27FC236}">
+                <a16:creationId xmlns:a16="http://schemas.microsoft.com/office/drawing/2014/main" id="{62E8CB75-0D9A-B948-D76F-679E53DE0807}"/>
+              </a:ext>
+            </a:extLst>
+          </p:cNvPr>
+          <p:cNvPicPr>
+            <a:picLocks noChangeAspect="1"/>
+          </p:cNvPicPr>
+          <p:nvPr/>
+        </p:nvPicPr>
+        <p:blipFill>
+          <a:blip r:embed="rId16"/>
+          <a:stretch>
+            <a:fillRect/>
+          </a:stretch>
+        </p:blipFill>
+        <p:spPr>
+          <a:xfrm>
+            <a:off x="6667965" y="5796090"/>
+            <a:ext cx="3473663" cy="999616"/>
+          </a:xfrm>
+          <a:prstGeom prst="rect">
+            <a:avLst/>
+          </a:prstGeom>
+        </p:spPr>
+      </p:pic>
+    </p:spTree>
+    <p:extLst>
+      <p:ext uri="{BB962C8B-B14F-4D97-AF65-F5344CB8AC3E}">
+        <p14:creationId xmlns:p14="http://schemas.microsoft.com/office/powerpoint/2010/main" val="1571061951"/>
+      </p:ext>
+    </p:extLst>
+  </p:cSld>
+  <p:clrMapOvr>
+    <a:masterClrMapping/>
+  </p:clrMapOvr>
+</p:sld>
+</file>
+
+<file path=ppt/slides/slide13.xml><?xml version="1.0" encoding="utf-8"?>
+<p:sld xmlns:a="http://schemas.openxmlformats.org/drawingml/2006/main" xmlns:r="http://schemas.openxmlformats.org/officeDocument/2006/relationships" xmlns:p="http://schemas.openxmlformats.org/presentationml/2006/main">
+  <p:cSld>
+    <p:spTree>
+      <p:nvGrpSpPr>
+        <p:cNvPr id="1" name=""/>
+        <p:cNvGrpSpPr/>
+        <p:nvPr/>
+      </p:nvGrpSpPr>
+      <p:grpSpPr>
+        <a:xfrm>
+          <a:off x="0" y="0"/>
+          <a:ext cx="0" cy="0"/>
+          <a:chOff x="0" y="0"/>
+          <a:chExt cx="0" cy="0"/>
+        </a:xfrm>
+      </p:grpSpPr>
+      <p:sp>
+        <p:nvSpPr>
+          <p:cNvPr id="4" name="文字方塊 3">
+            <a:extLst>
+              <a:ext uri="{FF2B5EF4-FFF2-40B4-BE49-F238E27FC236}">
+                <a16:creationId xmlns:a16="http://schemas.microsoft.com/office/drawing/2014/main" id="{A4DBF5AB-CD26-2F09-7A44-25C022443747}"/>
+              </a:ext>
+            </a:extLst>
+          </p:cNvPr>
+          <p:cNvSpPr txBox="1"/>
+          <p:nvPr/>
+        </p:nvSpPr>
+        <p:spPr>
+          <a:xfrm>
+            <a:off x="219456" y="35929"/>
+            <a:ext cx="2157984" cy="369332"/>
+          </a:xfrm>
+          <a:prstGeom prst="rect">
+            <a:avLst/>
+          </a:prstGeom>
+          <a:noFill/>
+        </p:spPr>
+        <p:txBody>
+          <a:bodyPr wrap="square" rtlCol="0">
+            <a:spAutoFit/>
+          </a:bodyPr>
+          <a:lstStyle/>
+          <a:p>
+            <a:r>
+              <a:rPr lang="en-US" altLang="zh-TW" dirty="0"/>
+              <a:t>CNN</a:t>
+            </a:r>
+            <a:r>
+              <a:rPr lang="zh-TW" altLang="en-US" dirty="0"/>
+              <a:t> </a:t>
+            </a:r>
+            <a:r>
+              <a:rPr lang="en-US" altLang="zh-TW" dirty="0"/>
+              <a:t>43</a:t>
+            </a:r>
+            <a:r>
+              <a:rPr lang="zh-TW" altLang="en-US" dirty="0"/>
+              <a:t> </a:t>
+            </a:r>
+            <a:r>
+              <a:rPr lang="en-US" altLang="zh-TW" dirty="0"/>
+              <a:t>(30epoch)</a:t>
+            </a:r>
+            <a:endParaRPr lang="zh-TW" altLang="en-US" dirty="0"/>
+          </a:p>
+        </p:txBody>
+      </p:sp>
+      <p:pic>
+        <p:nvPicPr>
+          <p:cNvPr id="6" name="圖片 5">
+            <a:extLst>
+              <a:ext uri="{FF2B5EF4-FFF2-40B4-BE49-F238E27FC236}">
+                <a16:creationId xmlns:a16="http://schemas.microsoft.com/office/drawing/2014/main" id="{AD6597A1-08F8-A982-AA2A-64624F134E8C}"/>
+              </a:ext>
+            </a:extLst>
+          </p:cNvPr>
+          <p:cNvPicPr>
+            <a:picLocks noChangeAspect="1"/>
+          </p:cNvPicPr>
+          <p:nvPr/>
+        </p:nvPicPr>
+        <p:blipFill>
+          <a:blip r:embed="rId2"/>
+          <a:stretch>
+            <a:fillRect/>
+          </a:stretch>
+        </p:blipFill>
+        <p:spPr>
+          <a:xfrm>
+            <a:off x="379460" y="542522"/>
+            <a:ext cx="1997980" cy="2045230"/>
+          </a:xfrm>
+          <a:prstGeom prst="rect">
+            <a:avLst/>
+          </a:prstGeom>
+        </p:spPr>
+      </p:pic>
+      <p:pic>
+        <p:nvPicPr>
+          <p:cNvPr id="8" name="圖片 7">
+            <a:extLst>
+              <a:ext uri="{FF2B5EF4-FFF2-40B4-BE49-F238E27FC236}">
+                <a16:creationId xmlns:a16="http://schemas.microsoft.com/office/drawing/2014/main" id="{23A0F0BB-0ACA-979E-9CA7-918771D41148}"/>
+              </a:ext>
+            </a:extLst>
+          </p:cNvPr>
+          <p:cNvPicPr>
+            <a:picLocks noChangeAspect="1"/>
+          </p:cNvPicPr>
+          <p:nvPr/>
+        </p:nvPicPr>
+        <p:blipFill>
+          <a:blip r:embed="rId3"/>
+          <a:stretch>
+            <a:fillRect/>
+          </a:stretch>
+        </p:blipFill>
+        <p:spPr>
+          <a:xfrm>
+            <a:off x="3231554" y="643808"/>
+            <a:ext cx="2721190" cy="805316"/>
+          </a:xfrm>
+          <a:prstGeom prst="rect">
+            <a:avLst/>
+          </a:prstGeom>
+        </p:spPr>
+      </p:pic>
+      <p:pic>
+        <p:nvPicPr>
+          <p:cNvPr id="10" name="圖片 9">
+            <a:extLst>
+              <a:ext uri="{FF2B5EF4-FFF2-40B4-BE49-F238E27FC236}">
+                <a16:creationId xmlns:a16="http://schemas.microsoft.com/office/drawing/2014/main" id="{7F9715C1-D186-3CD3-A7EC-E9CFDA01871B}"/>
+              </a:ext>
+            </a:extLst>
+          </p:cNvPr>
+          <p:cNvPicPr>
+            <a:picLocks noChangeAspect="1"/>
+          </p:cNvPicPr>
+          <p:nvPr/>
+        </p:nvPicPr>
+        <p:blipFill>
+          <a:blip r:embed="rId4"/>
+          <a:stretch>
+            <a:fillRect/>
+          </a:stretch>
+        </p:blipFill>
+        <p:spPr>
+          <a:xfrm>
+            <a:off x="3222411" y="1630212"/>
+            <a:ext cx="2873590" cy="885229"/>
+          </a:xfrm>
+          <a:prstGeom prst="rect">
+            <a:avLst/>
+          </a:prstGeom>
+        </p:spPr>
+      </p:pic>
+      <p:pic>
+        <p:nvPicPr>
+          <p:cNvPr id="12" name="圖片 11">
+            <a:extLst>
+              <a:ext uri="{FF2B5EF4-FFF2-40B4-BE49-F238E27FC236}">
+                <a16:creationId xmlns:a16="http://schemas.microsoft.com/office/drawing/2014/main" id="{F8013594-D9C0-55CC-E8F1-DD31332E0A9D}"/>
+              </a:ext>
+            </a:extLst>
+          </p:cNvPr>
+          <p:cNvPicPr>
+            <a:picLocks noChangeAspect="1"/>
+          </p:cNvPicPr>
+          <p:nvPr/>
+        </p:nvPicPr>
+        <p:blipFill>
+          <a:blip r:embed="rId5"/>
+          <a:stretch>
+            <a:fillRect/>
+          </a:stretch>
+        </p:blipFill>
+        <p:spPr>
+          <a:xfrm>
+            <a:off x="6806858" y="643808"/>
+            <a:ext cx="2904070" cy="860972"/>
+          </a:xfrm>
+          <a:prstGeom prst="rect">
+            <a:avLst/>
+          </a:prstGeom>
+        </p:spPr>
+      </p:pic>
+      <p:pic>
+        <p:nvPicPr>
+          <p:cNvPr id="14" name="圖片 13">
+            <a:extLst>
+              <a:ext uri="{FF2B5EF4-FFF2-40B4-BE49-F238E27FC236}">
+                <a16:creationId xmlns:a16="http://schemas.microsoft.com/office/drawing/2014/main" id="{F20D25D8-8671-414E-FB27-848F7407223C}"/>
+              </a:ext>
+            </a:extLst>
+          </p:cNvPr>
+          <p:cNvPicPr>
+            <a:picLocks noChangeAspect="1"/>
+          </p:cNvPicPr>
+          <p:nvPr/>
+        </p:nvPicPr>
+        <p:blipFill>
+          <a:blip r:embed="rId6"/>
+          <a:stretch>
+            <a:fillRect/>
+          </a:stretch>
+        </p:blipFill>
+        <p:spPr>
+          <a:xfrm>
+            <a:off x="6806858" y="1708892"/>
+            <a:ext cx="2873590" cy="855235"/>
+          </a:xfrm>
+          <a:prstGeom prst="rect">
+            <a:avLst/>
+          </a:prstGeom>
+        </p:spPr>
+      </p:pic>
+      <p:pic>
+        <p:nvPicPr>
+          <p:cNvPr id="16" name="圖片 15">
+            <a:extLst>
+              <a:ext uri="{FF2B5EF4-FFF2-40B4-BE49-F238E27FC236}">
+                <a16:creationId xmlns:a16="http://schemas.microsoft.com/office/drawing/2014/main" id="{6C189E10-3750-4247-4015-F5171026255B}"/>
+              </a:ext>
+            </a:extLst>
+          </p:cNvPr>
+          <p:cNvPicPr>
+            <a:picLocks noChangeAspect="1"/>
+          </p:cNvPicPr>
+          <p:nvPr/>
+        </p:nvPicPr>
+        <p:blipFill>
+          <a:blip r:embed="rId7"/>
+          <a:stretch>
+            <a:fillRect/>
+          </a:stretch>
+        </p:blipFill>
+        <p:spPr>
+          <a:xfrm>
+            <a:off x="440420" y="2562079"/>
+            <a:ext cx="2071132" cy="2148755"/>
+          </a:xfrm>
+          <a:prstGeom prst="rect">
+            <a:avLst/>
+          </a:prstGeom>
+        </p:spPr>
+      </p:pic>
+      <p:pic>
+        <p:nvPicPr>
+          <p:cNvPr id="18" name="圖片 17">
+            <a:extLst>
+              <a:ext uri="{FF2B5EF4-FFF2-40B4-BE49-F238E27FC236}">
+                <a16:creationId xmlns:a16="http://schemas.microsoft.com/office/drawing/2014/main" id="{18E54E59-7FE0-C898-D078-2421A75288DB}"/>
+              </a:ext>
+            </a:extLst>
+          </p:cNvPr>
+          <p:cNvPicPr>
+            <a:picLocks noChangeAspect="1"/>
+          </p:cNvPicPr>
+          <p:nvPr/>
+        </p:nvPicPr>
+        <p:blipFill>
+          <a:blip r:embed="rId8"/>
+          <a:stretch>
+            <a:fillRect/>
+          </a:stretch>
+        </p:blipFill>
+        <p:spPr>
+          <a:xfrm>
+            <a:off x="3222411" y="2696529"/>
+            <a:ext cx="2920558" cy="885229"/>
+          </a:xfrm>
+          <a:prstGeom prst="rect">
+            <a:avLst/>
+          </a:prstGeom>
+        </p:spPr>
+      </p:pic>
+      <p:pic>
+        <p:nvPicPr>
+          <p:cNvPr id="20" name="圖片 19">
+            <a:extLst>
+              <a:ext uri="{FF2B5EF4-FFF2-40B4-BE49-F238E27FC236}">
+                <a16:creationId xmlns:a16="http://schemas.microsoft.com/office/drawing/2014/main" id="{F5663335-6C4C-5306-3590-EE60543924C4}"/>
+              </a:ext>
+            </a:extLst>
+          </p:cNvPr>
+          <p:cNvPicPr>
+            <a:picLocks noChangeAspect="1"/>
+          </p:cNvPicPr>
+          <p:nvPr/>
+        </p:nvPicPr>
+        <p:blipFill>
+          <a:blip r:embed="rId9"/>
+          <a:stretch>
+            <a:fillRect/>
+          </a:stretch>
+        </p:blipFill>
+        <p:spPr>
+          <a:xfrm>
+            <a:off x="3231555" y="3762846"/>
+            <a:ext cx="2864446" cy="851955"/>
+          </a:xfrm>
+          <a:prstGeom prst="rect">
+            <a:avLst/>
+          </a:prstGeom>
+        </p:spPr>
+      </p:pic>
+      <p:pic>
+        <p:nvPicPr>
+          <p:cNvPr id="22" name="圖片 21">
+            <a:extLst>
+              <a:ext uri="{FF2B5EF4-FFF2-40B4-BE49-F238E27FC236}">
+                <a16:creationId xmlns:a16="http://schemas.microsoft.com/office/drawing/2014/main" id="{D0136CDE-73BA-5F50-9057-C7B7D5F4F2B9}"/>
+              </a:ext>
+            </a:extLst>
+          </p:cNvPr>
+          <p:cNvPicPr>
+            <a:picLocks noChangeAspect="1"/>
+          </p:cNvPicPr>
+          <p:nvPr/>
+        </p:nvPicPr>
+        <p:blipFill>
+          <a:blip r:embed="rId10"/>
+          <a:stretch>
+            <a:fillRect/>
+          </a:stretch>
+        </p:blipFill>
+        <p:spPr>
+          <a:xfrm>
+            <a:off x="6817719" y="2696529"/>
+            <a:ext cx="2930232" cy="855235"/>
+          </a:xfrm>
+          <a:prstGeom prst="rect">
+            <a:avLst/>
+          </a:prstGeom>
+        </p:spPr>
+      </p:pic>
+      <p:pic>
+        <p:nvPicPr>
+          <p:cNvPr id="24" name="圖片 23">
+            <a:extLst>
+              <a:ext uri="{FF2B5EF4-FFF2-40B4-BE49-F238E27FC236}">
+                <a16:creationId xmlns:a16="http://schemas.microsoft.com/office/drawing/2014/main" id="{A20D0B39-513E-F4BB-5FF5-E4021483CBC3}"/>
+              </a:ext>
+            </a:extLst>
+          </p:cNvPr>
+          <p:cNvPicPr>
+            <a:picLocks noChangeAspect="1"/>
+          </p:cNvPicPr>
+          <p:nvPr/>
+        </p:nvPicPr>
+        <p:blipFill>
+          <a:blip r:embed="rId11"/>
+          <a:stretch>
+            <a:fillRect/>
+          </a:stretch>
+        </p:blipFill>
+        <p:spPr>
+          <a:xfrm>
+            <a:off x="6806858" y="3712768"/>
+            <a:ext cx="2905027" cy="851955"/>
+          </a:xfrm>
+          <a:prstGeom prst="rect">
+            <a:avLst/>
+          </a:prstGeom>
+        </p:spPr>
+      </p:pic>
+      <p:pic>
+        <p:nvPicPr>
+          <p:cNvPr id="26" name="圖片 25">
+            <a:extLst>
+              <a:ext uri="{FF2B5EF4-FFF2-40B4-BE49-F238E27FC236}">
+                <a16:creationId xmlns:a16="http://schemas.microsoft.com/office/drawing/2014/main" id="{0693C3A1-E78F-E7F3-66B4-8983FB5FD748}"/>
+              </a:ext>
+            </a:extLst>
+          </p:cNvPr>
+          <p:cNvPicPr>
+            <a:picLocks noChangeAspect="1"/>
+          </p:cNvPicPr>
+          <p:nvPr/>
+        </p:nvPicPr>
+        <p:blipFill>
+          <a:blip r:embed="rId12"/>
+          <a:stretch>
+            <a:fillRect/>
+          </a:stretch>
+        </p:blipFill>
+        <p:spPr>
+          <a:xfrm>
+            <a:off x="602924" y="4771884"/>
+            <a:ext cx="1997981" cy="2052627"/>
+          </a:xfrm>
+          <a:prstGeom prst="rect">
+            <a:avLst/>
+          </a:prstGeom>
+        </p:spPr>
+      </p:pic>
+      <p:pic>
+        <p:nvPicPr>
+          <p:cNvPr id="28" name="圖片 27">
+            <a:extLst>
+              <a:ext uri="{FF2B5EF4-FFF2-40B4-BE49-F238E27FC236}">
+                <a16:creationId xmlns:a16="http://schemas.microsoft.com/office/drawing/2014/main" id="{C37179D8-F49F-A120-8811-63F9244B656B}"/>
+              </a:ext>
+            </a:extLst>
+          </p:cNvPr>
+          <p:cNvPicPr>
+            <a:picLocks noChangeAspect="1"/>
+          </p:cNvPicPr>
+          <p:nvPr/>
+        </p:nvPicPr>
+        <p:blipFill>
+          <a:blip r:embed="rId13"/>
+          <a:stretch>
+            <a:fillRect/>
+          </a:stretch>
+        </p:blipFill>
+        <p:spPr>
+          <a:xfrm>
+            <a:off x="3231554" y="4771884"/>
+            <a:ext cx="2864446" cy="868221"/>
+          </a:xfrm>
+          <a:prstGeom prst="rect">
+            <a:avLst/>
+          </a:prstGeom>
+        </p:spPr>
+      </p:pic>
+      <p:pic>
+        <p:nvPicPr>
+          <p:cNvPr id="30" name="圖片 29">
+            <a:extLst>
+              <a:ext uri="{FF2B5EF4-FFF2-40B4-BE49-F238E27FC236}">
+                <a16:creationId xmlns:a16="http://schemas.microsoft.com/office/drawing/2014/main" id="{4F332E5B-263C-0CA0-3660-416A88C887A9}"/>
+              </a:ext>
+            </a:extLst>
+          </p:cNvPr>
+          <p:cNvPicPr>
+            <a:picLocks noChangeAspect="1"/>
+          </p:cNvPicPr>
+          <p:nvPr/>
+        </p:nvPicPr>
+        <p:blipFill>
+          <a:blip r:embed="rId14"/>
+          <a:stretch>
+            <a:fillRect/>
+          </a:stretch>
+        </p:blipFill>
+        <p:spPr>
+          <a:xfrm>
+            <a:off x="3222411" y="5894717"/>
+            <a:ext cx="2720250" cy="831921"/>
+          </a:xfrm>
+          <a:prstGeom prst="rect">
+            <a:avLst/>
+          </a:prstGeom>
+        </p:spPr>
+      </p:pic>
+      <p:pic>
+        <p:nvPicPr>
+          <p:cNvPr id="32" name="圖片 31">
+            <a:extLst>
+              <a:ext uri="{FF2B5EF4-FFF2-40B4-BE49-F238E27FC236}">
+                <a16:creationId xmlns:a16="http://schemas.microsoft.com/office/drawing/2014/main" id="{DB4F628C-4831-D727-D060-0CD4B4157CFF}"/>
+              </a:ext>
+            </a:extLst>
+          </p:cNvPr>
+          <p:cNvPicPr>
+            <a:picLocks noChangeAspect="1"/>
+          </p:cNvPicPr>
+          <p:nvPr/>
+        </p:nvPicPr>
+        <p:blipFill>
+          <a:blip r:embed="rId15"/>
+          <a:stretch>
+            <a:fillRect/>
+          </a:stretch>
+        </p:blipFill>
+        <p:spPr>
+          <a:xfrm>
+            <a:off x="6637201" y="4683121"/>
+            <a:ext cx="2864446" cy="931973"/>
+          </a:xfrm>
+          <a:prstGeom prst="rect">
+            <a:avLst/>
+          </a:prstGeom>
+        </p:spPr>
+      </p:pic>
+      <p:pic>
+        <p:nvPicPr>
+          <p:cNvPr id="34" name="圖片 33">
+            <a:extLst>
+              <a:ext uri="{FF2B5EF4-FFF2-40B4-BE49-F238E27FC236}">
+                <a16:creationId xmlns:a16="http://schemas.microsoft.com/office/drawing/2014/main" id="{4F6D0BC3-9B52-4462-BEFF-65ADC4C7C669}"/>
+              </a:ext>
+            </a:extLst>
+          </p:cNvPr>
+          <p:cNvPicPr>
+            <a:picLocks noChangeAspect="1"/>
+          </p:cNvPicPr>
+          <p:nvPr/>
+        </p:nvPicPr>
+        <p:blipFill>
+          <a:blip r:embed="rId16"/>
+          <a:stretch>
+            <a:fillRect/>
+          </a:stretch>
+        </p:blipFill>
+        <p:spPr>
+          <a:xfrm>
+            <a:off x="6564167" y="5733493"/>
+            <a:ext cx="2864446" cy="847712"/>
+          </a:xfrm>
+          <a:prstGeom prst="rect">
+            <a:avLst/>
+          </a:prstGeom>
+        </p:spPr>
+      </p:pic>
+    </p:spTree>
+    <p:extLst>
+      <p:ext uri="{BB962C8B-B14F-4D97-AF65-F5344CB8AC3E}">
+        <p14:creationId xmlns:p14="http://schemas.microsoft.com/office/powerpoint/2010/main" val="1938859620"/>
+      </p:ext>
+    </p:extLst>
+  </p:cSld>
+  <p:clrMapOvr>
+    <a:masterClrMapping/>
+  </p:clrMapOvr>
+</p:sld>
+</file>
+
+<file path=ppt/slides/slide14.xml><?xml version="1.0" encoding="utf-8"?>
+<p:sld xmlns:a="http://schemas.openxmlformats.org/drawingml/2006/main" xmlns:r="http://schemas.openxmlformats.org/officeDocument/2006/relationships" xmlns:p="http://schemas.openxmlformats.org/presentationml/2006/main">
+  <p:cSld>
+    <p:spTree>
+      <p:nvGrpSpPr>
+        <p:cNvPr id="1" name=""/>
+        <p:cNvGrpSpPr/>
+        <p:nvPr/>
+      </p:nvGrpSpPr>
+      <p:grpSpPr>
+        <a:xfrm>
+          <a:off x="0" y="0"/>
+          <a:ext cx="0" cy="0"/>
+          <a:chOff x="0" y="0"/>
+          <a:chExt cx="0" cy="0"/>
+        </a:xfrm>
+      </p:grpSpPr>
+      <p:sp>
+        <p:nvSpPr>
+          <p:cNvPr id="4" name="文字方塊 3">
+            <a:extLst>
+              <a:ext uri="{FF2B5EF4-FFF2-40B4-BE49-F238E27FC236}">
+                <a16:creationId xmlns:a16="http://schemas.microsoft.com/office/drawing/2014/main" id="{4E3270FE-CEDA-2D1F-0D08-D8AF750ABF8C}"/>
+              </a:ext>
+            </a:extLst>
+          </p:cNvPr>
+          <p:cNvSpPr txBox="1"/>
+          <p:nvPr/>
+        </p:nvSpPr>
+        <p:spPr>
+          <a:xfrm>
+            <a:off x="219456" y="35929"/>
+            <a:ext cx="2157984" cy="369332"/>
+          </a:xfrm>
+          <a:prstGeom prst="rect">
+            <a:avLst/>
+          </a:prstGeom>
+          <a:noFill/>
+        </p:spPr>
+        <p:txBody>
+          <a:bodyPr wrap="square" rtlCol="0">
+            <a:spAutoFit/>
+          </a:bodyPr>
+          <a:lstStyle/>
+          <a:p>
+            <a:r>
+              <a:rPr lang="en-US" altLang="zh-TW" dirty="0"/>
+              <a:t>CNN</a:t>
+            </a:r>
+            <a:r>
+              <a:rPr lang="zh-TW" altLang="en-US" dirty="0"/>
+              <a:t> </a:t>
+            </a:r>
+            <a:r>
+              <a:rPr lang="en-US" altLang="zh-TW" dirty="0"/>
+              <a:t>43</a:t>
+            </a:r>
+            <a:r>
+              <a:rPr lang="zh-TW" altLang="en-US" dirty="0"/>
+              <a:t> </a:t>
+            </a:r>
+            <a:r>
+              <a:rPr lang="en-US" altLang="zh-TW" dirty="0"/>
+              <a:t>(30epoch)</a:t>
+            </a:r>
+            <a:endParaRPr lang="zh-TW" altLang="en-US" dirty="0"/>
+          </a:p>
+        </p:txBody>
+      </p:sp>
+      <p:pic>
+        <p:nvPicPr>
+          <p:cNvPr id="6" name="圖片 5">
+            <a:extLst>
+              <a:ext uri="{FF2B5EF4-FFF2-40B4-BE49-F238E27FC236}">
+                <a16:creationId xmlns:a16="http://schemas.microsoft.com/office/drawing/2014/main" id="{F1BEA9EF-C13A-5B93-B261-49C1BA38948C}"/>
+              </a:ext>
+            </a:extLst>
+          </p:cNvPr>
+          <p:cNvPicPr>
+            <a:picLocks noChangeAspect="1"/>
+          </p:cNvPicPr>
+          <p:nvPr/>
+        </p:nvPicPr>
+        <p:blipFill>
+          <a:blip r:embed="rId2"/>
+          <a:stretch>
+            <a:fillRect/>
+          </a:stretch>
+        </p:blipFill>
+        <p:spPr>
+          <a:xfrm>
+            <a:off x="310896" y="542422"/>
+            <a:ext cx="2496312" cy="1771054"/>
+          </a:xfrm>
+          <a:prstGeom prst="rect">
+            <a:avLst/>
+          </a:prstGeom>
+        </p:spPr>
+      </p:pic>
+      <p:pic>
+        <p:nvPicPr>
+          <p:cNvPr id="8" name="圖片 7">
+            <a:extLst>
+              <a:ext uri="{FF2B5EF4-FFF2-40B4-BE49-F238E27FC236}">
+                <a16:creationId xmlns:a16="http://schemas.microsoft.com/office/drawing/2014/main" id="{F5E0C30B-9089-F68D-9C34-7FFE90BBA2AC}"/>
+              </a:ext>
+            </a:extLst>
+          </p:cNvPr>
+          <p:cNvPicPr>
+            <a:picLocks noChangeAspect="1"/>
+          </p:cNvPicPr>
+          <p:nvPr/>
+        </p:nvPicPr>
+        <p:blipFill>
+          <a:blip r:embed="rId3"/>
+          <a:stretch>
+            <a:fillRect/>
+          </a:stretch>
+        </p:blipFill>
+        <p:spPr>
+          <a:xfrm>
+            <a:off x="3209681" y="619848"/>
+            <a:ext cx="3486637" cy="552527"/>
+          </a:xfrm>
+          <a:prstGeom prst="rect">
+            <a:avLst/>
+          </a:prstGeom>
+        </p:spPr>
+      </p:pic>
+      <p:pic>
+        <p:nvPicPr>
+          <p:cNvPr id="10" name="圖片 9">
+            <a:extLst>
+              <a:ext uri="{FF2B5EF4-FFF2-40B4-BE49-F238E27FC236}">
+                <a16:creationId xmlns:a16="http://schemas.microsoft.com/office/drawing/2014/main" id="{65CA63CC-CC41-11FE-BAA9-DED3414F4710}"/>
+              </a:ext>
+            </a:extLst>
+          </p:cNvPr>
+          <p:cNvPicPr>
+            <a:picLocks noChangeAspect="1"/>
+          </p:cNvPicPr>
+          <p:nvPr/>
+        </p:nvPicPr>
+        <p:blipFill>
+          <a:blip r:embed="rId4"/>
+          <a:stretch>
+            <a:fillRect/>
+          </a:stretch>
+        </p:blipFill>
+        <p:spPr>
+          <a:xfrm>
+            <a:off x="3323997" y="1373085"/>
+            <a:ext cx="3372321" cy="523948"/>
+          </a:xfrm>
+          <a:prstGeom prst="rect">
+            <a:avLst/>
+          </a:prstGeom>
+        </p:spPr>
+      </p:pic>
+      <p:pic>
+        <p:nvPicPr>
+          <p:cNvPr id="12" name="圖片 11">
+            <a:extLst>
+              <a:ext uri="{FF2B5EF4-FFF2-40B4-BE49-F238E27FC236}">
+                <a16:creationId xmlns:a16="http://schemas.microsoft.com/office/drawing/2014/main" id="{E971427C-D5CD-E56A-9DA3-07F5F9E9F56C}"/>
+              </a:ext>
+            </a:extLst>
+          </p:cNvPr>
+          <p:cNvPicPr>
+            <a:picLocks noChangeAspect="1"/>
+          </p:cNvPicPr>
+          <p:nvPr/>
+        </p:nvPicPr>
+        <p:blipFill>
+          <a:blip r:embed="rId5"/>
+          <a:stretch>
+            <a:fillRect/>
+          </a:stretch>
+        </p:blipFill>
+        <p:spPr>
+          <a:xfrm>
+            <a:off x="6862530" y="667473"/>
+            <a:ext cx="3324689" cy="523948"/>
+          </a:xfrm>
+          <a:prstGeom prst="rect">
+            <a:avLst/>
+          </a:prstGeom>
+        </p:spPr>
+      </p:pic>
+      <p:pic>
+        <p:nvPicPr>
+          <p:cNvPr id="14" name="圖片 13">
+            <a:extLst>
+              <a:ext uri="{FF2B5EF4-FFF2-40B4-BE49-F238E27FC236}">
+                <a16:creationId xmlns:a16="http://schemas.microsoft.com/office/drawing/2014/main" id="{3C524382-E7AD-73E4-55EB-04CF4EBDDC83}"/>
+              </a:ext>
+            </a:extLst>
+          </p:cNvPr>
+          <p:cNvPicPr>
+            <a:picLocks noChangeAspect="1"/>
+          </p:cNvPicPr>
+          <p:nvPr/>
+        </p:nvPicPr>
+        <p:blipFill>
+          <a:blip r:embed="rId6"/>
+          <a:stretch>
+            <a:fillRect/>
+          </a:stretch>
+        </p:blipFill>
+        <p:spPr>
+          <a:xfrm>
+            <a:off x="6862530" y="1468342"/>
+            <a:ext cx="3200847" cy="476316"/>
+          </a:xfrm>
+          <a:prstGeom prst="rect">
+            <a:avLst/>
+          </a:prstGeom>
+        </p:spPr>
+      </p:pic>
+      <p:pic>
+        <p:nvPicPr>
+          <p:cNvPr id="16" name="圖片 15">
+            <a:extLst>
+              <a:ext uri="{FF2B5EF4-FFF2-40B4-BE49-F238E27FC236}">
+                <a16:creationId xmlns:a16="http://schemas.microsoft.com/office/drawing/2014/main" id="{A1D24208-36AB-1F80-6816-ED8CFF3BBDCA}"/>
+              </a:ext>
+            </a:extLst>
+          </p:cNvPr>
+          <p:cNvPicPr>
+            <a:picLocks noChangeAspect="1"/>
+          </p:cNvPicPr>
+          <p:nvPr/>
+        </p:nvPicPr>
+        <p:blipFill>
+          <a:blip r:embed="rId7"/>
+          <a:stretch>
+            <a:fillRect/>
+          </a:stretch>
+        </p:blipFill>
+        <p:spPr>
+          <a:xfrm>
+            <a:off x="333506" y="2496777"/>
+            <a:ext cx="2473702" cy="1771055"/>
+          </a:xfrm>
+          <a:prstGeom prst="rect">
+            <a:avLst/>
+          </a:prstGeom>
+        </p:spPr>
+      </p:pic>
+      <p:pic>
+        <p:nvPicPr>
+          <p:cNvPr id="18" name="圖片 17">
+            <a:extLst>
+              <a:ext uri="{FF2B5EF4-FFF2-40B4-BE49-F238E27FC236}">
+                <a16:creationId xmlns:a16="http://schemas.microsoft.com/office/drawing/2014/main" id="{33E3C60C-71EC-770B-376B-58C5F6D7A55F}"/>
+              </a:ext>
+            </a:extLst>
+          </p:cNvPr>
+          <p:cNvPicPr>
+            <a:picLocks noChangeAspect="1"/>
+          </p:cNvPicPr>
+          <p:nvPr/>
+        </p:nvPicPr>
+        <p:blipFill>
+          <a:blip r:embed="rId8"/>
+          <a:stretch>
+            <a:fillRect/>
+          </a:stretch>
+        </p:blipFill>
+        <p:spPr>
+          <a:xfrm>
+            <a:off x="3323997" y="2496777"/>
+            <a:ext cx="3353268" cy="523948"/>
+          </a:xfrm>
+          <a:prstGeom prst="rect">
+            <a:avLst/>
+          </a:prstGeom>
+        </p:spPr>
+      </p:pic>
+      <p:pic>
+        <p:nvPicPr>
+          <p:cNvPr id="20" name="圖片 19">
+            <a:extLst>
+              <a:ext uri="{FF2B5EF4-FFF2-40B4-BE49-F238E27FC236}">
+                <a16:creationId xmlns:a16="http://schemas.microsoft.com/office/drawing/2014/main" id="{44725C50-0F56-6A6F-6E0C-FCD59981CE6E}"/>
+              </a:ext>
+            </a:extLst>
+          </p:cNvPr>
+          <p:cNvPicPr>
+            <a:picLocks noChangeAspect="1"/>
+          </p:cNvPicPr>
+          <p:nvPr/>
+        </p:nvPicPr>
+        <p:blipFill>
+          <a:blip r:embed="rId9"/>
+          <a:stretch>
+            <a:fillRect/>
+          </a:stretch>
+        </p:blipFill>
+        <p:spPr>
+          <a:xfrm>
+            <a:off x="3500197" y="3322854"/>
+            <a:ext cx="3439005" cy="514422"/>
+          </a:xfrm>
+          <a:prstGeom prst="rect">
+            <a:avLst/>
+          </a:prstGeom>
+        </p:spPr>
+      </p:pic>
+      <p:pic>
+        <p:nvPicPr>
+          <p:cNvPr id="22" name="圖片 21">
+            <a:extLst>
+              <a:ext uri="{FF2B5EF4-FFF2-40B4-BE49-F238E27FC236}">
+                <a16:creationId xmlns:a16="http://schemas.microsoft.com/office/drawing/2014/main" id="{F9B7A7C6-4066-68A4-2D76-848D3EEEF3D9}"/>
+              </a:ext>
+            </a:extLst>
+          </p:cNvPr>
+          <p:cNvPicPr>
+            <a:picLocks noChangeAspect="1"/>
+          </p:cNvPicPr>
+          <p:nvPr/>
+        </p:nvPicPr>
+        <p:blipFill>
+          <a:blip r:embed="rId10"/>
+          <a:stretch>
+            <a:fillRect/>
+          </a:stretch>
+        </p:blipFill>
+        <p:spPr>
+          <a:xfrm>
+            <a:off x="6833950" y="2444382"/>
+            <a:ext cx="3258005" cy="628738"/>
+          </a:xfrm>
+          <a:prstGeom prst="rect">
+            <a:avLst/>
+          </a:prstGeom>
+        </p:spPr>
+      </p:pic>
+      <p:pic>
+        <p:nvPicPr>
+          <p:cNvPr id="24" name="圖片 23">
+            <a:extLst>
+              <a:ext uri="{FF2B5EF4-FFF2-40B4-BE49-F238E27FC236}">
+                <a16:creationId xmlns:a16="http://schemas.microsoft.com/office/drawing/2014/main" id="{16C2F575-57E6-3158-93F7-113AD96FB30F}"/>
+              </a:ext>
+            </a:extLst>
+          </p:cNvPr>
+          <p:cNvPicPr>
+            <a:picLocks noChangeAspect="1"/>
+          </p:cNvPicPr>
+          <p:nvPr/>
+        </p:nvPicPr>
+        <p:blipFill>
+          <a:blip r:embed="rId11"/>
+          <a:stretch>
+            <a:fillRect/>
+          </a:stretch>
+        </p:blipFill>
+        <p:spPr>
+          <a:xfrm>
+            <a:off x="7091126" y="3318091"/>
+            <a:ext cx="3381847" cy="466790"/>
+          </a:xfrm>
+          <a:prstGeom prst="rect">
+            <a:avLst/>
+          </a:prstGeom>
+        </p:spPr>
+      </p:pic>
+      <p:pic>
+        <p:nvPicPr>
+          <p:cNvPr id="26" name="圖片 25">
+            <a:extLst>
+              <a:ext uri="{FF2B5EF4-FFF2-40B4-BE49-F238E27FC236}">
+                <a16:creationId xmlns:a16="http://schemas.microsoft.com/office/drawing/2014/main" id="{E9A2C410-A791-9F33-32BE-81D73CD6A19B}"/>
+              </a:ext>
+            </a:extLst>
+          </p:cNvPr>
+          <p:cNvPicPr>
+            <a:picLocks noChangeAspect="1"/>
+          </p:cNvPicPr>
+          <p:nvPr/>
+        </p:nvPicPr>
+        <p:blipFill>
+          <a:blip r:embed="rId12"/>
+          <a:stretch>
+            <a:fillRect/>
+          </a:stretch>
+        </p:blipFill>
+        <p:spPr>
+          <a:xfrm>
+            <a:off x="397723" y="4612130"/>
+            <a:ext cx="2619798" cy="1864417"/>
+          </a:xfrm>
+          <a:prstGeom prst="rect">
+            <a:avLst/>
+          </a:prstGeom>
+        </p:spPr>
+      </p:pic>
+      <p:pic>
+        <p:nvPicPr>
+          <p:cNvPr id="28" name="圖片 27">
+            <a:extLst>
+              <a:ext uri="{FF2B5EF4-FFF2-40B4-BE49-F238E27FC236}">
+                <a16:creationId xmlns:a16="http://schemas.microsoft.com/office/drawing/2014/main" id="{04A9B265-8535-35DE-AA28-34FDD2AAF279}"/>
+              </a:ext>
+            </a:extLst>
+          </p:cNvPr>
+          <p:cNvPicPr>
+            <a:picLocks noChangeAspect="1"/>
+          </p:cNvPicPr>
+          <p:nvPr/>
+        </p:nvPicPr>
+        <p:blipFill>
+          <a:blip r:embed="rId13"/>
+          <a:stretch>
+            <a:fillRect/>
+          </a:stretch>
+        </p:blipFill>
+        <p:spPr>
+          <a:xfrm>
+            <a:off x="3338249" y="4607747"/>
+            <a:ext cx="3600953" cy="466790"/>
+          </a:xfrm>
+          <a:prstGeom prst="rect">
+            <a:avLst/>
+          </a:prstGeom>
+        </p:spPr>
+      </p:pic>
+      <p:pic>
+        <p:nvPicPr>
+          <p:cNvPr id="30" name="圖片 29">
+            <a:extLst>
+              <a:ext uri="{FF2B5EF4-FFF2-40B4-BE49-F238E27FC236}">
+                <a16:creationId xmlns:a16="http://schemas.microsoft.com/office/drawing/2014/main" id="{496CA775-FF7C-5493-44DC-31F0230E009F}"/>
+              </a:ext>
+            </a:extLst>
+          </p:cNvPr>
+          <p:cNvPicPr>
+            <a:picLocks noChangeAspect="1"/>
+          </p:cNvPicPr>
+          <p:nvPr/>
+        </p:nvPicPr>
+        <p:blipFill>
+          <a:blip r:embed="rId14"/>
+          <a:stretch>
+            <a:fillRect/>
+          </a:stretch>
+        </p:blipFill>
+        <p:spPr>
+          <a:xfrm>
+            <a:off x="3442578" y="5380705"/>
+            <a:ext cx="3419952" cy="533474"/>
+          </a:xfrm>
+          <a:prstGeom prst="rect">
+            <a:avLst/>
+          </a:prstGeom>
+        </p:spPr>
+      </p:pic>
+      <p:pic>
+        <p:nvPicPr>
+          <p:cNvPr id="32" name="圖片 31">
+            <a:extLst>
+              <a:ext uri="{FF2B5EF4-FFF2-40B4-BE49-F238E27FC236}">
+                <a16:creationId xmlns:a16="http://schemas.microsoft.com/office/drawing/2014/main" id="{3EEC88C3-4915-0001-25D7-BD8B0B5C284D}"/>
+              </a:ext>
+            </a:extLst>
+          </p:cNvPr>
+          <p:cNvPicPr>
+            <a:picLocks noChangeAspect="1"/>
+          </p:cNvPicPr>
+          <p:nvPr/>
+        </p:nvPicPr>
+        <p:blipFill>
+          <a:blip r:embed="rId15"/>
+          <a:stretch>
+            <a:fillRect/>
+          </a:stretch>
+        </p:blipFill>
+        <p:spPr>
+          <a:xfrm>
+            <a:off x="7039172" y="4526773"/>
+            <a:ext cx="3305636" cy="628738"/>
+          </a:xfrm>
+          <a:prstGeom prst="rect">
+            <a:avLst/>
+          </a:prstGeom>
+        </p:spPr>
+      </p:pic>
+      <p:pic>
+        <p:nvPicPr>
+          <p:cNvPr id="34" name="圖片 33">
+            <a:extLst>
+              <a:ext uri="{FF2B5EF4-FFF2-40B4-BE49-F238E27FC236}">
+                <a16:creationId xmlns:a16="http://schemas.microsoft.com/office/drawing/2014/main" id="{57359F64-662E-8BBB-0BC6-C802BEEAB8AC}"/>
+              </a:ext>
+            </a:extLst>
+          </p:cNvPr>
+          <p:cNvPicPr>
+            <a:picLocks noChangeAspect="1"/>
+          </p:cNvPicPr>
+          <p:nvPr/>
+        </p:nvPicPr>
+        <p:blipFill>
+          <a:blip r:embed="rId16"/>
+          <a:stretch>
+            <a:fillRect/>
+          </a:stretch>
+        </p:blipFill>
+        <p:spPr>
+          <a:xfrm>
+            <a:off x="7172099" y="5425708"/>
+            <a:ext cx="3219899" cy="485843"/>
+          </a:xfrm>
+          <a:prstGeom prst="rect">
+            <a:avLst/>
+          </a:prstGeom>
+        </p:spPr>
+      </p:pic>
+    </p:spTree>
+    <p:extLst>
+      <p:ext uri="{BB962C8B-B14F-4D97-AF65-F5344CB8AC3E}">
+        <p14:creationId xmlns:p14="http://schemas.microsoft.com/office/powerpoint/2010/main" val="841236493"/>
+      </p:ext>
+    </p:extLst>
+  </p:cSld>
+  <p:clrMapOvr>
+    <a:masterClrMapping/>
+  </p:clrMapOvr>
+</p:sld>
+</file>
+
+<file path=ppt/slides/slide15.xml><?xml version="1.0" encoding="utf-8"?>
+<p:sld xmlns:a="http://schemas.openxmlformats.org/drawingml/2006/main" xmlns:r="http://schemas.openxmlformats.org/officeDocument/2006/relationships" xmlns:p="http://schemas.openxmlformats.org/presentationml/2006/main">
+  <p:cSld>
+    <p:spTree>
+      <p:nvGrpSpPr>
+        <p:cNvPr id="1" name=""/>
+        <p:cNvGrpSpPr/>
+        <p:nvPr/>
+      </p:nvGrpSpPr>
+      <p:grpSpPr>
+        <a:xfrm>
+          <a:off x="0" y="0"/>
+          <a:ext cx="0" cy="0"/>
+          <a:chOff x="0" y="0"/>
+          <a:chExt cx="0" cy="0"/>
+        </a:xfrm>
+      </p:grpSpPr>
+      <p:pic>
+        <p:nvPicPr>
+          <p:cNvPr id="5" name="圖片 4">
+            <a:extLst>
+              <a:ext uri="{FF2B5EF4-FFF2-40B4-BE49-F238E27FC236}">
+                <a16:creationId xmlns:a16="http://schemas.microsoft.com/office/drawing/2014/main" id="{5C89C7A4-FA07-4D70-3E4E-11E36B4BBE34}"/>
+              </a:ext>
+            </a:extLst>
+          </p:cNvPr>
+          <p:cNvPicPr>
+            <a:picLocks noChangeAspect="1"/>
+          </p:cNvPicPr>
+          <p:nvPr/>
+        </p:nvPicPr>
+        <p:blipFill>
+          <a:blip r:embed="rId2"/>
+          <a:stretch>
+            <a:fillRect/>
+          </a:stretch>
+        </p:blipFill>
+        <p:spPr>
+          <a:xfrm>
+            <a:off x="392612" y="4253397"/>
+            <a:ext cx="2231715" cy="2277494"/>
+          </a:xfrm>
+          <a:prstGeom prst="rect">
+            <a:avLst/>
+          </a:prstGeom>
+        </p:spPr>
+      </p:pic>
+      <p:sp>
+        <p:nvSpPr>
+          <p:cNvPr id="6" name="文字方塊 5">
+            <a:extLst>
+              <a:ext uri="{FF2B5EF4-FFF2-40B4-BE49-F238E27FC236}">
+                <a16:creationId xmlns:a16="http://schemas.microsoft.com/office/drawing/2014/main" id="{C0C9FE41-BA29-6115-E5E0-66AD1DAB1D13}"/>
+              </a:ext>
+            </a:extLst>
+          </p:cNvPr>
+          <p:cNvSpPr txBox="1"/>
+          <p:nvPr/>
+        </p:nvSpPr>
+        <p:spPr>
+          <a:xfrm>
+            <a:off x="137159" y="141011"/>
+            <a:ext cx="3776473" cy="369332"/>
+          </a:xfrm>
+          <a:prstGeom prst="rect">
+            <a:avLst/>
+          </a:prstGeom>
+          <a:noFill/>
+        </p:spPr>
+        <p:txBody>
+          <a:bodyPr wrap="square" rtlCol="0">
+            <a:spAutoFit/>
+          </a:bodyPr>
+          <a:lstStyle/>
+          <a:p>
+            <a:r>
+              <a:rPr lang="en-US" altLang="zh-TW" dirty="0"/>
+              <a:t>Transformer (no decoder) 42</a:t>
+            </a:r>
+            <a:endParaRPr lang="zh-TW" altLang="en-US" dirty="0"/>
+          </a:p>
+        </p:txBody>
+      </p:sp>
+      <p:pic>
+        <p:nvPicPr>
+          <p:cNvPr id="8" name="圖片 7">
+            <a:extLst>
+              <a:ext uri="{FF2B5EF4-FFF2-40B4-BE49-F238E27FC236}">
+                <a16:creationId xmlns:a16="http://schemas.microsoft.com/office/drawing/2014/main" id="{1809D71B-EA8C-CADB-A4B7-4356D602A58F}"/>
+              </a:ext>
+            </a:extLst>
+          </p:cNvPr>
+          <p:cNvPicPr>
+            <a:picLocks noChangeAspect="1"/>
+          </p:cNvPicPr>
+          <p:nvPr/>
+        </p:nvPicPr>
+        <p:blipFill>
+          <a:blip r:embed="rId3"/>
+          <a:stretch>
+            <a:fillRect/>
+          </a:stretch>
+        </p:blipFill>
+        <p:spPr>
+          <a:xfrm>
+            <a:off x="2935999" y="4253397"/>
+            <a:ext cx="3601962" cy="851727"/>
+          </a:xfrm>
+          <a:prstGeom prst="rect">
+            <a:avLst/>
+          </a:prstGeom>
+        </p:spPr>
+      </p:pic>
+      <p:pic>
+        <p:nvPicPr>
+          <p:cNvPr id="10" name="圖片 9">
+            <a:extLst>
+              <a:ext uri="{FF2B5EF4-FFF2-40B4-BE49-F238E27FC236}">
+                <a16:creationId xmlns:a16="http://schemas.microsoft.com/office/drawing/2014/main" id="{D8B975DD-6D3C-912C-9697-70C244C16012}"/>
+              </a:ext>
+            </a:extLst>
+          </p:cNvPr>
+          <p:cNvPicPr>
+            <a:picLocks noChangeAspect="1"/>
+          </p:cNvPicPr>
+          <p:nvPr/>
+        </p:nvPicPr>
+        <p:blipFill>
+          <a:blip r:embed="rId4"/>
+          <a:stretch>
+            <a:fillRect/>
+          </a:stretch>
+        </p:blipFill>
+        <p:spPr>
+          <a:xfrm>
+            <a:off x="2935999" y="5470010"/>
+            <a:ext cx="3336403" cy="767615"/>
+          </a:xfrm>
+          <a:prstGeom prst="rect">
+            <a:avLst/>
+          </a:prstGeom>
+        </p:spPr>
+      </p:pic>
+      <p:pic>
+        <p:nvPicPr>
+          <p:cNvPr id="12" name="圖片 11">
+            <a:extLst>
+              <a:ext uri="{FF2B5EF4-FFF2-40B4-BE49-F238E27FC236}">
+                <a16:creationId xmlns:a16="http://schemas.microsoft.com/office/drawing/2014/main" id="{9742F1B0-CA1A-0E1A-A94D-2EDCD4B57002}"/>
+              </a:ext>
+            </a:extLst>
+          </p:cNvPr>
+          <p:cNvPicPr>
+            <a:picLocks noChangeAspect="1"/>
+          </p:cNvPicPr>
+          <p:nvPr/>
+        </p:nvPicPr>
+        <p:blipFill>
+          <a:blip r:embed="rId5"/>
+          <a:stretch>
+            <a:fillRect/>
+          </a:stretch>
+        </p:blipFill>
+        <p:spPr>
+          <a:xfrm>
+            <a:off x="6835237" y="4278361"/>
+            <a:ext cx="4010972" cy="979671"/>
+          </a:xfrm>
+          <a:prstGeom prst="rect">
+            <a:avLst/>
+          </a:prstGeom>
+        </p:spPr>
+      </p:pic>
+      <p:pic>
+        <p:nvPicPr>
+          <p:cNvPr id="14" name="圖片 13">
+            <a:extLst>
+              <a:ext uri="{FF2B5EF4-FFF2-40B4-BE49-F238E27FC236}">
+                <a16:creationId xmlns:a16="http://schemas.microsoft.com/office/drawing/2014/main" id="{970A2710-A2E4-9C54-203C-F9EFF597B19E}"/>
+              </a:ext>
+            </a:extLst>
+          </p:cNvPr>
+          <p:cNvPicPr>
+            <a:picLocks noChangeAspect="1"/>
+          </p:cNvPicPr>
+          <p:nvPr/>
+        </p:nvPicPr>
+        <p:blipFill>
+          <a:blip r:embed="rId6"/>
+          <a:stretch>
+            <a:fillRect/>
+          </a:stretch>
+        </p:blipFill>
+        <p:spPr>
+          <a:xfrm>
+            <a:off x="6835237" y="5470010"/>
+            <a:ext cx="3880105" cy="797652"/>
+          </a:xfrm>
+          <a:prstGeom prst="rect">
+            <a:avLst/>
+          </a:prstGeom>
+        </p:spPr>
+      </p:pic>
+      <p:pic>
+        <p:nvPicPr>
+          <p:cNvPr id="16" name="圖片 15">
+            <a:extLst>
+              <a:ext uri="{FF2B5EF4-FFF2-40B4-BE49-F238E27FC236}">
+                <a16:creationId xmlns:a16="http://schemas.microsoft.com/office/drawing/2014/main" id="{BBF330E4-DAE9-0394-EE49-8D47CC4D7D88}"/>
+              </a:ext>
+            </a:extLst>
+          </p:cNvPr>
+          <p:cNvPicPr>
+            <a:picLocks noChangeAspect="1"/>
+          </p:cNvPicPr>
+          <p:nvPr/>
+        </p:nvPicPr>
+        <p:blipFill>
+          <a:blip r:embed="rId7"/>
+          <a:stretch>
+            <a:fillRect/>
+          </a:stretch>
+        </p:blipFill>
+        <p:spPr>
+          <a:xfrm>
+            <a:off x="588083" y="2267711"/>
+            <a:ext cx="1840771" cy="1907305"/>
+          </a:xfrm>
+          <a:prstGeom prst="rect">
+            <a:avLst/>
+          </a:prstGeom>
+        </p:spPr>
+      </p:pic>
+      <p:pic>
+        <p:nvPicPr>
+          <p:cNvPr id="18" name="圖片 17">
+            <a:extLst>
+              <a:ext uri="{FF2B5EF4-FFF2-40B4-BE49-F238E27FC236}">
+                <a16:creationId xmlns:a16="http://schemas.microsoft.com/office/drawing/2014/main" id="{04852B89-A7B4-6D2B-3BFB-6BF922898446}"/>
+              </a:ext>
+            </a:extLst>
+          </p:cNvPr>
+          <p:cNvPicPr>
+            <a:picLocks noChangeAspect="1"/>
+          </p:cNvPicPr>
+          <p:nvPr/>
+        </p:nvPicPr>
+        <p:blipFill>
+          <a:blip r:embed="rId8"/>
+          <a:stretch>
+            <a:fillRect/>
+          </a:stretch>
+        </p:blipFill>
+        <p:spPr>
+          <a:xfrm>
+            <a:off x="2887231" y="2267711"/>
+            <a:ext cx="3880105" cy="931781"/>
+          </a:xfrm>
+          <a:prstGeom prst="rect">
+            <a:avLst/>
+          </a:prstGeom>
+        </p:spPr>
+      </p:pic>
+      <p:pic>
+        <p:nvPicPr>
+          <p:cNvPr id="20" name="圖片 19">
+            <a:extLst>
+              <a:ext uri="{FF2B5EF4-FFF2-40B4-BE49-F238E27FC236}">
+                <a16:creationId xmlns:a16="http://schemas.microsoft.com/office/drawing/2014/main" id="{442C5359-6B93-57C4-2ED9-3F1672066237}"/>
+              </a:ext>
+            </a:extLst>
+          </p:cNvPr>
+          <p:cNvPicPr>
+            <a:picLocks noChangeAspect="1"/>
+          </p:cNvPicPr>
+          <p:nvPr/>
+        </p:nvPicPr>
+        <p:blipFill>
+          <a:blip r:embed="rId9"/>
+          <a:stretch>
+            <a:fillRect/>
+          </a:stretch>
+        </p:blipFill>
+        <p:spPr>
+          <a:xfrm>
+            <a:off x="2935999" y="3272841"/>
+            <a:ext cx="3300603" cy="771336"/>
+          </a:xfrm>
+          <a:prstGeom prst="rect">
+            <a:avLst/>
+          </a:prstGeom>
+        </p:spPr>
+      </p:pic>
+      <p:pic>
+        <p:nvPicPr>
+          <p:cNvPr id="22" name="圖片 21">
+            <a:extLst>
+              <a:ext uri="{FF2B5EF4-FFF2-40B4-BE49-F238E27FC236}">
+                <a16:creationId xmlns:a16="http://schemas.microsoft.com/office/drawing/2014/main" id="{340E8823-EA88-AFBA-CB38-328F64205453}"/>
+              </a:ext>
+            </a:extLst>
+          </p:cNvPr>
+          <p:cNvPicPr>
+            <a:picLocks noChangeAspect="1"/>
+          </p:cNvPicPr>
+          <p:nvPr/>
+        </p:nvPicPr>
+        <p:blipFill>
+          <a:blip r:embed="rId10"/>
+          <a:stretch>
+            <a:fillRect/>
+          </a:stretch>
+        </p:blipFill>
+        <p:spPr>
+          <a:xfrm>
+            <a:off x="7113380" y="2288310"/>
+            <a:ext cx="3601962" cy="818028"/>
+          </a:xfrm>
+          <a:prstGeom prst="rect">
+            <a:avLst/>
+          </a:prstGeom>
+        </p:spPr>
+      </p:pic>
+      <p:pic>
+        <p:nvPicPr>
+          <p:cNvPr id="24" name="圖片 23">
+            <a:extLst>
+              <a:ext uri="{FF2B5EF4-FFF2-40B4-BE49-F238E27FC236}">
+                <a16:creationId xmlns:a16="http://schemas.microsoft.com/office/drawing/2014/main" id="{E4A621AD-EDD3-658F-F288-1BD4231EA5DE}"/>
+              </a:ext>
+            </a:extLst>
+          </p:cNvPr>
+          <p:cNvPicPr>
+            <a:picLocks noChangeAspect="1"/>
+          </p:cNvPicPr>
+          <p:nvPr/>
+        </p:nvPicPr>
+        <p:blipFill>
+          <a:blip r:embed="rId11"/>
+          <a:stretch>
+            <a:fillRect/>
+          </a:stretch>
+        </p:blipFill>
+        <p:spPr>
+          <a:xfrm>
+            <a:off x="7110332" y="3341103"/>
+            <a:ext cx="3046965" cy="821120"/>
+          </a:xfrm>
+          <a:prstGeom prst="rect">
+            <a:avLst/>
+          </a:prstGeom>
+        </p:spPr>
+      </p:pic>
+      <p:pic>
+        <p:nvPicPr>
+          <p:cNvPr id="4" name="圖片 3">
+            <a:extLst>
+              <a:ext uri="{FF2B5EF4-FFF2-40B4-BE49-F238E27FC236}">
+                <a16:creationId xmlns:a16="http://schemas.microsoft.com/office/drawing/2014/main" id="{686ACFD1-661D-08A6-9446-E1DA6B353A71}"/>
+              </a:ext>
+            </a:extLst>
+          </p:cNvPr>
+          <p:cNvPicPr>
+            <a:picLocks noChangeAspect="1"/>
+          </p:cNvPicPr>
+          <p:nvPr/>
+        </p:nvPicPr>
+        <p:blipFill>
+          <a:blip r:embed="rId12"/>
+          <a:stretch>
+            <a:fillRect/>
+          </a:stretch>
+        </p:blipFill>
+        <p:spPr>
+          <a:xfrm>
+            <a:off x="699335" y="543434"/>
+            <a:ext cx="1618265" cy="1691185"/>
+          </a:xfrm>
+          <a:prstGeom prst="rect">
+            <a:avLst/>
+          </a:prstGeom>
+        </p:spPr>
+      </p:pic>
+      <p:pic>
+        <p:nvPicPr>
+          <p:cNvPr id="11" name="圖片 10">
+            <a:extLst>
+              <a:ext uri="{FF2B5EF4-FFF2-40B4-BE49-F238E27FC236}">
+                <a16:creationId xmlns:a16="http://schemas.microsoft.com/office/drawing/2014/main" id="{02826A53-70D2-6DA1-134E-346E2F84940E}"/>
+              </a:ext>
+            </a:extLst>
+          </p:cNvPr>
+          <p:cNvPicPr>
+            <a:picLocks noChangeAspect="1"/>
+          </p:cNvPicPr>
+          <p:nvPr/>
+        </p:nvPicPr>
+        <p:blipFill>
+          <a:blip r:embed="rId13"/>
+          <a:stretch>
+            <a:fillRect/>
+          </a:stretch>
+        </p:blipFill>
+        <p:spPr>
+          <a:xfrm>
+            <a:off x="3026665" y="569650"/>
+            <a:ext cx="2377439" cy="780739"/>
+          </a:xfrm>
+          <a:prstGeom prst="rect">
+            <a:avLst/>
+          </a:prstGeom>
+        </p:spPr>
+      </p:pic>
+      <p:pic>
+        <p:nvPicPr>
+          <p:cNvPr id="15" name="圖片 14">
+            <a:extLst>
+              <a:ext uri="{FF2B5EF4-FFF2-40B4-BE49-F238E27FC236}">
+                <a16:creationId xmlns:a16="http://schemas.microsoft.com/office/drawing/2014/main" id="{B8FA0A63-8ECF-32E6-FE67-035C3FF7D365}"/>
+              </a:ext>
+            </a:extLst>
+          </p:cNvPr>
+          <p:cNvPicPr>
+            <a:picLocks noChangeAspect="1"/>
+          </p:cNvPicPr>
+          <p:nvPr/>
+        </p:nvPicPr>
+        <p:blipFill>
+          <a:blip r:embed="rId14"/>
+          <a:stretch>
+            <a:fillRect/>
+          </a:stretch>
+        </p:blipFill>
+        <p:spPr>
+          <a:xfrm>
+            <a:off x="3026665" y="1372559"/>
+            <a:ext cx="2377439" cy="790542"/>
+          </a:xfrm>
+          <a:prstGeom prst="rect">
+            <a:avLst/>
+          </a:prstGeom>
+        </p:spPr>
+      </p:pic>
+      <p:pic>
+        <p:nvPicPr>
+          <p:cNvPr id="19" name="圖片 18">
+            <a:extLst>
+              <a:ext uri="{FF2B5EF4-FFF2-40B4-BE49-F238E27FC236}">
+                <a16:creationId xmlns:a16="http://schemas.microsoft.com/office/drawing/2014/main" id="{7D75485F-0016-7D90-8445-AD6766618D47}"/>
+              </a:ext>
+            </a:extLst>
+          </p:cNvPr>
+          <p:cNvPicPr>
+            <a:picLocks noChangeAspect="1"/>
+          </p:cNvPicPr>
+          <p:nvPr/>
+        </p:nvPicPr>
+        <p:blipFill>
+          <a:blip r:embed="rId15"/>
+          <a:stretch>
+            <a:fillRect/>
+          </a:stretch>
+        </p:blipFill>
+        <p:spPr>
+          <a:xfrm>
+            <a:off x="5964081" y="543434"/>
+            <a:ext cx="2677000" cy="821281"/>
+          </a:xfrm>
+          <a:prstGeom prst="rect">
+            <a:avLst/>
+          </a:prstGeom>
+        </p:spPr>
+      </p:pic>
+      <p:pic>
+        <p:nvPicPr>
+          <p:cNvPr id="23" name="圖片 22">
+            <a:extLst>
+              <a:ext uri="{FF2B5EF4-FFF2-40B4-BE49-F238E27FC236}">
+                <a16:creationId xmlns:a16="http://schemas.microsoft.com/office/drawing/2014/main" id="{E0A1BE32-AC8A-3C38-EE3F-2B40FB74EFD2}"/>
+              </a:ext>
+            </a:extLst>
+          </p:cNvPr>
+          <p:cNvPicPr>
+            <a:picLocks noChangeAspect="1"/>
+          </p:cNvPicPr>
+          <p:nvPr/>
+        </p:nvPicPr>
+        <p:blipFill>
+          <a:blip r:embed="rId16"/>
+          <a:stretch>
+            <a:fillRect/>
+          </a:stretch>
+        </p:blipFill>
+        <p:spPr>
+          <a:xfrm>
+            <a:off x="5979321" y="1469325"/>
+            <a:ext cx="2504968" cy="772163"/>
+          </a:xfrm>
+          <a:prstGeom prst="rect">
+            <a:avLst/>
+          </a:prstGeom>
+        </p:spPr>
+      </p:pic>
+    </p:spTree>
+    <p:extLst>
+      <p:ext uri="{BB962C8B-B14F-4D97-AF65-F5344CB8AC3E}">
+        <p14:creationId xmlns:p14="http://schemas.microsoft.com/office/powerpoint/2010/main" val="1734030493"/>
+      </p:ext>
+    </p:extLst>
+  </p:cSld>
+  <p:clrMapOvr>
+    <a:masterClrMapping/>
+  </p:clrMapOvr>
+</p:sld>
+</file>
+
+<file path=ppt/slides/slide16.xml><?xml version="1.0" encoding="utf-8"?>
+<p:sld xmlns:a="http://schemas.openxmlformats.org/drawingml/2006/main" xmlns:r="http://schemas.openxmlformats.org/officeDocument/2006/relationships" xmlns:p="http://schemas.openxmlformats.org/presentationml/2006/main">
+  <p:cSld>
+    <p:spTree>
+      <p:nvGrpSpPr>
+        <p:cNvPr id="1" name=""/>
+        <p:cNvGrpSpPr/>
+        <p:nvPr/>
+      </p:nvGrpSpPr>
+      <p:grpSpPr>
+        <a:xfrm>
+          <a:off x="0" y="0"/>
+          <a:ext cx="0" cy="0"/>
+          <a:chOff x="0" y="0"/>
+          <a:chExt cx="0" cy="0"/>
+        </a:xfrm>
+      </p:grpSpPr>
+      <p:pic>
+        <p:nvPicPr>
+          <p:cNvPr id="5" name="圖片 4">
+            <a:extLst>
+              <a:ext uri="{FF2B5EF4-FFF2-40B4-BE49-F238E27FC236}">
+                <a16:creationId xmlns:a16="http://schemas.microsoft.com/office/drawing/2014/main" id="{AD4A47DA-8F1E-FBCA-77A2-F21CCEE999C8}"/>
+              </a:ext>
+            </a:extLst>
+          </p:cNvPr>
+          <p:cNvPicPr>
+            <a:picLocks noChangeAspect="1"/>
+          </p:cNvPicPr>
+          <p:nvPr/>
+        </p:nvPicPr>
+        <p:blipFill>
+          <a:blip r:embed="rId2"/>
+          <a:stretch>
+            <a:fillRect/>
+          </a:stretch>
+        </p:blipFill>
+        <p:spPr>
+          <a:xfrm>
+            <a:off x="476055" y="2352670"/>
+            <a:ext cx="2084265" cy="2152660"/>
+          </a:xfrm>
+          <a:prstGeom prst="rect">
+            <a:avLst/>
+          </a:prstGeom>
+        </p:spPr>
+      </p:pic>
+      <p:sp>
+        <p:nvSpPr>
+          <p:cNvPr id="6" name="文字方塊 5">
+            <a:extLst>
+              <a:ext uri="{FF2B5EF4-FFF2-40B4-BE49-F238E27FC236}">
+                <a16:creationId xmlns:a16="http://schemas.microsoft.com/office/drawing/2014/main" id="{E389AF75-3967-4A5C-4CC5-F4F2F56F3A5D}"/>
+              </a:ext>
+            </a:extLst>
+          </p:cNvPr>
+          <p:cNvSpPr txBox="1"/>
+          <p:nvPr/>
+        </p:nvSpPr>
+        <p:spPr>
+          <a:xfrm>
+            <a:off x="137159" y="141011"/>
+            <a:ext cx="3776473" cy="369332"/>
+          </a:xfrm>
+          <a:prstGeom prst="rect">
+            <a:avLst/>
+          </a:prstGeom>
+          <a:noFill/>
+        </p:spPr>
+        <p:txBody>
+          <a:bodyPr wrap="square" rtlCol="0">
+            <a:spAutoFit/>
+          </a:bodyPr>
+          <a:lstStyle/>
+          <a:p>
+            <a:r>
+              <a:rPr lang="en-US" altLang="zh-TW" dirty="0"/>
+              <a:t>Transformer (no decoder) 43</a:t>
+            </a:r>
+            <a:endParaRPr lang="zh-TW" altLang="en-US" dirty="0"/>
+          </a:p>
+        </p:txBody>
+      </p:sp>
+      <p:pic>
+        <p:nvPicPr>
+          <p:cNvPr id="8" name="圖片 7">
+            <a:extLst>
+              <a:ext uri="{FF2B5EF4-FFF2-40B4-BE49-F238E27FC236}">
+                <a16:creationId xmlns:a16="http://schemas.microsoft.com/office/drawing/2014/main" id="{83430F34-D678-6B4A-9197-7583319B73F7}"/>
+              </a:ext>
+            </a:extLst>
+          </p:cNvPr>
+          <p:cNvPicPr>
+            <a:picLocks noChangeAspect="1"/>
+          </p:cNvPicPr>
+          <p:nvPr/>
+        </p:nvPicPr>
+        <p:blipFill>
+          <a:blip r:embed="rId3"/>
+          <a:stretch>
+            <a:fillRect/>
+          </a:stretch>
+        </p:blipFill>
+        <p:spPr>
+          <a:xfrm>
+            <a:off x="2965342" y="2352670"/>
+            <a:ext cx="3850645" cy="913112"/>
+          </a:xfrm>
+          <a:prstGeom prst="rect">
+            <a:avLst/>
+          </a:prstGeom>
+        </p:spPr>
+      </p:pic>
+      <p:pic>
+        <p:nvPicPr>
+          <p:cNvPr id="10" name="圖片 9">
+            <a:extLst>
+              <a:ext uri="{FF2B5EF4-FFF2-40B4-BE49-F238E27FC236}">
+                <a16:creationId xmlns:a16="http://schemas.microsoft.com/office/drawing/2014/main" id="{C4160526-B336-0777-8495-AE0847503F65}"/>
+              </a:ext>
+            </a:extLst>
+          </p:cNvPr>
+          <p:cNvPicPr>
+            <a:picLocks noChangeAspect="1"/>
+          </p:cNvPicPr>
+          <p:nvPr/>
+        </p:nvPicPr>
+        <p:blipFill>
+          <a:blip r:embed="rId4"/>
+          <a:stretch>
+            <a:fillRect/>
+          </a:stretch>
+        </p:blipFill>
+        <p:spPr>
+          <a:xfrm>
+            <a:off x="3187782" y="3434731"/>
+            <a:ext cx="3180802" cy="996854"/>
+          </a:xfrm>
+          <a:prstGeom prst="rect">
+            <a:avLst/>
+          </a:prstGeom>
+        </p:spPr>
+      </p:pic>
+      <p:pic>
+        <p:nvPicPr>
+          <p:cNvPr id="12" name="圖片 11">
+            <a:extLst>
+              <a:ext uri="{FF2B5EF4-FFF2-40B4-BE49-F238E27FC236}">
+                <a16:creationId xmlns:a16="http://schemas.microsoft.com/office/drawing/2014/main" id="{CF309774-AFD1-C3E5-1035-510B110C20D0}"/>
+              </a:ext>
+            </a:extLst>
+          </p:cNvPr>
+          <p:cNvPicPr>
+            <a:picLocks noChangeAspect="1"/>
+          </p:cNvPicPr>
+          <p:nvPr/>
+        </p:nvPicPr>
+        <p:blipFill>
+          <a:blip r:embed="rId5"/>
+          <a:stretch>
+            <a:fillRect/>
+          </a:stretch>
+        </p:blipFill>
+        <p:spPr>
+          <a:xfrm>
+            <a:off x="7555901" y="2305038"/>
+            <a:ext cx="3548029" cy="1123962"/>
+          </a:xfrm>
+          <a:prstGeom prst="rect">
+            <a:avLst/>
+          </a:prstGeom>
+        </p:spPr>
+      </p:pic>
+      <p:pic>
+        <p:nvPicPr>
+          <p:cNvPr id="14" name="圖片 13">
+            <a:extLst>
+              <a:ext uri="{FF2B5EF4-FFF2-40B4-BE49-F238E27FC236}">
+                <a16:creationId xmlns:a16="http://schemas.microsoft.com/office/drawing/2014/main" id="{6A32071C-2B45-17E4-ED68-0E694BC1C437}"/>
+              </a:ext>
+            </a:extLst>
+          </p:cNvPr>
+          <p:cNvPicPr>
+            <a:picLocks noChangeAspect="1"/>
+          </p:cNvPicPr>
+          <p:nvPr/>
+        </p:nvPicPr>
+        <p:blipFill>
+          <a:blip r:embed="rId6"/>
+          <a:stretch>
+            <a:fillRect/>
+          </a:stretch>
+        </p:blipFill>
+        <p:spPr>
+          <a:xfrm>
+            <a:off x="7555901" y="3519036"/>
+            <a:ext cx="3460387" cy="986294"/>
+          </a:xfrm>
+          <a:prstGeom prst="rect">
+            <a:avLst/>
+          </a:prstGeom>
+        </p:spPr>
+      </p:pic>
+      <p:pic>
+        <p:nvPicPr>
+          <p:cNvPr id="16" name="圖片 15">
+            <a:extLst>
+              <a:ext uri="{FF2B5EF4-FFF2-40B4-BE49-F238E27FC236}">
+                <a16:creationId xmlns:a16="http://schemas.microsoft.com/office/drawing/2014/main" id="{615936D4-BF6C-C087-4170-EE9BEC3CC4A4}"/>
+              </a:ext>
+            </a:extLst>
+          </p:cNvPr>
+          <p:cNvPicPr>
+            <a:picLocks noChangeAspect="1"/>
+          </p:cNvPicPr>
+          <p:nvPr/>
+        </p:nvPicPr>
+        <p:blipFill>
+          <a:blip r:embed="rId7"/>
+          <a:stretch>
+            <a:fillRect/>
+          </a:stretch>
+        </p:blipFill>
+        <p:spPr>
+          <a:xfrm>
+            <a:off x="653408" y="4807702"/>
+            <a:ext cx="1989208" cy="2043707"/>
+          </a:xfrm>
+          <a:prstGeom prst="rect">
+            <a:avLst/>
+          </a:prstGeom>
+        </p:spPr>
+      </p:pic>
+      <p:pic>
+        <p:nvPicPr>
+          <p:cNvPr id="18" name="圖片 17">
+            <a:extLst>
+              <a:ext uri="{FF2B5EF4-FFF2-40B4-BE49-F238E27FC236}">
+                <a16:creationId xmlns:a16="http://schemas.microsoft.com/office/drawing/2014/main" id="{BFB54FEC-6B9D-991E-EBF4-014F5182C90A}"/>
+              </a:ext>
+            </a:extLst>
+          </p:cNvPr>
+          <p:cNvPicPr>
+            <a:picLocks noChangeAspect="1"/>
+          </p:cNvPicPr>
+          <p:nvPr/>
+        </p:nvPicPr>
+        <p:blipFill>
+          <a:blip r:embed="rId8"/>
+          <a:stretch>
+            <a:fillRect/>
+          </a:stretch>
+        </p:blipFill>
+        <p:spPr>
+          <a:xfrm>
+            <a:off x="3199215" y="4807702"/>
+            <a:ext cx="3180802" cy="954993"/>
+          </a:xfrm>
+          <a:prstGeom prst="rect">
+            <a:avLst/>
+          </a:prstGeom>
+        </p:spPr>
+      </p:pic>
+      <p:pic>
+        <p:nvPicPr>
+          <p:cNvPr id="20" name="圖片 19">
+            <a:extLst>
+              <a:ext uri="{FF2B5EF4-FFF2-40B4-BE49-F238E27FC236}">
+                <a16:creationId xmlns:a16="http://schemas.microsoft.com/office/drawing/2014/main" id="{4C79DF6D-60B1-CBC0-381D-1045440EF5CB}"/>
+              </a:ext>
+            </a:extLst>
+          </p:cNvPr>
+          <p:cNvPicPr>
+            <a:picLocks noChangeAspect="1"/>
+          </p:cNvPicPr>
+          <p:nvPr/>
+        </p:nvPicPr>
+        <p:blipFill>
+          <a:blip r:embed="rId9"/>
+          <a:stretch>
+            <a:fillRect/>
+          </a:stretch>
+        </p:blipFill>
+        <p:spPr>
+          <a:xfrm>
+            <a:off x="3436502" y="5871393"/>
+            <a:ext cx="2706227" cy="843668"/>
+          </a:xfrm>
+          <a:prstGeom prst="rect">
+            <a:avLst/>
+          </a:prstGeom>
+        </p:spPr>
+      </p:pic>
+      <p:pic>
+        <p:nvPicPr>
+          <p:cNvPr id="22" name="圖片 21">
+            <a:extLst>
+              <a:ext uri="{FF2B5EF4-FFF2-40B4-BE49-F238E27FC236}">
+                <a16:creationId xmlns:a16="http://schemas.microsoft.com/office/drawing/2014/main" id="{815A69D7-BC64-C87E-BDA2-71C06B88375A}"/>
+              </a:ext>
+            </a:extLst>
+          </p:cNvPr>
+          <p:cNvPicPr>
+            <a:picLocks noChangeAspect="1"/>
+          </p:cNvPicPr>
+          <p:nvPr/>
+        </p:nvPicPr>
+        <p:blipFill>
+          <a:blip r:embed="rId10"/>
+          <a:stretch>
+            <a:fillRect/>
+          </a:stretch>
+        </p:blipFill>
+        <p:spPr>
+          <a:xfrm>
+            <a:off x="7456720" y="4704061"/>
+            <a:ext cx="3180802" cy="981635"/>
+          </a:xfrm>
+          <a:prstGeom prst="rect">
+            <a:avLst/>
+          </a:prstGeom>
+        </p:spPr>
+      </p:pic>
+      <p:pic>
+        <p:nvPicPr>
+          <p:cNvPr id="24" name="圖片 23">
+            <a:extLst>
+              <a:ext uri="{FF2B5EF4-FFF2-40B4-BE49-F238E27FC236}">
+                <a16:creationId xmlns:a16="http://schemas.microsoft.com/office/drawing/2014/main" id="{40AD2976-7E71-D397-75C9-88BE818C68C4}"/>
+              </a:ext>
+            </a:extLst>
+          </p:cNvPr>
+          <p:cNvPicPr>
+            <a:picLocks noChangeAspect="1"/>
+          </p:cNvPicPr>
+          <p:nvPr/>
+        </p:nvPicPr>
+        <p:blipFill>
+          <a:blip r:embed="rId11"/>
+          <a:stretch>
+            <a:fillRect/>
+          </a:stretch>
+        </p:blipFill>
+        <p:spPr>
+          <a:xfrm>
+            <a:off x="7456720" y="5875248"/>
+            <a:ext cx="2858074" cy="839813"/>
+          </a:xfrm>
+          <a:prstGeom prst="rect">
+            <a:avLst/>
+          </a:prstGeom>
+        </p:spPr>
+      </p:pic>
+      <p:pic>
+        <p:nvPicPr>
+          <p:cNvPr id="3" name="圖片 2">
+            <a:extLst>
+              <a:ext uri="{FF2B5EF4-FFF2-40B4-BE49-F238E27FC236}">
+                <a16:creationId xmlns:a16="http://schemas.microsoft.com/office/drawing/2014/main" id="{92FCBEA8-55B1-0166-C8DD-165218AA67DF}"/>
+              </a:ext>
+            </a:extLst>
+          </p:cNvPr>
+          <p:cNvPicPr>
+            <a:picLocks noChangeAspect="1"/>
+          </p:cNvPicPr>
+          <p:nvPr/>
+        </p:nvPicPr>
+        <p:blipFill>
+          <a:blip r:embed="rId12"/>
+          <a:stretch>
+            <a:fillRect/>
+          </a:stretch>
+        </p:blipFill>
+        <p:spPr>
+          <a:xfrm>
+            <a:off x="730909" y="510343"/>
+            <a:ext cx="1673964" cy="1731291"/>
+          </a:xfrm>
+          <a:prstGeom prst="rect">
+            <a:avLst/>
+          </a:prstGeom>
+        </p:spPr>
+      </p:pic>
+      <p:pic>
+        <p:nvPicPr>
+          <p:cNvPr id="7" name="圖片 6">
+            <a:extLst>
+              <a:ext uri="{FF2B5EF4-FFF2-40B4-BE49-F238E27FC236}">
+                <a16:creationId xmlns:a16="http://schemas.microsoft.com/office/drawing/2014/main" id="{3B0E8FEB-ABE4-4E30-325F-28D3F51DD8BE}"/>
+              </a:ext>
+            </a:extLst>
+          </p:cNvPr>
+          <p:cNvPicPr>
+            <a:picLocks noChangeAspect="1"/>
+          </p:cNvPicPr>
+          <p:nvPr/>
+        </p:nvPicPr>
+        <p:blipFill>
+          <a:blip r:embed="rId13"/>
+          <a:stretch>
+            <a:fillRect/>
+          </a:stretch>
+        </p:blipFill>
+        <p:spPr>
+          <a:xfrm>
+            <a:off x="3116298" y="518756"/>
+            <a:ext cx="2461542" cy="714080"/>
+          </a:xfrm>
+          <a:prstGeom prst="rect">
+            <a:avLst/>
+          </a:prstGeom>
+        </p:spPr>
+      </p:pic>
+      <p:pic>
+        <p:nvPicPr>
+          <p:cNvPr id="11" name="圖片 10">
+            <a:extLst>
+              <a:ext uri="{FF2B5EF4-FFF2-40B4-BE49-F238E27FC236}">
+                <a16:creationId xmlns:a16="http://schemas.microsoft.com/office/drawing/2014/main" id="{A05ED92C-0D11-B616-348C-07185847E1A0}"/>
+              </a:ext>
+            </a:extLst>
+          </p:cNvPr>
+          <p:cNvPicPr>
+            <a:picLocks noChangeAspect="1"/>
+          </p:cNvPicPr>
+          <p:nvPr/>
+        </p:nvPicPr>
+        <p:blipFill>
+          <a:blip r:embed="rId14"/>
+          <a:stretch>
+            <a:fillRect/>
+          </a:stretch>
+        </p:blipFill>
+        <p:spPr>
+          <a:xfrm>
+            <a:off x="3116298" y="1375988"/>
+            <a:ext cx="2431434" cy="770943"/>
+          </a:xfrm>
+          <a:prstGeom prst="rect">
+            <a:avLst/>
+          </a:prstGeom>
+        </p:spPr>
+      </p:pic>
+      <p:pic>
+        <p:nvPicPr>
+          <p:cNvPr id="15" name="圖片 14">
+            <a:extLst>
+              <a:ext uri="{FF2B5EF4-FFF2-40B4-BE49-F238E27FC236}">
+                <a16:creationId xmlns:a16="http://schemas.microsoft.com/office/drawing/2014/main" id="{644B89CB-2FD3-E608-8988-ACEED08B0B22}"/>
+              </a:ext>
+            </a:extLst>
+          </p:cNvPr>
+          <p:cNvPicPr>
+            <a:picLocks noChangeAspect="1"/>
+          </p:cNvPicPr>
+          <p:nvPr/>
+        </p:nvPicPr>
+        <p:blipFill>
+          <a:blip r:embed="rId15"/>
+          <a:stretch>
+            <a:fillRect/>
+          </a:stretch>
+        </p:blipFill>
+        <p:spPr>
+          <a:xfrm>
+            <a:off x="6550150" y="450293"/>
+            <a:ext cx="2496971" cy="782543"/>
+          </a:xfrm>
+          <a:prstGeom prst="rect">
+            <a:avLst/>
+          </a:prstGeom>
+        </p:spPr>
+      </p:pic>
+      <p:pic>
+        <p:nvPicPr>
+          <p:cNvPr id="19" name="圖片 18">
+            <a:extLst>
+              <a:ext uri="{FF2B5EF4-FFF2-40B4-BE49-F238E27FC236}">
+                <a16:creationId xmlns:a16="http://schemas.microsoft.com/office/drawing/2014/main" id="{C1D79FFE-9572-6BBF-43E8-9BF8A0ABC439}"/>
+              </a:ext>
+            </a:extLst>
+          </p:cNvPr>
+          <p:cNvPicPr>
+            <a:picLocks noChangeAspect="1"/>
+          </p:cNvPicPr>
+          <p:nvPr/>
+        </p:nvPicPr>
+        <p:blipFill>
+          <a:blip r:embed="rId16"/>
+          <a:stretch>
+            <a:fillRect/>
+          </a:stretch>
+        </p:blipFill>
+        <p:spPr>
+          <a:xfrm>
+            <a:off x="6550151" y="1375988"/>
+            <a:ext cx="2667002" cy="764709"/>
+          </a:xfrm>
+          <a:prstGeom prst="rect">
+            <a:avLst/>
+          </a:prstGeom>
+        </p:spPr>
+      </p:pic>
+    </p:spTree>
+    <p:extLst>
+      <p:ext uri="{BB962C8B-B14F-4D97-AF65-F5344CB8AC3E}">
+        <p14:creationId xmlns:p14="http://schemas.microsoft.com/office/powerpoint/2010/main" val="3089187575"/>
+      </p:ext>
+    </p:extLst>
+  </p:cSld>
+  <p:clrMapOvr>
+    <a:masterClrMapping/>
+  </p:clrMapOvr>
+</p:sld>
+</file>
+
+<file path=ppt/slides/slide17.xml><?xml version="1.0" encoding="utf-8"?>
+<p:sld xmlns:a="http://schemas.openxmlformats.org/drawingml/2006/main" xmlns:r="http://schemas.openxmlformats.org/officeDocument/2006/relationships" xmlns:p="http://schemas.openxmlformats.org/presentationml/2006/main">
+  <p:cSld>
+    <p:spTree>
+      <p:nvGrpSpPr>
+        <p:cNvPr id="1" name=""/>
+        <p:cNvGrpSpPr/>
+        <p:nvPr/>
+      </p:nvGrpSpPr>
+      <p:grpSpPr>
+        <a:xfrm>
+          <a:off x="0" y="0"/>
+          <a:ext cx="0" cy="0"/>
+          <a:chOff x="0" y="0"/>
+          <a:chExt cx="0" cy="0"/>
+        </a:xfrm>
+      </p:grpSpPr>
+      <p:pic>
+        <p:nvPicPr>
+          <p:cNvPr id="5" name="圖片 4">
+            <a:extLst>
+              <a:ext uri="{FF2B5EF4-FFF2-40B4-BE49-F238E27FC236}">
+                <a16:creationId xmlns:a16="http://schemas.microsoft.com/office/drawing/2014/main" id="{13D9A0B1-84BD-4A78-7F82-3B37C2DC18EA}"/>
+              </a:ext>
+            </a:extLst>
+          </p:cNvPr>
+          <p:cNvPicPr>
+            <a:picLocks noChangeAspect="1"/>
+          </p:cNvPicPr>
+          <p:nvPr/>
+        </p:nvPicPr>
+        <p:blipFill>
+          <a:blip r:embed="rId2"/>
+          <a:stretch>
+            <a:fillRect/>
+          </a:stretch>
+        </p:blipFill>
+        <p:spPr>
+          <a:xfrm>
+            <a:off x="504507" y="763921"/>
+            <a:ext cx="2494725" cy="1787071"/>
+          </a:xfrm>
+          <a:prstGeom prst="rect">
+            <a:avLst/>
+          </a:prstGeom>
+        </p:spPr>
+      </p:pic>
+      <p:sp>
+        <p:nvSpPr>
+          <p:cNvPr id="6" name="文字方塊 5">
+            <a:extLst>
+              <a:ext uri="{FF2B5EF4-FFF2-40B4-BE49-F238E27FC236}">
+                <a16:creationId xmlns:a16="http://schemas.microsoft.com/office/drawing/2014/main" id="{D8F28EBC-C762-A858-D219-E288AEEF25E7}"/>
+              </a:ext>
+            </a:extLst>
+          </p:cNvPr>
+          <p:cNvSpPr txBox="1"/>
+          <p:nvPr/>
+        </p:nvSpPr>
+        <p:spPr>
+          <a:xfrm>
+            <a:off x="137159" y="141011"/>
+            <a:ext cx="3776473" cy="369332"/>
+          </a:xfrm>
+          <a:prstGeom prst="rect">
+            <a:avLst/>
+          </a:prstGeom>
+          <a:noFill/>
+        </p:spPr>
+        <p:txBody>
+          <a:bodyPr wrap="square" rtlCol="0">
+            <a:spAutoFit/>
+          </a:bodyPr>
+          <a:lstStyle/>
+          <a:p>
+            <a:r>
+              <a:rPr lang="en-US" altLang="zh-TW" dirty="0"/>
+              <a:t>Transformer (no decoder) 42</a:t>
+            </a:r>
+            <a:endParaRPr lang="zh-TW" altLang="en-US" dirty="0"/>
+          </a:p>
+        </p:txBody>
+      </p:sp>
+      <p:pic>
+        <p:nvPicPr>
+          <p:cNvPr id="8" name="圖片 7">
+            <a:extLst>
+              <a:ext uri="{FF2B5EF4-FFF2-40B4-BE49-F238E27FC236}">
+                <a16:creationId xmlns:a16="http://schemas.microsoft.com/office/drawing/2014/main" id="{C5780803-C7D3-0AC1-DB11-8702F3E13CEF}"/>
+              </a:ext>
+            </a:extLst>
+          </p:cNvPr>
+          <p:cNvPicPr>
+            <a:picLocks noChangeAspect="1"/>
+          </p:cNvPicPr>
+          <p:nvPr/>
+        </p:nvPicPr>
+        <p:blipFill>
+          <a:blip r:embed="rId3"/>
+          <a:stretch>
+            <a:fillRect/>
+          </a:stretch>
+        </p:blipFill>
+        <p:spPr>
+          <a:xfrm>
+            <a:off x="3402582" y="763922"/>
+            <a:ext cx="3702306" cy="407946"/>
+          </a:xfrm>
+          <a:prstGeom prst="rect">
+            <a:avLst/>
+          </a:prstGeom>
+        </p:spPr>
+      </p:pic>
+      <p:pic>
+        <p:nvPicPr>
+          <p:cNvPr id="10" name="圖片 9">
+            <a:extLst>
+              <a:ext uri="{FF2B5EF4-FFF2-40B4-BE49-F238E27FC236}">
+                <a16:creationId xmlns:a16="http://schemas.microsoft.com/office/drawing/2014/main" id="{8985DD94-C9C8-D7A6-32FE-CC9163006607}"/>
+              </a:ext>
+            </a:extLst>
+          </p:cNvPr>
+          <p:cNvPicPr>
+            <a:picLocks noChangeAspect="1"/>
+          </p:cNvPicPr>
+          <p:nvPr/>
+        </p:nvPicPr>
+        <p:blipFill>
+          <a:blip r:embed="rId4"/>
+          <a:stretch>
+            <a:fillRect/>
+          </a:stretch>
+        </p:blipFill>
+        <p:spPr>
+          <a:xfrm>
+            <a:off x="3402583" y="1775991"/>
+            <a:ext cx="3830322" cy="472019"/>
+          </a:xfrm>
+          <a:prstGeom prst="rect">
+            <a:avLst/>
+          </a:prstGeom>
+        </p:spPr>
+      </p:pic>
+      <p:pic>
+        <p:nvPicPr>
+          <p:cNvPr id="12" name="圖片 11">
+            <a:extLst>
+              <a:ext uri="{FF2B5EF4-FFF2-40B4-BE49-F238E27FC236}">
+                <a16:creationId xmlns:a16="http://schemas.microsoft.com/office/drawing/2014/main" id="{582A2059-F628-0150-5B40-D4DE33D364FC}"/>
+              </a:ext>
+            </a:extLst>
+          </p:cNvPr>
+          <p:cNvPicPr>
+            <a:picLocks noChangeAspect="1"/>
+          </p:cNvPicPr>
+          <p:nvPr/>
+        </p:nvPicPr>
+        <p:blipFill>
+          <a:blip r:embed="rId5"/>
+          <a:stretch>
+            <a:fillRect/>
+          </a:stretch>
+        </p:blipFill>
+        <p:spPr>
+          <a:xfrm>
+            <a:off x="7388601" y="701158"/>
+            <a:ext cx="4620270" cy="533474"/>
+          </a:xfrm>
+          <a:prstGeom prst="rect">
+            <a:avLst/>
+          </a:prstGeom>
+        </p:spPr>
+      </p:pic>
+      <p:pic>
+        <p:nvPicPr>
+          <p:cNvPr id="14" name="圖片 13">
+            <a:extLst>
+              <a:ext uri="{FF2B5EF4-FFF2-40B4-BE49-F238E27FC236}">
+                <a16:creationId xmlns:a16="http://schemas.microsoft.com/office/drawing/2014/main" id="{7C3AAE8C-04B2-5748-4602-6CDE2775F90E}"/>
+              </a:ext>
+            </a:extLst>
+          </p:cNvPr>
+          <p:cNvPicPr>
+            <a:picLocks noChangeAspect="1"/>
+          </p:cNvPicPr>
+          <p:nvPr/>
+        </p:nvPicPr>
+        <p:blipFill>
+          <a:blip r:embed="rId6"/>
+          <a:stretch>
+            <a:fillRect/>
+          </a:stretch>
+        </p:blipFill>
+        <p:spPr>
+          <a:xfrm>
+            <a:off x="7445759" y="1775991"/>
+            <a:ext cx="4563112" cy="447737"/>
+          </a:xfrm>
+          <a:prstGeom prst="rect">
+            <a:avLst/>
+          </a:prstGeom>
+        </p:spPr>
+      </p:pic>
+      <p:pic>
+        <p:nvPicPr>
+          <p:cNvPr id="16" name="圖片 15">
+            <a:extLst>
+              <a:ext uri="{FF2B5EF4-FFF2-40B4-BE49-F238E27FC236}">
+                <a16:creationId xmlns:a16="http://schemas.microsoft.com/office/drawing/2014/main" id="{0BDC7111-68B7-6B00-9AAF-68D28A65892C}"/>
+              </a:ext>
+            </a:extLst>
+          </p:cNvPr>
+          <p:cNvPicPr>
+            <a:picLocks noChangeAspect="1"/>
+          </p:cNvPicPr>
+          <p:nvPr/>
+        </p:nvPicPr>
+        <p:blipFill>
+          <a:blip r:embed="rId7"/>
+          <a:stretch>
+            <a:fillRect/>
+          </a:stretch>
+        </p:blipFill>
+        <p:spPr>
+          <a:xfrm>
+            <a:off x="504507" y="2719699"/>
+            <a:ext cx="2641794" cy="1879143"/>
+          </a:xfrm>
+          <a:prstGeom prst="rect">
+            <a:avLst/>
+          </a:prstGeom>
+        </p:spPr>
+      </p:pic>
+      <p:pic>
+        <p:nvPicPr>
+          <p:cNvPr id="18" name="圖片 17">
+            <a:extLst>
+              <a:ext uri="{FF2B5EF4-FFF2-40B4-BE49-F238E27FC236}">
+                <a16:creationId xmlns:a16="http://schemas.microsoft.com/office/drawing/2014/main" id="{FDBB9866-4F0E-670F-A09D-83193496276D}"/>
+              </a:ext>
+            </a:extLst>
+          </p:cNvPr>
+          <p:cNvPicPr>
+            <a:picLocks noChangeAspect="1"/>
+          </p:cNvPicPr>
+          <p:nvPr/>
+        </p:nvPicPr>
+        <p:blipFill>
+          <a:blip r:embed="rId8"/>
+          <a:stretch>
+            <a:fillRect/>
+          </a:stretch>
+        </p:blipFill>
+        <p:spPr>
+          <a:xfrm>
+            <a:off x="3285414" y="2789369"/>
+            <a:ext cx="4725059" cy="514422"/>
+          </a:xfrm>
+          <a:prstGeom prst="rect">
+            <a:avLst/>
+          </a:prstGeom>
+        </p:spPr>
+      </p:pic>
+      <p:pic>
+        <p:nvPicPr>
+          <p:cNvPr id="20" name="圖片 19">
+            <a:extLst>
+              <a:ext uri="{FF2B5EF4-FFF2-40B4-BE49-F238E27FC236}">
+                <a16:creationId xmlns:a16="http://schemas.microsoft.com/office/drawing/2014/main" id="{10C40AFD-6F52-ED9B-BD99-F659DC3A06F7}"/>
+              </a:ext>
+            </a:extLst>
+          </p:cNvPr>
+          <p:cNvPicPr>
+            <a:picLocks noChangeAspect="1"/>
+          </p:cNvPicPr>
+          <p:nvPr/>
+        </p:nvPicPr>
+        <p:blipFill>
+          <a:blip r:embed="rId9"/>
+          <a:stretch>
+            <a:fillRect/>
+          </a:stretch>
+        </p:blipFill>
+        <p:spPr>
+          <a:xfrm>
+            <a:off x="3361624" y="3771683"/>
+            <a:ext cx="4648849" cy="533474"/>
+          </a:xfrm>
+          <a:prstGeom prst="rect">
+            <a:avLst/>
+          </a:prstGeom>
+        </p:spPr>
+      </p:pic>
+      <p:pic>
+        <p:nvPicPr>
+          <p:cNvPr id="22" name="圖片 21">
+            <a:extLst>
+              <a:ext uri="{FF2B5EF4-FFF2-40B4-BE49-F238E27FC236}">
+                <a16:creationId xmlns:a16="http://schemas.microsoft.com/office/drawing/2014/main" id="{6082BE83-718C-35CA-F3A3-30B9791D6764}"/>
+              </a:ext>
+            </a:extLst>
+          </p:cNvPr>
+          <p:cNvPicPr>
+            <a:picLocks noChangeAspect="1"/>
+          </p:cNvPicPr>
+          <p:nvPr/>
+        </p:nvPicPr>
+        <p:blipFill>
+          <a:blip r:embed="rId10"/>
+          <a:stretch>
+            <a:fillRect/>
+          </a:stretch>
+        </p:blipFill>
+        <p:spPr>
+          <a:xfrm>
+            <a:off x="8226997" y="2732211"/>
+            <a:ext cx="4534533" cy="571580"/>
+          </a:xfrm>
+          <a:prstGeom prst="rect">
+            <a:avLst/>
+          </a:prstGeom>
+        </p:spPr>
+      </p:pic>
+      <p:pic>
+        <p:nvPicPr>
+          <p:cNvPr id="24" name="圖片 23">
+            <a:extLst>
+              <a:ext uri="{FF2B5EF4-FFF2-40B4-BE49-F238E27FC236}">
+                <a16:creationId xmlns:a16="http://schemas.microsoft.com/office/drawing/2014/main" id="{97365126-5715-9269-2BF7-AB4FC7FFAA55}"/>
+              </a:ext>
+            </a:extLst>
+          </p:cNvPr>
+          <p:cNvPicPr>
+            <a:picLocks noChangeAspect="1"/>
+          </p:cNvPicPr>
+          <p:nvPr/>
+        </p:nvPicPr>
+        <p:blipFill>
+          <a:blip r:embed="rId11"/>
+          <a:stretch>
+            <a:fillRect/>
+          </a:stretch>
+        </p:blipFill>
+        <p:spPr>
+          <a:xfrm>
+            <a:off x="8226045" y="3721307"/>
+            <a:ext cx="4544059" cy="485843"/>
+          </a:xfrm>
+          <a:prstGeom prst="rect">
+            <a:avLst/>
+          </a:prstGeom>
+        </p:spPr>
+      </p:pic>
+      <p:pic>
+        <p:nvPicPr>
+          <p:cNvPr id="26" name="圖片 25">
+            <a:extLst>
+              <a:ext uri="{FF2B5EF4-FFF2-40B4-BE49-F238E27FC236}">
+                <a16:creationId xmlns:a16="http://schemas.microsoft.com/office/drawing/2014/main" id="{1D55B04A-2778-182B-E05B-E06E625917E1}"/>
+              </a:ext>
+            </a:extLst>
+          </p:cNvPr>
+          <p:cNvPicPr>
+            <a:picLocks noChangeAspect="1"/>
+          </p:cNvPicPr>
+          <p:nvPr/>
+        </p:nvPicPr>
+        <p:blipFill>
+          <a:blip r:embed="rId12"/>
+          <a:stretch>
+            <a:fillRect/>
+          </a:stretch>
+        </p:blipFill>
+        <p:spPr>
+          <a:xfrm>
+            <a:off x="433736" y="4734588"/>
+            <a:ext cx="2783335" cy="1982401"/>
+          </a:xfrm>
+          <a:prstGeom prst="rect">
+            <a:avLst/>
+          </a:prstGeom>
+        </p:spPr>
+      </p:pic>
+      <p:pic>
+        <p:nvPicPr>
+          <p:cNvPr id="28" name="圖片 27">
+            <a:extLst>
+              <a:ext uri="{FF2B5EF4-FFF2-40B4-BE49-F238E27FC236}">
+                <a16:creationId xmlns:a16="http://schemas.microsoft.com/office/drawing/2014/main" id="{BC2FCEAD-0623-133C-771A-5A33DCB418CC}"/>
+              </a:ext>
+            </a:extLst>
+          </p:cNvPr>
+          <p:cNvPicPr>
+            <a:picLocks noChangeAspect="1"/>
+          </p:cNvPicPr>
+          <p:nvPr/>
+        </p:nvPicPr>
+        <p:blipFill>
+          <a:blip r:embed="rId13"/>
+          <a:stretch>
+            <a:fillRect/>
+          </a:stretch>
+        </p:blipFill>
+        <p:spPr>
+          <a:xfrm>
+            <a:off x="3390202" y="4773049"/>
+            <a:ext cx="4591691" cy="514422"/>
+          </a:xfrm>
+          <a:prstGeom prst="rect">
+            <a:avLst/>
+          </a:prstGeom>
+        </p:spPr>
+      </p:pic>
+      <p:pic>
+        <p:nvPicPr>
+          <p:cNvPr id="30" name="圖片 29">
+            <a:extLst>
+              <a:ext uri="{FF2B5EF4-FFF2-40B4-BE49-F238E27FC236}">
+                <a16:creationId xmlns:a16="http://schemas.microsoft.com/office/drawing/2014/main" id="{3EE15CC8-DD9B-1D39-0130-3876DE407766}"/>
+              </a:ext>
+            </a:extLst>
+          </p:cNvPr>
+          <p:cNvPicPr>
+            <a:picLocks noChangeAspect="1"/>
+          </p:cNvPicPr>
+          <p:nvPr/>
+        </p:nvPicPr>
+        <p:blipFill>
+          <a:blip r:embed="rId14"/>
+          <a:stretch>
+            <a:fillRect/>
+          </a:stretch>
+        </p:blipFill>
+        <p:spPr>
+          <a:xfrm>
+            <a:off x="3371150" y="5642420"/>
+            <a:ext cx="4553585" cy="514422"/>
+          </a:xfrm>
+          <a:prstGeom prst="rect">
+            <a:avLst/>
+          </a:prstGeom>
+        </p:spPr>
+      </p:pic>
+      <p:pic>
+        <p:nvPicPr>
+          <p:cNvPr id="32" name="圖片 31">
+            <a:extLst>
+              <a:ext uri="{FF2B5EF4-FFF2-40B4-BE49-F238E27FC236}">
+                <a16:creationId xmlns:a16="http://schemas.microsoft.com/office/drawing/2014/main" id="{0D8D896B-9741-1401-C73C-EAE0BD36CB9B}"/>
+              </a:ext>
+            </a:extLst>
+          </p:cNvPr>
+          <p:cNvPicPr>
+            <a:picLocks noChangeAspect="1"/>
+          </p:cNvPicPr>
+          <p:nvPr/>
+        </p:nvPicPr>
+        <p:blipFill>
+          <a:blip r:embed="rId15"/>
+          <a:stretch>
+            <a:fillRect/>
+          </a:stretch>
+        </p:blipFill>
+        <p:spPr>
+          <a:xfrm>
+            <a:off x="8075328" y="4811155"/>
+            <a:ext cx="3667637" cy="476316"/>
+          </a:xfrm>
+          <a:prstGeom prst="rect">
+            <a:avLst/>
+          </a:prstGeom>
+        </p:spPr>
+      </p:pic>
+      <p:pic>
+        <p:nvPicPr>
+          <p:cNvPr id="34" name="圖片 33">
+            <a:extLst>
+              <a:ext uri="{FF2B5EF4-FFF2-40B4-BE49-F238E27FC236}">
+                <a16:creationId xmlns:a16="http://schemas.microsoft.com/office/drawing/2014/main" id="{04E75374-DCC6-D9B0-5380-5661AA3A7FFD}"/>
+              </a:ext>
+            </a:extLst>
+          </p:cNvPr>
+          <p:cNvPicPr>
+            <a:picLocks noChangeAspect="1"/>
+          </p:cNvPicPr>
+          <p:nvPr/>
+        </p:nvPicPr>
+        <p:blipFill>
+          <a:blip r:embed="rId16"/>
+          <a:stretch>
+            <a:fillRect/>
+          </a:stretch>
+        </p:blipFill>
+        <p:spPr>
+          <a:xfrm>
+            <a:off x="8075328" y="5642420"/>
+            <a:ext cx="3496163" cy="466790"/>
+          </a:xfrm>
+          <a:prstGeom prst="rect">
+            <a:avLst/>
+          </a:prstGeom>
+        </p:spPr>
+      </p:pic>
+    </p:spTree>
+    <p:extLst>
+      <p:ext uri="{BB962C8B-B14F-4D97-AF65-F5344CB8AC3E}">
+        <p14:creationId xmlns:p14="http://schemas.microsoft.com/office/powerpoint/2010/main" val="3285377708"/>
+      </p:ext>
+    </p:extLst>
+  </p:cSld>
+  <p:clrMapOvr>
+    <a:masterClrMapping/>
+  </p:clrMapOvr>
+</p:sld>
+</file>
+
+<file path=ppt/slides/slide18.xml><?xml version="1.0" encoding="utf-8"?>
+<p:sld xmlns:a="http://schemas.openxmlformats.org/drawingml/2006/main" xmlns:r="http://schemas.openxmlformats.org/officeDocument/2006/relationships" xmlns:p="http://schemas.openxmlformats.org/presentationml/2006/main">
+  <p:cSld>
+    <p:spTree>
+      <p:nvGrpSpPr>
+        <p:cNvPr id="1" name=""/>
+        <p:cNvGrpSpPr/>
+        <p:nvPr/>
+      </p:nvGrpSpPr>
+      <p:grpSpPr>
+        <a:xfrm>
+          <a:off x="0" y="0"/>
+          <a:ext cx="0" cy="0"/>
+          <a:chOff x="0" y="0"/>
+          <a:chExt cx="0" cy="0"/>
+        </a:xfrm>
+      </p:grpSpPr>
+      <p:sp>
+        <p:nvSpPr>
+          <p:cNvPr id="4" name="文字方塊 3">
+            <a:extLst>
+              <a:ext uri="{FF2B5EF4-FFF2-40B4-BE49-F238E27FC236}">
+                <a16:creationId xmlns:a16="http://schemas.microsoft.com/office/drawing/2014/main" id="{4BC13685-8006-F959-58F3-A177E7CE4FF7}"/>
+              </a:ext>
+            </a:extLst>
+          </p:cNvPr>
+          <p:cNvSpPr txBox="1"/>
+          <p:nvPr/>
+        </p:nvSpPr>
+        <p:spPr>
+          <a:xfrm>
+            <a:off x="137159" y="141011"/>
+            <a:ext cx="3776473" cy="369332"/>
+          </a:xfrm>
+          <a:prstGeom prst="rect">
+            <a:avLst/>
+          </a:prstGeom>
+          <a:noFill/>
+        </p:spPr>
+        <p:txBody>
+          <a:bodyPr wrap="square" rtlCol="0">
+            <a:spAutoFit/>
+          </a:bodyPr>
+          <a:lstStyle/>
+          <a:p>
+            <a:r>
+              <a:rPr lang="en-US" altLang="zh-TW" dirty="0"/>
+              <a:t>Transformer (no decoder) 43</a:t>
+            </a:r>
+            <a:endParaRPr lang="zh-TW" altLang="en-US" dirty="0"/>
+          </a:p>
+        </p:txBody>
+      </p:sp>
+      <p:pic>
+        <p:nvPicPr>
+          <p:cNvPr id="3" name="圖片 2">
+            <a:extLst>
+              <a:ext uri="{FF2B5EF4-FFF2-40B4-BE49-F238E27FC236}">
+                <a16:creationId xmlns:a16="http://schemas.microsoft.com/office/drawing/2014/main" id="{26C4D832-285E-8823-D14F-930E068783A8}"/>
+              </a:ext>
+            </a:extLst>
+          </p:cNvPr>
+          <p:cNvPicPr>
+            <a:picLocks noChangeAspect="1"/>
+          </p:cNvPicPr>
+          <p:nvPr/>
+        </p:nvPicPr>
+        <p:blipFill>
+          <a:blip r:embed="rId2"/>
+          <a:stretch>
+            <a:fillRect/>
+          </a:stretch>
+        </p:blipFill>
+        <p:spPr>
+          <a:xfrm>
+            <a:off x="380872" y="4791456"/>
+            <a:ext cx="2296650" cy="1631041"/>
+          </a:xfrm>
+          <a:prstGeom prst="rect">
+            <a:avLst/>
+          </a:prstGeom>
+        </p:spPr>
+      </p:pic>
+      <p:pic>
+        <p:nvPicPr>
+          <p:cNvPr id="7" name="圖片 6">
+            <a:extLst>
+              <a:ext uri="{FF2B5EF4-FFF2-40B4-BE49-F238E27FC236}">
+                <a16:creationId xmlns:a16="http://schemas.microsoft.com/office/drawing/2014/main" id="{943528CE-0C6F-F04F-66B8-D7D854352757}"/>
+              </a:ext>
+            </a:extLst>
+          </p:cNvPr>
+          <p:cNvPicPr>
+            <a:picLocks noChangeAspect="1"/>
+          </p:cNvPicPr>
+          <p:nvPr/>
+        </p:nvPicPr>
+        <p:blipFill>
+          <a:blip r:embed="rId3"/>
+          <a:stretch>
+            <a:fillRect/>
+          </a:stretch>
+        </p:blipFill>
+        <p:spPr>
+          <a:xfrm>
+            <a:off x="3180720" y="4928202"/>
+            <a:ext cx="3562847" cy="476316"/>
+          </a:xfrm>
+          <a:prstGeom prst="rect">
+            <a:avLst/>
+          </a:prstGeom>
+        </p:spPr>
+      </p:pic>
+      <p:pic>
+        <p:nvPicPr>
+          <p:cNvPr id="11" name="圖片 10">
+            <a:extLst>
+              <a:ext uri="{FF2B5EF4-FFF2-40B4-BE49-F238E27FC236}">
+                <a16:creationId xmlns:a16="http://schemas.microsoft.com/office/drawing/2014/main" id="{59496EF9-36D4-0C7D-C813-847DB411F1C7}"/>
+              </a:ext>
+            </a:extLst>
+          </p:cNvPr>
+          <p:cNvPicPr>
+            <a:picLocks noChangeAspect="1"/>
+          </p:cNvPicPr>
+          <p:nvPr/>
+        </p:nvPicPr>
+        <p:blipFill>
+          <a:blip r:embed="rId4"/>
+          <a:stretch>
+            <a:fillRect/>
+          </a:stretch>
+        </p:blipFill>
+        <p:spPr>
+          <a:xfrm>
+            <a:off x="3180720" y="5763539"/>
+            <a:ext cx="3477110" cy="543001"/>
+          </a:xfrm>
+          <a:prstGeom prst="rect">
+            <a:avLst/>
+          </a:prstGeom>
+        </p:spPr>
+      </p:pic>
+      <p:pic>
+        <p:nvPicPr>
+          <p:cNvPr id="13" name="圖片 12">
+            <a:extLst>
+              <a:ext uri="{FF2B5EF4-FFF2-40B4-BE49-F238E27FC236}">
+                <a16:creationId xmlns:a16="http://schemas.microsoft.com/office/drawing/2014/main" id="{E32A31BF-EF14-5D39-53B7-EF60109503F2}"/>
+              </a:ext>
+            </a:extLst>
+          </p:cNvPr>
+          <p:cNvPicPr>
+            <a:picLocks noChangeAspect="1"/>
+          </p:cNvPicPr>
+          <p:nvPr/>
+        </p:nvPicPr>
+        <p:blipFill>
+          <a:blip r:embed="rId5"/>
+          <a:stretch>
+            <a:fillRect/>
+          </a:stretch>
+        </p:blipFill>
+        <p:spPr>
+          <a:xfrm>
+            <a:off x="7168094" y="4871044"/>
+            <a:ext cx="3305636" cy="590632"/>
+          </a:xfrm>
+          <a:prstGeom prst="rect">
+            <a:avLst/>
+          </a:prstGeom>
+        </p:spPr>
+      </p:pic>
+      <p:pic>
+        <p:nvPicPr>
+          <p:cNvPr id="15" name="圖片 14">
+            <a:extLst>
+              <a:ext uri="{FF2B5EF4-FFF2-40B4-BE49-F238E27FC236}">
+                <a16:creationId xmlns:a16="http://schemas.microsoft.com/office/drawing/2014/main" id="{264AC944-3631-5EC3-0371-839322FD2A38}"/>
+              </a:ext>
+            </a:extLst>
+          </p:cNvPr>
+          <p:cNvPicPr>
+            <a:picLocks noChangeAspect="1"/>
+          </p:cNvPicPr>
+          <p:nvPr/>
+        </p:nvPicPr>
+        <p:blipFill>
+          <a:blip r:embed="rId6"/>
+          <a:stretch>
+            <a:fillRect/>
+          </a:stretch>
+        </p:blipFill>
+        <p:spPr>
+          <a:xfrm>
+            <a:off x="7158567" y="5801644"/>
+            <a:ext cx="3315163" cy="466790"/>
+          </a:xfrm>
+          <a:prstGeom prst="rect">
+            <a:avLst/>
+          </a:prstGeom>
+        </p:spPr>
+      </p:pic>
+      <p:pic>
+        <p:nvPicPr>
+          <p:cNvPr id="17" name="圖片 16">
+            <a:extLst>
+              <a:ext uri="{FF2B5EF4-FFF2-40B4-BE49-F238E27FC236}">
+                <a16:creationId xmlns:a16="http://schemas.microsoft.com/office/drawing/2014/main" id="{1385E2B7-C445-D072-6F18-6B43014077C5}"/>
+              </a:ext>
+            </a:extLst>
+          </p:cNvPr>
+          <p:cNvPicPr>
+            <a:picLocks noChangeAspect="1"/>
+          </p:cNvPicPr>
+          <p:nvPr/>
+        </p:nvPicPr>
+        <p:blipFill>
+          <a:blip r:embed="rId7"/>
+          <a:stretch>
+            <a:fillRect/>
+          </a:stretch>
+        </p:blipFill>
+        <p:spPr>
+          <a:xfrm>
+            <a:off x="300276" y="565621"/>
+            <a:ext cx="2308643" cy="1631041"/>
+          </a:xfrm>
+          <a:prstGeom prst="rect">
+            <a:avLst/>
+          </a:prstGeom>
+        </p:spPr>
+      </p:pic>
+      <p:pic>
+        <p:nvPicPr>
+          <p:cNvPr id="19" name="圖片 18">
+            <a:extLst>
+              <a:ext uri="{FF2B5EF4-FFF2-40B4-BE49-F238E27FC236}">
+                <a16:creationId xmlns:a16="http://schemas.microsoft.com/office/drawing/2014/main" id="{F7DE9BB6-28E2-8C12-1F5F-323AB65F1B3C}"/>
+              </a:ext>
+            </a:extLst>
+          </p:cNvPr>
+          <p:cNvPicPr>
+            <a:picLocks noChangeAspect="1"/>
+          </p:cNvPicPr>
+          <p:nvPr/>
+        </p:nvPicPr>
+        <p:blipFill>
+          <a:blip r:embed="rId8"/>
+          <a:stretch>
+            <a:fillRect/>
+          </a:stretch>
+        </p:blipFill>
+        <p:spPr>
+          <a:xfrm>
+            <a:off x="2955114" y="642438"/>
+            <a:ext cx="3505689" cy="504895"/>
+          </a:xfrm>
+          <a:prstGeom prst="rect">
+            <a:avLst/>
+          </a:prstGeom>
+        </p:spPr>
+      </p:pic>
+      <p:pic>
+        <p:nvPicPr>
+          <p:cNvPr id="21" name="圖片 20">
+            <a:extLst>
+              <a:ext uri="{FF2B5EF4-FFF2-40B4-BE49-F238E27FC236}">
+                <a16:creationId xmlns:a16="http://schemas.microsoft.com/office/drawing/2014/main" id="{D5506E80-79F4-68E5-280A-4631858A52FE}"/>
+              </a:ext>
+            </a:extLst>
+          </p:cNvPr>
+          <p:cNvPicPr>
+            <a:picLocks noChangeAspect="1"/>
+          </p:cNvPicPr>
+          <p:nvPr/>
+        </p:nvPicPr>
+        <p:blipFill>
+          <a:blip r:embed="rId9"/>
+          <a:stretch>
+            <a:fillRect/>
+          </a:stretch>
+        </p:blipFill>
+        <p:spPr>
+          <a:xfrm>
+            <a:off x="3069430" y="1453482"/>
+            <a:ext cx="3391373" cy="552527"/>
+          </a:xfrm>
+          <a:prstGeom prst="rect">
+            <a:avLst/>
+          </a:prstGeom>
+        </p:spPr>
+      </p:pic>
+      <p:pic>
+        <p:nvPicPr>
+          <p:cNvPr id="23" name="圖片 22">
+            <a:extLst>
+              <a:ext uri="{FF2B5EF4-FFF2-40B4-BE49-F238E27FC236}">
+                <a16:creationId xmlns:a16="http://schemas.microsoft.com/office/drawing/2014/main" id="{3AD27AFA-67FD-A387-2782-B2BCDFCB5F77}"/>
+              </a:ext>
+            </a:extLst>
+          </p:cNvPr>
+          <p:cNvPicPr>
+            <a:picLocks noChangeAspect="1"/>
+          </p:cNvPicPr>
+          <p:nvPr/>
+        </p:nvPicPr>
+        <p:blipFill>
+          <a:blip r:embed="rId10"/>
+          <a:stretch>
+            <a:fillRect/>
+          </a:stretch>
+        </p:blipFill>
+        <p:spPr>
+          <a:xfrm>
+            <a:off x="6939494" y="661490"/>
+            <a:ext cx="3305636" cy="485843"/>
+          </a:xfrm>
+          <a:prstGeom prst="rect">
+            <a:avLst/>
+          </a:prstGeom>
+        </p:spPr>
+      </p:pic>
+      <p:pic>
+        <p:nvPicPr>
+          <p:cNvPr id="25" name="圖片 24">
+            <a:extLst>
+              <a:ext uri="{FF2B5EF4-FFF2-40B4-BE49-F238E27FC236}">
+                <a16:creationId xmlns:a16="http://schemas.microsoft.com/office/drawing/2014/main" id="{29EDAE85-6FB3-5C39-546C-0C8F3AC9F0C2}"/>
+              </a:ext>
+            </a:extLst>
+          </p:cNvPr>
+          <p:cNvPicPr>
+            <a:picLocks noChangeAspect="1"/>
+          </p:cNvPicPr>
+          <p:nvPr/>
+        </p:nvPicPr>
+        <p:blipFill>
+          <a:blip r:embed="rId11"/>
+          <a:stretch>
+            <a:fillRect/>
+          </a:stretch>
+        </p:blipFill>
+        <p:spPr>
+          <a:xfrm>
+            <a:off x="7106172" y="1405468"/>
+            <a:ext cx="3419952" cy="466790"/>
+          </a:xfrm>
+          <a:prstGeom prst="rect">
+            <a:avLst/>
+          </a:prstGeom>
+        </p:spPr>
+      </p:pic>
+      <p:pic>
+        <p:nvPicPr>
+          <p:cNvPr id="27" name="圖片 26">
+            <a:extLst>
+              <a:ext uri="{FF2B5EF4-FFF2-40B4-BE49-F238E27FC236}">
+                <a16:creationId xmlns:a16="http://schemas.microsoft.com/office/drawing/2014/main" id="{A2E8AC71-6F85-9187-37B7-7EC9ADC8714A}"/>
+              </a:ext>
+            </a:extLst>
+          </p:cNvPr>
+          <p:cNvPicPr>
+            <a:picLocks noChangeAspect="1"/>
+          </p:cNvPicPr>
+          <p:nvPr/>
+        </p:nvPicPr>
+        <p:blipFill>
+          <a:blip r:embed="rId12"/>
+          <a:stretch>
+            <a:fillRect/>
+          </a:stretch>
+        </p:blipFill>
+        <p:spPr>
+          <a:xfrm>
+            <a:off x="338514" y="2471174"/>
+            <a:ext cx="2671464" cy="1915652"/>
+          </a:xfrm>
+          <a:prstGeom prst="rect">
+            <a:avLst/>
+          </a:prstGeom>
+        </p:spPr>
+      </p:pic>
+      <p:pic>
+        <p:nvPicPr>
+          <p:cNvPr id="29" name="圖片 28">
+            <a:extLst>
+              <a:ext uri="{FF2B5EF4-FFF2-40B4-BE49-F238E27FC236}">
+                <a16:creationId xmlns:a16="http://schemas.microsoft.com/office/drawing/2014/main" id="{3E8EF114-A609-8FBF-3DFF-EC4B5DA695C3}"/>
+              </a:ext>
+            </a:extLst>
+          </p:cNvPr>
+          <p:cNvPicPr>
+            <a:picLocks noChangeAspect="1"/>
+          </p:cNvPicPr>
+          <p:nvPr/>
+        </p:nvPicPr>
+        <p:blipFill>
+          <a:blip r:embed="rId13"/>
+          <a:stretch>
+            <a:fillRect/>
+          </a:stretch>
+        </p:blipFill>
+        <p:spPr>
+          <a:xfrm>
+            <a:off x="3180720" y="2507750"/>
+            <a:ext cx="3315163" cy="543001"/>
+          </a:xfrm>
+          <a:prstGeom prst="rect">
+            <a:avLst/>
+          </a:prstGeom>
+        </p:spPr>
+      </p:pic>
+      <p:pic>
+        <p:nvPicPr>
+          <p:cNvPr id="31" name="圖片 30">
+            <a:extLst>
+              <a:ext uri="{FF2B5EF4-FFF2-40B4-BE49-F238E27FC236}">
+                <a16:creationId xmlns:a16="http://schemas.microsoft.com/office/drawing/2014/main" id="{1AA1385E-3CFC-84EB-D4C3-1D5CC36D42E6}"/>
+              </a:ext>
+            </a:extLst>
+          </p:cNvPr>
+          <p:cNvPicPr>
+            <a:picLocks noChangeAspect="1"/>
+          </p:cNvPicPr>
+          <p:nvPr/>
+        </p:nvPicPr>
+        <p:blipFill>
+          <a:blip r:embed="rId14"/>
+          <a:stretch>
+            <a:fillRect/>
+          </a:stretch>
+        </p:blipFill>
+        <p:spPr>
+          <a:xfrm>
+            <a:off x="3567173" y="3448474"/>
+            <a:ext cx="3372321" cy="495369"/>
+          </a:xfrm>
+          <a:prstGeom prst="rect">
+            <a:avLst/>
+          </a:prstGeom>
+        </p:spPr>
+      </p:pic>
+      <p:pic>
+        <p:nvPicPr>
+          <p:cNvPr id="33" name="圖片 32">
+            <a:extLst>
+              <a:ext uri="{FF2B5EF4-FFF2-40B4-BE49-F238E27FC236}">
+                <a16:creationId xmlns:a16="http://schemas.microsoft.com/office/drawing/2014/main" id="{EE1D8011-D053-969B-89FF-E519AB0D1D56}"/>
+              </a:ext>
+            </a:extLst>
+          </p:cNvPr>
+          <p:cNvPicPr>
+            <a:picLocks noChangeAspect="1"/>
+          </p:cNvPicPr>
+          <p:nvPr/>
+        </p:nvPicPr>
+        <p:blipFill>
+          <a:blip r:embed="rId15"/>
+          <a:stretch>
+            <a:fillRect/>
+          </a:stretch>
+        </p:blipFill>
+        <p:spPr>
+          <a:xfrm>
+            <a:off x="7168094" y="2353824"/>
+            <a:ext cx="3915321" cy="552527"/>
+          </a:xfrm>
+          <a:prstGeom prst="rect">
+            <a:avLst/>
+          </a:prstGeom>
+        </p:spPr>
+      </p:pic>
+      <p:pic>
+        <p:nvPicPr>
+          <p:cNvPr id="35" name="圖片 34">
+            <a:extLst>
+              <a:ext uri="{FF2B5EF4-FFF2-40B4-BE49-F238E27FC236}">
+                <a16:creationId xmlns:a16="http://schemas.microsoft.com/office/drawing/2014/main" id="{C6605015-B01C-D7B6-7F2B-E8290CB6BEC7}"/>
+              </a:ext>
+            </a:extLst>
+          </p:cNvPr>
+          <p:cNvPicPr>
+            <a:picLocks noChangeAspect="1"/>
+          </p:cNvPicPr>
+          <p:nvPr/>
+        </p:nvPicPr>
+        <p:blipFill>
+          <a:blip r:embed="rId16"/>
+          <a:stretch>
+            <a:fillRect/>
+          </a:stretch>
+        </p:blipFill>
+        <p:spPr>
+          <a:xfrm>
+            <a:off x="7353825" y="3341581"/>
+            <a:ext cx="3391373" cy="495369"/>
+          </a:xfrm>
+          <a:prstGeom prst="rect">
+            <a:avLst/>
+          </a:prstGeom>
+        </p:spPr>
+      </p:pic>
+    </p:spTree>
+    <p:extLst>
+      <p:ext uri="{BB962C8B-B14F-4D97-AF65-F5344CB8AC3E}">
+        <p14:creationId xmlns:p14="http://schemas.microsoft.com/office/powerpoint/2010/main" val="3798451928"/>
+      </p:ext>
+    </p:extLst>
+  </p:cSld>
+  <p:clrMapOvr>
+    <a:masterClrMapping/>
+  </p:clrMapOvr>
+</p:sld>
+</file>
+
 <file path=ppt/slides/slide2.xml><?xml version="1.0" encoding="utf-8"?>
 <p:sld xmlns:a="http://schemas.openxmlformats.org/drawingml/2006/main" xmlns:r="http://schemas.openxmlformats.org/officeDocument/2006/relationships" xmlns:p="http://schemas.openxmlformats.org/presentationml/2006/main">
   <p:cSld>
@@ -5597,6 +10679,1414 @@
     <p:extLst>
       <p:ext uri="{BB962C8B-B14F-4D97-AF65-F5344CB8AC3E}">
         <p14:creationId xmlns:p14="http://schemas.microsoft.com/office/powerpoint/2010/main" val="936600707"/>
+      </p:ext>
+    </p:extLst>
+  </p:cSld>
+  <p:clrMapOvr>
+    <a:masterClrMapping/>
+  </p:clrMapOvr>
+</p:sld>
+</file>
+
+<file path=ppt/slides/slide8.xml><?xml version="1.0" encoding="utf-8"?>
+<p:sld xmlns:a="http://schemas.openxmlformats.org/drawingml/2006/main" xmlns:r="http://schemas.openxmlformats.org/officeDocument/2006/relationships" xmlns:p="http://schemas.openxmlformats.org/presentationml/2006/main">
+  <p:cSld>
+    <p:spTree>
+      <p:nvGrpSpPr>
+        <p:cNvPr id="1" name=""/>
+        <p:cNvGrpSpPr/>
+        <p:nvPr/>
+      </p:nvGrpSpPr>
+      <p:grpSpPr>
+        <a:xfrm>
+          <a:off x="0" y="0"/>
+          <a:ext cx="0" cy="0"/>
+          <a:chOff x="0" y="0"/>
+          <a:chExt cx="0" cy="0"/>
+        </a:xfrm>
+      </p:grpSpPr>
+      <p:sp>
+        <p:nvSpPr>
+          <p:cNvPr id="4" name="文字方塊 3">
+            <a:extLst>
+              <a:ext uri="{FF2B5EF4-FFF2-40B4-BE49-F238E27FC236}">
+                <a16:creationId xmlns:a16="http://schemas.microsoft.com/office/drawing/2014/main" id="{C162FF06-8048-C79E-6DC5-2D96C2D9B196}"/>
+              </a:ext>
+            </a:extLst>
+          </p:cNvPr>
+          <p:cNvSpPr txBox="1"/>
+          <p:nvPr/>
+        </p:nvSpPr>
+        <p:spPr>
+          <a:xfrm>
+            <a:off x="219456" y="35929"/>
+            <a:ext cx="1216152" cy="369332"/>
+          </a:xfrm>
+          <a:prstGeom prst="rect">
+            <a:avLst/>
+          </a:prstGeom>
+          <a:noFill/>
+        </p:spPr>
+        <p:txBody>
+          <a:bodyPr wrap="square" rtlCol="0">
+            <a:spAutoFit/>
+          </a:bodyPr>
+          <a:lstStyle/>
+          <a:p>
+            <a:r>
+              <a:rPr lang="en-US" altLang="zh-TW" dirty="0"/>
+              <a:t>CNN</a:t>
+            </a:r>
+            <a:r>
+              <a:rPr lang="zh-TW" altLang="en-US" dirty="0"/>
+              <a:t> </a:t>
+            </a:r>
+            <a:r>
+              <a:rPr lang="en-US" altLang="zh-TW" dirty="0"/>
+              <a:t>42</a:t>
+            </a:r>
+            <a:endParaRPr lang="zh-TW" altLang="en-US" dirty="0"/>
+          </a:p>
+        </p:txBody>
+      </p:sp>
+      <p:pic>
+        <p:nvPicPr>
+          <p:cNvPr id="6" name="圖片 5">
+            <a:extLst>
+              <a:ext uri="{FF2B5EF4-FFF2-40B4-BE49-F238E27FC236}">
+                <a16:creationId xmlns:a16="http://schemas.microsoft.com/office/drawing/2014/main" id="{2883A98F-84C3-67FE-BCB5-B9CF9479B335}"/>
+              </a:ext>
+            </a:extLst>
+          </p:cNvPr>
+          <p:cNvPicPr>
+            <a:picLocks noChangeAspect="1"/>
+          </p:cNvPicPr>
+          <p:nvPr/>
+        </p:nvPicPr>
+        <p:blipFill>
+          <a:blip r:embed="rId2"/>
+          <a:stretch>
+            <a:fillRect/>
+          </a:stretch>
+        </p:blipFill>
+        <p:spPr>
+          <a:xfrm>
+            <a:off x="416046" y="502920"/>
+            <a:ext cx="1977862" cy="2049228"/>
+          </a:xfrm>
+          <a:prstGeom prst="rect">
+            <a:avLst/>
+          </a:prstGeom>
+        </p:spPr>
+      </p:pic>
+      <p:sp>
+        <p:nvSpPr>
+          <p:cNvPr id="8" name="文字方塊 7">
+            <a:extLst>
+              <a:ext uri="{FF2B5EF4-FFF2-40B4-BE49-F238E27FC236}">
+                <a16:creationId xmlns:a16="http://schemas.microsoft.com/office/drawing/2014/main" id="{FADB8A41-A5F9-C4E0-A761-0D5F41A551CC}"/>
+              </a:ext>
+            </a:extLst>
+          </p:cNvPr>
+          <p:cNvSpPr txBox="1"/>
+          <p:nvPr/>
+        </p:nvSpPr>
+        <p:spPr>
+          <a:xfrm>
+            <a:off x="2654046" y="10283"/>
+            <a:ext cx="7358634" cy="646331"/>
+          </a:xfrm>
+          <a:prstGeom prst="rect">
+            <a:avLst/>
+          </a:prstGeom>
+          <a:noFill/>
+        </p:spPr>
+        <p:txBody>
+          <a:bodyPr wrap="square">
+            <a:spAutoFit/>
+          </a:bodyPr>
+          <a:lstStyle/>
+          <a:p>
+            <a:r>
+              <a:rPr lang="en-US" altLang="zh-TW" sz="1200" b="0" i="0" dirty="0">
+                <a:solidFill>
+                  <a:srgbClr val="D5D5D5"/>
+                </a:solidFill>
+                <a:effectLst/>
+                <a:highlight>
+                  <a:srgbClr val="383838"/>
+                </a:highlight>
+                <a:latin typeface="Courier New" panose="02070309020205020404" pitchFamily="49" charset="0"/>
+              </a:rPr>
+              <a:t>Accuracy: 0.7048611111111112 Sensitivity: 0.37853470437017994 Specificity: 0.8712319790301442 Positive Predictive Value (PPV): 0.59979633401222 Negative Predictive Value (NPV): 0.7333149476006618</a:t>
+            </a:r>
+            <a:endParaRPr lang="zh-TW" altLang="en-US" sz="1200" dirty="0"/>
+          </a:p>
+        </p:txBody>
+      </p:sp>
+      <p:sp>
+        <p:nvSpPr>
+          <p:cNvPr id="10" name="文字方塊 9">
+            <a:extLst>
+              <a:ext uri="{FF2B5EF4-FFF2-40B4-BE49-F238E27FC236}">
+                <a16:creationId xmlns:a16="http://schemas.microsoft.com/office/drawing/2014/main" id="{802EAF50-CF0B-B9F4-029F-BC8166E0105D}"/>
+              </a:ext>
+            </a:extLst>
+          </p:cNvPr>
+          <p:cNvSpPr txBox="1"/>
+          <p:nvPr/>
+        </p:nvSpPr>
+        <p:spPr>
+          <a:xfrm>
+            <a:off x="2654046" y="656614"/>
+            <a:ext cx="7468362" cy="646331"/>
+          </a:xfrm>
+          <a:prstGeom prst="rect">
+            <a:avLst/>
+          </a:prstGeom>
+          <a:noFill/>
+        </p:spPr>
+        <p:txBody>
+          <a:bodyPr wrap="square">
+            <a:spAutoFit/>
+          </a:bodyPr>
+          <a:lstStyle/>
+          <a:p>
+            <a:r>
+              <a:rPr lang="en-US" altLang="zh-TW" sz="1200" b="0" i="0" dirty="0">
+                <a:solidFill>
+                  <a:srgbClr val="D5D5D5"/>
+                </a:solidFill>
+                <a:effectLst/>
+                <a:highlight>
+                  <a:srgbClr val="383838"/>
+                </a:highlight>
+                <a:latin typeface="Courier New" panose="02070309020205020404" pitchFamily="49" charset="0"/>
+              </a:rPr>
+              <a:t>Accuracy: 0.7237413194444444 Sensitivity: 0.32519280205655526 Specificity: 0.9269331585845347 Positive Predictive Value (PPV): 0.6941015089163237 Negative Predictive Value (NPV): 0.7293116782675947</a:t>
+            </a:r>
+            <a:endParaRPr lang="zh-TW" altLang="en-US" sz="1200" dirty="0"/>
+          </a:p>
+        </p:txBody>
+      </p:sp>
+      <p:sp>
+        <p:nvSpPr>
+          <p:cNvPr id="12" name="文字方塊 11">
+            <a:extLst>
+              <a:ext uri="{FF2B5EF4-FFF2-40B4-BE49-F238E27FC236}">
+                <a16:creationId xmlns:a16="http://schemas.microsoft.com/office/drawing/2014/main" id="{C94FB3C3-234C-F010-700D-6C334150F569}"/>
+              </a:ext>
+            </a:extLst>
+          </p:cNvPr>
+          <p:cNvSpPr txBox="1"/>
+          <p:nvPr/>
+        </p:nvSpPr>
+        <p:spPr>
+          <a:xfrm>
+            <a:off x="2654046" y="1302945"/>
+            <a:ext cx="7468362" cy="646331"/>
+          </a:xfrm>
+          <a:prstGeom prst="rect">
+            <a:avLst/>
+          </a:prstGeom>
+          <a:noFill/>
+        </p:spPr>
+        <p:txBody>
+          <a:bodyPr wrap="square">
+            <a:spAutoFit/>
+          </a:bodyPr>
+          <a:lstStyle/>
+          <a:p>
+            <a:r>
+              <a:rPr lang="en-US" altLang="zh-TW" sz="1200" b="0" i="0" dirty="0">
+                <a:solidFill>
+                  <a:srgbClr val="D5D5D5"/>
+                </a:solidFill>
+                <a:effectLst/>
+                <a:highlight>
+                  <a:srgbClr val="383838"/>
+                </a:highlight>
+                <a:latin typeface="Courier New" panose="02070309020205020404" pitchFamily="49" charset="0"/>
+              </a:rPr>
+              <a:t>Accuracy: 0.8133680555555556 Sensitivity: 0.4640102827763496 Specificity: 0.991480996068152 Positive Predictive Value (PPV): 0.9652406417112299 Negative Predictive Value (NPV): 0.7839378238341969</a:t>
+            </a:r>
+            <a:endParaRPr lang="zh-TW" altLang="en-US" sz="1200" dirty="0"/>
+          </a:p>
+        </p:txBody>
+      </p:sp>
+      <p:sp>
+        <p:nvSpPr>
+          <p:cNvPr id="14" name="文字方塊 13">
+            <a:extLst>
+              <a:ext uri="{FF2B5EF4-FFF2-40B4-BE49-F238E27FC236}">
+                <a16:creationId xmlns:a16="http://schemas.microsoft.com/office/drawing/2014/main" id="{FC3854F3-A9FE-3DBF-8954-1E07B0EBE9DC}"/>
+              </a:ext>
+            </a:extLst>
+          </p:cNvPr>
+          <p:cNvSpPr txBox="1"/>
+          <p:nvPr/>
+        </p:nvSpPr>
+        <p:spPr>
+          <a:xfrm>
+            <a:off x="2654046" y="1859093"/>
+            <a:ext cx="7541514" cy="646331"/>
+          </a:xfrm>
+          <a:prstGeom prst="rect">
+            <a:avLst/>
+          </a:prstGeom>
+          <a:noFill/>
+        </p:spPr>
+        <p:txBody>
+          <a:bodyPr wrap="square">
+            <a:spAutoFit/>
+          </a:bodyPr>
+          <a:lstStyle/>
+          <a:p>
+            <a:r>
+              <a:rPr lang="en-US" altLang="zh-TW" sz="1200" b="0" i="0" dirty="0">
+                <a:solidFill>
+                  <a:srgbClr val="D5D5D5"/>
+                </a:solidFill>
+                <a:effectLst/>
+                <a:highlight>
+                  <a:srgbClr val="383838"/>
+                </a:highlight>
+                <a:latin typeface="Courier New" panose="02070309020205020404" pitchFamily="49" charset="0"/>
+              </a:rPr>
+              <a:t>Accuracy: 0.8157552083333334 Sensitivity: 0.487146529562982 Specificity: 0.9832896461336829 Positive Predictive Value (PPV): 0.9369592088998764 Negative Predictive Value (NPV): 0.7899447222953409</a:t>
+            </a:r>
+            <a:endParaRPr lang="zh-TW" altLang="en-US" sz="1200" dirty="0"/>
+          </a:p>
+        </p:txBody>
+      </p:sp>
+      <p:pic>
+        <p:nvPicPr>
+          <p:cNvPr id="16" name="圖片 15">
+            <a:extLst>
+              <a:ext uri="{FF2B5EF4-FFF2-40B4-BE49-F238E27FC236}">
+                <a16:creationId xmlns:a16="http://schemas.microsoft.com/office/drawing/2014/main" id="{5759E09D-E3B8-B4D7-9652-5342D9C7F9E7}"/>
+              </a:ext>
+            </a:extLst>
+          </p:cNvPr>
+          <p:cNvPicPr>
+            <a:picLocks noChangeAspect="1"/>
+          </p:cNvPicPr>
+          <p:nvPr/>
+        </p:nvPicPr>
+        <p:blipFill>
+          <a:blip r:embed="rId3"/>
+          <a:stretch>
+            <a:fillRect/>
+          </a:stretch>
+        </p:blipFill>
+        <p:spPr>
+          <a:xfrm>
+            <a:off x="517241" y="2669938"/>
+            <a:ext cx="2006732" cy="2075930"/>
+          </a:xfrm>
+          <a:prstGeom prst="rect">
+            <a:avLst/>
+          </a:prstGeom>
+        </p:spPr>
+      </p:pic>
+      <p:sp>
+        <p:nvSpPr>
+          <p:cNvPr id="18" name="文字方塊 17">
+            <a:extLst>
+              <a:ext uri="{FF2B5EF4-FFF2-40B4-BE49-F238E27FC236}">
+                <a16:creationId xmlns:a16="http://schemas.microsoft.com/office/drawing/2014/main" id="{49BA6745-326C-EBBA-6C6A-17BD02D652CB}"/>
+              </a:ext>
+            </a:extLst>
+          </p:cNvPr>
+          <p:cNvSpPr txBox="1"/>
+          <p:nvPr/>
+        </p:nvSpPr>
+        <p:spPr>
+          <a:xfrm>
+            <a:off x="2654046" y="2518601"/>
+            <a:ext cx="7159519" cy="646331"/>
+          </a:xfrm>
+          <a:prstGeom prst="rect">
+            <a:avLst/>
+          </a:prstGeom>
+          <a:noFill/>
+        </p:spPr>
+        <p:txBody>
+          <a:bodyPr wrap="square">
+            <a:spAutoFit/>
+          </a:bodyPr>
+          <a:lstStyle/>
+          <a:p>
+            <a:r>
+              <a:rPr lang="en-US" altLang="zh-TW" sz="1200" b="0" i="0" dirty="0">
+                <a:solidFill>
+                  <a:srgbClr val="D5D5D5"/>
+                </a:solidFill>
+                <a:effectLst/>
+                <a:highlight>
+                  <a:srgbClr val="383838"/>
+                </a:highlight>
+                <a:latin typeface="Courier New" panose="02070309020205020404" pitchFamily="49" charset="0"/>
+              </a:rPr>
+              <a:t>Accuracy: 0.6883680555555556 Sensitivity: 0.7101990049751243 Specificity: 0.6766666666666666 Positive Predictive Value (PPV): 0.540719696969697 Negative Predictive Value (NPV): 0.813301282051282</a:t>
+            </a:r>
+            <a:endParaRPr lang="zh-TW" altLang="en-US" sz="1200" dirty="0"/>
+          </a:p>
+        </p:txBody>
+      </p:sp>
+      <p:sp>
+        <p:nvSpPr>
+          <p:cNvPr id="20" name="文字方塊 19">
+            <a:extLst>
+              <a:ext uri="{FF2B5EF4-FFF2-40B4-BE49-F238E27FC236}">
+                <a16:creationId xmlns:a16="http://schemas.microsoft.com/office/drawing/2014/main" id="{45E590C7-FE34-D30C-6D06-E325C1965446}"/>
+              </a:ext>
+            </a:extLst>
+          </p:cNvPr>
+          <p:cNvSpPr txBox="1"/>
+          <p:nvPr/>
+        </p:nvSpPr>
+        <p:spPr>
+          <a:xfrm>
+            <a:off x="2654045" y="3061572"/>
+            <a:ext cx="7159519" cy="646331"/>
+          </a:xfrm>
+          <a:prstGeom prst="rect">
+            <a:avLst/>
+          </a:prstGeom>
+          <a:noFill/>
+        </p:spPr>
+        <p:txBody>
+          <a:bodyPr wrap="square">
+            <a:spAutoFit/>
+          </a:bodyPr>
+          <a:lstStyle/>
+          <a:p>
+            <a:r>
+              <a:rPr lang="en-US" altLang="zh-TW" sz="1200" b="0" i="0" dirty="0">
+                <a:solidFill>
+                  <a:srgbClr val="D5D5D5"/>
+                </a:solidFill>
+                <a:effectLst/>
+                <a:highlight>
+                  <a:srgbClr val="383838"/>
+                </a:highlight>
+                <a:latin typeface="Courier New" panose="02070309020205020404" pitchFamily="49" charset="0"/>
+              </a:rPr>
+              <a:t>Accuracy: 0.7092013888888888 Sensitivity: 0.6859452736318408 Specificity: 0.7216666666666667 Positive Predictive Value (PPV): 0.5691434468524251 Negative Predictive Value (NPV): 0.8108614232209738</a:t>
+            </a:r>
+            <a:endParaRPr lang="zh-TW" altLang="en-US" sz="1200" dirty="0"/>
+          </a:p>
+        </p:txBody>
+      </p:sp>
+      <p:sp>
+        <p:nvSpPr>
+          <p:cNvPr id="22" name="文字方塊 21">
+            <a:extLst>
+              <a:ext uri="{FF2B5EF4-FFF2-40B4-BE49-F238E27FC236}">
+                <a16:creationId xmlns:a16="http://schemas.microsoft.com/office/drawing/2014/main" id="{4A0BE0EB-35AB-9890-27B5-8162F26D5795}"/>
+              </a:ext>
+            </a:extLst>
+          </p:cNvPr>
+          <p:cNvSpPr txBox="1"/>
+          <p:nvPr/>
+        </p:nvSpPr>
+        <p:spPr>
+          <a:xfrm>
+            <a:off x="2654044" y="3657103"/>
+            <a:ext cx="6727700" cy="646331"/>
+          </a:xfrm>
+          <a:prstGeom prst="rect">
+            <a:avLst/>
+          </a:prstGeom>
+          <a:noFill/>
+        </p:spPr>
+        <p:txBody>
+          <a:bodyPr wrap="square">
+            <a:spAutoFit/>
+          </a:bodyPr>
+          <a:lstStyle/>
+          <a:p>
+            <a:r>
+              <a:rPr lang="en-US" altLang="zh-TW" sz="1200" b="0" i="0" dirty="0">
+                <a:solidFill>
+                  <a:srgbClr val="D5D5D5"/>
+                </a:solidFill>
+                <a:effectLst/>
+                <a:highlight>
+                  <a:srgbClr val="383838"/>
+                </a:highlight>
+                <a:latin typeface="Courier New" panose="02070309020205020404" pitchFamily="49" charset="0"/>
+              </a:rPr>
+              <a:t>Accuracy: 0.7760416666666666 Sensitivity: 0.4247512437810945 Specificity: 0.9643333333333334 Positive Predictive Value (PPV): 0.8645569620253165 Negative Predictive Value (NPV): 0.7577265584075432</a:t>
+            </a:r>
+            <a:endParaRPr lang="zh-TW" altLang="en-US" sz="1200" dirty="0"/>
+          </a:p>
+        </p:txBody>
+      </p:sp>
+      <p:sp>
+        <p:nvSpPr>
+          <p:cNvPr id="24" name="文字方塊 23">
+            <a:extLst>
+              <a:ext uri="{FF2B5EF4-FFF2-40B4-BE49-F238E27FC236}">
+                <a16:creationId xmlns:a16="http://schemas.microsoft.com/office/drawing/2014/main" id="{5D6D843B-B75D-A7A8-0F6B-FA5B628E69D1}"/>
+              </a:ext>
+            </a:extLst>
+          </p:cNvPr>
+          <p:cNvSpPr txBox="1"/>
+          <p:nvPr/>
+        </p:nvSpPr>
+        <p:spPr>
+          <a:xfrm>
+            <a:off x="2654042" y="4240566"/>
+            <a:ext cx="7248909" cy="646331"/>
+          </a:xfrm>
+          <a:prstGeom prst="rect">
+            <a:avLst/>
+          </a:prstGeom>
+          <a:noFill/>
+        </p:spPr>
+        <p:txBody>
+          <a:bodyPr wrap="square">
+            <a:spAutoFit/>
+          </a:bodyPr>
+          <a:lstStyle/>
+          <a:p>
+            <a:r>
+              <a:rPr lang="en-US" altLang="zh-TW" sz="1200" b="0" i="0" dirty="0">
+                <a:solidFill>
+                  <a:srgbClr val="D5D5D5"/>
+                </a:solidFill>
+                <a:effectLst/>
+                <a:highlight>
+                  <a:srgbClr val="383838"/>
+                </a:highlight>
+                <a:latin typeface="Courier New" panose="02070309020205020404" pitchFamily="49" charset="0"/>
+              </a:rPr>
+              <a:t>Accuracy: 0.7801649305555556 Sensitivity: 0.43843283582089554 Specificity: 0.9633333333333334 Positive Predictive Value (PPV): 0.8650306748466258 Negative Predictive Value (NPV): 0.7619298708146586</a:t>
+            </a:r>
+            <a:endParaRPr lang="zh-TW" altLang="en-US" sz="1200" dirty="0"/>
+          </a:p>
+        </p:txBody>
+      </p:sp>
+      <p:pic>
+        <p:nvPicPr>
+          <p:cNvPr id="26" name="圖片 25">
+            <a:extLst>
+              <a:ext uri="{FF2B5EF4-FFF2-40B4-BE49-F238E27FC236}">
+                <a16:creationId xmlns:a16="http://schemas.microsoft.com/office/drawing/2014/main" id="{1E0ECDB3-2441-CC19-CE93-B68A1D337DEE}"/>
+              </a:ext>
+            </a:extLst>
+          </p:cNvPr>
+          <p:cNvPicPr>
+            <a:picLocks noChangeAspect="1"/>
+          </p:cNvPicPr>
+          <p:nvPr/>
+        </p:nvPicPr>
+        <p:blipFill>
+          <a:blip r:embed="rId4"/>
+          <a:stretch>
+            <a:fillRect/>
+          </a:stretch>
+        </p:blipFill>
+        <p:spPr>
+          <a:xfrm>
+            <a:off x="643447" y="4886897"/>
+            <a:ext cx="1880526" cy="1935174"/>
+          </a:xfrm>
+          <a:prstGeom prst="rect">
+            <a:avLst/>
+          </a:prstGeom>
+        </p:spPr>
+      </p:pic>
+      <p:sp>
+        <p:nvSpPr>
+          <p:cNvPr id="28" name="文字方塊 27">
+            <a:extLst>
+              <a:ext uri="{FF2B5EF4-FFF2-40B4-BE49-F238E27FC236}">
+                <a16:creationId xmlns:a16="http://schemas.microsoft.com/office/drawing/2014/main" id="{854E1424-B460-5DED-8D60-E936A2BECEE6}"/>
+              </a:ext>
+            </a:extLst>
+          </p:cNvPr>
+          <p:cNvSpPr txBox="1"/>
+          <p:nvPr/>
+        </p:nvSpPr>
+        <p:spPr>
+          <a:xfrm>
+            <a:off x="2654042" y="4886663"/>
+            <a:ext cx="8237478" cy="430887"/>
+          </a:xfrm>
+          <a:prstGeom prst="rect">
+            <a:avLst/>
+          </a:prstGeom>
+          <a:noFill/>
+        </p:spPr>
+        <p:txBody>
+          <a:bodyPr wrap="square">
+            <a:spAutoFit/>
+          </a:bodyPr>
+          <a:lstStyle/>
+          <a:p>
+            <a:r>
+              <a:rPr lang="en-US" altLang="zh-TW" sz="1100" b="0" i="0" dirty="0">
+                <a:solidFill>
+                  <a:srgbClr val="D5D5D5"/>
+                </a:solidFill>
+                <a:effectLst/>
+                <a:highlight>
+                  <a:srgbClr val="383838"/>
+                </a:highlight>
+                <a:latin typeface="Courier New" panose="02070309020205020404" pitchFamily="49" charset="0"/>
+              </a:rPr>
+              <a:t>Accuracy: 0.712890625 Sensitivity: 0.4119537275064267 Specificity: 0.8663171690694627 Positive Predictive Value (PPV): 0.6110581506196378 Negative Predictive Value (NPV): 0.742905310480472</a:t>
+            </a:r>
+            <a:endParaRPr lang="zh-TW" altLang="en-US" sz="1100" dirty="0"/>
+          </a:p>
+        </p:txBody>
+      </p:sp>
+      <p:sp>
+        <p:nvSpPr>
+          <p:cNvPr id="30" name="文字方塊 29">
+            <a:extLst>
+              <a:ext uri="{FF2B5EF4-FFF2-40B4-BE49-F238E27FC236}">
+                <a16:creationId xmlns:a16="http://schemas.microsoft.com/office/drawing/2014/main" id="{CE53D147-D0B8-A376-BED4-8232AC0DC5A8}"/>
+              </a:ext>
+            </a:extLst>
+          </p:cNvPr>
+          <p:cNvSpPr txBox="1"/>
+          <p:nvPr/>
+        </p:nvSpPr>
+        <p:spPr>
+          <a:xfrm>
+            <a:off x="2654042" y="5279574"/>
+            <a:ext cx="8481318" cy="400110"/>
+          </a:xfrm>
+          <a:prstGeom prst="rect">
+            <a:avLst/>
+          </a:prstGeom>
+          <a:noFill/>
+        </p:spPr>
+        <p:txBody>
+          <a:bodyPr wrap="square">
+            <a:spAutoFit/>
+          </a:bodyPr>
+          <a:lstStyle/>
+          <a:p>
+            <a:r>
+              <a:rPr lang="en-US" altLang="zh-TW" sz="1000" b="0" i="0" dirty="0">
+                <a:solidFill>
+                  <a:srgbClr val="D5D5D5"/>
+                </a:solidFill>
+                <a:effectLst/>
+                <a:highlight>
+                  <a:srgbClr val="383838"/>
+                </a:highlight>
+                <a:latin typeface="Courier New" panose="02070309020205020404" pitchFamily="49" charset="0"/>
+              </a:rPr>
+              <a:t>Accuracy: 0.7161458333333334 Sensitivity: 0.6561696658097687 Specificity: 0.7467234600262124 Positive Predictive Value (PPV): 0.5691192865105908 Negative Predictive Value (NPV): 0.8098791755508173</a:t>
+            </a:r>
+            <a:endParaRPr lang="zh-TW" altLang="en-US" sz="1000" dirty="0"/>
+          </a:p>
+        </p:txBody>
+      </p:sp>
+      <p:sp>
+        <p:nvSpPr>
+          <p:cNvPr id="32" name="文字方塊 31">
+            <a:extLst>
+              <a:ext uri="{FF2B5EF4-FFF2-40B4-BE49-F238E27FC236}">
+                <a16:creationId xmlns:a16="http://schemas.microsoft.com/office/drawing/2014/main" id="{79CF3D4B-78A4-7D32-43BF-D0A671F50551}"/>
+              </a:ext>
+            </a:extLst>
+          </p:cNvPr>
+          <p:cNvSpPr txBox="1"/>
+          <p:nvPr/>
+        </p:nvSpPr>
+        <p:spPr>
+          <a:xfrm>
+            <a:off x="2654041" y="5647062"/>
+            <a:ext cx="8894511" cy="430887"/>
+          </a:xfrm>
+          <a:prstGeom prst="rect">
+            <a:avLst/>
+          </a:prstGeom>
+          <a:noFill/>
+        </p:spPr>
+        <p:txBody>
+          <a:bodyPr wrap="square">
+            <a:spAutoFit/>
+          </a:bodyPr>
+          <a:lstStyle/>
+          <a:p>
+            <a:r>
+              <a:rPr lang="en-US" altLang="zh-TW" sz="1100" b="0" i="0" dirty="0">
+                <a:solidFill>
+                  <a:srgbClr val="D5D5D5"/>
+                </a:solidFill>
+                <a:effectLst/>
+                <a:highlight>
+                  <a:srgbClr val="383838"/>
+                </a:highlight>
+                <a:latin typeface="Courier New" panose="02070309020205020404" pitchFamily="49" charset="0"/>
+              </a:rPr>
+              <a:t>Accuracy: 0.7779947916666666 Sensitivity: 0.4524421593830334 Specificity: 0.9439711664482306 Positive Predictive Value (PPV): 0.8045714285714286 Negative Predictive Value (NPV): 0.7717653361907313</a:t>
+            </a:r>
+            <a:endParaRPr lang="zh-TW" altLang="en-US" sz="1100" dirty="0"/>
+          </a:p>
+        </p:txBody>
+      </p:sp>
+      <p:sp>
+        <p:nvSpPr>
+          <p:cNvPr id="34" name="文字方塊 33">
+            <a:extLst>
+              <a:ext uri="{FF2B5EF4-FFF2-40B4-BE49-F238E27FC236}">
+                <a16:creationId xmlns:a16="http://schemas.microsoft.com/office/drawing/2014/main" id="{3BC45A8F-A5A5-1BBC-0859-CF591D3548C9}"/>
+              </a:ext>
+            </a:extLst>
+          </p:cNvPr>
+          <p:cNvSpPr txBox="1"/>
+          <p:nvPr/>
+        </p:nvSpPr>
+        <p:spPr>
+          <a:xfrm>
+            <a:off x="2654040" y="6019279"/>
+            <a:ext cx="8745480" cy="430887"/>
+          </a:xfrm>
+          <a:prstGeom prst="rect">
+            <a:avLst/>
+          </a:prstGeom>
+          <a:noFill/>
+        </p:spPr>
+        <p:txBody>
+          <a:bodyPr wrap="square">
+            <a:spAutoFit/>
+          </a:bodyPr>
+          <a:lstStyle/>
+          <a:p>
+            <a:r>
+              <a:rPr lang="en-US" altLang="zh-TW" sz="1100" b="0" i="0" dirty="0">
+                <a:solidFill>
+                  <a:srgbClr val="D5D5D5"/>
+                </a:solidFill>
+                <a:effectLst/>
+                <a:highlight>
+                  <a:srgbClr val="383838"/>
+                </a:highlight>
+                <a:latin typeface="Courier New" panose="02070309020205020404" pitchFamily="49" charset="0"/>
+              </a:rPr>
+              <a:t>Accuracy: 0.7719184027777778 Sensitivity: 0.4453727506426735 Specificity: 0.9384010484927916 Positive Predictive Value (PPV): 0.7866061293984109 Negative Predictive Value (NPV): 0.7684464716930507</a:t>
+            </a:r>
+            <a:endParaRPr lang="zh-TW" altLang="en-US" sz="1100" dirty="0"/>
+          </a:p>
+        </p:txBody>
+      </p:sp>
+    </p:spTree>
+    <p:extLst>
+      <p:ext uri="{BB962C8B-B14F-4D97-AF65-F5344CB8AC3E}">
+        <p14:creationId xmlns:p14="http://schemas.microsoft.com/office/powerpoint/2010/main" val="907152682"/>
+      </p:ext>
+    </p:extLst>
+  </p:cSld>
+  <p:clrMapOvr>
+    <a:masterClrMapping/>
+  </p:clrMapOvr>
+</p:sld>
+</file>
+
+<file path=ppt/slides/slide9.xml><?xml version="1.0" encoding="utf-8"?>
+<p:sld xmlns:a="http://schemas.openxmlformats.org/drawingml/2006/main" xmlns:r="http://schemas.openxmlformats.org/officeDocument/2006/relationships" xmlns:p="http://schemas.openxmlformats.org/presentationml/2006/main">
+  <p:cSld>
+    <p:spTree>
+      <p:nvGrpSpPr>
+        <p:cNvPr id="1" name=""/>
+        <p:cNvGrpSpPr/>
+        <p:nvPr/>
+      </p:nvGrpSpPr>
+      <p:grpSpPr>
+        <a:xfrm>
+          <a:off x="0" y="0"/>
+          <a:ext cx="0" cy="0"/>
+          <a:chOff x="0" y="0"/>
+          <a:chExt cx="0" cy="0"/>
+        </a:xfrm>
+      </p:grpSpPr>
+      <p:sp>
+        <p:nvSpPr>
+          <p:cNvPr id="5" name="文字方塊 4">
+            <a:extLst>
+              <a:ext uri="{FF2B5EF4-FFF2-40B4-BE49-F238E27FC236}">
+                <a16:creationId xmlns:a16="http://schemas.microsoft.com/office/drawing/2014/main" id="{02754C4D-CAE3-E246-628F-749C085DAF81}"/>
+              </a:ext>
+            </a:extLst>
+          </p:cNvPr>
+          <p:cNvSpPr txBox="1"/>
+          <p:nvPr/>
+        </p:nvSpPr>
+        <p:spPr>
+          <a:xfrm>
+            <a:off x="137159" y="141011"/>
+            <a:ext cx="3557017" cy="369332"/>
+          </a:xfrm>
+          <a:prstGeom prst="rect">
+            <a:avLst/>
+          </a:prstGeom>
+          <a:noFill/>
+        </p:spPr>
+        <p:txBody>
+          <a:bodyPr wrap="square" rtlCol="0">
+            <a:spAutoFit/>
+          </a:bodyPr>
+          <a:lstStyle/>
+          <a:p>
+            <a:r>
+              <a:rPr lang="en-US" altLang="zh-TW" dirty="0"/>
+              <a:t>Transformer(layer=1, head=8)</a:t>
+            </a:r>
+            <a:r>
+              <a:rPr lang="zh-TW" altLang="en-US" dirty="0"/>
+              <a:t> </a:t>
+            </a:r>
+            <a:r>
+              <a:rPr lang="en-US" altLang="zh-TW" dirty="0"/>
+              <a:t>42</a:t>
+            </a:r>
+            <a:endParaRPr lang="zh-TW" altLang="en-US" dirty="0"/>
+          </a:p>
+        </p:txBody>
+      </p:sp>
+      <p:pic>
+        <p:nvPicPr>
+          <p:cNvPr id="3" name="圖片 2">
+            <a:extLst>
+              <a:ext uri="{FF2B5EF4-FFF2-40B4-BE49-F238E27FC236}">
+                <a16:creationId xmlns:a16="http://schemas.microsoft.com/office/drawing/2014/main" id="{4F907958-3B22-BD69-FF2D-1302DE3A816A}"/>
+              </a:ext>
+            </a:extLst>
+          </p:cNvPr>
+          <p:cNvPicPr>
+            <a:picLocks noChangeAspect="1"/>
+          </p:cNvPicPr>
+          <p:nvPr/>
+        </p:nvPicPr>
+        <p:blipFill>
+          <a:blip r:embed="rId2"/>
+          <a:stretch>
+            <a:fillRect/>
+          </a:stretch>
+        </p:blipFill>
+        <p:spPr>
+          <a:xfrm>
+            <a:off x="749993" y="648843"/>
+            <a:ext cx="2013683" cy="2076069"/>
+          </a:xfrm>
+          <a:prstGeom prst="rect">
+            <a:avLst/>
+          </a:prstGeom>
+        </p:spPr>
+      </p:pic>
+      <p:sp>
+        <p:nvSpPr>
+          <p:cNvPr id="7" name="文字方塊 6">
+            <a:extLst>
+              <a:ext uri="{FF2B5EF4-FFF2-40B4-BE49-F238E27FC236}">
+                <a16:creationId xmlns:a16="http://schemas.microsoft.com/office/drawing/2014/main" id="{44D3E0B2-2F80-9738-800B-5792F06683EF}"/>
+              </a:ext>
+            </a:extLst>
+          </p:cNvPr>
+          <p:cNvSpPr txBox="1"/>
+          <p:nvPr/>
+        </p:nvSpPr>
+        <p:spPr>
+          <a:xfrm>
+            <a:off x="3694176" y="0"/>
+            <a:ext cx="7194042" cy="646331"/>
+          </a:xfrm>
+          <a:prstGeom prst="rect">
+            <a:avLst/>
+          </a:prstGeom>
+          <a:noFill/>
+        </p:spPr>
+        <p:txBody>
+          <a:bodyPr wrap="square">
+            <a:spAutoFit/>
+          </a:bodyPr>
+          <a:lstStyle/>
+          <a:p>
+            <a:r>
+              <a:rPr lang="en-US" altLang="zh-TW" sz="1200" b="0" i="0" dirty="0">
+                <a:solidFill>
+                  <a:srgbClr val="D5D5D5"/>
+                </a:solidFill>
+                <a:effectLst/>
+                <a:highlight>
+                  <a:srgbClr val="383838"/>
+                </a:highlight>
+                <a:latin typeface="Courier New" panose="02070309020205020404" pitchFamily="49" charset="0"/>
+              </a:rPr>
+              <a:t>Accuracy: 0.6953125 Sensitivity: 0.6172985781990521 Specificity: 0.738517060367454 Positive Predictive Value (PPV): 0.5666122892876564 Negative Predictive Value (NPV): 0.7770107007248878</a:t>
+            </a:r>
+            <a:endParaRPr lang="zh-TW" altLang="en-US" sz="1200" dirty="0"/>
+          </a:p>
+        </p:txBody>
+      </p:sp>
+      <p:sp>
+        <p:nvSpPr>
+          <p:cNvPr id="9" name="文字方塊 8">
+            <a:extLst>
+              <a:ext uri="{FF2B5EF4-FFF2-40B4-BE49-F238E27FC236}">
+                <a16:creationId xmlns:a16="http://schemas.microsoft.com/office/drawing/2014/main" id="{4F53B37D-B51B-6FE3-EFE7-8BA984B8DA85}"/>
+              </a:ext>
+            </a:extLst>
+          </p:cNvPr>
+          <p:cNvSpPr txBox="1"/>
+          <p:nvPr/>
+        </p:nvSpPr>
+        <p:spPr>
+          <a:xfrm>
+            <a:off x="3694176" y="569419"/>
+            <a:ext cx="7130034" cy="646331"/>
+          </a:xfrm>
+          <a:prstGeom prst="rect">
+            <a:avLst/>
+          </a:prstGeom>
+          <a:noFill/>
+        </p:spPr>
+        <p:txBody>
+          <a:bodyPr wrap="square">
+            <a:spAutoFit/>
+          </a:bodyPr>
+          <a:lstStyle/>
+          <a:p>
+            <a:r>
+              <a:rPr lang="en-US" altLang="zh-TW" sz="1200" b="0" i="0" dirty="0">
+                <a:solidFill>
+                  <a:srgbClr val="D5D5D5"/>
+                </a:solidFill>
+                <a:effectLst/>
+                <a:highlight>
+                  <a:srgbClr val="383838"/>
+                </a:highlight>
+                <a:latin typeface="Courier New" panose="02070309020205020404" pitchFamily="49" charset="0"/>
+              </a:rPr>
+              <a:t>Accuracy: 0.7022804054054054 Sensitivity: 0.5835308056872038 Specificity: 0.7680446194225722 Positive Predictive Value (PPV): 0.5821513002364066 Negative Predictive Value (NPV): 0.769053876478318</a:t>
+            </a:r>
+            <a:endParaRPr lang="zh-TW" altLang="en-US" sz="1200" dirty="0"/>
+          </a:p>
+        </p:txBody>
+      </p:sp>
+      <p:sp>
+        <p:nvSpPr>
+          <p:cNvPr id="11" name="文字方塊 10">
+            <a:extLst>
+              <a:ext uri="{FF2B5EF4-FFF2-40B4-BE49-F238E27FC236}">
+                <a16:creationId xmlns:a16="http://schemas.microsoft.com/office/drawing/2014/main" id="{67BFB3F6-59EB-366F-FB8D-3A406437A0EC}"/>
+              </a:ext>
+            </a:extLst>
+          </p:cNvPr>
+          <p:cNvSpPr txBox="1"/>
+          <p:nvPr/>
+        </p:nvSpPr>
+        <p:spPr>
+          <a:xfrm>
+            <a:off x="3694176" y="1215750"/>
+            <a:ext cx="6681978" cy="646331"/>
+          </a:xfrm>
+          <a:prstGeom prst="rect">
+            <a:avLst/>
+          </a:prstGeom>
+          <a:noFill/>
+        </p:spPr>
+        <p:txBody>
+          <a:bodyPr wrap="square">
+            <a:spAutoFit/>
+          </a:bodyPr>
+          <a:lstStyle/>
+          <a:p>
+            <a:r>
+              <a:rPr lang="en-US" altLang="zh-TW" sz="1200" b="0" i="0" dirty="0">
+                <a:solidFill>
+                  <a:srgbClr val="D5D5D5"/>
+                </a:solidFill>
+                <a:effectLst/>
+                <a:highlight>
+                  <a:srgbClr val="383838"/>
+                </a:highlight>
+                <a:latin typeface="Courier New" panose="02070309020205020404" pitchFamily="49" charset="0"/>
+              </a:rPr>
+              <a:t>Accuracy: 0.8336148648648649 Sensitivity: 0.7031990521327014 Specificity: 0.9058398950131233 Positive Predictive Value (PPV): 0.805291723202171 Negative Predictive Value (NPV): 0.8464132434089515</a:t>
+            </a:r>
+            <a:endParaRPr lang="zh-TW" altLang="en-US" sz="1200" dirty="0"/>
+          </a:p>
+        </p:txBody>
+      </p:sp>
+      <p:sp>
+        <p:nvSpPr>
+          <p:cNvPr id="13" name="文字方塊 12">
+            <a:extLst>
+              <a:ext uri="{FF2B5EF4-FFF2-40B4-BE49-F238E27FC236}">
+                <a16:creationId xmlns:a16="http://schemas.microsoft.com/office/drawing/2014/main" id="{1BAD2C19-EFC0-A4AB-39C2-0A5A604A423F}"/>
+              </a:ext>
+            </a:extLst>
+          </p:cNvPr>
+          <p:cNvSpPr txBox="1"/>
+          <p:nvPr/>
+        </p:nvSpPr>
+        <p:spPr>
+          <a:xfrm>
+            <a:off x="3694176" y="1809633"/>
+            <a:ext cx="7130034" cy="646331"/>
+          </a:xfrm>
+          <a:prstGeom prst="rect">
+            <a:avLst/>
+          </a:prstGeom>
+          <a:noFill/>
+        </p:spPr>
+        <p:txBody>
+          <a:bodyPr wrap="square">
+            <a:spAutoFit/>
+          </a:bodyPr>
+          <a:lstStyle/>
+          <a:p>
+            <a:r>
+              <a:rPr lang="en-US" altLang="zh-TW" sz="1200" b="0" i="0" dirty="0">
+                <a:solidFill>
+                  <a:srgbClr val="D5D5D5"/>
+                </a:solidFill>
+                <a:effectLst/>
+                <a:highlight>
+                  <a:srgbClr val="383838"/>
+                </a:highlight>
+                <a:latin typeface="Courier New" panose="02070309020205020404" pitchFamily="49" charset="0"/>
+              </a:rPr>
+              <a:t>Accuracy: 0.8165118243243243 Sensitivity: 0.784952606635071 Specificity: 0.833989501312336 Positive Predictive Value (PPV): 0.7236482796286182 Negative Predictive Value (NPV): 0.8750430292598967</a:t>
+            </a:r>
+            <a:endParaRPr lang="zh-TW" altLang="en-US" sz="1200" dirty="0"/>
+          </a:p>
+        </p:txBody>
+      </p:sp>
+      <p:pic>
+        <p:nvPicPr>
+          <p:cNvPr id="4" name="圖片 3">
+            <a:extLst>
+              <a:ext uri="{FF2B5EF4-FFF2-40B4-BE49-F238E27FC236}">
+                <a16:creationId xmlns:a16="http://schemas.microsoft.com/office/drawing/2014/main" id="{8FB72561-6404-B400-3EFC-3B261F2D72B3}"/>
+              </a:ext>
+            </a:extLst>
+          </p:cNvPr>
+          <p:cNvPicPr>
+            <a:picLocks noChangeAspect="1"/>
+          </p:cNvPicPr>
+          <p:nvPr/>
+        </p:nvPicPr>
+        <p:blipFill>
+          <a:blip r:embed="rId3"/>
+          <a:stretch>
+            <a:fillRect/>
+          </a:stretch>
+        </p:blipFill>
+        <p:spPr>
+          <a:xfrm>
+            <a:off x="749993" y="2851372"/>
+            <a:ext cx="2013683" cy="2079649"/>
+          </a:xfrm>
+          <a:prstGeom prst="rect">
+            <a:avLst/>
+          </a:prstGeom>
+        </p:spPr>
+      </p:pic>
+      <p:sp>
+        <p:nvSpPr>
+          <p:cNvPr id="8" name="文字方塊 7">
+            <a:extLst>
+              <a:ext uri="{FF2B5EF4-FFF2-40B4-BE49-F238E27FC236}">
+                <a16:creationId xmlns:a16="http://schemas.microsoft.com/office/drawing/2014/main" id="{B6EEB22D-C6E5-2348-F2FD-D7F01A99B80F}"/>
+              </a:ext>
+            </a:extLst>
+          </p:cNvPr>
+          <p:cNvSpPr txBox="1"/>
+          <p:nvPr/>
+        </p:nvSpPr>
+        <p:spPr>
+          <a:xfrm>
+            <a:off x="3694176" y="2382315"/>
+            <a:ext cx="6908800" cy="646331"/>
+          </a:xfrm>
+          <a:prstGeom prst="rect">
+            <a:avLst/>
+          </a:prstGeom>
+          <a:noFill/>
+        </p:spPr>
+        <p:txBody>
+          <a:bodyPr wrap="square">
+            <a:spAutoFit/>
+          </a:bodyPr>
+          <a:lstStyle/>
+          <a:p>
+            <a:r>
+              <a:rPr lang="en-US" altLang="zh-TW" sz="1200" b="0" i="0" dirty="0">
+                <a:solidFill>
+                  <a:srgbClr val="D5D5D5"/>
+                </a:solidFill>
+                <a:effectLst/>
+                <a:highlight>
+                  <a:srgbClr val="383838"/>
+                </a:highlight>
+                <a:latin typeface="Courier New" panose="02070309020205020404" pitchFamily="49" charset="0"/>
+              </a:rPr>
+              <a:t>Accuracy: 0.6827713815789473 Sensitivity: 0.472 Specificity: 0.8012202954399487 Positive Predictive Value (PPV): 0.5716262975778547 Negative Predictive Value (NPV): 0.7297455396314712</a:t>
+            </a:r>
+            <a:endParaRPr lang="zh-TW" altLang="en-US" sz="1200" dirty="0"/>
+          </a:p>
+        </p:txBody>
+      </p:sp>
+      <p:sp>
+        <p:nvSpPr>
+          <p:cNvPr id="12" name="文字方塊 11">
+            <a:extLst>
+              <a:ext uri="{FF2B5EF4-FFF2-40B4-BE49-F238E27FC236}">
+                <a16:creationId xmlns:a16="http://schemas.microsoft.com/office/drawing/2014/main" id="{49F876F6-1909-A016-1E90-3FCF7C3DA593}"/>
+              </a:ext>
+            </a:extLst>
+          </p:cNvPr>
+          <p:cNvSpPr txBox="1"/>
+          <p:nvPr/>
+        </p:nvSpPr>
+        <p:spPr>
+          <a:xfrm>
+            <a:off x="3694176" y="2984632"/>
+            <a:ext cx="7000240" cy="646331"/>
+          </a:xfrm>
+          <a:prstGeom prst="rect">
+            <a:avLst/>
+          </a:prstGeom>
+          <a:noFill/>
+        </p:spPr>
+        <p:txBody>
+          <a:bodyPr wrap="square">
+            <a:spAutoFit/>
+          </a:bodyPr>
+          <a:lstStyle/>
+          <a:p>
+            <a:r>
+              <a:rPr lang="en-US" altLang="zh-TW" sz="1200" b="0" i="0" dirty="0">
+                <a:solidFill>
+                  <a:srgbClr val="D5D5D5"/>
+                </a:solidFill>
+                <a:effectLst/>
+                <a:highlight>
+                  <a:srgbClr val="383838"/>
+                </a:highlight>
+                <a:latin typeface="Courier New" panose="02070309020205020404" pitchFamily="49" charset="0"/>
+              </a:rPr>
+              <a:t>Accuracy: 0.7142269736842105 Sensitivity: 0.6434285714285715 Specificity: 0.7540141297366731 Positive Predictive Value (PPV): 0.595137420718816 Negative Predictive Value (NPV): 0.7900403768506057</a:t>
+            </a:r>
+            <a:endParaRPr lang="zh-TW" altLang="en-US" sz="1200" dirty="0"/>
+          </a:p>
+        </p:txBody>
+      </p:sp>
+      <p:sp>
+        <p:nvSpPr>
+          <p:cNvPr id="15" name="文字方塊 14">
+            <a:extLst>
+              <a:ext uri="{FF2B5EF4-FFF2-40B4-BE49-F238E27FC236}">
+                <a16:creationId xmlns:a16="http://schemas.microsoft.com/office/drawing/2014/main" id="{09F84491-694D-5C1D-4753-45BFB2168842}"/>
+              </a:ext>
+            </a:extLst>
+          </p:cNvPr>
+          <p:cNvSpPr txBox="1"/>
+          <p:nvPr/>
+        </p:nvSpPr>
+        <p:spPr>
+          <a:xfrm>
+            <a:off x="3694176" y="3586949"/>
+            <a:ext cx="7518400" cy="646331"/>
+          </a:xfrm>
+          <a:prstGeom prst="rect">
+            <a:avLst/>
+          </a:prstGeom>
+          <a:noFill/>
+        </p:spPr>
+        <p:txBody>
+          <a:bodyPr wrap="square">
+            <a:spAutoFit/>
+          </a:bodyPr>
+          <a:lstStyle/>
+          <a:p>
+            <a:r>
+              <a:rPr lang="en-US" altLang="zh-TW" sz="1200" b="0" i="0" dirty="0">
+                <a:solidFill>
+                  <a:srgbClr val="D5D5D5"/>
+                </a:solidFill>
+                <a:effectLst/>
+                <a:highlight>
+                  <a:srgbClr val="383838"/>
+                </a:highlight>
+                <a:latin typeface="Courier New" panose="02070309020205020404" pitchFamily="49" charset="0"/>
+              </a:rPr>
+              <a:t>Accuracy: 0.7613075657894737 Sensitivity: 0.6634285714285715 Specificity: 0.8163134232498395 Positive Predictive Value (PPV): 0.6699365262550491 Negative Predictive Value (NPV): 0.8118811881188119</a:t>
+            </a:r>
+            <a:endParaRPr lang="zh-TW" altLang="en-US" sz="1200" dirty="0"/>
+          </a:p>
+        </p:txBody>
+      </p:sp>
+      <p:sp>
+        <p:nvSpPr>
+          <p:cNvPr id="17" name="文字方塊 16">
+            <a:extLst>
+              <a:ext uri="{FF2B5EF4-FFF2-40B4-BE49-F238E27FC236}">
+                <a16:creationId xmlns:a16="http://schemas.microsoft.com/office/drawing/2014/main" id="{CCAA4A5A-C913-E224-509F-5B685A0358AE}"/>
+              </a:ext>
+            </a:extLst>
+          </p:cNvPr>
+          <p:cNvSpPr txBox="1"/>
+          <p:nvPr/>
+        </p:nvSpPr>
+        <p:spPr>
+          <a:xfrm>
+            <a:off x="3694176" y="4233280"/>
+            <a:ext cx="7130034" cy="646331"/>
+          </a:xfrm>
+          <a:prstGeom prst="rect">
+            <a:avLst/>
+          </a:prstGeom>
+          <a:noFill/>
+        </p:spPr>
+        <p:txBody>
+          <a:bodyPr wrap="square">
+            <a:spAutoFit/>
+          </a:bodyPr>
+          <a:lstStyle/>
+          <a:p>
+            <a:r>
+              <a:rPr lang="en-US" altLang="zh-TW" sz="1200" b="0" i="0" dirty="0">
+                <a:solidFill>
+                  <a:srgbClr val="D5D5D5"/>
+                </a:solidFill>
+                <a:effectLst/>
+                <a:highlight>
+                  <a:srgbClr val="383838"/>
+                </a:highlight>
+                <a:latin typeface="Courier New" panose="02070309020205020404" pitchFamily="49" charset="0"/>
+              </a:rPr>
+              <a:t>Accuracy: 0.7756990131578947 Sensitivity: 0.5948571428571429 Specificity: 0.8773281952472703 Positive Predictive Value (PPV): 0.7315530569219958 Negative Predictive Value (NPV): 0.7939552455681488</a:t>
+            </a:r>
+            <a:endParaRPr lang="zh-TW" altLang="en-US" sz="1200" dirty="0"/>
+          </a:p>
+        </p:txBody>
+      </p:sp>
+      <p:pic>
+        <p:nvPicPr>
+          <p:cNvPr id="19" name="圖片 18">
+            <a:extLst>
+              <a:ext uri="{FF2B5EF4-FFF2-40B4-BE49-F238E27FC236}">
+                <a16:creationId xmlns:a16="http://schemas.microsoft.com/office/drawing/2014/main" id="{81AFDE8D-4917-CD83-4634-A9D2506826EC}"/>
+              </a:ext>
+            </a:extLst>
+          </p:cNvPr>
+          <p:cNvPicPr>
+            <a:picLocks noChangeAspect="1"/>
+          </p:cNvPicPr>
+          <p:nvPr/>
+        </p:nvPicPr>
+        <p:blipFill>
+          <a:blip r:embed="rId4"/>
+          <a:stretch>
+            <a:fillRect/>
+          </a:stretch>
+        </p:blipFill>
+        <p:spPr>
+          <a:xfrm>
+            <a:off x="887584" y="5057481"/>
+            <a:ext cx="1738500" cy="1785968"/>
+          </a:xfrm>
+          <a:prstGeom prst="rect">
+            <a:avLst/>
+          </a:prstGeom>
+        </p:spPr>
+      </p:pic>
+      <p:sp>
+        <p:nvSpPr>
+          <p:cNvPr id="21" name="文字方塊 20">
+            <a:extLst>
+              <a:ext uri="{FF2B5EF4-FFF2-40B4-BE49-F238E27FC236}">
+                <a16:creationId xmlns:a16="http://schemas.microsoft.com/office/drawing/2014/main" id="{1CF5F41A-8FDB-92D5-1438-66489BFDFF86}"/>
+              </a:ext>
+            </a:extLst>
+          </p:cNvPr>
+          <p:cNvSpPr txBox="1"/>
+          <p:nvPr/>
+        </p:nvSpPr>
+        <p:spPr>
+          <a:xfrm>
+            <a:off x="3694176" y="4833605"/>
+            <a:ext cx="6496304" cy="600164"/>
+          </a:xfrm>
+          <a:prstGeom prst="rect">
+            <a:avLst/>
+          </a:prstGeom>
+          <a:noFill/>
+        </p:spPr>
+        <p:txBody>
+          <a:bodyPr wrap="square">
+            <a:spAutoFit/>
+          </a:bodyPr>
+          <a:lstStyle/>
+          <a:p>
+            <a:r>
+              <a:rPr lang="en-US" altLang="zh-TW" sz="1100" b="0" i="0" dirty="0">
+                <a:solidFill>
+                  <a:srgbClr val="D5D5D5"/>
+                </a:solidFill>
+                <a:effectLst/>
+                <a:highlight>
+                  <a:srgbClr val="383838"/>
+                </a:highlight>
+                <a:latin typeface="Courier New" panose="02070309020205020404" pitchFamily="49" charset="0"/>
+              </a:rPr>
+              <a:t>Accuracy: 0.6918402777777778 Sensitivity: 0.2610340479192938 Specificity: 0.9179351422898743 Positive Predictive Value (PPV): 0.6253776435045317 Negative Predictive Value (NPV): 0.7029903699949316</a:t>
+            </a:r>
+            <a:endParaRPr lang="zh-TW" altLang="en-US" sz="1100" dirty="0"/>
+          </a:p>
+        </p:txBody>
+      </p:sp>
+      <p:sp>
+        <p:nvSpPr>
+          <p:cNvPr id="23" name="文字方塊 22">
+            <a:extLst>
+              <a:ext uri="{FF2B5EF4-FFF2-40B4-BE49-F238E27FC236}">
+                <a16:creationId xmlns:a16="http://schemas.microsoft.com/office/drawing/2014/main" id="{9AC195F8-16A0-E80A-CFC6-0D54A77E1256}"/>
+              </a:ext>
+            </a:extLst>
+          </p:cNvPr>
+          <p:cNvSpPr txBox="1"/>
+          <p:nvPr/>
+        </p:nvSpPr>
+        <p:spPr>
+          <a:xfrm>
+            <a:off x="3694176" y="5380672"/>
+            <a:ext cx="6096000" cy="600164"/>
+          </a:xfrm>
+          <a:prstGeom prst="rect">
+            <a:avLst/>
+          </a:prstGeom>
+          <a:noFill/>
+        </p:spPr>
+        <p:txBody>
+          <a:bodyPr wrap="square">
+            <a:spAutoFit/>
+          </a:bodyPr>
+          <a:lstStyle/>
+          <a:p>
+            <a:r>
+              <a:rPr lang="en-US" altLang="zh-TW" sz="1100" b="0" i="0" dirty="0">
+                <a:solidFill>
+                  <a:srgbClr val="D5D5D5"/>
+                </a:solidFill>
+                <a:effectLst/>
+                <a:highlight>
+                  <a:srgbClr val="383838"/>
+                </a:highlight>
+                <a:latin typeface="Courier New" panose="02070309020205020404" pitchFamily="49" charset="0"/>
+              </a:rPr>
+              <a:t>Accuracy: 0.7213541666666666 Sensitivity: 0.4823455233291299 Specificity: 0.8467902051621443 Positive Predictive Value (PPV): 0.6229641693811075 Negative Predictive Value (NPV): 0.7571005917159763</a:t>
+            </a:r>
+            <a:endParaRPr lang="zh-TW" altLang="en-US" sz="1100" dirty="0"/>
+          </a:p>
+        </p:txBody>
+      </p:sp>
+      <p:sp>
+        <p:nvSpPr>
+          <p:cNvPr id="25" name="文字方塊 24">
+            <a:extLst>
+              <a:ext uri="{FF2B5EF4-FFF2-40B4-BE49-F238E27FC236}">
+                <a16:creationId xmlns:a16="http://schemas.microsoft.com/office/drawing/2014/main" id="{AF7EF538-3231-C5D8-6C0C-296442B2D6C4}"/>
+              </a:ext>
+            </a:extLst>
+          </p:cNvPr>
+          <p:cNvSpPr txBox="1"/>
+          <p:nvPr/>
+        </p:nvSpPr>
+        <p:spPr>
+          <a:xfrm>
+            <a:off x="3694176" y="5934830"/>
+            <a:ext cx="8640064" cy="415498"/>
+          </a:xfrm>
+          <a:prstGeom prst="rect">
+            <a:avLst/>
+          </a:prstGeom>
+          <a:noFill/>
+        </p:spPr>
+        <p:txBody>
+          <a:bodyPr wrap="square">
+            <a:spAutoFit/>
+          </a:bodyPr>
+          <a:lstStyle/>
+          <a:p>
+            <a:r>
+              <a:rPr lang="en-US" altLang="zh-TW" sz="1050" b="0" i="0" dirty="0">
+                <a:solidFill>
+                  <a:srgbClr val="D5D5D5"/>
+                </a:solidFill>
+                <a:effectLst/>
+                <a:highlight>
+                  <a:srgbClr val="383838"/>
+                </a:highlight>
+                <a:latin typeface="Courier New" panose="02070309020205020404" pitchFamily="49" charset="0"/>
+              </a:rPr>
+              <a:t>Accuracy: 0.7660590277777778 Sensitivity: 0.6298865069356873 Specificity: 0.8375248180013236 Positive Predictive Value (PPV): 0.6704697986577182 Negative Predictive Value (NPV): 0.8117382937780628</a:t>
+            </a:r>
+            <a:endParaRPr lang="zh-TW" altLang="en-US" sz="1050" dirty="0"/>
+          </a:p>
+        </p:txBody>
+      </p:sp>
+      <p:sp>
+        <p:nvSpPr>
+          <p:cNvPr id="27" name="文字方塊 26">
+            <a:extLst>
+              <a:ext uri="{FF2B5EF4-FFF2-40B4-BE49-F238E27FC236}">
+                <a16:creationId xmlns:a16="http://schemas.microsoft.com/office/drawing/2014/main" id="{701B2C01-11E1-CFB5-0F0D-C5B7494526EC}"/>
+              </a:ext>
+            </a:extLst>
+          </p:cNvPr>
+          <p:cNvSpPr txBox="1"/>
+          <p:nvPr/>
+        </p:nvSpPr>
+        <p:spPr>
+          <a:xfrm>
+            <a:off x="3694176" y="6297391"/>
+            <a:ext cx="8426704" cy="600164"/>
+          </a:xfrm>
+          <a:prstGeom prst="rect">
+            <a:avLst/>
+          </a:prstGeom>
+          <a:noFill/>
+        </p:spPr>
+        <p:txBody>
+          <a:bodyPr wrap="square">
+            <a:spAutoFit/>
+          </a:bodyPr>
+          <a:lstStyle/>
+          <a:p>
+            <a:r>
+              <a:rPr lang="en-US" altLang="zh-TW" sz="1100" b="0" i="0" dirty="0">
+                <a:solidFill>
+                  <a:srgbClr val="D5D5D5"/>
+                </a:solidFill>
+                <a:effectLst/>
+                <a:highlight>
+                  <a:srgbClr val="383838"/>
+                </a:highlight>
+                <a:latin typeface="Courier New" panose="02070309020205020404" pitchFamily="49" charset="0"/>
+              </a:rPr>
+              <a:t>Accuracy: 0.7771267361111112 Sensitivity: 0.7408575031525851 Specificity: 0.7961614824619457 Positive Predictive Value (PPV): 0.6560580681183696 Negative Predictive Value (NPV): 0.8541001064962727</a:t>
+            </a:r>
+            <a:endParaRPr lang="zh-TW" altLang="en-US" sz="1100" dirty="0"/>
+          </a:p>
+        </p:txBody>
+      </p:sp>
+    </p:spTree>
+    <p:extLst>
+      <p:ext uri="{BB962C8B-B14F-4D97-AF65-F5344CB8AC3E}">
+        <p14:creationId xmlns:p14="http://schemas.microsoft.com/office/powerpoint/2010/main" val="858243601"/>
       </p:ext>
     </p:extLst>
   </p:cSld>
